--- a/IRP Poster.pptx
+++ b/IRP Poster.pptx
@@ -227,7 +227,7 @@
           <a:p>
             <a:fld id="{FC851B3E-1325-48C3-8E2C-998D0099FC98}" type="datetimeFigureOut">
               <a:rPr lang="en-US" smtClean="0"/>
-              <a:t>5/7/2026</a:t>
+              <a:t>5/8/2026</a:t>
             </a:fld>
             <a:endParaRPr lang="en-US" dirty="0"/>
           </a:p>
@@ -404,7 +404,7 @@
           <a:p>
             <a:fld id="{04D39CC4-BC6F-4E80-BC0D-03833D02DC81}" type="datetimeFigureOut">
               <a:rPr lang="en-US" noProof="0" smtClean="0"/>
-              <a:t>5/7/2026</a:t>
+              <a:t>5/8/2026</a:t>
             </a:fld>
             <a:endParaRPr lang="en-US" noProof="0" dirty="0"/>
           </a:p>
@@ -7564,8 +7564,18 @@
 </file>
 
 <file path=ppt/slides/slide1.xml><?xml version="1.0" encoding="utf-8"?>
-<p:sld xmlns:a="http://schemas.openxmlformats.org/drawingml/2006/main" xmlns:r="http://schemas.openxmlformats.org/officeDocument/2006/relationships" xmlns:p="http://schemas.openxmlformats.org/presentationml/2006/main">
+<p:sld xmlns:a="http://schemas.openxmlformats.org/drawingml/2006/main" xmlns:r="http://schemas.openxmlformats.org/officeDocument/2006/relationships" xmlns:p="http://schemas.openxmlformats.org/presentationml/2006/main" showMasterSp="0">
   <p:cSld>
+    <p:bg>
+      <p:bgPr>
+        <a:solidFill>
+          <a:schemeClr val="tx2">
+            <a:lumMod val="75000"/>
+          </a:schemeClr>
+        </a:solidFill>
+        <a:effectLst/>
+      </p:bgPr>
+    </p:bg>
     <p:spTree>
       <p:nvGrpSpPr>
         <p:cNvPr id="1" name=""/>
@@ -7598,17 +7608,19 @@
         </p:nvSpPr>
         <p:spPr>
           <a:xfrm>
-            <a:off x="618744" y="209677"/>
-            <a:ext cx="9064752" cy="1097915"/>
-          </a:xfrm>
-        </p:spPr>
-        <p:txBody>
-          <a:bodyPr/>
+            <a:off x="90175" y="-418838"/>
+            <a:ext cx="12063593" cy="1097915"/>
+          </a:xfrm>
+        </p:spPr>
+        <p:txBody>
+          <a:bodyPr>
+            <a:normAutofit/>
+          </a:bodyPr>
           <a:lstStyle/>
           <a:p>
             <a:r>
-              <a:rPr lang="en-US" dirty="0"/>
-              <a:t>Project timeline</a:t>
+              <a:rPr lang="en-US" sz="3000" dirty="0"/>
+              <a:t>Can Track Sequencers be Relevant in Modern Game Development?</a:t>
             </a:r>
           </a:p>
         </p:txBody>
@@ -7631,7 +7643,7 @@
         </p:nvSpPr>
         <p:spPr>
           <a:xfrm>
-            <a:off x="618745" y="1344676"/>
+            <a:off x="214753" y="737612"/>
             <a:ext cx="9064752" cy="511175"/>
           </a:xfrm>
         </p:spPr>
@@ -7641,17 +7653,92 @@
           <a:p>
             <a:r>
               <a:rPr lang="en-US" dirty="0"/>
-              <a:t>At-a-glance</a:t>
-            </a:r>
+              <a:t>Adrienne Moullec - University of Gloucestershire</a:t>
+            </a:r>
+          </a:p>
+        </p:txBody>
+      </p:sp>
+      <p:sp>
+        <p:nvSpPr>
+          <p:cNvPr id="5" name="Text Placeholder 4">
+            <a:extLst>
+              <a:ext uri="{FF2B5EF4-FFF2-40B4-BE49-F238E27FC236}">
+                <a16:creationId xmlns:a16="http://schemas.microsoft.com/office/drawing/2014/main" id="{8AF51EFE-C206-4E9F-1ECA-69B8E804771B}"/>
+              </a:ext>
+            </a:extLst>
+          </p:cNvPr>
+          <p:cNvSpPr>
+            <a:spLocks noGrp="1"/>
+          </p:cNvSpPr>
+          <p:nvPr>
+            <p:ph type="body" sz="quarter" idx="15"/>
+          </p:nvPr>
+        </p:nvSpPr>
+        <p:spPr>
+          <a:xfrm>
+            <a:off x="218434" y="1287121"/>
+            <a:ext cx="2721668" cy="381190"/>
+          </a:xfrm>
+        </p:spPr>
+        <p:txBody>
+          <a:bodyPr/>
+          <a:lstStyle/>
+          <a:p>
+            <a:r>
+              <a:rPr lang="en-US" dirty="0"/>
+              <a:t>Introduction</a:t>
+            </a:r>
+          </a:p>
+        </p:txBody>
+      </p:sp>
+      <p:sp>
+        <p:nvSpPr>
+          <p:cNvPr id="10" name="Text Placeholder 9">
+            <a:extLst>
+              <a:ext uri="{FF2B5EF4-FFF2-40B4-BE49-F238E27FC236}">
+                <a16:creationId xmlns:a16="http://schemas.microsoft.com/office/drawing/2014/main" id="{704798AF-C115-FD01-660C-FACB9324AE67}"/>
+              </a:ext>
+            </a:extLst>
+          </p:cNvPr>
+          <p:cNvSpPr>
+            <a:spLocks noGrp="1"/>
+          </p:cNvSpPr>
+          <p:nvPr>
+            <p:ph type="body" sz="quarter" idx="20"/>
+          </p:nvPr>
+        </p:nvSpPr>
+        <p:spPr>
+          <a:xfrm>
+            <a:off x="218434" y="1690647"/>
+            <a:ext cx="3364992" cy="1548055"/>
+          </a:xfrm>
+        </p:spPr>
+        <p:txBody>
+          <a:bodyPr/>
+          <a:lstStyle/>
+          <a:p>
+            <a:r>
+              <a:rPr lang="en-US" sz="900" dirty="0"/>
+              <a:t>Music track sequencing was used in older game consoles where storage space and audio capabilities were limited. Music used to be a list of text commands that played preset instrumental tones. Audio has since been upgraded to pre-recorded tracks, creating greater immersive experiences.</a:t>
+            </a:r>
+          </a:p>
+          <a:p>
+            <a:r>
+              <a:rPr lang="en-US" sz="900" dirty="0"/>
+              <a:t>This research dives into the history of music in gaming and explores the question “Can track sequencers be relevant in modern game development?”.</a:t>
+            </a:r>
+          </a:p>
+          <a:p>
+            <a:endParaRPr lang="en-US" sz="900" dirty="0"/>
           </a:p>
         </p:txBody>
       </p:sp>
       <p:pic>
         <p:nvPicPr>
-          <p:cNvPr id="158" name="Picture Placeholder 157" descr="Cloud Icon">
-            <a:extLst>
-              <a:ext uri="{FF2B5EF4-FFF2-40B4-BE49-F238E27FC236}">
-                <a16:creationId xmlns:a16="http://schemas.microsoft.com/office/drawing/2014/main" id="{E00EE016-AD81-3104-FB78-D36E9AF9EFA1}"/>
+          <p:cNvPr id="216" name="Picture Placeholder 215" descr="Game controller outline">
+            <a:extLst>
+              <a:ext uri="{FF2B5EF4-FFF2-40B4-BE49-F238E27FC236}">
+                <a16:creationId xmlns:a16="http://schemas.microsoft.com/office/drawing/2014/main" id="{77F5520F-24C4-6968-9481-7307959BD532}"/>
               </a:ext>
             </a:extLst>
           </p:cNvPr>
@@ -7659,7 +7746,7 @@
             <a:picLocks noGrp="1" noChangeAspect="1"/>
           </p:cNvPicPr>
           <p:nvPr>
-            <p:ph type="pic" sz="quarter" idx="14"/>
+            <p:ph type="pic" sz="quarter" idx="35"/>
           </p:nvPr>
         </p:nvPicPr>
         <p:blipFill>
@@ -7667,139 +7754,6 @@
             <a:extLst>
               <a:ext uri="{96DAC541-7B7A-43D3-8B79-37D633B846F1}">
                 <asvg:svgBlip xmlns:asvg="http://schemas.microsoft.com/office/drawing/2016/SVG/main" r:embed="rId3"/>
-              </a:ext>
-            </a:extLst>
-          </a:blip>
-          <a:srcRect t="96" b="96"/>
-          <a:stretch/>
-        </p:blipFill>
-        <p:spPr>
-          <a:xfrm>
-            <a:off x="10487786" y="649342"/>
-            <a:ext cx="822960" cy="822960"/>
-          </a:xfrm>
-        </p:spPr>
-      </p:pic>
-      <p:sp>
-        <p:nvSpPr>
-          <p:cNvPr id="5" name="Text Placeholder 4">
-            <a:extLst>
-              <a:ext uri="{FF2B5EF4-FFF2-40B4-BE49-F238E27FC236}">
-                <a16:creationId xmlns:a16="http://schemas.microsoft.com/office/drawing/2014/main" id="{8AF51EFE-C206-4E9F-1ECA-69B8E804771B}"/>
-              </a:ext>
-            </a:extLst>
-          </p:cNvPr>
-          <p:cNvSpPr>
-            <a:spLocks noGrp="1"/>
-          </p:cNvSpPr>
-          <p:nvPr>
-            <p:ph type="body" sz="quarter" idx="15"/>
-          </p:nvPr>
-        </p:nvSpPr>
-        <p:spPr>
-          <a:xfrm>
-            <a:off x="673608" y="2556796"/>
-            <a:ext cx="1996440" cy="381190"/>
-          </a:xfrm>
-        </p:spPr>
-        <p:txBody>
-          <a:bodyPr/>
-          <a:lstStyle/>
-          <a:p>
-            <a:r>
-              <a:rPr lang="en-US" dirty="0"/>
-              <a:t>Initiation</a:t>
-            </a:r>
-          </a:p>
-        </p:txBody>
-      </p:sp>
-      <p:sp>
-        <p:nvSpPr>
-          <p:cNvPr id="10" name="Text Placeholder 9">
-            <a:extLst>
-              <a:ext uri="{FF2B5EF4-FFF2-40B4-BE49-F238E27FC236}">
-                <a16:creationId xmlns:a16="http://schemas.microsoft.com/office/drawing/2014/main" id="{704798AF-C115-FD01-660C-FACB9324AE67}"/>
-              </a:ext>
-            </a:extLst>
-          </p:cNvPr>
-          <p:cNvSpPr>
-            <a:spLocks noGrp="1"/>
-          </p:cNvSpPr>
-          <p:nvPr>
-            <p:ph type="body" sz="quarter" idx="20"/>
-          </p:nvPr>
-        </p:nvSpPr>
-        <p:spPr>
-          <a:xfrm>
-            <a:off x="673608" y="3391012"/>
-            <a:ext cx="1996440" cy="778652"/>
-          </a:xfrm>
-        </p:spPr>
-        <p:txBody>
-          <a:bodyPr/>
-          <a:lstStyle/>
-          <a:p>
-            <a:r>
-              <a:rPr lang="en-US" dirty="0"/>
-              <a:t>Defining the project scope, objectives, and deliverables.</a:t>
-            </a:r>
-          </a:p>
-        </p:txBody>
-      </p:sp>
-      <p:sp>
-        <p:nvSpPr>
-          <p:cNvPr id="15" name="Text Placeholder 14">
-            <a:extLst>
-              <a:ext uri="{FF2B5EF4-FFF2-40B4-BE49-F238E27FC236}">
-                <a16:creationId xmlns:a16="http://schemas.microsoft.com/office/drawing/2014/main" id="{CEF0FB64-55E0-EC94-60C2-AF7B00F7949A}"/>
-              </a:ext>
-            </a:extLst>
-          </p:cNvPr>
-          <p:cNvSpPr>
-            <a:spLocks noGrp="1"/>
-          </p:cNvSpPr>
-          <p:nvPr>
-            <p:ph type="body" sz="quarter" idx="25"/>
-          </p:nvPr>
-        </p:nvSpPr>
-        <p:spPr>
-          <a:xfrm>
-            <a:off x="670560" y="4505738"/>
-            <a:ext cx="893064" cy="335470"/>
-          </a:xfrm>
-        </p:spPr>
-        <p:txBody>
-          <a:bodyPr/>
-          <a:lstStyle/>
-          <a:p>
-            <a:r>
-              <a:rPr lang="en-US" dirty="0"/>
-              <a:t>20xx</a:t>
-            </a:r>
-          </a:p>
-        </p:txBody>
-      </p:sp>
-      <p:pic>
-        <p:nvPicPr>
-          <p:cNvPr id="216" name="Picture Placeholder 215" descr="3d Glasses">
-            <a:extLst>
-              <a:ext uri="{FF2B5EF4-FFF2-40B4-BE49-F238E27FC236}">
-                <a16:creationId xmlns:a16="http://schemas.microsoft.com/office/drawing/2014/main" id="{77F5520F-24C4-6968-9481-7307959BD532}"/>
-              </a:ext>
-            </a:extLst>
-          </p:cNvPr>
-          <p:cNvPicPr>
-            <a:picLocks noGrp="1" noChangeAspect="1"/>
-          </p:cNvPicPr>
-          <p:nvPr>
-            <p:ph type="pic" sz="quarter" idx="35"/>
-          </p:nvPr>
-        </p:nvPicPr>
-        <p:blipFill>
-          <a:blip>
-            <a:extLst>
-              <a:ext uri="{96DAC541-7B7A-43D3-8B79-37D633B846F1}">
-                <asvg:svgBlip xmlns:asvg="http://schemas.microsoft.com/office/drawing/2016/SVG/main" r:embed="rId4"/>
               </a:ext>
             </a:extLst>
           </a:blip>
@@ -7808,17 +7762,17 @@
         </p:blipFill>
         <p:spPr>
           <a:xfrm>
-            <a:off x="1796796" y="4513453"/>
+            <a:off x="381306" y="2798093"/>
             <a:ext cx="457200" cy="457200"/>
           </a:xfrm>
         </p:spPr>
       </p:pic>
       <p:sp>
         <p:nvSpPr>
-          <p:cNvPr id="16" name="Text Placeholder 15">
-            <a:extLst>
-              <a:ext uri="{FF2B5EF4-FFF2-40B4-BE49-F238E27FC236}">
-                <a16:creationId xmlns:a16="http://schemas.microsoft.com/office/drawing/2014/main" id="{7CD1A1A3-7B06-540A-7142-A38FDAEFF942}"/>
+          <p:cNvPr id="6" name="Text Placeholder 5">
+            <a:extLst>
+              <a:ext uri="{FF2B5EF4-FFF2-40B4-BE49-F238E27FC236}">
+                <a16:creationId xmlns:a16="http://schemas.microsoft.com/office/drawing/2014/main" id="{D392FED6-AAD8-5F8E-79B4-DF24A782374A}"/>
               </a:ext>
             </a:extLst>
           </p:cNvPr>
@@ -7826,13 +7780,13 @@
             <a:spLocks noGrp="1"/>
           </p:cNvSpPr>
           <p:nvPr>
-            <p:ph type="body" sz="quarter" idx="26"/>
-          </p:nvPr>
-        </p:nvSpPr>
-        <p:spPr>
-          <a:xfrm>
-            <a:off x="670560" y="4894756"/>
-            <a:ext cx="893064" cy="335470"/>
+            <p:ph type="body" sz="quarter" idx="16"/>
+          </p:nvPr>
+        </p:nvSpPr>
+        <p:spPr>
+          <a:xfrm>
+            <a:off x="3597508" y="3184551"/>
+            <a:ext cx="1996440" cy="381190"/>
           </a:xfrm>
         </p:spPr>
         <p:txBody>
@@ -7841,17 +7795,17 @@
           <a:p>
             <a:r>
               <a:rPr lang="en-US" dirty="0"/>
-              <a:t>Jan</a:t>
-            </a:r>
-          </a:p>
-        </p:txBody>
-      </p:sp>
-      <p:sp>
-        <p:nvSpPr>
-          <p:cNvPr id="6" name="Text Placeholder 5">
-            <a:extLst>
-              <a:ext uri="{FF2B5EF4-FFF2-40B4-BE49-F238E27FC236}">
-                <a16:creationId xmlns:a16="http://schemas.microsoft.com/office/drawing/2014/main" id="{D392FED6-AAD8-5F8E-79B4-DF24A782374A}"/>
+              <a:t>Objective</a:t>
+            </a:r>
+          </a:p>
+        </p:txBody>
+      </p:sp>
+      <p:sp>
+        <p:nvSpPr>
+          <p:cNvPr id="11" name="Text Placeholder 10">
+            <a:extLst>
+              <a:ext uri="{FF2B5EF4-FFF2-40B4-BE49-F238E27FC236}">
+                <a16:creationId xmlns:a16="http://schemas.microsoft.com/office/drawing/2014/main" id="{743309AC-45B9-55D7-27D2-36A3565F37F2}"/>
               </a:ext>
             </a:extLst>
           </p:cNvPr>
@@ -7859,88 +7813,44 @@
             <a:spLocks noGrp="1"/>
           </p:cNvSpPr>
           <p:nvPr>
-            <p:ph type="body" sz="quarter" idx="16"/>
-          </p:nvPr>
-        </p:nvSpPr>
-        <p:spPr>
-          <a:xfrm>
-            <a:off x="2862072" y="2556796"/>
-            <a:ext cx="1996440" cy="381190"/>
+            <p:ph type="body" sz="quarter" idx="21"/>
+          </p:nvPr>
+        </p:nvSpPr>
+        <p:spPr>
+          <a:xfrm>
+            <a:off x="3627988" y="3582332"/>
+            <a:ext cx="2817876" cy="1444170"/>
           </a:xfrm>
         </p:spPr>
         <p:txBody>
           <a:bodyPr/>
           <a:lstStyle/>
           <a:p>
-            <a:r>
-              <a:rPr lang="en-US" dirty="0"/>
-              <a:t>Planning</a:t>
-            </a:r>
-          </a:p>
-        </p:txBody>
-      </p:sp>
-      <p:sp>
-        <p:nvSpPr>
-          <p:cNvPr id="11" name="Text Placeholder 10">
-            <a:extLst>
-              <a:ext uri="{FF2B5EF4-FFF2-40B4-BE49-F238E27FC236}">
-                <a16:creationId xmlns:a16="http://schemas.microsoft.com/office/drawing/2014/main" id="{743309AC-45B9-55D7-27D2-36A3565F37F2}"/>
-              </a:ext>
-            </a:extLst>
-          </p:cNvPr>
-          <p:cNvSpPr>
-            <a:spLocks noGrp="1"/>
-          </p:cNvSpPr>
-          <p:nvPr>
-            <p:ph type="body" sz="quarter" idx="21"/>
-          </p:nvPr>
-        </p:nvSpPr>
-        <p:spPr>
-          <a:xfrm>
-            <a:off x="2862072" y="3391012"/>
-            <a:ext cx="1996440" cy="778652"/>
-          </a:xfrm>
-        </p:spPr>
-        <p:txBody>
-          <a:bodyPr/>
-          <a:lstStyle/>
-          <a:p>
-            <a:r>
-              <a:rPr lang="en-US" dirty="0"/>
-              <a:t>Detailed project plans created, including development of work breakdown structure.</a:t>
-            </a:r>
-          </a:p>
-        </p:txBody>
-      </p:sp>
-      <p:sp>
-        <p:nvSpPr>
-          <p:cNvPr id="17" name="Text Placeholder 16">
-            <a:extLst>
-              <a:ext uri="{FF2B5EF4-FFF2-40B4-BE49-F238E27FC236}">
-                <a16:creationId xmlns:a16="http://schemas.microsoft.com/office/drawing/2014/main" id="{06CF7B6D-90A6-8A59-BCF3-987FD30E7D32}"/>
-              </a:ext>
-            </a:extLst>
-          </p:cNvPr>
-          <p:cNvSpPr>
-            <a:spLocks noGrp="1"/>
-          </p:cNvSpPr>
-          <p:nvPr>
-            <p:ph type="body" sz="quarter" idx="27"/>
-          </p:nvPr>
-        </p:nvSpPr>
-        <p:spPr>
-          <a:xfrm>
-            <a:off x="2862072" y="4505738"/>
-            <a:ext cx="893064" cy="335470"/>
-          </a:xfrm>
-        </p:spPr>
-        <p:txBody>
-          <a:bodyPr/>
-          <a:lstStyle/>
-          <a:p>
-            <a:r>
-              <a:rPr lang="en-US" dirty="0"/>
-              <a:t>20xx</a:t>
+            <a:pPr fontAlgn="base"/>
+            <a:r>
+              <a:rPr lang="en-GB" sz="900" dirty="0"/>
+              <a:t>Demonstrate the potential of legacy music playback formats in modern systems. </a:t>
+            </a:r>
+          </a:p>
+          <a:p>
+            <a:pPr fontAlgn="base"/>
+            <a:r>
+              <a:rPr lang="en-GB" sz="900" dirty="0"/>
+              <a:t>Allow quick prototype or full music production for a game engine user. </a:t>
+            </a:r>
+          </a:p>
+          <a:p>
+            <a:pPr fontAlgn="base"/>
+            <a:r>
+              <a:rPr lang="en-GB" sz="900" dirty="0"/>
+              <a:t>Removes barrier between level design/gameplay programming and music creation for events and sections in a level. </a:t>
+            </a:r>
+          </a:p>
+          <a:p>
+            <a:pPr fontAlgn="base"/>
+            <a:r>
+              <a:rPr lang="en-GB" sz="900" dirty="0"/>
+              <a:t>Allow for future modification of tracks due to the text-command style of music files. (Transformative/Generative music). </a:t>
             </a:r>
           </a:p>
         </p:txBody>
@@ -7965,7 +7875,7 @@
           <a:blip>
             <a:extLst>
               <a:ext uri="{96DAC541-7B7A-43D3-8B79-37D633B846F1}">
-                <asvg:svgBlip xmlns:asvg="http://schemas.microsoft.com/office/drawing/2016/SVG/main" r:embed="rId5"/>
+                <asvg:svgBlip xmlns:asvg="http://schemas.microsoft.com/office/drawing/2016/SVG/main" r:embed="rId4"/>
               </a:ext>
             </a:extLst>
           </a:blip>
@@ -7974,17 +7884,17 @@
         </p:blipFill>
         <p:spPr>
           <a:xfrm>
-            <a:off x="4002024" y="4513453"/>
+            <a:off x="6445864" y="4790688"/>
             <a:ext cx="457200" cy="457200"/>
           </a:xfrm>
         </p:spPr>
       </p:pic>
       <p:sp>
         <p:nvSpPr>
-          <p:cNvPr id="18" name="Text Placeholder 17">
-            <a:extLst>
-              <a:ext uri="{FF2B5EF4-FFF2-40B4-BE49-F238E27FC236}">
-                <a16:creationId xmlns:a16="http://schemas.microsoft.com/office/drawing/2014/main" id="{678764F9-E4BE-4CDA-9057-9DAC71454214}"/>
+          <p:cNvPr id="7" name="Text Placeholder 6">
+            <a:extLst>
+              <a:ext uri="{FF2B5EF4-FFF2-40B4-BE49-F238E27FC236}">
+                <a16:creationId xmlns:a16="http://schemas.microsoft.com/office/drawing/2014/main" id="{8C718A59-7FF0-150D-65DA-7E2BCFAC70CD}"/>
               </a:ext>
             </a:extLst>
           </p:cNvPr>
@@ -7992,13 +7902,13 @@
             <a:spLocks noGrp="1"/>
           </p:cNvSpPr>
           <p:nvPr>
-            <p:ph type="body" sz="quarter" idx="28"/>
-          </p:nvPr>
-        </p:nvSpPr>
-        <p:spPr>
-          <a:xfrm>
-            <a:off x="2862072" y="4894756"/>
-            <a:ext cx="893064" cy="335470"/>
+            <p:ph type="body" sz="quarter" idx="17"/>
+          </p:nvPr>
+        </p:nvSpPr>
+        <p:spPr>
+          <a:xfrm>
+            <a:off x="146739" y="4668396"/>
+            <a:ext cx="2587752" cy="381190"/>
           </a:xfrm>
         </p:spPr>
         <p:txBody>
@@ -8007,17 +7917,17 @@
           <a:p>
             <a:r>
               <a:rPr lang="en-US" dirty="0"/>
-              <a:t>Feb</a:t>
-            </a:r>
-          </a:p>
-        </p:txBody>
-      </p:sp>
-      <p:sp>
-        <p:nvSpPr>
-          <p:cNvPr id="7" name="Text Placeholder 6">
-            <a:extLst>
-              <a:ext uri="{FF2B5EF4-FFF2-40B4-BE49-F238E27FC236}">
-                <a16:creationId xmlns:a16="http://schemas.microsoft.com/office/drawing/2014/main" id="{8C718A59-7FF0-150D-65DA-7E2BCFAC70CD}"/>
+              <a:t>Methodology</a:t>
+            </a:r>
+          </a:p>
+        </p:txBody>
+      </p:sp>
+      <p:sp>
+        <p:nvSpPr>
+          <p:cNvPr id="12" name="Text Placeholder 11">
+            <a:extLst>
+              <a:ext uri="{FF2B5EF4-FFF2-40B4-BE49-F238E27FC236}">
+                <a16:creationId xmlns:a16="http://schemas.microsoft.com/office/drawing/2014/main" id="{8AD98222-E384-9A18-1F02-89CAC7CC3BB8}"/>
               </a:ext>
             </a:extLst>
           </p:cNvPr>
@@ -8025,88 +7935,56 @@
             <a:spLocks noGrp="1"/>
           </p:cNvSpPr>
           <p:nvPr>
-            <p:ph type="body" sz="quarter" idx="17"/>
-          </p:nvPr>
-        </p:nvSpPr>
-        <p:spPr>
-          <a:xfrm>
-            <a:off x="5050536" y="2556796"/>
-            <a:ext cx="1996440" cy="381190"/>
+            <p:ph type="body" sz="quarter" idx="22"/>
+          </p:nvPr>
+        </p:nvSpPr>
+        <p:spPr>
+          <a:xfrm>
+            <a:off x="156644" y="5099831"/>
+            <a:ext cx="3592395" cy="1548055"/>
           </a:xfrm>
         </p:spPr>
         <p:txBody>
           <a:bodyPr/>
           <a:lstStyle/>
           <a:p>
-            <a:r>
-              <a:rPr lang="en-US" dirty="0"/>
-              <a:t>Execution</a:t>
-            </a:r>
-          </a:p>
-        </p:txBody>
-      </p:sp>
-      <p:sp>
-        <p:nvSpPr>
-          <p:cNvPr id="12" name="Text Placeholder 11">
-            <a:extLst>
-              <a:ext uri="{FF2B5EF4-FFF2-40B4-BE49-F238E27FC236}">
-                <a16:creationId xmlns:a16="http://schemas.microsoft.com/office/drawing/2014/main" id="{8AD98222-E384-9A18-1F02-89CAC7CC3BB8}"/>
-              </a:ext>
-            </a:extLst>
-          </p:cNvPr>
-          <p:cNvSpPr>
-            <a:spLocks noGrp="1"/>
-          </p:cNvSpPr>
-          <p:nvPr>
-            <p:ph type="body" sz="quarter" idx="22"/>
-          </p:nvPr>
-        </p:nvSpPr>
-        <p:spPr>
-          <a:xfrm>
-            <a:off x="5050536" y="3391012"/>
-            <a:ext cx="1996440" cy="778652"/>
-          </a:xfrm>
-        </p:spPr>
-        <p:txBody>
-          <a:bodyPr/>
-          <a:lstStyle/>
-          <a:p>
-            <a:r>
-              <a:rPr lang="en-US" dirty="0"/>
-              <a:t>Project tasks are performed, and the project plan is put into action.</a:t>
-            </a:r>
-          </a:p>
-        </p:txBody>
-      </p:sp>
-      <p:sp>
-        <p:nvSpPr>
-          <p:cNvPr id="19" name="Text Placeholder 18">
-            <a:extLst>
-              <a:ext uri="{FF2B5EF4-FFF2-40B4-BE49-F238E27FC236}">
-                <a16:creationId xmlns:a16="http://schemas.microsoft.com/office/drawing/2014/main" id="{241E28D7-854E-501F-42D9-C642C74C2B72}"/>
-              </a:ext>
-            </a:extLst>
-          </p:cNvPr>
-          <p:cNvSpPr>
-            <a:spLocks noGrp="1"/>
-          </p:cNvSpPr>
-          <p:nvPr>
-            <p:ph type="body" sz="quarter" idx="29"/>
-          </p:nvPr>
-        </p:nvSpPr>
-        <p:spPr>
-          <a:xfrm>
-            <a:off x="5065776" y="4505738"/>
-            <a:ext cx="893064" cy="335470"/>
-          </a:xfrm>
-        </p:spPr>
-        <p:txBody>
-          <a:bodyPr/>
-          <a:lstStyle/>
-          <a:p>
-            <a:r>
-              <a:rPr lang="en-US" dirty="0"/>
-              <a:t>20xx</a:t>
+            <a:pPr fontAlgn="base"/>
+            <a:r>
+              <a:rPr lang="en-GB" sz="900" dirty="0"/>
+              <a:t>SF2 file playback in Miniaudio &amp; </a:t>
+            </a:r>
+            <a:r>
+              <a:rPr lang="en-GB" sz="900" dirty="0" err="1"/>
+              <a:t>TinySoundFont</a:t>
+            </a:r>
+            <a:r>
+              <a:rPr lang="en-GB" sz="900" dirty="0"/>
+              <a:t> in C. </a:t>
+            </a:r>
+          </a:p>
+          <a:p>
+            <a:pPr fontAlgn="base"/>
+            <a:r>
+              <a:rPr lang="en-GB" sz="900" dirty="0"/>
+              <a:t>Unity interpreter as an example of game engine usage. </a:t>
+            </a:r>
+          </a:p>
+          <a:p>
+            <a:pPr fontAlgn="base"/>
+            <a:r>
+              <a:rPr lang="en-GB" sz="900" dirty="0"/>
+              <a:t>Allow ‘testers’ to play a level/audio sample with music to test the authenticity and immersion of gameplay. </a:t>
+            </a:r>
+          </a:p>
+          <a:p>
+            <a:pPr fontAlgn="base"/>
+            <a:r>
+              <a:rPr lang="en-GB" sz="900" dirty="0"/>
+              <a:t>Testers will take a questionnaire about how they felt during certain parts of the gameplay and their emotions. (mention qualitive data</a:t>
+            </a:r>
+            <a:r>
+              <a:rPr lang="en-GB" dirty="0"/>
+              <a:t>?) </a:t>
             </a:r>
           </a:p>
         </p:txBody>
@@ -8131,7 +8009,7 @@
           <a:blip>
             <a:extLst>
               <a:ext uri="{96DAC541-7B7A-43D3-8B79-37D633B846F1}">
-                <asvg:svgBlip xmlns:asvg="http://schemas.microsoft.com/office/drawing/2016/SVG/main" r:embed="rId6"/>
+                <asvg:svgBlip xmlns:asvg="http://schemas.microsoft.com/office/drawing/2016/SVG/main" r:embed="rId5"/>
               </a:ext>
             </a:extLst>
           </a:blip>
@@ -8140,17 +8018,17 @@
         </p:blipFill>
         <p:spPr>
           <a:xfrm>
-            <a:off x="6207252" y="4517172"/>
+            <a:off x="1541923" y="6234089"/>
             <a:ext cx="457200" cy="457200"/>
           </a:xfrm>
         </p:spPr>
       </p:pic>
       <p:sp>
         <p:nvSpPr>
-          <p:cNvPr id="20" name="Text Placeholder 19">
-            <a:extLst>
-              <a:ext uri="{FF2B5EF4-FFF2-40B4-BE49-F238E27FC236}">
-                <a16:creationId xmlns:a16="http://schemas.microsoft.com/office/drawing/2014/main" id="{1E03F989-54DC-067A-FE2C-CC0917539F8B}"/>
+          <p:cNvPr id="8" name="Text Placeholder 7">
+            <a:extLst>
+              <a:ext uri="{FF2B5EF4-FFF2-40B4-BE49-F238E27FC236}">
+                <a16:creationId xmlns:a16="http://schemas.microsoft.com/office/drawing/2014/main" id="{1A668396-55B1-62F2-1540-284A767D707A}"/>
               </a:ext>
             </a:extLst>
           </p:cNvPr>
@@ -8158,13 +8036,13 @@
             <a:spLocks noGrp="1"/>
           </p:cNvSpPr>
           <p:nvPr>
-            <p:ph type="body" sz="quarter" idx="30"/>
-          </p:nvPr>
-        </p:nvSpPr>
-        <p:spPr>
-          <a:xfrm>
-            <a:off x="5065776" y="4894756"/>
-            <a:ext cx="893064" cy="335470"/>
+            <p:ph type="body" sz="quarter" idx="18"/>
+          </p:nvPr>
+        </p:nvSpPr>
+        <p:spPr>
+          <a:xfrm>
+            <a:off x="7326147" y="1148466"/>
+            <a:ext cx="1996440" cy="381190"/>
           </a:xfrm>
         </p:spPr>
         <p:txBody>
@@ -8173,17 +8051,17 @@
           <a:p>
             <a:r>
               <a:rPr lang="en-US" dirty="0"/>
-              <a:t>Mar</a:t>
-            </a:r>
-          </a:p>
-        </p:txBody>
-      </p:sp>
-      <p:sp>
-        <p:nvSpPr>
-          <p:cNvPr id="8" name="Text Placeholder 7">
-            <a:extLst>
-              <a:ext uri="{FF2B5EF4-FFF2-40B4-BE49-F238E27FC236}">
-                <a16:creationId xmlns:a16="http://schemas.microsoft.com/office/drawing/2014/main" id="{1A668396-55B1-62F2-1540-284A767D707A}"/>
+              <a:t>Results</a:t>
+            </a:r>
+          </a:p>
+        </p:txBody>
+      </p:sp>
+      <p:sp>
+        <p:nvSpPr>
+          <p:cNvPr id="13" name="Text Placeholder 12">
+            <a:extLst>
+              <a:ext uri="{FF2B5EF4-FFF2-40B4-BE49-F238E27FC236}">
+                <a16:creationId xmlns:a16="http://schemas.microsoft.com/office/drawing/2014/main" id="{7A796CA2-AD43-6CE8-757E-437D60714D2F}"/>
               </a:ext>
             </a:extLst>
           </p:cNvPr>
@@ -8191,13 +8069,13 @@
             <a:spLocks noGrp="1"/>
           </p:cNvSpPr>
           <p:nvPr>
-            <p:ph type="body" sz="quarter" idx="18"/>
-          </p:nvPr>
-        </p:nvSpPr>
-        <p:spPr>
-          <a:xfrm>
-            <a:off x="7239000" y="2556796"/>
-            <a:ext cx="1996440" cy="381190"/>
+            <p:ph type="body" sz="quarter" idx="23"/>
+          </p:nvPr>
+        </p:nvSpPr>
+        <p:spPr>
+          <a:xfrm>
+            <a:off x="7351353" y="1672771"/>
+            <a:ext cx="1996440" cy="778652"/>
           </a:xfrm>
         </p:spPr>
         <p:txBody>
@@ -8206,73 +8084,7 @@
           <a:p>
             <a:r>
               <a:rPr lang="en-US" dirty="0"/>
-              <a:t>Control</a:t>
-            </a:r>
-          </a:p>
-        </p:txBody>
-      </p:sp>
-      <p:sp>
-        <p:nvSpPr>
-          <p:cNvPr id="13" name="Text Placeholder 12">
-            <a:extLst>
-              <a:ext uri="{FF2B5EF4-FFF2-40B4-BE49-F238E27FC236}">
-                <a16:creationId xmlns:a16="http://schemas.microsoft.com/office/drawing/2014/main" id="{7A796CA2-AD43-6CE8-757E-437D60714D2F}"/>
-              </a:ext>
-            </a:extLst>
-          </p:cNvPr>
-          <p:cNvSpPr>
-            <a:spLocks noGrp="1"/>
-          </p:cNvSpPr>
-          <p:nvPr>
-            <p:ph type="body" sz="quarter" idx="23"/>
-          </p:nvPr>
-        </p:nvSpPr>
-        <p:spPr>
-          <a:xfrm>
-            <a:off x="7239000" y="3391012"/>
-            <a:ext cx="1996440" cy="778652"/>
-          </a:xfrm>
-        </p:spPr>
-        <p:txBody>
-          <a:bodyPr/>
-          <a:lstStyle/>
-          <a:p>
-            <a:r>
-              <a:rPr lang="en-US" dirty="0"/>
-              <a:t>Progress is monitored, and any deviations from the plan are identified and addressed.</a:t>
-            </a:r>
-          </a:p>
-        </p:txBody>
-      </p:sp>
-      <p:sp>
-        <p:nvSpPr>
-          <p:cNvPr id="21" name="Text Placeholder 20">
-            <a:extLst>
-              <a:ext uri="{FF2B5EF4-FFF2-40B4-BE49-F238E27FC236}">
-                <a16:creationId xmlns:a16="http://schemas.microsoft.com/office/drawing/2014/main" id="{C82DF9C1-AC48-88A4-1DE4-5C291D78D087}"/>
-              </a:ext>
-            </a:extLst>
-          </p:cNvPr>
-          <p:cNvSpPr>
-            <a:spLocks noGrp="1"/>
-          </p:cNvSpPr>
-          <p:nvPr>
-            <p:ph type="body" sz="quarter" idx="31"/>
-          </p:nvPr>
-        </p:nvSpPr>
-        <p:spPr>
-          <a:xfrm>
-            <a:off x="7257288" y="4505738"/>
-            <a:ext cx="893064" cy="335470"/>
-          </a:xfrm>
-        </p:spPr>
-        <p:txBody>
-          <a:bodyPr/>
-          <a:lstStyle/>
-          <a:p>
-            <a:r>
-              <a:rPr lang="en-US" dirty="0"/>
-              <a:t>20xx</a:t>
+              <a:t>Table/form information here</a:t>
             </a:r>
           </a:p>
         </p:txBody>
@@ -8297,7 +8109,7 @@
           <a:blip>
             <a:extLst>
               <a:ext uri="{96DAC541-7B7A-43D3-8B79-37D633B846F1}">
-                <asvg:svgBlip xmlns:asvg="http://schemas.microsoft.com/office/drawing/2016/SVG/main" r:embed="rId7"/>
+                <asvg:svgBlip xmlns:asvg="http://schemas.microsoft.com/office/drawing/2016/SVG/main" r:embed="rId6"/>
               </a:ext>
             </a:extLst>
           </a:blip>
@@ -8306,17 +8118,17 @@
         </p:blipFill>
         <p:spPr>
           <a:xfrm>
-            <a:off x="8412480" y="4517172"/>
+            <a:off x="7599962" y="1966808"/>
             <a:ext cx="457200" cy="457200"/>
           </a:xfrm>
         </p:spPr>
       </p:pic>
       <p:sp>
         <p:nvSpPr>
-          <p:cNvPr id="22" name="Text Placeholder 21">
-            <a:extLst>
-              <a:ext uri="{FF2B5EF4-FFF2-40B4-BE49-F238E27FC236}">
-                <a16:creationId xmlns:a16="http://schemas.microsoft.com/office/drawing/2014/main" id="{6E0AB1ED-F5D1-D929-4FEE-C47FC6E1F392}"/>
+          <p:cNvPr id="9" name="Text Placeholder 8">
+            <a:extLst>
+              <a:ext uri="{FF2B5EF4-FFF2-40B4-BE49-F238E27FC236}">
+                <a16:creationId xmlns:a16="http://schemas.microsoft.com/office/drawing/2014/main" id="{0443785B-1A6D-E1D6-6E52-FE4E67D01D2F}"/>
               </a:ext>
             </a:extLst>
           </p:cNvPr>
@@ -8324,13 +8136,13 @@
             <a:spLocks noGrp="1"/>
           </p:cNvSpPr>
           <p:nvPr>
-            <p:ph type="body" sz="quarter" idx="32"/>
-          </p:nvPr>
-        </p:nvSpPr>
-        <p:spPr>
-          <a:xfrm>
-            <a:off x="7257288" y="4894756"/>
-            <a:ext cx="893064" cy="335470"/>
+            <p:ph type="body" sz="quarter" idx="19"/>
+          </p:nvPr>
+        </p:nvSpPr>
+        <p:spPr>
+          <a:xfrm>
+            <a:off x="8082794" y="4477802"/>
+            <a:ext cx="2656332" cy="381190"/>
           </a:xfrm>
         </p:spPr>
         <p:txBody>
@@ -8339,17 +8151,17 @@
           <a:p>
             <a:r>
               <a:rPr lang="en-US" dirty="0"/>
-              <a:t>Apr</a:t>
-            </a:r>
-          </a:p>
-        </p:txBody>
-      </p:sp>
-      <p:sp>
-        <p:nvSpPr>
-          <p:cNvPr id="9" name="Text Placeholder 8">
-            <a:extLst>
-              <a:ext uri="{FF2B5EF4-FFF2-40B4-BE49-F238E27FC236}">
-                <a16:creationId xmlns:a16="http://schemas.microsoft.com/office/drawing/2014/main" id="{0443785B-1A6D-E1D6-6E52-FE4E67D01D2F}"/>
+              <a:t>Conclusion</a:t>
+            </a:r>
+          </a:p>
+        </p:txBody>
+      </p:sp>
+      <p:sp>
+        <p:nvSpPr>
+          <p:cNvPr id="14" name="Text Placeholder 13">
+            <a:extLst>
+              <a:ext uri="{FF2B5EF4-FFF2-40B4-BE49-F238E27FC236}">
+                <a16:creationId xmlns:a16="http://schemas.microsoft.com/office/drawing/2014/main" id="{74478444-AE6E-47B8-62DC-D7A1402293D6}"/>
               </a:ext>
             </a:extLst>
           </p:cNvPr>
@@ -8357,13 +8169,13 @@
             <a:spLocks noGrp="1"/>
           </p:cNvSpPr>
           <p:nvPr>
-            <p:ph type="body" sz="quarter" idx="19"/>
-          </p:nvPr>
-        </p:nvSpPr>
-        <p:spPr>
-          <a:xfrm>
-            <a:off x="9427464" y="2556796"/>
-            <a:ext cx="1996440" cy="381190"/>
+            <p:ph type="body" sz="quarter" idx="24"/>
+          </p:nvPr>
+        </p:nvSpPr>
+        <p:spPr>
+          <a:xfrm>
+            <a:off x="8138816" y="4858991"/>
+            <a:ext cx="3099286" cy="1079489"/>
           </a:xfrm>
         </p:spPr>
         <p:txBody>
@@ -8371,74 +8183,34 @@
           <a:lstStyle/>
           <a:p>
             <a:r>
-              <a:rPr lang="en-US" dirty="0"/>
-              <a:t>Closure</a:t>
-            </a:r>
-          </a:p>
-        </p:txBody>
-      </p:sp>
-      <p:sp>
-        <p:nvSpPr>
-          <p:cNvPr id="14" name="Text Placeholder 13">
-            <a:extLst>
-              <a:ext uri="{FF2B5EF4-FFF2-40B4-BE49-F238E27FC236}">
-                <a16:creationId xmlns:a16="http://schemas.microsoft.com/office/drawing/2014/main" id="{74478444-AE6E-47B8-62DC-D7A1402293D6}"/>
-              </a:ext>
-            </a:extLst>
-          </p:cNvPr>
-          <p:cNvSpPr>
-            <a:spLocks noGrp="1"/>
-          </p:cNvSpPr>
-          <p:nvPr>
-            <p:ph type="body" sz="quarter" idx="24"/>
-          </p:nvPr>
-        </p:nvSpPr>
-        <p:spPr>
-          <a:xfrm>
-            <a:off x="9427464" y="3391012"/>
-            <a:ext cx="1996440" cy="778652"/>
-          </a:xfrm>
-        </p:spPr>
-        <p:txBody>
-          <a:bodyPr/>
-          <a:lstStyle/>
-          <a:p>
-            <a:r>
-              <a:rPr lang="en-US" dirty="0"/>
-              <a:t>Documenting deliverables, conducting reviews, transitioning outcomes.</a:t>
-            </a:r>
-          </a:p>
-        </p:txBody>
-      </p:sp>
-      <p:sp>
-        <p:nvSpPr>
-          <p:cNvPr id="23" name="Text Placeholder 22">
-            <a:extLst>
-              <a:ext uri="{FF2B5EF4-FFF2-40B4-BE49-F238E27FC236}">
-                <a16:creationId xmlns:a16="http://schemas.microsoft.com/office/drawing/2014/main" id="{8B7EEEE4-EFCB-5235-DF74-74FE37B59EB4}"/>
-              </a:ext>
-            </a:extLst>
-          </p:cNvPr>
-          <p:cNvSpPr>
-            <a:spLocks noGrp="1"/>
-          </p:cNvSpPr>
-          <p:nvPr>
-            <p:ph type="body" sz="quarter" idx="33"/>
-          </p:nvPr>
-        </p:nvSpPr>
-        <p:spPr>
-          <a:xfrm>
-            <a:off x="9448800" y="4505738"/>
-            <a:ext cx="893064" cy="335470"/>
-          </a:xfrm>
-        </p:spPr>
-        <p:txBody>
-          <a:bodyPr/>
-          <a:lstStyle/>
-          <a:p>
-            <a:r>
-              <a:rPr lang="en-US" dirty="0"/>
-              <a:t>20xx</a:t>
+              <a:rPr lang="en-US" sz="900" dirty="0">
+                <a:solidFill>
+                  <a:srgbClr val="FF0000"/>
+                </a:solidFill>
+              </a:rPr>
+              <a:t>Something here about how people responded to the tool/audio samples I created.</a:t>
+            </a:r>
+          </a:p>
+          <a:p>
+            <a:r>
+              <a:rPr lang="en-US" sz="900" dirty="0"/>
+              <a:t>Requires more testers and musical creators to test the limits of sf2 file playback.</a:t>
+            </a:r>
+          </a:p>
+          <a:p>
+            <a:r>
+              <a:rPr lang="en-US" sz="900" dirty="0"/>
+              <a:t>Future potential for greater sound samples or tool improvement.</a:t>
+            </a:r>
+          </a:p>
+          <a:p>
+            <a:r>
+              <a:rPr lang="en-US" sz="900" dirty="0">
+                <a:solidFill>
+                  <a:srgbClr val="FF0000"/>
+                </a:solidFill>
+              </a:rPr>
+              <a:t>Mention things I didn’t get to do.</a:t>
             </a:r>
           </a:p>
         </p:txBody>
@@ -8463,7 +8235,7 @@
           <a:blip>
             <a:extLst>
               <a:ext uri="{96DAC541-7B7A-43D3-8B79-37D633B846F1}">
-                <asvg:svgBlip xmlns:asvg="http://schemas.microsoft.com/office/drawing/2016/SVG/main" r:embed="rId8"/>
+                <asvg:svgBlip xmlns:asvg="http://schemas.microsoft.com/office/drawing/2016/SVG/main" r:embed="rId7"/>
               </a:ext>
             </a:extLst>
           </a:blip>
@@ -8472,122 +8244,17 @@
         </p:blipFill>
         <p:spPr>
           <a:xfrm>
-            <a:off x="10599038" y="4513453"/>
+            <a:off x="9254368" y="6134627"/>
             <a:ext cx="457200" cy="457200"/>
           </a:xfrm>
         </p:spPr>
       </p:pic>
-      <p:sp>
-        <p:nvSpPr>
-          <p:cNvPr id="24" name="Text Placeholder 23">
-            <a:extLst>
-              <a:ext uri="{FF2B5EF4-FFF2-40B4-BE49-F238E27FC236}">
-                <a16:creationId xmlns:a16="http://schemas.microsoft.com/office/drawing/2014/main" id="{9A96CED8-CB30-2B2E-9162-1F8036EFB37B}"/>
-              </a:ext>
-            </a:extLst>
-          </p:cNvPr>
-          <p:cNvSpPr>
-            <a:spLocks noGrp="1"/>
-          </p:cNvSpPr>
-          <p:nvPr>
-            <p:ph type="body" sz="quarter" idx="34"/>
-          </p:nvPr>
-        </p:nvSpPr>
-        <p:spPr>
-          <a:xfrm>
-            <a:off x="9448800" y="4894756"/>
-            <a:ext cx="893064" cy="335470"/>
-          </a:xfrm>
-        </p:spPr>
-        <p:txBody>
-          <a:bodyPr/>
-          <a:lstStyle/>
-          <a:p>
-            <a:r>
-              <a:rPr lang="en-US" dirty="0"/>
-              <a:t>May</a:t>
-            </a:r>
-          </a:p>
-        </p:txBody>
-      </p:sp>
-      <p:sp>
-        <p:nvSpPr>
-          <p:cNvPr id="31" name="Footer Placeholder 30">
-            <a:extLst>
-              <a:ext uri="{FF2B5EF4-FFF2-40B4-BE49-F238E27FC236}">
-                <a16:creationId xmlns:a16="http://schemas.microsoft.com/office/drawing/2014/main" id="{79483BE1-6DA7-D003-E2C0-D63969BCA6F7}"/>
-              </a:ext>
-            </a:extLst>
-          </p:cNvPr>
-          <p:cNvSpPr>
-            <a:spLocks noGrp="1"/>
-          </p:cNvSpPr>
-          <p:nvPr>
-            <p:ph type="ftr" sz="quarter" idx="11"/>
-          </p:nvPr>
-        </p:nvSpPr>
-        <p:spPr>
-          <a:xfrm>
-            <a:off x="670560" y="6072886"/>
-            <a:ext cx="4114800" cy="365125"/>
-          </a:xfrm>
-        </p:spPr>
-        <p:txBody>
-          <a:bodyPr/>
-          <a:lstStyle/>
-          <a:p>
-            <a:r>
-              <a:rPr lang="en-US" dirty="0"/>
-              <a:t>RELECLOUD / PROJECT TIMELINE</a:t>
-            </a:r>
-          </a:p>
-        </p:txBody>
-      </p:sp>
-      <p:sp>
-        <p:nvSpPr>
-          <p:cNvPr id="465" name="Slide Number Placeholder 464">
-            <a:extLst>
-              <a:ext uri="{FF2B5EF4-FFF2-40B4-BE49-F238E27FC236}">
-                <a16:creationId xmlns:a16="http://schemas.microsoft.com/office/drawing/2014/main" id="{F449235B-77DE-3ADB-9E4E-186CD7770E1D}"/>
-              </a:ext>
-            </a:extLst>
-          </p:cNvPr>
-          <p:cNvSpPr>
-            <a:spLocks noGrp="1"/>
-          </p:cNvSpPr>
-          <p:nvPr>
-            <p:ph type="sldNum" sz="quarter" idx="12"/>
-          </p:nvPr>
-        </p:nvSpPr>
-        <p:spPr>
-          <a:xfrm>
-            <a:off x="8738616" y="6072886"/>
-            <a:ext cx="2743200" cy="365125"/>
-          </a:xfrm>
-        </p:spPr>
-        <p:txBody>
-          <a:bodyPr/>
-          <a:lstStyle/>
-          <a:p>
-            <a:r>
-              <a:rPr lang="en-US" dirty="0"/>
-              <a:t>0</a:t>
-            </a:r>
-            <a:fld id="{E6B975A5-EA91-314B-AF62-F6E264554D2F}" type="slidenum">
-              <a:rPr lang="en-US" smtClean="0"/>
-              <a:pPr/>
-              <a:t>1</a:t>
-            </a:fld>
-            <a:endParaRPr lang="en-US" dirty="0"/>
-          </a:p>
-        </p:txBody>
-      </p:sp>
       <p:cxnSp>
         <p:nvCxnSpPr>
-          <p:cNvPr id="30" name="Straight Connector 29">
-            <a:extLst>
-              <a:ext uri="{FF2B5EF4-FFF2-40B4-BE49-F238E27FC236}">
-                <a16:creationId xmlns:a16="http://schemas.microsoft.com/office/drawing/2014/main" id="{26819713-90D5-D6DB-A09C-7E98B2CAD7E5}"/>
+          <p:cNvPr id="4" name="Straight Connector 3">
+            <a:extLst>
+              <a:ext uri="{FF2B5EF4-FFF2-40B4-BE49-F238E27FC236}">
+                <a16:creationId xmlns:a16="http://schemas.microsoft.com/office/drawing/2014/main" id="{341F7D99-95D6-3DC3-0374-0DE532900569}"/>
               </a:ext>
               <a:ext uri="{C183D7F6-B498-43B3-948B-1728B52AA6E4}">
                 <adec:decorative xmlns:adec="http://schemas.microsoft.com/office/drawing/2017/decorative" val="1"/>
@@ -8601,8 +8268,8 @@
         </p:nvCxnSpPr>
         <p:spPr>
           <a:xfrm>
-            <a:off x="2199568" y="1475740"/>
-            <a:ext cx="3291058" cy="0"/>
+            <a:off x="234059" y="613251"/>
+            <a:ext cx="11312652" cy="21533"/>
           </a:xfrm>
           <a:prstGeom prst="line">
             <a:avLst/>
@@ -8642,6 +8309,646 @@
           </a:fontRef>
         </p:style>
       </p:cxnSp>
+      <p:pic>
+        <p:nvPicPr>
+          <p:cNvPr id="34" name="Picture Placeholder 33" descr="Harvey Balls 100% outline">
+            <a:extLst>
+              <a:ext uri="{FF2B5EF4-FFF2-40B4-BE49-F238E27FC236}">
+                <a16:creationId xmlns:a16="http://schemas.microsoft.com/office/drawing/2014/main" id="{9389C35E-CB35-9695-83FB-56EB11B06563}"/>
+              </a:ext>
+            </a:extLst>
+          </p:cNvPr>
+          <p:cNvPicPr>
+            <a:picLocks noGrp="1" noChangeAspect="1"/>
+          </p:cNvPicPr>
+          <p:nvPr>
+            <p:ph type="pic" sz="quarter" idx="14"/>
+          </p:nvPr>
+        </p:nvPicPr>
+        <p:blipFill>
+          <a:blip>
+            <a:extLst>
+              <a:ext uri="{96DAC541-7B7A-43D3-8B79-37D633B846F1}">
+                <asvg:svgBlip xmlns:asvg="http://schemas.microsoft.com/office/drawing/2016/SVG/main" r:embed="rId8"/>
+              </a:ext>
+            </a:extLst>
+          </a:blip>
+          <a:srcRect/>
+          <a:stretch/>
+        </p:blipFill>
+        <p:spPr>
+          <a:xfrm>
+            <a:off x="10485434" y="767635"/>
+            <a:ext cx="1524363" cy="1524363"/>
+          </a:xfrm>
+        </p:spPr>
+      </p:pic>
+      <p:pic>
+        <p:nvPicPr>
+          <p:cNvPr id="37" name="Picture Placeholder 33" descr="Music notation with solid fill">
+            <a:extLst>
+              <a:ext uri="{FF2B5EF4-FFF2-40B4-BE49-F238E27FC236}">
+                <a16:creationId xmlns:a16="http://schemas.microsoft.com/office/drawing/2014/main" id="{D5F5E0E8-7F9D-1052-4DB0-3C9EB2B06384}"/>
+              </a:ext>
+            </a:extLst>
+          </p:cNvPr>
+          <p:cNvPicPr>
+            <a:picLocks noChangeAspect="1"/>
+          </p:cNvPicPr>
+          <p:nvPr/>
+        </p:nvPicPr>
+        <p:blipFill>
+          <a:blip>
+            <a:extLst>
+              <a:ext uri="{96DAC541-7B7A-43D3-8B79-37D633B846F1}">
+                <asvg:svgBlip xmlns:asvg="http://schemas.microsoft.com/office/drawing/2016/SVG/main" r:embed="rId9"/>
+              </a:ext>
+            </a:extLst>
+          </a:blip>
+          <a:srcRect/>
+          <a:stretch/>
+        </p:blipFill>
+        <p:spPr>
+          <a:xfrm>
+            <a:off x="-908906" y="-2611848"/>
+            <a:ext cx="727809" cy="12510591"/>
+          </a:xfrm>
+          <a:prstGeom prst="ellipse">
+            <a:avLst/>
+          </a:prstGeom>
+          <a:ln w="22225">
+            <a:noFill/>
+          </a:ln>
+        </p:spPr>
+      </p:pic>
+      <p:pic>
+        <p:nvPicPr>
+          <p:cNvPr id="38" name="Picture Placeholder 33" descr="Harvey Balls 0% with solid fill">
+            <a:extLst>
+              <a:ext uri="{FF2B5EF4-FFF2-40B4-BE49-F238E27FC236}">
+                <a16:creationId xmlns:a16="http://schemas.microsoft.com/office/drawing/2014/main" id="{FE7CF5C5-05D7-5829-85F6-0D447310E6F5}"/>
+              </a:ext>
+            </a:extLst>
+          </p:cNvPr>
+          <p:cNvPicPr>
+            <a:picLocks noChangeAspect="1"/>
+          </p:cNvPicPr>
+          <p:nvPr/>
+        </p:nvPicPr>
+        <p:blipFill>
+          <a:blip>
+            <a:extLst>
+              <a:ext uri="{96DAC541-7B7A-43D3-8B79-37D633B846F1}">
+                <asvg:svgBlip xmlns:asvg="http://schemas.microsoft.com/office/drawing/2016/SVG/main" r:embed="rId10"/>
+              </a:ext>
+            </a:extLst>
+          </a:blip>
+          <a:srcRect/>
+          <a:stretch/>
+        </p:blipFill>
+        <p:spPr>
+          <a:xfrm>
+            <a:off x="10899648" y="5843968"/>
+            <a:ext cx="822960" cy="822960"/>
+          </a:xfrm>
+          <a:prstGeom prst="ellipse">
+            <a:avLst/>
+          </a:prstGeom>
+          <a:ln w="22225">
+            <a:noFill/>
+          </a:ln>
+        </p:spPr>
+      </p:pic>
+      <p:pic>
+        <p:nvPicPr>
+          <p:cNvPr id="60" name="Picture Placeholder 33" descr="Music note with solid fill">
+            <a:extLst>
+              <a:ext uri="{FF2B5EF4-FFF2-40B4-BE49-F238E27FC236}">
+                <a16:creationId xmlns:a16="http://schemas.microsoft.com/office/drawing/2014/main" id="{19C70016-CA91-A324-6556-3E43A969D592}"/>
+              </a:ext>
+            </a:extLst>
+          </p:cNvPr>
+          <p:cNvPicPr>
+            <a:picLocks noChangeAspect="1"/>
+          </p:cNvPicPr>
+          <p:nvPr/>
+        </p:nvPicPr>
+        <p:blipFill>
+          <a:blip>
+            <a:extLst>
+              <a:ext uri="{96DAC541-7B7A-43D3-8B79-37D633B846F1}">
+                <asvg:svgBlip xmlns:asvg="http://schemas.microsoft.com/office/drawing/2016/SVG/main" r:embed="rId11"/>
+              </a:ext>
+            </a:extLst>
+          </a:blip>
+          <a:srcRect/>
+          <a:stretch/>
+        </p:blipFill>
+        <p:spPr>
+          <a:xfrm>
+            <a:off x="11420736" y="1222491"/>
+            <a:ext cx="324926" cy="324926"/>
+          </a:xfrm>
+          <a:prstGeom prst="ellipse">
+            <a:avLst/>
+          </a:prstGeom>
+          <a:ln w="22225">
+            <a:noFill/>
+          </a:ln>
+        </p:spPr>
+      </p:pic>
+      <p:pic>
+        <p:nvPicPr>
+          <p:cNvPr id="61" name="Picture Placeholder 33" descr="Music notes with solid fill">
+            <a:extLst>
+              <a:ext uri="{FF2B5EF4-FFF2-40B4-BE49-F238E27FC236}">
+                <a16:creationId xmlns:a16="http://schemas.microsoft.com/office/drawing/2014/main" id="{CD72E53F-305F-3E70-77AF-8ED3E1F1FF43}"/>
+              </a:ext>
+            </a:extLst>
+          </p:cNvPr>
+          <p:cNvPicPr>
+            <a:picLocks noChangeAspect="1"/>
+          </p:cNvPicPr>
+          <p:nvPr/>
+        </p:nvPicPr>
+        <p:blipFill>
+          <a:blip>
+            <a:extLst>
+              <a:ext uri="{96DAC541-7B7A-43D3-8B79-37D633B846F1}">
+                <asvg:svgBlip xmlns:asvg="http://schemas.microsoft.com/office/drawing/2016/SVG/main" r:embed="rId12"/>
+              </a:ext>
+            </a:extLst>
+          </a:blip>
+          <a:srcRect t="96" b="96"/>
+          <a:stretch>
+            <a:fillRect/>
+          </a:stretch>
+        </p:blipFill>
+        <p:spPr>
+          <a:xfrm>
+            <a:off x="10751095" y="1121331"/>
+            <a:ext cx="822960" cy="822960"/>
+          </a:xfrm>
+          <a:prstGeom prst="ellipse">
+            <a:avLst/>
+          </a:prstGeom>
+          <a:ln w="22225">
+            <a:noFill/>
+          </a:ln>
+        </p:spPr>
+      </p:pic>
+      <p:cxnSp>
+        <p:nvCxnSpPr>
+          <p:cNvPr id="449" name="Straight Connector 448">
+            <a:extLst>
+              <a:ext uri="{FF2B5EF4-FFF2-40B4-BE49-F238E27FC236}">
+                <a16:creationId xmlns:a16="http://schemas.microsoft.com/office/drawing/2014/main" id="{340B8317-E353-6339-47FD-6256E22A84BA}"/>
+              </a:ext>
+              <a:ext uri="{C183D7F6-B498-43B3-948B-1728B52AA6E4}">
+                <adec:decorative xmlns:adec="http://schemas.microsoft.com/office/drawing/2017/decorative" val="1"/>
+              </a:ext>
+            </a:extLst>
+          </p:cNvPr>
+          <p:cNvCxnSpPr>
+            <a:cxnSpLocks/>
+          </p:cNvCxnSpPr>
+          <p:nvPr/>
+        </p:nvCxnSpPr>
+        <p:spPr>
+          <a:xfrm>
+            <a:off x="244146" y="1602448"/>
+            <a:ext cx="2424684" cy="0"/>
+          </a:xfrm>
+          <a:prstGeom prst="line">
+            <a:avLst/>
+          </a:prstGeom>
+          <a:ln w="28575">
+            <a:gradFill>
+              <a:gsLst>
+                <a:gs pos="0">
+                  <a:schemeClr val="accent1">
+                    <a:lumMod val="60000"/>
+                    <a:lumOff val="40000"/>
+                  </a:schemeClr>
+                </a:gs>
+                <a:gs pos="100000">
+                  <a:schemeClr val="accent2">
+                    <a:lumMod val="60000"/>
+                    <a:lumOff val="40000"/>
+                  </a:schemeClr>
+                </a:gs>
+              </a:gsLst>
+              <a:lin ang="2160000" scaled="0"/>
+            </a:gradFill>
+          </a:ln>
+        </p:spPr>
+        <p:style>
+          <a:lnRef idx="1">
+            <a:schemeClr val="accent1"/>
+          </a:lnRef>
+          <a:fillRef idx="0">
+            <a:schemeClr val="accent1"/>
+          </a:fillRef>
+          <a:effectRef idx="0">
+            <a:schemeClr val="accent1"/>
+          </a:effectRef>
+          <a:fontRef idx="minor">
+            <a:schemeClr val="tx1"/>
+          </a:fontRef>
+        </p:style>
+      </p:cxnSp>
+      <p:cxnSp>
+        <p:nvCxnSpPr>
+          <p:cNvPr id="452" name="Straight Connector 451">
+            <a:extLst>
+              <a:ext uri="{FF2B5EF4-FFF2-40B4-BE49-F238E27FC236}">
+                <a16:creationId xmlns:a16="http://schemas.microsoft.com/office/drawing/2014/main" id="{00485201-EBCD-3B17-CFB3-F3E6C6091C82}"/>
+              </a:ext>
+              <a:ext uri="{C183D7F6-B498-43B3-948B-1728B52AA6E4}">
+                <adec:decorative xmlns:adec="http://schemas.microsoft.com/office/drawing/2017/decorative" val="1"/>
+              </a:ext>
+            </a:extLst>
+          </p:cNvPr>
+          <p:cNvCxnSpPr>
+            <a:cxnSpLocks/>
+          </p:cNvCxnSpPr>
+          <p:nvPr/>
+        </p:nvCxnSpPr>
+        <p:spPr>
+          <a:xfrm>
+            <a:off x="3661521" y="3492411"/>
+            <a:ext cx="2006589" cy="0"/>
+          </a:xfrm>
+          <a:prstGeom prst="line">
+            <a:avLst/>
+          </a:prstGeom>
+          <a:ln w="28575">
+            <a:gradFill>
+              <a:gsLst>
+                <a:gs pos="0">
+                  <a:schemeClr val="accent1">
+                    <a:lumMod val="60000"/>
+                    <a:lumOff val="40000"/>
+                  </a:schemeClr>
+                </a:gs>
+                <a:gs pos="100000">
+                  <a:schemeClr val="accent2">
+                    <a:lumMod val="60000"/>
+                    <a:lumOff val="40000"/>
+                  </a:schemeClr>
+                </a:gs>
+              </a:gsLst>
+              <a:lin ang="2160000" scaled="0"/>
+            </a:gradFill>
+          </a:ln>
+        </p:spPr>
+        <p:style>
+          <a:lnRef idx="1">
+            <a:schemeClr val="accent1"/>
+          </a:lnRef>
+          <a:fillRef idx="0">
+            <a:schemeClr val="accent1"/>
+          </a:fillRef>
+          <a:effectRef idx="0">
+            <a:schemeClr val="accent1"/>
+          </a:effectRef>
+          <a:fontRef idx="minor">
+            <a:schemeClr val="tx1"/>
+          </a:fontRef>
+        </p:style>
+      </p:cxnSp>
+      <p:cxnSp>
+        <p:nvCxnSpPr>
+          <p:cNvPr id="454" name="Straight Connector 453">
+            <a:extLst>
+              <a:ext uri="{FF2B5EF4-FFF2-40B4-BE49-F238E27FC236}">
+                <a16:creationId xmlns:a16="http://schemas.microsoft.com/office/drawing/2014/main" id="{477D483A-1F7C-6EE9-5C3F-35F88011515B}"/>
+              </a:ext>
+              <a:ext uri="{C183D7F6-B498-43B3-948B-1728B52AA6E4}">
+                <adec:decorative xmlns:adec="http://schemas.microsoft.com/office/drawing/2017/decorative" val="1"/>
+              </a:ext>
+            </a:extLst>
+          </p:cNvPr>
+          <p:cNvCxnSpPr>
+            <a:cxnSpLocks/>
+          </p:cNvCxnSpPr>
+          <p:nvPr/>
+        </p:nvCxnSpPr>
+        <p:spPr>
+          <a:xfrm>
+            <a:off x="214753" y="4958435"/>
+            <a:ext cx="2328476" cy="0"/>
+          </a:xfrm>
+          <a:prstGeom prst="line">
+            <a:avLst/>
+          </a:prstGeom>
+          <a:ln w="28575">
+            <a:gradFill>
+              <a:gsLst>
+                <a:gs pos="0">
+                  <a:schemeClr val="accent1">
+                    <a:lumMod val="60000"/>
+                    <a:lumOff val="40000"/>
+                  </a:schemeClr>
+                </a:gs>
+                <a:gs pos="100000">
+                  <a:schemeClr val="accent2">
+                    <a:lumMod val="60000"/>
+                    <a:lumOff val="40000"/>
+                  </a:schemeClr>
+                </a:gs>
+              </a:gsLst>
+              <a:lin ang="2160000" scaled="0"/>
+            </a:gradFill>
+          </a:ln>
+        </p:spPr>
+        <p:style>
+          <a:lnRef idx="1">
+            <a:schemeClr val="accent1"/>
+          </a:lnRef>
+          <a:fillRef idx="0">
+            <a:schemeClr val="accent1"/>
+          </a:fillRef>
+          <a:effectRef idx="0">
+            <a:schemeClr val="accent1"/>
+          </a:effectRef>
+          <a:fontRef idx="minor">
+            <a:schemeClr val="tx1"/>
+          </a:fontRef>
+        </p:style>
+      </p:cxnSp>
+      <p:cxnSp>
+        <p:nvCxnSpPr>
+          <p:cNvPr id="457" name="Straight Connector 456">
+            <a:extLst>
+              <a:ext uri="{FF2B5EF4-FFF2-40B4-BE49-F238E27FC236}">
+                <a16:creationId xmlns:a16="http://schemas.microsoft.com/office/drawing/2014/main" id="{E0381664-FDE6-1C61-B792-B04EF1F062B8}"/>
+              </a:ext>
+              <a:ext uri="{C183D7F6-B498-43B3-948B-1728B52AA6E4}">
+                <adec:decorative xmlns:adec="http://schemas.microsoft.com/office/drawing/2017/decorative" val="1"/>
+              </a:ext>
+            </a:extLst>
+          </p:cNvPr>
+          <p:cNvCxnSpPr>
+            <a:cxnSpLocks/>
+          </p:cNvCxnSpPr>
+          <p:nvPr/>
+        </p:nvCxnSpPr>
+        <p:spPr>
+          <a:xfrm>
+            <a:off x="7415361" y="1467713"/>
+            <a:ext cx="1677610" cy="0"/>
+          </a:xfrm>
+          <a:prstGeom prst="line">
+            <a:avLst/>
+          </a:prstGeom>
+          <a:ln w="28575">
+            <a:gradFill>
+              <a:gsLst>
+                <a:gs pos="0">
+                  <a:schemeClr val="accent1">
+                    <a:lumMod val="60000"/>
+                    <a:lumOff val="40000"/>
+                  </a:schemeClr>
+                </a:gs>
+                <a:gs pos="100000">
+                  <a:schemeClr val="accent2">
+                    <a:lumMod val="60000"/>
+                    <a:lumOff val="40000"/>
+                  </a:schemeClr>
+                </a:gs>
+              </a:gsLst>
+              <a:lin ang="2160000" scaled="0"/>
+            </a:gradFill>
+          </a:ln>
+        </p:spPr>
+        <p:style>
+          <a:lnRef idx="1">
+            <a:schemeClr val="accent1"/>
+          </a:lnRef>
+          <a:fillRef idx="0">
+            <a:schemeClr val="accent1"/>
+          </a:fillRef>
+          <a:effectRef idx="0">
+            <a:schemeClr val="accent1"/>
+          </a:effectRef>
+          <a:fontRef idx="minor">
+            <a:schemeClr val="tx1"/>
+          </a:fontRef>
+        </p:style>
+      </p:cxnSp>
+      <p:cxnSp>
+        <p:nvCxnSpPr>
+          <p:cNvPr id="459" name="Straight Connector 458">
+            <a:extLst>
+              <a:ext uri="{FF2B5EF4-FFF2-40B4-BE49-F238E27FC236}">
+                <a16:creationId xmlns:a16="http://schemas.microsoft.com/office/drawing/2014/main" id="{774EA625-3F51-B2CE-1BAD-BD842A45F343}"/>
+              </a:ext>
+              <a:ext uri="{C183D7F6-B498-43B3-948B-1728B52AA6E4}">
+                <adec:decorative xmlns:adec="http://schemas.microsoft.com/office/drawing/2017/decorative" val="1"/>
+              </a:ext>
+            </a:extLst>
+          </p:cNvPr>
+          <p:cNvCxnSpPr>
+            <a:cxnSpLocks/>
+          </p:cNvCxnSpPr>
+          <p:nvPr/>
+        </p:nvCxnSpPr>
+        <p:spPr>
+          <a:xfrm>
+            <a:off x="8175915" y="4774482"/>
+            <a:ext cx="2115155" cy="0"/>
+          </a:xfrm>
+          <a:prstGeom prst="line">
+            <a:avLst/>
+          </a:prstGeom>
+          <a:ln w="28575">
+            <a:gradFill>
+              <a:gsLst>
+                <a:gs pos="0">
+                  <a:schemeClr val="accent1">
+                    <a:lumMod val="60000"/>
+                    <a:lumOff val="40000"/>
+                  </a:schemeClr>
+                </a:gs>
+                <a:gs pos="100000">
+                  <a:schemeClr val="accent2">
+                    <a:lumMod val="60000"/>
+                    <a:lumOff val="40000"/>
+                  </a:schemeClr>
+                </a:gs>
+              </a:gsLst>
+              <a:lin ang="2160000" scaled="0"/>
+            </a:gradFill>
+          </a:ln>
+        </p:spPr>
+        <p:style>
+          <a:lnRef idx="1">
+            <a:schemeClr val="accent1"/>
+          </a:lnRef>
+          <a:fillRef idx="0">
+            <a:schemeClr val="accent1"/>
+          </a:fillRef>
+          <a:effectRef idx="0">
+            <a:schemeClr val="accent1"/>
+          </a:effectRef>
+          <a:fontRef idx="minor">
+            <a:schemeClr val="tx1"/>
+          </a:fontRef>
+        </p:style>
+      </p:cxnSp>
+      <p:pic>
+        <p:nvPicPr>
+          <p:cNvPr id="461" name="Picture Placeholder 33" descr="Question mark with solid fill">
+            <a:extLst>
+              <a:ext uri="{FF2B5EF4-FFF2-40B4-BE49-F238E27FC236}">
+                <a16:creationId xmlns:a16="http://schemas.microsoft.com/office/drawing/2014/main" id="{DD83DCFC-C0FE-2E61-1458-006EEE933838}"/>
+              </a:ext>
+            </a:extLst>
+          </p:cNvPr>
+          <p:cNvPicPr>
+            <a:picLocks noChangeAspect="1"/>
+          </p:cNvPicPr>
+          <p:nvPr/>
+        </p:nvPicPr>
+        <p:blipFill>
+          <a:blip>
+            <a:extLst>
+              <a:ext uri="{96DAC541-7B7A-43D3-8B79-37D633B846F1}">
+                <asvg:svgBlip xmlns:asvg="http://schemas.microsoft.com/office/drawing/2016/SVG/main" r:embed="rId13"/>
+              </a:ext>
+            </a:extLst>
+          </a:blip>
+          <a:srcRect/>
+          <a:stretch/>
+        </p:blipFill>
+        <p:spPr>
+          <a:xfrm>
+            <a:off x="902519" y="2957481"/>
+            <a:ext cx="1520321" cy="1520321"/>
+          </a:xfrm>
+          <a:prstGeom prst="ellipse">
+            <a:avLst/>
+          </a:prstGeom>
+          <a:ln w="22225">
+            <a:noFill/>
+          </a:ln>
+        </p:spPr>
+      </p:pic>
+      <p:pic>
+        <p:nvPicPr>
+          <p:cNvPr id="462" name="Picture Placeholder 33" descr="Question mark with solid fill">
+            <a:extLst>
+              <a:ext uri="{FF2B5EF4-FFF2-40B4-BE49-F238E27FC236}">
+                <a16:creationId xmlns:a16="http://schemas.microsoft.com/office/drawing/2014/main" id="{FD98C290-CD08-D4C8-C929-10AFCAE392E7}"/>
+              </a:ext>
+            </a:extLst>
+          </p:cNvPr>
+          <p:cNvPicPr>
+            <a:picLocks noChangeAspect="1"/>
+          </p:cNvPicPr>
+          <p:nvPr/>
+        </p:nvPicPr>
+        <p:blipFill>
+          <a:blip>
+            <a:extLst>
+              <a:ext uri="{96DAC541-7B7A-43D3-8B79-37D633B846F1}">
+                <asvg:svgBlip xmlns:asvg="http://schemas.microsoft.com/office/drawing/2016/SVG/main" r:embed="rId13"/>
+              </a:ext>
+            </a:extLst>
+          </a:blip>
+          <a:srcRect/>
+          <a:stretch/>
+        </p:blipFill>
+        <p:spPr>
+          <a:xfrm>
+            <a:off x="4607871" y="1235696"/>
+            <a:ext cx="1520321" cy="1520321"/>
+          </a:xfrm>
+          <a:prstGeom prst="ellipse">
+            <a:avLst/>
+          </a:prstGeom>
+          <a:ln w="22225">
+            <a:noFill/>
+          </a:ln>
+        </p:spPr>
+      </p:pic>
+      <p:pic>
+        <p:nvPicPr>
+          <p:cNvPr id="463" name="Picture Placeholder 33" descr="Question mark with solid fill">
+            <a:extLst>
+              <a:ext uri="{FF2B5EF4-FFF2-40B4-BE49-F238E27FC236}">
+                <a16:creationId xmlns:a16="http://schemas.microsoft.com/office/drawing/2014/main" id="{627744F8-D50D-AA72-F5E3-C00E4FC17768}"/>
+              </a:ext>
+            </a:extLst>
+          </p:cNvPr>
+          <p:cNvPicPr>
+            <a:picLocks noChangeAspect="1"/>
+          </p:cNvPicPr>
+          <p:nvPr/>
+        </p:nvPicPr>
+        <p:blipFill>
+          <a:blip>
+            <a:extLst>
+              <a:ext uri="{96DAC541-7B7A-43D3-8B79-37D633B846F1}">
+                <asvg:svgBlip xmlns:asvg="http://schemas.microsoft.com/office/drawing/2016/SVG/main" r:embed="rId13"/>
+              </a:ext>
+            </a:extLst>
+          </a:blip>
+          <a:srcRect/>
+          <a:stretch/>
+        </p:blipFill>
+        <p:spPr>
+          <a:xfrm>
+            <a:off x="4449951" y="5071506"/>
+            <a:ext cx="1520321" cy="1520321"/>
+          </a:xfrm>
+          <a:prstGeom prst="ellipse">
+            <a:avLst/>
+          </a:prstGeom>
+          <a:ln w="22225">
+            <a:noFill/>
+          </a:ln>
+        </p:spPr>
+      </p:pic>
+      <p:pic>
+        <p:nvPicPr>
+          <p:cNvPr id="464" name="Picture Placeholder 33" descr="Question mark with solid fill">
+            <a:extLst>
+              <a:ext uri="{FF2B5EF4-FFF2-40B4-BE49-F238E27FC236}">
+                <a16:creationId xmlns:a16="http://schemas.microsoft.com/office/drawing/2014/main" id="{09211515-5B3C-0F2A-AC32-B033439D40A7}"/>
+              </a:ext>
+            </a:extLst>
+          </p:cNvPr>
+          <p:cNvPicPr>
+            <a:picLocks noChangeAspect="1"/>
+          </p:cNvPicPr>
+          <p:nvPr/>
+        </p:nvPicPr>
+        <p:blipFill>
+          <a:blip>
+            <a:extLst>
+              <a:ext uri="{96DAC541-7B7A-43D3-8B79-37D633B846F1}">
+                <asvg:svgBlip xmlns:asvg="http://schemas.microsoft.com/office/drawing/2016/SVG/main" r:embed="rId13"/>
+              </a:ext>
+            </a:extLst>
+          </a:blip>
+          <a:srcRect/>
+          <a:stretch/>
+        </p:blipFill>
+        <p:spPr>
+          <a:xfrm>
+            <a:off x="8650799" y="1944291"/>
+            <a:ext cx="1520321" cy="1520321"/>
+          </a:xfrm>
+          <a:prstGeom prst="ellipse">
+            <a:avLst/>
+          </a:prstGeom>
+          <a:ln w="22225">
+            <a:noFill/>
+          </a:ln>
+        </p:spPr>
+      </p:pic>
     </p:spTree>
     <p:extLst>
       <p:ext uri="{BB962C8B-B14F-4D97-AF65-F5344CB8AC3E}">
@@ -10536,15 +10843,6 @@
 </file>
 
 <file path=customXml/item1.xml><?xml version="1.0" encoding="utf-8"?>
-<?mso-contentType ?>
-<FormTemplates xmlns="http://schemas.microsoft.com/sharepoint/v3/contenttype/forms">
-  <Display>DocumentLibraryForm</Display>
-  <Edit>DocumentLibraryForm</Edit>
-  <New>DocumentLibraryForm</New>
-</FormTemplates>
-</file>
-
-<file path=customXml/item2.xml><?xml version="1.0" encoding="utf-8"?>
 <ct:contentTypeSchema xmlns:ct="http://schemas.microsoft.com/office/2006/metadata/contentType" xmlns:ma="http://schemas.microsoft.com/office/2006/metadata/properties/metaAttributes" ct:_="" ma:_="" ma:contentTypeName="Document" ma:contentTypeID="0x01010079F111ED35F8CC479449609E8A0923A6" ma:contentTypeVersion="27" ma:contentTypeDescription="Create a new document." ma:contentTypeScope="" ma:versionID="c6f9a84f66a9c8b9a21755b9ffafb945">
   <xsd:schema xmlns:xsd="http://www.w3.org/2001/XMLSchema" xmlns:xs="http://www.w3.org/2001/XMLSchema" xmlns:p="http://schemas.microsoft.com/office/2006/metadata/properties" xmlns:ns1="http://schemas.microsoft.com/sharepoint/v3" xmlns:ns2="71af3243-3dd4-4a8d-8c0d-dd76da1f02a5" xmlns:ns3="16c05727-aa75-4e4a-9b5f-8a80a1165891" xmlns:ns4="230e9df3-be65-4c73-a93b-d1236ebd677e" targetNamespace="http://schemas.microsoft.com/office/2006/metadata/properties" ma:root="true" ma:fieldsID="27df39e3e7036dff54f89ddd5805ce72" ns1:_="" ns2:_="" ns3:_="" ns4:_="">
     <xsd:import namespace="http://schemas.microsoft.com/sharepoint/v3"/>
@@ -10850,6 +11148,15 @@
 </ct:contentTypeSchema>
 </file>
 
+<file path=customXml/item2.xml><?xml version="1.0" encoding="utf-8"?>
+<?mso-contentType ?>
+<FormTemplates xmlns="http://schemas.microsoft.com/sharepoint/v3/contenttype/forms">
+  <Display>DocumentLibraryForm</Display>
+  <Edit>DocumentLibraryForm</Edit>
+  <New>DocumentLibraryForm</New>
+</FormTemplates>
+</file>
+
 <file path=customXml/item3.xml><?xml version="1.0" encoding="utf-8"?>
 <p:properties xmlns:p="http://schemas.microsoft.com/office/2006/metadata/properties" xmlns:xsi="http://www.w3.org/2001/XMLSchema-instance" xmlns:pc="http://schemas.microsoft.com/office/infopath/2007/PartnerControls">
   <documentManagement>
@@ -10871,14 +11178,6 @@
 </file>
 
 <file path=customXml/itemProps1.xml><?xml version="1.0" encoding="utf-8"?>
-<ds:datastoreItem xmlns:ds="http://schemas.openxmlformats.org/officeDocument/2006/customXml" ds:itemID="{836CDCFB-1550-438B-8C76-AE76FBCD3159}">
-  <ds:schemaRefs>
-    <ds:schemaRef ds:uri="http://schemas.microsoft.com/sharepoint/v3/contenttype/forms"/>
-  </ds:schemaRefs>
-</ds:datastoreItem>
-</file>
-
-<file path=customXml/itemProps2.xml><?xml version="1.0" encoding="utf-8"?>
 <ds:datastoreItem xmlns:ds="http://schemas.openxmlformats.org/officeDocument/2006/customXml" ds:itemID="{B0A68F62-F174-4677-B07F-B071C4E6C2C1}">
   <ds:schemaRefs>
     <ds:schemaRef ds:uri="http://schemas.microsoft.com/office/2006/metadata/contentType"/>
@@ -10899,6 +11198,14 @@
 </ds:datastoreItem>
 </file>
 
+<file path=customXml/itemProps2.xml><?xml version="1.0" encoding="utf-8"?>
+<ds:datastoreItem xmlns:ds="http://schemas.openxmlformats.org/officeDocument/2006/customXml" ds:itemID="{836CDCFB-1550-438B-8C76-AE76FBCD3159}">
+  <ds:schemaRefs>
+    <ds:schemaRef ds:uri="http://schemas.microsoft.com/sharepoint/v3/contenttype/forms"/>
+  </ds:schemaRefs>
+</ds:datastoreItem>
+</file>
+
 <file path=customXml/itemProps3.xml><?xml version="1.0" encoding="utf-8"?>
 <ds:datastoreItem xmlns:ds="http://schemas.openxmlformats.org/officeDocument/2006/customXml" ds:itemID="{A0FF118E-0388-4333-9D85-CA81E2C8D164}">
   <ds:schemaRefs>

--- a/IRP Poster.pptx
+++ b/IRP Poster.pptx
@@ -133,6 +133,981 @@
 </p:presentation>
 </file>
 
+<file path=ppt/charts/chart1.xml><?xml version="1.0" encoding="utf-8"?>
+<c:chartSpace xmlns:c="http://schemas.openxmlformats.org/drawingml/2006/chart" xmlns:a="http://schemas.openxmlformats.org/drawingml/2006/main" xmlns:r="http://schemas.openxmlformats.org/officeDocument/2006/relationships" xmlns:c16r2="http://schemas.microsoft.com/office/drawing/2015/06/chart">
+  <c:date1904 val="0"/>
+  <c:lang val="en-US"/>
+  <c:roundedCorners val="0"/>
+  <mc:AlternateContent xmlns:mc="http://schemas.openxmlformats.org/markup-compatibility/2006">
+    <mc:Choice xmlns:c14="http://schemas.microsoft.com/office/drawing/2007/8/2/chart" Requires="c14">
+      <c14:style val="102"/>
+    </mc:Choice>
+    <mc:Fallback>
+      <c:style val="2"/>
+    </mc:Fallback>
+  </mc:AlternateContent>
+  <c:chart>
+    <c:autoTitleDeleted val="1"/>
+    <c:plotArea>
+      <c:layout/>
+      <c:barChart>
+        <c:barDir val="col"/>
+        <c:grouping val="clustered"/>
+        <c:varyColors val="0"/>
+        <c:ser>
+          <c:idx val="0"/>
+          <c:order val="0"/>
+          <c:tx>
+            <c:strRef>
+              <c:f>Sheet1!$B$1</c:f>
+              <c:strCache>
+                <c:ptCount val="1"/>
+                <c:pt idx="0">
+                  <c:v>Series 1</c:v>
+                </c:pt>
+              </c:strCache>
+            </c:strRef>
+          </c:tx>
+          <c:spPr>
+            <a:solidFill>
+              <a:schemeClr val="accent1"/>
+            </a:solidFill>
+            <a:ln>
+              <a:noFill/>
+            </a:ln>
+            <a:effectLst/>
+          </c:spPr>
+          <c:invertIfNegative val="0"/>
+          <c:cat>
+            <c:strRef>
+              <c:f>Sheet1!$A$2:$A$5</c:f>
+              <c:strCache>
+                <c:ptCount val="4"/>
+                <c:pt idx="0">
+                  <c:v>Category 1</c:v>
+                </c:pt>
+                <c:pt idx="1">
+                  <c:v>Category 2</c:v>
+                </c:pt>
+                <c:pt idx="2">
+                  <c:v>Category 3</c:v>
+                </c:pt>
+                <c:pt idx="3">
+                  <c:v>Category 4</c:v>
+                </c:pt>
+              </c:strCache>
+            </c:strRef>
+          </c:cat>
+          <c:val>
+            <c:numRef>
+              <c:f>Sheet1!$B$2:$B$5</c:f>
+              <c:numCache>
+                <c:formatCode>General</c:formatCode>
+                <c:ptCount val="4"/>
+                <c:pt idx="0">
+                  <c:v>4.3</c:v>
+                </c:pt>
+                <c:pt idx="1">
+                  <c:v>2.5</c:v>
+                </c:pt>
+                <c:pt idx="2">
+                  <c:v>3.5</c:v>
+                </c:pt>
+                <c:pt idx="3">
+                  <c:v>4.5</c:v>
+                </c:pt>
+              </c:numCache>
+            </c:numRef>
+          </c:val>
+          <c:extLst>
+            <c:ext xmlns:c16="http://schemas.microsoft.com/office/drawing/2014/chart" uri="{C3380CC4-5D6E-409C-BE32-E72D297353CC}">
+              <c16:uniqueId val="{00000000-C83A-4EB6-964E-D29AFAC04499}"/>
+            </c:ext>
+          </c:extLst>
+        </c:ser>
+        <c:ser>
+          <c:idx val="1"/>
+          <c:order val="1"/>
+          <c:tx>
+            <c:strRef>
+              <c:f>Sheet1!$C$1</c:f>
+              <c:strCache>
+                <c:ptCount val="1"/>
+                <c:pt idx="0">
+                  <c:v>Series 2</c:v>
+                </c:pt>
+              </c:strCache>
+            </c:strRef>
+          </c:tx>
+          <c:spPr>
+            <a:solidFill>
+              <a:schemeClr val="accent2"/>
+            </a:solidFill>
+            <a:ln>
+              <a:noFill/>
+            </a:ln>
+            <a:effectLst/>
+          </c:spPr>
+          <c:invertIfNegative val="0"/>
+          <c:cat>
+            <c:strRef>
+              <c:f>Sheet1!$A$2:$A$5</c:f>
+              <c:strCache>
+                <c:ptCount val="4"/>
+                <c:pt idx="0">
+                  <c:v>Category 1</c:v>
+                </c:pt>
+                <c:pt idx="1">
+                  <c:v>Category 2</c:v>
+                </c:pt>
+                <c:pt idx="2">
+                  <c:v>Category 3</c:v>
+                </c:pt>
+                <c:pt idx="3">
+                  <c:v>Category 4</c:v>
+                </c:pt>
+              </c:strCache>
+            </c:strRef>
+          </c:cat>
+          <c:val>
+            <c:numRef>
+              <c:f>Sheet1!$C$2:$C$5</c:f>
+              <c:numCache>
+                <c:formatCode>General</c:formatCode>
+                <c:ptCount val="4"/>
+                <c:pt idx="0">
+                  <c:v>2.4</c:v>
+                </c:pt>
+                <c:pt idx="1">
+                  <c:v>4.4000000000000004</c:v>
+                </c:pt>
+                <c:pt idx="2">
+                  <c:v>1.8</c:v>
+                </c:pt>
+                <c:pt idx="3">
+                  <c:v>2.8</c:v>
+                </c:pt>
+              </c:numCache>
+            </c:numRef>
+          </c:val>
+          <c:extLst>
+            <c:ext xmlns:c16="http://schemas.microsoft.com/office/drawing/2014/chart" uri="{C3380CC4-5D6E-409C-BE32-E72D297353CC}">
+              <c16:uniqueId val="{00000001-C83A-4EB6-964E-D29AFAC04499}"/>
+            </c:ext>
+          </c:extLst>
+        </c:ser>
+        <c:ser>
+          <c:idx val="2"/>
+          <c:order val="2"/>
+          <c:tx>
+            <c:strRef>
+              <c:f>Sheet1!$D$1</c:f>
+              <c:strCache>
+                <c:ptCount val="1"/>
+                <c:pt idx="0">
+                  <c:v>Series 3</c:v>
+                </c:pt>
+              </c:strCache>
+            </c:strRef>
+          </c:tx>
+          <c:spPr>
+            <a:solidFill>
+              <a:schemeClr val="accent3"/>
+            </a:solidFill>
+            <a:ln>
+              <a:noFill/>
+            </a:ln>
+            <a:effectLst/>
+          </c:spPr>
+          <c:invertIfNegative val="0"/>
+          <c:cat>
+            <c:strRef>
+              <c:f>Sheet1!$A$2:$A$5</c:f>
+              <c:strCache>
+                <c:ptCount val="4"/>
+                <c:pt idx="0">
+                  <c:v>Category 1</c:v>
+                </c:pt>
+                <c:pt idx="1">
+                  <c:v>Category 2</c:v>
+                </c:pt>
+                <c:pt idx="2">
+                  <c:v>Category 3</c:v>
+                </c:pt>
+                <c:pt idx="3">
+                  <c:v>Category 4</c:v>
+                </c:pt>
+              </c:strCache>
+            </c:strRef>
+          </c:cat>
+          <c:val>
+            <c:numRef>
+              <c:f>Sheet1!$D$2:$D$5</c:f>
+              <c:numCache>
+                <c:formatCode>General</c:formatCode>
+                <c:ptCount val="4"/>
+                <c:pt idx="0">
+                  <c:v>2</c:v>
+                </c:pt>
+                <c:pt idx="1">
+                  <c:v>2</c:v>
+                </c:pt>
+                <c:pt idx="2">
+                  <c:v>3</c:v>
+                </c:pt>
+                <c:pt idx="3">
+                  <c:v>5</c:v>
+                </c:pt>
+              </c:numCache>
+            </c:numRef>
+          </c:val>
+          <c:extLst>
+            <c:ext xmlns:c16="http://schemas.microsoft.com/office/drawing/2014/chart" uri="{C3380CC4-5D6E-409C-BE32-E72D297353CC}">
+              <c16:uniqueId val="{00000002-C83A-4EB6-964E-D29AFAC04499}"/>
+            </c:ext>
+          </c:extLst>
+        </c:ser>
+        <c:dLbls>
+          <c:showLegendKey val="0"/>
+          <c:showVal val="0"/>
+          <c:showCatName val="0"/>
+          <c:showSerName val="0"/>
+          <c:showPercent val="0"/>
+          <c:showBubbleSize val="0"/>
+        </c:dLbls>
+        <c:gapWidth val="219"/>
+        <c:overlap val="-27"/>
+        <c:axId val="1278353743"/>
+        <c:axId val="1278367183"/>
+      </c:barChart>
+      <c:catAx>
+        <c:axId val="1278353743"/>
+        <c:scaling>
+          <c:orientation val="minMax"/>
+        </c:scaling>
+        <c:delete val="0"/>
+        <c:axPos val="b"/>
+        <c:numFmt formatCode="General" sourceLinked="1"/>
+        <c:majorTickMark val="none"/>
+        <c:minorTickMark val="none"/>
+        <c:tickLblPos val="nextTo"/>
+        <c:spPr>
+          <a:noFill/>
+          <a:ln w="9525" cap="flat" cmpd="sng" algn="ctr">
+            <a:solidFill>
+              <a:schemeClr val="tx1">
+                <a:lumMod val="15000"/>
+                <a:lumOff val="85000"/>
+              </a:schemeClr>
+            </a:solidFill>
+            <a:round/>
+          </a:ln>
+          <a:effectLst/>
+        </c:spPr>
+        <c:txPr>
+          <a:bodyPr rot="-60000000" spcFirstLastPara="1" vertOverflow="ellipsis" vert="horz" wrap="square" anchor="ctr" anchorCtr="1"/>
+          <a:lstStyle/>
+          <a:p>
+            <a:pPr>
+              <a:defRPr sz="800" b="0" i="0" u="none" strike="noStrike" kern="1200" baseline="0">
+                <a:ln>
+                  <a:noFill/>
+                </a:ln>
+                <a:solidFill>
+                  <a:schemeClr val="tx1">
+                    <a:lumMod val="65000"/>
+                    <a:lumOff val="35000"/>
+                  </a:schemeClr>
+                </a:solidFill>
+                <a:latin typeface="+mn-lt"/>
+                <a:ea typeface="+mn-ea"/>
+                <a:cs typeface="+mn-cs"/>
+              </a:defRPr>
+            </a:pPr>
+            <a:endParaRPr lang="en-US"/>
+          </a:p>
+        </c:txPr>
+        <c:crossAx val="1278367183"/>
+        <c:crosses val="autoZero"/>
+        <c:auto val="1"/>
+        <c:lblAlgn val="ctr"/>
+        <c:lblOffset val="100"/>
+        <c:noMultiLvlLbl val="0"/>
+      </c:catAx>
+      <c:valAx>
+        <c:axId val="1278367183"/>
+        <c:scaling>
+          <c:orientation val="minMax"/>
+        </c:scaling>
+        <c:delete val="0"/>
+        <c:axPos val="l"/>
+        <c:majorGridlines>
+          <c:spPr>
+            <a:ln w="9525" cap="flat" cmpd="sng" algn="ctr">
+              <a:solidFill>
+                <a:schemeClr val="tx1">
+                  <a:lumMod val="15000"/>
+                  <a:lumOff val="85000"/>
+                </a:schemeClr>
+              </a:solidFill>
+              <a:round/>
+            </a:ln>
+            <a:effectLst/>
+          </c:spPr>
+        </c:majorGridlines>
+        <c:numFmt formatCode="General" sourceLinked="1"/>
+        <c:majorTickMark val="none"/>
+        <c:minorTickMark val="none"/>
+        <c:tickLblPos val="nextTo"/>
+        <c:spPr>
+          <a:noFill/>
+          <a:ln>
+            <a:noFill/>
+          </a:ln>
+          <a:effectLst/>
+        </c:spPr>
+        <c:txPr>
+          <a:bodyPr rot="-60000000" spcFirstLastPara="1" vertOverflow="ellipsis" vert="horz" wrap="square" anchor="ctr" anchorCtr="1"/>
+          <a:lstStyle/>
+          <a:p>
+            <a:pPr>
+              <a:defRPr sz="1197" b="0" i="0" u="none" strike="noStrike" kern="1200" baseline="0">
+                <a:solidFill>
+                  <a:schemeClr val="tx1">
+                    <a:lumMod val="65000"/>
+                    <a:lumOff val="35000"/>
+                  </a:schemeClr>
+                </a:solidFill>
+                <a:latin typeface="+mn-lt"/>
+                <a:ea typeface="+mn-ea"/>
+                <a:cs typeface="+mn-cs"/>
+              </a:defRPr>
+            </a:pPr>
+            <a:endParaRPr lang="en-US"/>
+          </a:p>
+        </c:txPr>
+        <c:crossAx val="1278353743"/>
+        <c:crosses val="autoZero"/>
+        <c:crossBetween val="between"/>
+      </c:valAx>
+      <c:spPr>
+        <a:noFill/>
+        <a:ln>
+          <a:noFill/>
+        </a:ln>
+        <a:effectLst/>
+      </c:spPr>
+    </c:plotArea>
+    <c:legend>
+      <c:legendPos val="b"/>
+      <c:overlay val="0"/>
+      <c:spPr>
+        <a:noFill/>
+        <a:ln>
+          <a:noFill/>
+        </a:ln>
+        <a:effectLst/>
+      </c:spPr>
+      <c:txPr>
+        <a:bodyPr rot="0" spcFirstLastPara="1" vertOverflow="ellipsis" vert="horz" wrap="square" anchor="ctr" anchorCtr="1"/>
+        <a:lstStyle/>
+        <a:p>
+          <a:pPr>
+            <a:defRPr sz="800" b="0" i="0" u="none" strike="noStrike" kern="1200" baseline="0">
+              <a:solidFill>
+                <a:schemeClr val="tx1">
+                  <a:lumMod val="65000"/>
+                  <a:lumOff val="35000"/>
+                </a:schemeClr>
+              </a:solidFill>
+              <a:latin typeface="+mn-lt"/>
+              <a:ea typeface="+mn-ea"/>
+              <a:cs typeface="+mn-cs"/>
+            </a:defRPr>
+          </a:pPr>
+          <a:endParaRPr lang="en-US"/>
+        </a:p>
+      </c:txPr>
+    </c:legend>
+    <c:plotVisOnly val="1"/>
+    <c:dispBlanksAs val="gap"/>
+    <c:showDLblsOverMax val="0"/>
+    <c:extLst>
+      <c:ext xmlns:c16r3="http://schemas.microsoft.com/office/drawing/2017/03/chart" uri="{56B9EC1D-385E-4148-901F-78D8002777C0}">
+        <c16r3:dataDisplayOptions16>
+          <c16r3:dispNaAsBlank val="1"/>
+        </c16r3:dataDisplayOptions16>
+      </c:ext>
+    </c:extLst>
+  </c:chart>
+  <c:spPr>
+    <a:solidFill>
+      <a:schemeClr val="tx1"/>
+    </a:solidFill>
+    <a:ln>
+      <a:noFill/>
+    </a:ln>
+    <a:effectLst/>
+  </c:spPr>
+  <c:txPr>
+    <a:bodyPr/>
+    <a:lstStyle/>
+    <a:p>
+      <a:pPr>
+        <a:defRPr/>
+      </a:pPr>
+      <a:endParaRPr lang="en-US"/>
+    </a:p>
+  </c:txPr>
+  <c:externalData r:id="rId3">
+    <c:autoUpdate val="0"/>
+  </c:externalData>
+</c:chartSpace>
+</file>
+
+<file path=ppt/charts/colors1.xml><?xml version="1.0" encoding="utf-8"?>
+<cs:colorStyle xmlns:cs="http://schemas.microsoft.com/office/drawing/2012/chartStyle" xmlns:a="http://schemas.openxmlformats.org/drawingml/2006/main" meth="cycle" id="10">
+  <a:schemeClr val="accent1"/>
+  <a:schemeClr val="accent2"/>
+  <a:schemeClr val="accent3"/>
+  <a:schemeClr val="accent4"/>
+  <a:schemeClr val="accent5"/>
+  <a:schemeClr val="accent6"/>
+  <cs:variation/>
+  <cs:variation>
+    <a:lumMod val="60000"/>
+  </cs:variation>
+  <cs:variation>
+    <a:lumMod val="80000"/>
+    <a:lumOff val="20000"/>
+  </cs:variation>
+  <cs:variation>
+    <a:lumMod val="80000"/>
+  </cs:variation>
+  <cs:variation>
+    <a:lumMod val="60000"/>
+    <a:lumOff val="40000"/>
+  </cs:variation>
+  <cs:variation>
+    <a:lumMod val="50000"/>
+  </cs:variation>
+  <cs:variation>
+    <a:lumMod val="70000"/>
+    <a:lumOff val="30000"/>
+  </cs:variation>
+  <cs:variation>
+    <a:lumMod val="70000"/>
+  </cs:variation>
+  <cs:variation>
+    <a:lumMod val="50000"/>
+    <a:lumOff val="50000"/>
+  </cs:variation>
+</cs:colorStyle>
+</file>
+
+<file path=ppt/charts/style1.xml><?xml version="1.0" encoding="utf-8"?>
+<cs:chartStyle xmlns:cs="http://schemas.microsoft.com/office/drawing/2012/chartStyle" xmlns:a="http://schemas.openxmlformats.org/drawingml/2006/main" id="201">
+  <cs:axisTitle>
+    <cs:lnRef idx="0"/>
+    <cs:fillRef idx="0"/>
+    <cs:effectRef idx="0"/>
+    <cs:fontRef idx="minor">
+      <a:schemeClr val="tx1">
+        <a:lumMod val="65000"/>
+        <a:lumOff val="35000"/>
+      </a:schemeClr>
+    </cs:fontRef>
+    <cs:defRPr sz="1330" kern="1200"/>
+  </cs:axisTitle>
+  <cs:categoryAxis>
+    <cs:lnRef idx="0"/>
+    <cs:fillRef idx="0"/>
+    <cs:effectRef idx="0"/>
+    <cs:fontRef idx="minor">
+      <a:schemeClr val="tx1">
+        <a:lumMod val="65000"/>
+        <a:lumOff val="35000"/>
+      </a:schemeClr>
+    </cs:fontRef>
+    <cs:spPr>
+      <a:ln w="9525" cap="flat" cmpd="sng" algn="ctr">
+        <a:solidFill>
+          <a:schemeClr val="tx1">
+            <a:lumMod val="15000"/>
+            <a:lumOff val="85000"/>
+          </a:schemeClr>
+        </a:solidFill>
+        <a:round/>
+      </a:ln>
+    </cs:spPr>
+    <cs:defRPr sz="1197" kern="1200"/>
+  </cs:categoryAxis>
+  <cs:chartArea mods="allowNoFillOverride allowNoLineOverride">
+    <cs:lnRef idx="0"/>
+    <cs:fillRef idx="0"/>
+    <cs:effectRef idx="0"/>
+    <cs:fontRef idx="minor">
+      <a:schemeClr val="tx1"/>
+    </cs:fontRef>
+    <cs:spPr>
+      <a:solidFill>
+        <a:schemeClr val="bg1"/>
+      </a:solidFill>
+      <a:ln w="9525" cap="flat" cmpd="sng" algn="ctr">
+        <a:solidFill>
+          <a:schemeClr val="tx1">
+            <a:lumMod val="15000"/>
+            <a:lumOff val="85000"/>
+          </a:schemeClr>
+        </a:solidFill>
+        <a:round/>
+      </a:ln>
+    </cs:spPr>
+    <cs:defRPr sz="1330" kern="1200"/>
+  </cs:chartArea>
+  <cs:dataLabel>
+    <cs:lnRef idx="0"/>
+    <cs:fillRef idx="0"/>
+    <cs:effectRef idx="0"/>
+    <cs:fontRef idx="minor">
+      <a:schemeClr val="tx1">
+        <a:lumMod val="75000"/>
+        <a:lumOff val="25000"/>
+      </a:schemeClr>
+    </cs:fontRef>
+    <cs:defRPr sz="1197" kern="1200"/>
+  </cs:dataLabel>
+  <cs:dataLabelCallout>
+    <cs:lnRef idx="0"/>
+    <cs:fillRef idx="0"/>
+    <cs:effectRef idx="0"/>
+    <cs:fontRef idx="minor">
+      <a:schemeClr val="dk1">
+        <a:lumMod val="65000"/>
+        <a:lumOff val="35000"/>
+      </a:schemeClr>
+    </cs:fontRef>
+    <cs:spPr>
+      <a:solidFill>
+        <a:schemeClr val="lt1"/>
+      </a:solidFill>
+      <a:ln>
+        <a:solidFill>
+          <a:schemeClr val="dk1">
+            <a:lumMod val="25000"/>
+            <a:lumOff val="75000"/>
+          </a:schemeClr>
+        </a:solidFill>
+      </a:ln>
+    </cs:spPr>
+    <cs:defRPr sz="1197" kern="1200"/>
+    <cs:bodyPr rot="0" spcFirstLastPara="1" vertOverflow="clip" horzOverflow="clip" vert="horz" wrap="square" lIns="36576" tIns="18288" rIns="36576" bIns="18288" anchor="ctr" anchorCtr="1">
+      <a:spAutoFit/>
+    </cs:bodyPr>
+  </cs:dataLabelCallout>
+  <cs:dataPoint>
+    <cs:lnRef idx="0"/>
+    <cs:fillRef idx="1">
+      <cs:styleClr val="auto"/>
+    </cs:fillRef>
+    <cs:effectRef idx="0"/>
+    <cs:fontRef idx="minor">
+      <a:schemeClr val="tx1"/>
+    </cs:fontRef>
+  </cs:dataPoint>
+  <cs:dataPoint3D>
+    <cs:lnRef idx="0"/>
+    <cs:fillRef idx="1">
+      <cs:styleClr val="auto"/>
+    </cs:fillRef>
+    <cs:effectRef idx="0"/>
+    <cs:fontRef idx="minor">
+      <a:schemeClr val="tx1"/>
+    </cs:fontRef>
+  </cs:dataPoint3D>
+  <cs:dataPointLine>
+    <cs:lnRef idx="0">
+      <cs:styleClr val="auto"/>
+    </cs:lnRef>
+    <cs:fillRef idx="1"/>
+    <cs:effectRef idx="0"/>
+    <cs:fontRef idx="minor">
+      <a:schemeClr val="tx1"/>
+    </cs:fontRef>
+    <cs:spPr>
+      <a:ln w="28575" cap="rnd">
+        <a:solidFill>
+          <a:schemeClr val="phClr"/>
+        </a:solidFill>
+        <a:round/>
+      </a:ln>
+    </cs:spPr>
+  </cs:dataPointLine>
+  <cs:dataPointMarker>
+    <cs:lnRef idx="0">
+      <cs:styleClr val="auto"/>
+    </cs:lnRef>
+    <cs:fillRef idx="1">
+      <cs:styleClr val="auto"/>
+    </cs:fillRef>
+    <cs:effectRef idx="0"/>
+    <cs:fontRef idx="minor">
+      <a:schemeClr val="tx1"/>
+    </cs:fontRef>
+    <cs:spPr>
+      <a:ln w="9525">
+        <a:solidFill>
+          <a:schemeClr val="phClr"/>
+        </a:solidFill>
+      </a:ln>
+    </cs:spPr>
+  </cs:dataPointMarker>
+  <cs:dataPointMarkerLayout symbol="circle" size="5"/>
+  <cs:dataPointWireframe>
+    <cs:lnRef idx="0">
+      <cs:styleClr val="auto"/>
+    </cs:lnRef>
+    <cs:fillRef idx="1"/>
+    <cs:effectRef idx="0"/>
+    <cs:fontRef idx="minor">
+      <a:schemeClr val="tx1"/>
+    </cs:fontRef>
+    <cs:spPr>
+      <a:ln w="9525" cap="rnd">
+        <a:solidFill>
+          <a:schemeClr val="phClr"/>
+        </a:solidFill>
+        <a:round/>
+      </a:ln>
+    </cs:spPr>
+  </cs:dataPointWireframe>
+  <cs:dataTable>
+    <cs:lnRef idx="0"/>
+    <cs:fillRef idx="0"/>
+    <cs:effectRef idx="0"/>
+    <cs:fontRef idx="minor">
+      <a:schemeClr val="tx1">
+        <a:lumMod val="65000"/>
+        <a:lumOff val="35000"/>
+      </a:schemeClr>
+    </cs:fontRef>
+    <cs:spPr>
+      <a:noFill/>
+      <a:ln w="9525" cap="flat" cmpd="sng" algn="ctr">
+        <a:solidFill>
+          <a:schemeClr val="tx1">
+            <a:lumMod val="15000"/>
+            <a:lumOff val="85000"/>
+          </a:schemeClr>
+        </a:solidFill>
+        <a:round/>
+      </a:ln>
+    </cs:spPr>
+    <cs:defRPr sz="1197" kern="1200"/>
+  </cs:dataTable>
+  <cs:downBar>
+    <cs:lnRef idx="0"/>
+    <cs:fillRef idx="0"/>
+    <cs:effectRef idx="0"/>
+    <cs:fontRef idx="minor">
+      <a:schemeClr val="dk1"/>
+    </cs:fontRef>
+    <cs:spPr>
+      <a:solidFill>
+        <a:schemeClr val="dk1">
+          <a:lumMod val="65000"/>
+          <a:lumOff val="35000"/>
+        </a:schemeClr>
+      </a:solidFill>
+      <a:ln w="9525">
+        <a:solidFill>
+          <a:schemeClr val="tx1">
+            <a:lumMod val="65000"/>
+            <a:lumOff val="35000"/>
+          </a:schemeClr>
+        </a:solidFill>
+      </a:ln>
+    </cs:spPr>
+  </cs:downBar>
+  <cs:dropLine>
+    <cs:lnRef idx="0"/>
+    <cs:fillRef idx="0"/>
+    <cs:effectRef idx="0"/>
+    <cs:fontRef idx="minor">
+      <a:schemeClr val="tx1"/>
+    </cs:fontRef>
+    <cs:spPr>
+      <a:ln w="9525" cap="flat" cmpd="sng" algn="ctr">
+        <a:solidFill>
+          <a:schemeClr val="tx1">
+            <a:lumMod val="35000"/>
+            <a:lumOff val="65000"/>
+          </a:schemeClr>
+        </a:solidFill>
+        <a:round/>
+      </a:ln>
+    </cs:spPr>
+  </cs:dropLine>
+  <cs:errorBar>
+    <cs:lnRef idx="0"/>
+    <cs:fillRef idx="0"/>
+    <cs:effectRef idx="0"/>
+    <cs:fontRef idx="minor">
+      <a:schemeClr val="tx1"/>
+    </cs:fontRef>
+    <cs:spPr>
+      <a:ln w="9525" cap="flat" cmpd="sng" algn="ctr">
+        <a:solidFill>
+          <a:schemeClr val="tx1">
+            <a:lumMod val="65000"/>
+            <a:lumOff val="35000"/>
+          </a:schemeClr>
+        </a:solidFill>
+        <a:round/>
+      </a:ln>
+    </cs:spPr>
+  </cs:errorBar>
+  <cs:floor>
+    <cs:lnRef idx="0"/>
+    <cs:fillRef idx="0"/>
+    <cs:effectRef idx="0"/>
+    <cs:fontRef idx="minor">
+      <a:schemeClr val="tx1"/>
+    </cs:fontRef>
+    <cs:spPr>
+      <a:noFill/>
+      <a:ln>
+        <a:noFill/>
+      </a:ln>
+    </cs:spPr>
+  </cs:floor>
+  <cs:gridlineMajor>
+    <cs:lnRef idx="0"/>
+    <cs:fillRef idx="0"/>
+    <cs:effectRef idx="0"/>
+    <cs:fontRef idx="minor">
+      <a:schemeClr val="tx1"/>
+    </cs:fontRef>
+    <cs:spPr>
+      <a:ln w="9525" cap="flat" cmpd="sng" algn="ctr">
+        <a:solidFill>
+          <a:schemeClr val="tx1">
+            <a:lumMod val="15000"/>
+            <a:lumOff val="85000"/>
+          </a:schemeClr>
+        </a:solidFill>
+        <a:round/>
+      </a:ln>
+    </cs:spPr>
+  </cs:gridlineMajor>
+  <cs:gridlineMinor>
+    <cs:lnRef idx="0"/>
+    <cs:fillRef idx="0"/>
+    <cs:effectRef idx="0"/>
+    <cs:fontRef idx="minor">
+      <a:schemeClr val="tx1"/>
+    </cs:fontRef>
+    <cs:spPr>
+      <a:ln w="9525" cap="flat" cmpd="sng" algn="ctr">
+        <a:solidFill>
+          <a:schemeClr val="tx1">
+            <a:lumMod val="5000"/>
+            <a:lumOff val="95000"/>
+          </a:schemeClr>
+        </a:solidFill>
+        <a:round/>
+      </a:ln>
+    </cs:spPr>
+  </cs:gridlineMinor>
+  <cs:hiLoLine>
+    <cs:lnRef idx="0"/>
+    <cs:fillRef idx="0"/>
+    <cs:effectRef idx="0"/>
+    <cs:fontRef idx="minor">
+      <a:schemeClr val="tx1"/>
+    </cs:fontRef>
+    <cs:spPr>
+      <a:ln w="9525" cap="flat" cmpd="sng" algn="ctr">
+        <a:solidFill>
+          <a:schemeClr val="tx1">
+            <a:lumMod val="75000"/>
+            <a:lumOff val="25000"/>
+          </a:schemeClr>
+        </a:solidFill>
+        <a:round/>
+      </a:ln>
+    </cs:spPr>
+  </cs:hiLoLine>
+  <cs:leaderLine>
+    <cs:lnRef idx="0"/>
+    <cs:fillRef idx="0"/>
+    <cs:effectRef idx="0"/>
+    <cs:fontRef idx="minor">
+      <a:schemeClr val="tx1"/>
+    </cs:fontRef>
+    <cs:spPr>
+      <a:ln w="9525" cap="flat" cmpd="sng" algn="ctr">
+        <a:solidFill>
+          <a:schemeClr val="tx1">
+            <a:lumMod val="35000"/>
+            <a:lumOff val="65000"/>
+          </a:schemeClr>
+        </a:solidFill>
+        <a:round/>
+      </a:ln>
+    </cs:spPr>
+  </cs:leaderLine>
+  <cs:legend>
+    <cs:lnRef idx="0"/>
+    <cs:fillRef idx="0"/>
+    <cs:effectRef idx="0"/>
+    <cs:fontRef idx="minor">
+      <a:schemeClr val="tx1">
+        <a:lumMod val="65000"/>
+        <a:lumOff val="35000"/>
+      </a:schemeClr>
+    </cs:fontRef>
+    <cs:defRPr sz="1197" kern="1200"/>
+  </cs:legend>
+  <cs:plotArea mods="allowNoFillOverride allowNoLineOverride">
+    <cs:lnRef idx="0"/>
+    <cs:fillRef idx="0"/>
+    <cs:effectRef idx="0"/>
+    <cs:fontRef idx="minor">
+      <a:schemeClr val="tx1"/>
+    </cs:fontRef>
+  </cs:plotArea>
+  <cs:plotArea3D mods="allowNoFillOverride allowNoLineOverride">
+    <cs:lnRef idx="0"/>
+    <cs:fillRef idx="0"/>
+    <cs:effectRef idx="0"/>
+    <cs:fontRef idx="minor">
+      <a:schemeClr val="tx1"/>
+    </cs:fontRef>
+  </cs:plotArea3D>
+  <cs:seriesAxis>
+    <cs:lnRef idx="0"/>
+    <cs:fillRef idx="0"/>
+    <cs:effectRef idx="0"/>
+    <cs:fontRef idx="minor">
+      <a:schemeClr val="tx1">
+        <a:lumMod val="65000"/>
+        <a:lumOff val="35000"/>
+      </a:schemeClr>
+    </cs:fontRef>
+    <cs:defRPr sz="1197" kern="1200"/>
+  </cs:seriesAxis>
+  <cs:seriesLine>
+    <cs:lnRef idx="0"/>
+    <cs:fillRef idx="0"/>
+    <cs:effectRef idx="0"/>
+    <cs:fontRef idx="minor">
+      <a:schemeClr val="tx1"/>
+    </cs:fontRef>
+    <cs:spPr>
+      <a:ln w="9525" cap="flat" cmpd="sng" algn="ctr">
+        <a:solidFill>
+          <a:schemeClr val="tx1">
+            <a:lumMod val="35000"/>
+            <a:lumOff val="65000"/>
+          </a:schemeClr>
+        </a:solidFill>
+        <a:round/>
+      </a:ln>
+    </cs:spPr>
+  </cs:seriesLine>
+  <cs:title>
+    <cs:lnRef idx="0"/>
+    <cs:fillRef idx="0"/>
+    <cs:effectRef idx="0"/>
+    <cs:fontRef idx="minor">
+      <a:schemeClr val="tx1">
+        <a:lumMod val="65000"/>
+        <a:lumOff val="35000"/>
+      </a:schemeClr>
+    </cs:fontRef>
+    <cs:defRPr sz="1862" b="0" kern="1200" spc="0" baseline="0"/>
+  </cs:title>
+  <cs:trendline>
+    <cs:lnRef idx="0">
+      <cs:styleClr val="auto"/>
+    </cs:lnRef>
+    <cs:fillRef idx="0"/>
+    <cs:effectRef idx="0"/>
+    <cs:fontRef idx="minor">
+      <a:schemeClr val="tx1"/>
+    </cs:fontRef>
+    <cs:spPr>
+      <a:ln w="19050" cap="rnd">
+        <a:solidFill>
+          <a:schemeClr val="phClr"/>
+        </a:solidFill>
+        <a:prstDash val="sysDot"/>
+      </a:ln>
+    </cs:spPr>
+  </cs:trendline>
+  <cs:trendlineLabel>
+    <cs:lnRef idx="0"/>
+    <cs:fillRef idx="0"/>
+    <cs:effectRef idx="0"/>
+    <cs:fontRef idx="minor">
+      <a:schemeClr val="tx1">
+        <a:lumMod val="65000"/>
+        <a:lumOff val="35000"/>
+      </a:schemeClr>
+    </cs:fontRef>
+    <cs:defRPr sz="1197" kern="1200"/>
+  </cs:trendlineLabel>
+  <cs:upBar>
+    <cs:lnRef idx="0"/>
+    <cs:fillRef idx="0"/>
+    <cs:effectRef idx="0"/>
+    <cs:fontRef idx="minor">
+      <a:schemeClr val="dk1"/>
+    </cs:fontRef>
+    <cs:spPr>
+      <a:solidFill>
+        <a:schemeClr val="lt1"/>
+      </a:solidFill>
+      <a:ln w="9525">
+        <a:solidFill>
+          <a:schemeClr val="tx1">
+            <a:lumMod val="15000"/>
+            <a:lumOff val="85000"/>
+          </a:schemeClr>
+        </a:solidFill>
+      </a:ln>
+    </cs:spPr>
+  </cs:upBar>
+  <cs:valueAxis>
+    <cs:lnRef idx="0"/>
+    <cs:fillRef idx="0"/>
+    <cs:effectRef idx="0"/>
+    <cs:fontRef idx="minor">
+      <a:schemeClr val="tx1">
+        <a:lumMod val="65000"/>
+        <a:lumOff val="35000"/>
+      </a:schemeClr>
+    </cs:fontRef>
+    <cs:defRPr sz="1197" kern="1200"/>
+  </cs:valueAxis>
+  <cs:wall>
+    <cs:lnRef idx="0"/>
+    <cs:fillRef idx="0"/>
+    <cs:effectRef idx="0"/>
+    <cs:fontRef idx="minor">
+      <a:schemeClr val="tx1"/>
+    </cs:fontRef>
+    <cs:spPr>
+      <a:noFill/>
+      <a:ln>
+        <a:noFill/>
+      </a:ln>
+    </cs:spPr>
+  </cs:wall>
+</cs:chartStyle>
+</file>
+
 <file path=ppt/handoutMasters/handoutMaster1.xml><?xml version="1.0" encoding="utf-8"?>
 <p:handoutMaster xmlns:a="http://schemas.openxmlformats.org/drawingml/2006/main" xmlns:r="http://schemas.openxmlformats.org/officeDocument/2006/relationships" xmlns:p="http://schemas.openxmlformats.org/presentationml/2006/main">
   <p:cSld>
@@ -227,7 +1202,7 @@
           <a:p>
             <a:fld id="{FC851B3E-1325-48C3-8E2C-998D0099FC98}" type="datetimeFigureOut">
               <a:rPr lang="en-US" smtClean="0"/>
-              <a:t>5/8/2026</a:t>
+              <a:t>5/22/2026</a:t>
             </a:fld>
             <a:endParaRPr lang="en-US" dirty="0"/>
           </a:p>
@@ -404,7 +1379,7 @@
           <a:p>
             <a:fld id="{04D39CC4-BC6F-4E80-BC0D-03833D02DC81}" type="datetimeFigureOut">
               <a:rPr lang="en-US" noProof="0" smtClean="0"/>
-              <a:t>5/8/2026</a:t>
+              <a:t>5/22/2026</a:t>
             </a:fld>
             <a:endParaRPr lang="en-US" noProof="0" dirty="0"/>
           </a:p>
@@ -7569,9 +8544,7 @@
     <p:bg>
       <p:bgPr>
         <a:solidFill>
-          <a:schemeClr val="tx2">
-            <a:lumMod val="75000"/>
-          </a:schemeClr>
+          <a:srgbClr val="00011A"/>
         </a:solidFill>
         <a:effectLst/>
       </p:bgPr>
@@ -7592,6 +8565,244 @@
       </p:grpSpPr>
       <p:sp>
         <p:nvSpPr>
+          <p:cNvPr id="49" name="Rectangle: Rounded Corners 48">
+            <a:extLst>
+              <a:ext uri="{FF2B5EF4-FFF2-40B4-BE49-F238E27FC236}">
+                <a16:creationId xmlns:a16="http://schemas.microsoft.com/office/drawing/2014/main" id="{2B149DF3-3518-107D-96F5-57AB88FD68F6}"/>
+              </a:ext>
+            </a:extLst>
+          </p:cNvPr>
+          <p:cNvSpPr/>
+          <p:nvPr/>
+        </p:nvSpPr>
+        <p:spPr>
+          <a:xfrm>
+            <a:off x="7438257" y="5095622"/>
+            <a:ext cx="4605665" cy="1613224"/>
+          </a:xfrm>
+          <a:prstGeom prst="roundRect">
+            <a:avLst>
+              <a:gd name="adj" fmla="val 7621"/>
+            </a:avLst>
+          </a:prstGeom>
+          <a:solidFill>
+            <a:schemeClr val="dk1"/>
+          </a:solidFill>
+          <a:ln>
+            <a:noFill/>
+          </a:ln>
+        </p:spPr>
+        <p:style>
+          <a:lnRef idx="0">
+            <a:scrgbClr r="0" g="0" b="0"/>
+          </a:lnRef>
+          <a:fillRef idx="0">
+            <a:scrgbClr r="0" g="0" b="0"/>
+          </a:fillRef>
+          <a:effectRef idx="0">
+            <a:scrgbClr r="0" g="0" b="0"/>
+          </a:effectRef>
+          <a:fontRef idx="minor">
+            <a:schemeClr val="lt1"/>
+          </a:fontRef>
+        </p:style>
+        <p:txBody>
+          <a:bodyPr rtlCol="0" anchor="ctr"/>
+          <a:lstStyle/>
+          <a:p>
+            <a:pPr algn="ctr"/>
+            <a:endParaRPr lang="en-GB"/>
+          </a:p>
+        </p:txBody>
+      </p:sp>
+      <p:sp>
+        <p:nvSpPr>
+          <p:cNvPr id="26" name="Rectangle: Rounded Corners 25">
+            <a:extLst>
+              <a:ext uri="{FF2B5EF4-FFF2-40B4-BE49-F238E27FC236}">
+                <a16:creationId xmlns:a16="http://schemas.microsoft.com/office/drawing/2014/main" id="{E3702137-7B68-0942-D341-7B268DDDF63D}"/>
+              </a:ext>
+            </a:extLst>
+          </p:cNvPr>
+          <p:cNvSpPr/>
+          <p:nvPr/>
+        </p:nvSpPr>
+        <p:spPr>
+          <a:xfrm>
+            <a:off x="3760032" y="3124857"/>
+            <a:ext cx="3298786" cy="1613224"/>
+          </a:xfrm>
+          <a:prstGeom prst="roundRect">
+            <a:avLst>
+              <a:gd name="adj" fmla="val 7621"/>
+            </a:avLst>
+          </a:prstGeom>
+          <a:solidFill>
+            <a:schemeClr val="dk1"/>
+          </a:solidFill>
+          <a:ln>
+            <a:noFill/>
+          </a:ln>
+        </p:spPr>
+        <p:style>
+          <a:lnRef idx="0">
+            <a:scrgbClr r="0" g="0" b="0"/>
+          </a:lnRef>
+          <a:fillRef idx="0">
+            <a:scrgbClr r="0" g="0" b="0"/>
+          </a:fillRef>
+          <a:effectRef idx="0">
+            <a:scrgbClr r="0" g="0" b="0"/>
+          </a:effectRef>
+          <a:fontRef idx="minor">
+            <a:schemeClr val="lt1"/>
+          </a:fontRef>
+        </p:style>
+        <p:txBody>
+          <a:bodyPr rtlCol="0" anchor="ctr"/>
+          <a:lstStyle/>
+          <a:p>
+            <a:pPr algn="ctr"/>
+            <a:endParaRPr lang="en-GB"/>
+          </a:p>
+        </p:txBody>
+      </p:sp>
+      <p:pic>
+        <p:nvPicPr>
+          <p:cNvPr id="21" name="Picture 20">
+            <a:extLst>
+              <a:ext uri="{FF2B5EF4-FFF2-40B4-BE49-F238E27FC236}">
+                <a16:creationId xmlns:a16="http://schemas.microsoft.com/office/drawing/2014/main" id="{31D42FCE-69C5-E03D-091A-3A10E42ECD0F}"/>
+              </a:ext>
+            </a:extLst>
+          </p:cNvPr>
+          <p:cNvPicPr>
+            <a:picLocks noChangeAspect="1"/>
+          </p:cNvPicPr>
+          <p:nvPr/>
+        </p:nvPicPr>
+        <p:blipFill>
+          <a:blip r:embed="rId3"/>
+          <a:stretch>
+            <a:fillRect/>
+          </a:stretch>
+        </p:blipFill>
+        <p:spPr>
+          <a:xfrm>
+            <a:off x="12615550" y="1830991"/>
+            <a:ext cx="1683475" cy="778897"/>
+          </a:xfrm>
+          <a:prstGeom prst="rect">
+            <a:avLst/>
+          </a:prstGeom>
+        </p:spPr>
+      </p:pic>
+      <p:sp>
+        <p:nvSpPr>
+          <p:cNvPr id="23" name="Rectangle: Rounded Corners 22">
+            <a:extLst>
+              <a:ext uri="{FF2B5EF4-FFF2-40B4-BE49-F238E27FC236}">
+                <a16:creationId xmlns:a16="http://schemas.microsoft.com/office/drawing/2014/main" id="{7B161D79-24C0-1DBA-EC5D-4ACC645FBC7D}"/>
+              </a:ext>
+            </a:extLst>
+          </p:cNvPr>
+          <p:cNvSpPr/>
+          <p:nvPr/>
+        </p:nvSpPr>
+        <p:spPr>
+          <a:xfrm>
+            <a:off x="157982" y="4892716"/>
+            <a:ext cx="3367573" cy="1865169"/>
+          </a:xfrm>
+          <a:prstGeom prst="roundRect">
+            <a:avLst>
+              <a:gd name="adj" fmla="val 4163"/>
+            </a:avLst>
+          </a:prstGeom>
+          <a:solidFill>
+            <a:schemeClr val="dk1"/>
+          </a:solidFill>
+          <a:ln>
+            <a:noFill/>
+          </a:ln>
+        </p:spPr>
+        <p:style>
+          <a:lnRef idx="0">
+            <a:scrgbClr r="0" g="0" b="0"/>
+          </a:lnRef>
+          <a:fillRef idx="0">
+            <a:scrgbClr r="0" g="0" b="0"/>
+          </a:fillRef>
+          <a:effectRef idx="0">
+            <a:scrgbClr r="0" g="0" b="0"/>
+          </a:effectRef>
+          <a:fontRef idx="minor">
+            <a:schemeClr val="lt1"/>
+          </a:fontRef>
+        </p:style>
+        <p:txBody>
+          <a:bodyPr rtlCol="0" anchor="ctr"/>
+          <a:lstStyle/>
+          <a:p>
+            <a:pPr algn="ctr"/>
+            <a:endParaRPr lang="en-GB" dirty="0"/>
+          </a:p>
+        </p:txBody>
+      </p:sp>
+      <p:sp>
+        <p:nvSpPr>
+          <p:cNvPr id="22" name="Rectangle: Rounded Corners 21">
+            <a:extLst>
+              <a:ext uri="{FF2B5EF4-FFF2-40B4-BE49-F238E27FC236}">
+                <a16:creationId xmlns:a16="http://schemas.microsoft.com/office/drawing/2014/main" id="{D5F40875-B05D-EA92-6D1C-618B270BAC36}"/>
+              </a:ext>
+            </a:extLst>
+          </p:cNvPr>
+          <p:cNvSpPr/>
+          <p:nvPr/>
+        </p:nvSpPr>
+        <p:spPr>
+          <a:xfrm>
+            <a:off x="171671" y="1222490"/>
+            <a:ext cx="3328054" cy="1684745"/>
+          </a:xfrm>
+          <a:prstGeom prst="roundRect">
+            <a:avLst>
+              <a:gd name="adj" fmla="val 7621"/>
+            </a:avLst>
+          </a:prstGeom>
+          <a:solidFill>
+            <a:schemeClr val="dk1"/>
+          </a:solidFill>
+          <a:ln>
+            <a:noFill/>
+          </a:ln>
+        </p:spPr>
+        <p:style>
+          <a:lnRef idx="0">
+            <a:scrgbClr r="0" g="0" b="0"/>
+          </a:lnRef>
+          <a:fillRef idx="0">
+            <a:scrgbClr r="0" g="0" b="0"/>
+          </a:fillRef>
+          <a:effectRef idx="0">
+            <a:scrgbClr r="0" g="0" b="0"/>
+          </a:effectRef>
+          <a:fontRef idx="minor">
+            <a:schemeClr val="lt1"/>
+          </a:fontRef>
+        </p:style>
+        <p:txBody>
+          <a:bodyPr rtlCol="0" anchor="ctr"/>
+          <a:lstStyle/>
+          <a:p>
+            <a:pPr algn="ctr"/>
+            <a:endParaRPr lang="en-GB"/>
+          </a:p>
+        </p:txBody>
+      </p:sp>
+      <p:sp>
+        <p:nvSpPr>
           <p:cNvPr id="2" name="Title 1">
             <a:extLst>
               <a:ext uri="{FF2B5EF4-FFF2-40B4-BE49-F238E27FC236}">
@@ -7608,8 +8819,8 @@
         </p:nvSpPr>
         <p:spPr>
           <a:xfrm>
-            <a:off x="90175" y="-418838"/>
-            <a:ext cx="12063593" cy="1097915"/>
+            <a:off x="0" y="-100098"/>
+            <a:ext cx="12191999" cy="1097915"/>
           </a:xfrm>
         </p:spPr>
         <p:txBody>
@@ -7619,7 +8830,7 @@
           <a:lstStyle/>
           <a:p>
             <a:r>
-              <a:rPr lang="en-US" sz="3000" dirty="0"/>
+              <a:rPr lang="en-US" sz="3000" b="1" dirty="0"/>
               <a:t>Can Track Sequencers be Relevant in Modern Game Development?</a:t>
             </a:r>
           </a:p>
@@ -7643,7 +8854,7 @@
         </p:nvSpPr>
         <p:spPr>
           <a:xfrm>
-            <a:off x="214753" y="737612"/>
+            <a:off x="6802821" y="728275"/>
             <a:ext cx="9064752" cy="511175"/>
           </a:xfrm>
         </p:spPr>
@@ -7709,8 +8920,8 @@
         </p:nvSpPr>
         <p:spPr>
           <a:xfrm>
-            <a:off x="218434" y="1690647"/>
-            <a:ext cx="3364992" cy="1548055"/>
+            <a:off x="218434" y="1690648"/>
+            <a:ext cx="3364992" cy="1266834"/>
           </a:xfrm>
         </p:spPr>
         <p:txBody>
@@ -7718,13 +8929,13 @@
           <a:lstStyle/>
           <a:p>
             <a:r>
-              <a:rPr lang="en-US" sz="900" dirty="0"/>
+              <a:rPr lang="en-US" sz="800" dirty="0"/>
               <a:t>Music track sequencing was used in older game consoles where storage space and audio capabilities were limited. Music used to be a list of text commands that played preset instrumental tones. Audio has since been upgraded to pre-recorded tracks, creating greater immersive experiences.</a:t>
             </a:r>
           </a:p>
           <a:p>
             <a:r>
-              <a:rPr lang="en-US" sz="900" dirty="0"/>
+              <a:rPr lang="en-US" sz="800" dirty="0"/>
               <a:t>This research dives into the history of music in gaming and explores the question “Can track sequencers be relevant in modern game development?”.</a:t>
             </a:r>
           </a:p>
@@ -7753,7 +8964,7 @@
           <a:blip>
             <a:extLst>
               <a:ext uri="{96DAC541-7B7A-43D3-8B79-37D633B846F1}">
-                <asvg:svgBlip xmlns:asvg="http://schemas.microsoft.com/office/drawing/2016/SVG/main" r:embed="rId3"/>
+                <asvg:svgBlip xmlns:asvg="http://schemas.microsoft.com/office/drawing/2016/SVG/main" r:embed="rId4"/>
               </a:ext>
             </a:extLst>
           </a:blip>
@@ -7762,7 +8973,7 @@
         </p:blipFill>
         <p:spPr>
           <a:xfrm>
-            <a:off x="381306" y="2798093"/>
+            <a:off x="2733149" y="1224191"/>
             <a:ext cx="457200" cy="457200"/>
           </a:xfrm>
         </p:spPr>
@@ -7785,7 +8996,7 @@
         </p:nvSpPr>
         <p:spPr>
           <a:xfrm>
-            <a:off x="3597508" y="3184551"/>
+            <a:off x="3762835" y="3221973"/>
             <a:ext cx="1996440" cy="381190"/>
           </a:xfrm>
         </p:spPr>
@@ -7795,7 +9006,7 @@
           <a:p>
             <a:r>
               <a:rPr lang="en-US" dirty="0"/>
-              <a:t>Objective</a:t>
+              <a:t>Objectives</a:t>
             </a:r>
           </a:p>
         </p:txBody>
@@ -7818,39 +9029,75 @@
         </p:nvSpPr>
         <p:spPr>
           <a:xfrm>
-            <a:off x="3627988" y="3582332"/>
-            <a:ext cx="2817876" cy="1444170"/>
+            <a:off x="3760032" y="3648979"/>
+            <a:ext cx="3298785" cy="1099024"/>
           </a:xfrm>
         </p:spPr>
         <p:txBody>
           <a:bodyPr/>
           <a:lstStyle/>
           <a:p>
-            <a:pPr fontAlgn="base"/>
+            <a:pPr marL="171450" indent="-171450" fontAlgn="base">
+              <a:lnSpc>
+                <a:spcPct val="100000"/>
+              </a:lnSpc>
+              <a:spcBef>
+                <a:spcPts val="0"/>
+              </a:spcBef>
+              <a:buFont typeface="Arial" panose="020B0604020202020204" pitchFamily="34" charset="0"/>
+              <a:buChar char="•"/>
+            </a:pPr>
             <a:r>
-              <a:rPr lang="en-GB" sz="900" dirty="0"/>
+              <a:rPr lang="en-GB" sz="800" dirty="0"/>
               <a:t>Demonstrate the potential of legacy music playback formats in modern systems. </a:t>
             </a:r>
           </a:p>
           <a:p>
-            <a:pPr fontAlgn="base"/>
+            <a:pPr marL="171450" indent="-171450" fontAlgn="base">
+              <a:lnSpc>
+                <a:spcPct val="100000"/>
+              </a:lnSpc>
+              <a:spcBef>
+                <a:spcPts val="0"/>
+              </a:spcBef>
+              <a:buFont typeface="Arial" panose="020B0604020202020204" pitchFamily="34" charset="0"/>
+              <a:buChar char="•"/>
+            </a:pPr>
             <a:r>
-              <a:rPr lang="en-GB" sz="900" dirty="0"/>
-              <a:t>Allow quick prototype or full music production for a game engine user. </a:t>
+              <a:rPr lang="en-GB" sz="800" dirty="0"/>
+              <a:t>Allow quick prototype or full music production for a game developer.</a:t>
             </a:r>
           </a:p>
           <a:p>
-            <a:pPr fontAlgn="base"/>
+            <a:pPr marL="171450" indent="-171450" fontAlgn="base">
+              <a:lnSpc>
+                <a:spcPct val="100000"/>
+              </a:lnSpc>
+              <a:spcBef>
+                <a:spcPts val="0"/>
+              </a:spcBef>
+              <a:buFont typeface="Arial" panose="020B0604020202020204" pitchFamily="34" charset="0"/>
+              <a:buChar char="•"/>
+            </a:pPr>
             <a:r>
-              <a:rPr lang="en-GB" sz="900" dirty="0"/>
-              <a:t>Removes barrier between level design/gameplay programming and music creation for events and sections in a level. </a:t>
+              <a:rPr lang="en-GB" sz="800" dirty="0"/>
+              <a:t>Removes the barrier between level design/gameplay programming and music creation.</a:t>
             </a:r>
           </a:p>
           <a:p>
-            <a:pPr fontAlgn="base"/>
+            <a:pPr marL="171450" indent="-171450" fontAlgn="base">
+              <a:lnSpc>
+                <a:spcPct val="100000"/>
+              </a:lnSpc>
+              <a:spcBef>
+                <a:spcPts val="0"/>
+              </a:spcBef>
+              <a:buFont typeface="Arial" panose="020B0604020202020204" pitchFamily="34" charset="0"/>
+              <a:buChar char="•"/>
+            </a:pPr>
             <a:r>
-              <a:rPr lang="en-GB" sz="900" dirty="0"/>
-              <a:t>Allow for future modification of tracks due to the text-command style of music files. (Transformative/Generative music). </a:t>
+              <a:rPr lang="en-GB" sz="800" dirty="0"/>
+              <a:t>Allow for future modification of tracks due to the text-command style of music files such as transformative or generative music.</a:t>
             </a:r>
           </a:p>
         </p:txBody>
@@ -7875,7 +9122,7 @@
           <a:blip>
             <a:extLst>
               <a:ext uri="{96DAC541-7B7A-43D3-8B79-37D633B846F1}">
-                <asvg:svgBlip xmlns:asvg="http://schemas.microsoft.com/office/drawing/2016/SVG/main" r:embed="rId4"/>
+                <asvg:svgBlip xmlns:asvg="http://schemas.microsoft.com/office/drawing/2016/SVG/main" r:embed="rId5"/>
               </a:ext>
             </a:extLst>
           </a:blip>
@@ -7884,7 +9131,7 @@
         </p:blipFill>
         <p:spPr>
           <a:xfrm>
-            <a:off x="6445864" y="4790688"/>
+            <a:off x="5754248" y="3140405"/>
             <a:ext cx="457200" cy="457200"/>
           </a:xfrm>
         </p:spPr>
@@ -7907,7 +9154,7 @@
         </p:nvSpPr>
         <p:spPr>
           <a:xfrm>
-            <a:off x="146739" y="4668396"/>
+            <a:off x="148078" y="4977984"/>
             <a:ext cx="2587752" cy="381190"/>
           </a:xfrm>
         </p:spPr>
@@ -7940,8 +9187,8 @@
         </p:nvSpPr>
         <p:spPr>
           <a:xfrm>
-            <a:off x="156644" y="5099831"/>
-            <a:ext cx="3592395" cy="1548055"/>
+            <a:off x="157983" y="5409420"/>
+            <a:ext cx="3430295" cy="1355848"/>
           </a:xfrm>
         </p:spPr>
         <p:txBody>
@@ -7950,41 +9197,30 @@
           <a:p>
             <a:pPr fontAlgn="base"/>
             <a:r>
-              <a:rPr lang="en-GB" sz="900" dirty="0"/>
-              <a:t>SF2 file playback in Miniaudio &amp; </a:t>
+              <a:rPr lang="en-GB" sz="800" dirty="0"/>
+              <a:t>The first step is creating an sf2 file playback method, using </a:t>
             </a:r>
             <a:r>
-              <a:rPr lang="en-GB" sz="900" dirty="0" err="1"/>
+              <a:rPr lang="en-GB" sz="800" dirty="0" err="1"/>
               <a:t>TinySoundFont</a:t>
             </a:r>
             <a:r>
-              <a:rPr lang="en-GB" sz="900" dirty="0"/>
-              <a:t> in C. </a:t>
+              <a:rPr lang="en-GB" sz="800" dirty="0"/>
+              <a:t> in C, that can be read by other applications. A sequence editor tool !!!!!!! will be created to create and adjust musical files.</a:t>
             </a:r>
           </a:p>
           <a:p>
             <a:pPr fontAlgn="base"/>
             <a:r>
-              <a:rPr lang="en-GB" sz="900" dirty="0"/>
-              <a:t>Unity interpreter as an example of game engine usage. </a:t>
+              <a:rPr lang="en-GB" sz="800" dirty="0"/>
+              <a:t>Samples of tracker sequence playback will be implemented in a Unity project for game testers to play. An accompanying questionnaire will provide input on the authenticity and immersion of the music. </a:t>
             </a:r>
           </a:p>
           <a:p>
             <a:pPr fontAlgn="base"/>
             <a:r>
-              <a:rPr lang="en-GB" sz="900" dirty="0"/>
-              <a:t>Allow ‘testers’ to play a level/audio sample with music to test the authenticity and immersion of gameplay. </a:t>
-            </a:r>
-          </a:p>
-          <a:p>
-            <a:pPr fontAlgn="base"/>
-            <a:r>
-              <a:rPr lang="en-GB" sz="900" dirty="0"/>
-              <a:t>Testers will take a questionnaire about how they felt during certain parts of the gameplay and their emotions. (mention qualitive data</a:t>
-            </a:r>
-            <a:r>
-              <a:rPr lang="en-GB" dirty="0"/>
-              <a:t>?) </a:t>
+              <a:rPr lang="en-GB" sz="800" dirty="0"/>
+              <a:t>The results of these playtest will allow insight into the direction and potential that this type of music format holds.</a:t>
             </a:r>
           </a:p>
         </p:txBody>
@@ -8009,7 +9245,7 @@
           <a:blip>
             <a:extLst>
               <a:ext uri="{96DAC541-7B7A-43D3-8B79-37D633B846F1}">
-                <asvg:svgBlip xmlns:asvg="http://schemas.microsoft.com/office/drawing/2016/SVG/main" r:embed="rId5"/>
+                <asvg:svgBlip xmlns:asvg="http://schemas.microsoft.com/office/drawing/2016/SVG/main" r:embed="rId6"/>
               </a:ext>
             </a:extLst>
           </a:blip>
@@ -8018,7 +9254,7 @@
         </p:blipFill>
         <p:spPr>
           <a:xfrm>
-            <a:off x="1541923" y="6234089"/>
+            <a:off x="2626591" y="4892717"/>
             <a:ext cx="457200" cy="457200"/>
           </a:xfrm>
         </p:spPr>
@@ -8041,7 +9277,7 @@
         </p:nvSpPr>
         <p:spPr>
           <a:xfrm>
-            <a:off x="7326147" y="1148466"/>
+            <a:off x="7426418" y="1220894"/>
             <a:ext cx="1996440" cy="381190"/>
           </a:xfrm>
         </p:spPr>
@@ -8052,39 +9288,6 @@
             <a:r>
               <a:rPr lang="en-US" dirty="0"/>
               <a:t>Results</a:t>
-            </a:r>
-          </a:p>
-        </p:txBody>
-      </p:sp>
-      <p:sp>
-        <p:nvSpPr>
-          <p:cNvPr id="13" name="Text Placeholder 12">
-            <a:extLst>
-              <a:ext uri="{FF2B5EF4-FFF2-40B4-BE49-F238E27FC236}">
-                <a16:creationId xmlns:a16="http://schemas.microsoft.com/office/drawing/2014/main" id="{7A796CA2-AD43-6CE8-757E-437D60714D2F}"/>
-              </a:ext>
-            </a:extLst>
-          </p:cNvPr>
-          <p:cNvSpPr>
-            <a:spLocks noGrp="1"/>
-          </p:cNvSpPr>
-          <p:nvPr>
-            <p:ph type="body" sz="quarter" idx="23"/>
-          </p:nvPr>
-        </p:nvSpPr>
-        <p:spPr>
-          <a:xfrm>
-            <a:off x="7351353" y="1672771"/>
-            <a:ext cx="1996440" cy="778652"/>
-          </a:xfrm>
-        </p:spPr>
-        <p:txBody>
-          <a:bodyPr/>
-          <a:lstStyle/>
-          <a:p>
-            <a:r>
-              <a:rPr lang="en-US" dirty="0"/>
-              <a:t>Table/form information here</a:t>
             </a:r>
           </a:p>
         </p:txBody>
@@ -8109,7 +9312,7 @@
           <a:blip>
             <a:extLst>
               <a:ext uri="{96DAC541-7B7A-43D3-8B79-37D633B846F1}">
-                <asvg:svgBlip xmlns:asvg="http://schemas.microsoft.com/office/drawing/2016/SVG/main" r:embed="rId6"/>
+                <asvg:svgBlip xmlns:asvg="http://schemas.microsoft.com/office/drawing/2016/SVG/main" r:embed="rId7"/>
               </a:ext>
             </a:extLst>
           </a:blip>
@@ -8118,7 +9321,7 @@
         </p:blipFill>
         <p:spPr>
           <a:xfrm>
-            <a:off x="7599962" y="1966808"/>
+            <a:off x="8751201" y="1160761"/>
             <a:ext cx="457200" cy="457200"/>
           </a:xfrm>
         </p:spPr>
@@ -8141,7 +9344,7 @@
         </p:nvSpPr>
         <p:spPr>
           <a:xfrm>
-            <a:off x="8082794" y="4477802"/>
+            <a:off x="7455374" y="4638422"/>
             <a:ext cx="2656332" cy="381190"/>
           </a:xfrm>
         </p:spPr>
@@ -8174,8 +9377,8 @@
         </p:nvSpPr>
         <p:spPr>
           <a:xfrm>
-            <a:off x="8138816" y="4858991"/>
-            <a:ext cx="3099286" cy="1079489"/>
+            <a:off x="7469382" y="5165445"/>
+            <a:ext cx="4676255" cy="1422654"/>
           </a:xfrm>
         </p:spPr>
         <p:txBody>
@@ -8183,34 +9386,34 @@
           <a:lstStyle/>
           <a:p>
             <a:r>
-              <a:rPr lang="en-US" sz="900" dirty="0">
-                <a:solidFill>
-                  <a:srgbClr val="FF0000"/>
-                </a:solidFill>
-              </a:rPr>
-              <a:t>Something here about how people responded to the tool/audio samples I created.</a:t>
+              <a:rPr lang="en-US" sz="900" dirty="0"/>
+              <a:t>In conclusion, the results demonstrate …………………………………………………………………………………….</a:t>
             </a:r>
           </a:p>
           <a:p>
             <a:r>
               <a:rPr lang="en-US" sz="900" dirty="0"/>
-              <a:t>Requires more testers and musical creators to test the limits of sf2 file playback.</a:t>
+              <a:t>Producing track sequencer music files can easily be created and altered, but require specialist tools and training. Using a track sequencer only requires music knowledge; implementing it into a project needs programming skills.</a:t>
             </a:r>
           </a:p>
           <a:p>
             <a:r>
               <a:rPr lang="en-US" sz="900" dirty="0"/>
-              <a:t>Future potential for greater sound samples or tool improvement.</a:t>
+              <a:t>This method of game music requires </a:t>
             </a:r>
-          </a:p>
-          <a:p>
             <a:r>
-              <a:rPr lang="en-US" sz="900" dirty="0">
-                <a:solidFill>
-                  <a:srgbClr val="FF0000"/>
-                </a:solidFill>
-              </a:rPr>
-              <a:t>Mention things I didn’t get to do.</a:t>
+              <a:rPr lang="en-US" sz="900"/>
+              <a:t>further study to </a:t>
+            </a:r>
+            <a:r>
+              <a:rPr lang="en-US" sz="900" dirty="0"/>
+              <a:t>ascertain its functionality within the creative industry.</a:t>
+            </a:r>
+          </a:p>
+          <a:p>
+            <a:r>
+              <a:rPr lang="en-US" sz="900" dirty="0"/>
+              <a:t>A larger demographic of game testers would improve the feedback and </a:t>
             </a:r>
           </a:p>
         </p:txBody>
@@ -8235,7 +9438,7 @@
           <a:blip>
             <a:extLst>
               <a:ext uri="{96DAC541-7B7A-43D3-8B79-37D633B846F1}">
-                <asvg:svgBlip xmlns:asvg="http://schemas.microsoft.com/office/drawing/2016/SVG/main" r:embed="rId7"/>
+                <asvg:svgBlip xmlns:asvg="http://schemas.microsoft.com/office/drawing/2016/SVG/main" r:embed="rId8"/>
               </a:ext>
             </a:extLst>
           </a:blip>
@@ -8244,7 +9447,7 @@
         </p:blipFill>
         <p:spPr>
           <a:xfrm>
-            <a:off x="9254368" y="6134627"/>
+            <a:off x="9621304" y="4562410"/>
             <a:ext cx="457200" cy="457200"/>
           </a:xfrm>
         </p:spPr>
@@ -8268,8 +9471,8 @@
         </p:nvCxnSpPr>
         <p:spPr>
           <a:xfrm>
-            <a:off x="234059" y="613251"/>
-            <a:ext cx="11312652" cy="21533"/>
+            <a:off x="-98675" y="1032699"/>
+            <a:ext cx="12714225" cy="1985"/>
           </a:xfrm>
           <a:prstGeom prst="line">
             <a:avLst/>
@@ -8329,7 +9532,7 @@
           <a:blip>
             <a:extLst>
               <a:ext uri="{96DAC541-7B7A-43D3-8B79-37D633B846F1}">
-                <asvg:svgBlip xmlns:asvg="http://schemas.microsoft.com/office/drawing/2016/SVG/main" r:embed="rId8"/>
+                <asvg:svgBlip xmlns:asvg="http://schemas.microsoft.com/office/drawing/2016/SVG/main" r:embed="rId9"/>
               </a:ext>
             </a:extLst>
           </a:blip>
@@ -8338,8 +9541,8 @@
         </p:blipFill>
         <p:spPr>
           <a:xfrm>
-            <a:off x="10485434" y="767635"/>
-            <a:ext cx="1524363" cy="1524363"/>
+            <a:off x="11359547" y="50519"/>
+            <a:ext cx="635766" cy="635766"/>
           </a:xfrm>
         </p:spPr>
       </p:pic>
@@ -8361,7 +9564,7 @@
           <a:blip>
             <a:extLst>
               <a:ext uri="{96DAC541-7B7A-43D3-8B79-37D633B846F1}">
-                <asvg:svgBlip xmlns:asvg="http://schemas.microsoft.com/office/drawing/2016/SVG/main" r:embed="rId9"/>
+                <asvg:svgBlip xmlns:asvg="http://schemas.microsoft.com/office/drawing/2016/SVG/main" r:embed="rId10"/>
               </a:ext>
             </a:extLst>
           </a:blip>
@@ -8399,7 +9602,7 @@
           <a:blip>
             <a:extLst>
               <a:ext uri="{96DAC541-7B7A-43D3-8B79-37D633B846F1}">
-                <asvg:svgBlip xmlns:asvg="http://schemas.microsoft.com/office/drawing/2016/SVG/main" r:embed="rId10"/>
+                <asvg:svgBlip xmlns:asvg="http://schemas.microsoft.com/office/drawing/2016/SVG/main" r:embed="rId11"/>
               </a:ext>
             </a:extLst>
           </a:blip>
@@ -8408,7 +9611,7 @@
         </p:blipFill>
         <p:spPr>
           <a:xfrm>
-            <a:off x="10899648" y="5843968"/>
+            <a:off x="10312301" y="-8817"/>
             <a:ext cx="822960" cy="822960"/>
           </a:xfrm>
           <a:prstGeom prst="ellipse">
@@ -8437,7 +9640,7 @@
           <a:blip>
             <a:extLst>
               <a:ext uri="{96DAC541-7B7A-43D3-8B79-37D633B846F1}">
-                <asvg:svgBlip xmlns:asvg="http://schemas.microsoft.com/office/drawing/2016/SVG/main" r:embed="rId11"/>
+                <asvg:svgBlip xmlns:asvg="http://schemas.microsoft.com/office/drawing/2016/SVG/main" r:embed="rId12"/>
               </a:ext>
             </a:extLst>
           </a:blip>
@@ -8446,7 +9649,7 @@
         </p:blipFill>
         <p:spPr>
           <a:xfrm>
-            <a:off x="11420736" y="1222491"/>
+            <a:off x="11034621" y="214272"/>
             <a:ext cx="324926" cy="324926"/>
           </a:xfrm>
           <a:prstGeom prst="ellipse">
@@ -8475,7 +9678,7 @@
           <a:blip>
             <a:extLst>
               <a:ext uri="{96DAC541-7B7A-43D3-8B79-37D633B846F1}">
-                <asvg:svgBlip xmlns:asvg="http://schemas.microsoft.com/office/drawing/2016/SVG/main" r:embed="rId12"/>
+                <asvg:svgBlip xmlns:asvg="http://schemas.microsoft.com/office/drawing/2016/SVG/main" r:embed="rId13"/>
               </a:ext>
             </a:extLst>
           </a:blip>
@@ -8486,8 +9689,8 @@
         </p:blipFill>
         <p:spPr>
           <a:xfrm>
-            <a:off x="10751095" y="1121331"/>
-            <a:ext cx="822960" cy="822960"/>
+            <a:off x="11489288" y="152278"/>
+            <a:ext cx="376284" cy="376284"/>
           </a:xfrm>
           <a:prstGeom prst="ellipse">
             <a:avLst/>
@@ -8576,8 +9779,8 @@
         </p:nvCxnSpPr>
         <p:spPr>
           <a:xfrm>
-            <a:off x="3661521" y="3492411"/>
-            <a:ext cx="2006589" cy="0"/>
+            <a:off x="3826848" y="3529833"/>
+            <a:ext cx="1813153" cy="0"/>
           </a:xfrm>
           <a:prstGeom prst="line">
             <a:avLst/>
@@ -8636,7 +9839,7 @@
         </p:nvCxnSpPr>
         <p:spPr>
           <a:xfrm>
-            <a:off x="214753" y="4958435"/>
+            <a:off x="216092" y="5268023"/>
             <a:ext cx="2328476" cy="0"/>
           </a:xfrm>
           <a:prstGeom prst="line">
@@ -8696,8 +9899,8 @@
         </p:nvCxnSpPr>
         <p:spPr>
           <a:xfrm>
-            <a:off x="7415361" y="1467713"/>
-            <a:ext cx="1677610" cy="0"/>
+            <a:off x="7515632" y="1540141"/>
+            <a:ext cx="1226542" cy="837"/>
           </a:xfrm>
           <a:prstGeom prst="line">
             <a:avLst/>
@@ -8756,7 +9959,7 @@
         </p:nvCxnSpPr>
         <p:spPr>
           <a:xfrm>
-            <a:off x="8175915" y="4774482"/>
+            <a:off x="7548495" y="4935102"/>
             <a:ext cx="2115155" cy="0"/>
           </a:xfrm>
           <a:prstGeom prst="line">
@@ -8797,12 +10000,40 @@
           </a:fontRef>
         </p:style>
       </p:cxnSp>
+      <p:graphicFrame>
+        <p:nvGraphicFramePr>
+          <p:cNvPr id="17" name="Chart 16">
+            <a:extLst>
+              <a:ext uri="{FF2B5EF4-FFF2-40B4-BE49-F238E27FC236}">
+                <a16:creationId xmlns:a16="http://schemas.microsoft.com/office/drawing/2014/main" id="{5AE5CE50-ADD5-9554-96C4-76188162E714}"/>
+              </a:ext>
+            </a:extLst>
+          </p:cNvPr>
+          <p:cNvGraphicFramePr/>
+          <p:nvPr>
+            <p:extLst>
+              <p:ext uri="{D42A27DB-BD31-4B8C-83A1-F6EECF244321}">
+                <p14:modId xmlns:p14="http://schemas.microsoft.com/office/powerpoint/2010/main" val="1243006662"/>
+              </p:ext>
+            </p:extLst>
+          </p:nvPr>
+        </p:nvGraphicFramePr>
+        <p:xfrm>
+          <a:off x="7426418" y="1658543"/>
+          <a:ext cx="2700585" cy="1795236"/>
+        </p:xfrm>
+        <a:graphic>
+          <a:graphicData uri="http://schemas.openxmlformats.org/drawingml/2006/chart">
+            <c:chart xmlns:c="http://schemas.openxmlformats.org/drawingml/2006/chart" xmlns:r="http://schemas.openxmlformats.org/officeDocument/2006/relationships" r:id="rId14"/>
+          </a:graphicData>
+        </a:graphic>
+      </p:graphicFrame>
       <p:pic>
         <p:nvPicPr>
-          <p:cNvPr id="461" name="Picture Placeholder 33" descr="Question mark with solid fill">
-            <a:extLst>
-              <a:ext uri="{FF2B5EF4-FFF2-40B4-BE49-F238E27FC236}">
-                <a16:creationId xmlns:a16="http://schemas.microsoft.com/office/drawing/2014/main" id="{DD83DCFC-C0FE-2E61-1458-006EEE933838}"/>
+          <p:cNvPr id="30" name="Picture 29">
+            <a:extLst>
+              <a:ext uri="{FF2B5EF4-FFF2-40B4-BE49-F238E27FC236}">
+                <a16:creationId xmlns:a16="http://schemas.microsoft.com/office/drawing/2014/main" id="{F94EFD76-C369-ECF3-6857-B780AE3F8D93}"/>
               </a:ext>
             </a:extLst>
           </p:cNvPr>
@@ -8812,35 +10043,101 @@
           <p:nvPr/>
         </p:nvPicPr>
         <p:blipFill>
-          <a:blip>
-            <a:extLst>
-              <a:ext uri="{96DAC541-7B7A-43D3-8B79-37D633B846F1}">
-                <asvg:svgBlip xmlns:asvg="http://schemas.microsoft.com/office/drawing/2016/SVG/main" r:embed="rId13"/>
-              </a:ext>
-            </a:extLst>
-          </a:blip>
-          <a:srcRect/>
-          <a:stretch/>
+          <a:blip r:embed="rId15"/>
+          <a:stretch>
+            <a:fillRect/>
+          </a:stretch>
         </p:blipFill>
         <p:spPr>
           <a:xfrm>
-            <a:off x="902519" y="2957481"/>
-            <a:ext cx="1520321" cy="1520321"/>
-          </a:xfrm>
-          <a:prstGeom prst="ellipse">
+            <a:off x="1164729" y="3153097"/>
+            <a:ext cx="2490055" cy="1443510"/>
+          </a:xfrm>
+          <a:prstGeom prst="rect">
             <a:avLst/>
           </a:prstGeom>
-          <a:ln w="22225">
-            <a:noFill/>
+          <a:ln w="38100" cap="sq">
+            <a:solidFill>
+              <a:srgbClr val="000000"/>
+            </a:solidFill>
+            <a:prstDash val="solid"/>
+            <a:miter lim="800000"/>
           </a:ln>
+          <a:effectLst>
+            <a:outerShdw blurRad="50800" dist="38100" dir="2700000" algn="tl" rotWithShape="0">
+              <a:srgbClr val="000000">
+                <a:alpha val="43000"/>
+              </a:srgbClr>
+            </a:outerShdw>
+          </a:effectLst>
         </p:spPr>
       </p:pic>
+      <p:cxnSp>
+        <p:nvCxnSpPr>
+          <p:cNvPr id="31" name="Straight Connector 30">
+            <a:extLst>
+              <a:ext uri="{FF2B5EF4-FFF2-40B4-BE49-F238E27FC236}">
+                <a16:creationId xmlns:a16="http://schemas.microsoft.com/office/drawing/2014/main" id="{FD5CE708-A853-2C3E-983C-35C803DD1CC8}"/>
+              </a:ext>
+              <a:ext uri="{C183D7F6-B498-43B3-948B-1728B52AA6E4}">
+                <adec:decorative xmlns:adec="http://schemas.microsoft.com/office/drawing/2017/decorative" val="1"/>
+              </a:ext>
+            </a:extLst>
+          </p:cNvPr>
+          <p:cNvCxnSpPr>
+            <a:cxnSpLocks/>
+          </p:cNvCxnSpPr>
+          <p:nvPr/>
+        </p:nvCxnSpPr>
+        <p:spPr>
+          <a:xfrm>
+            <a:off x="7233273" y="1032699"/>
+            <a:ext cx="0" cy="5814766"/>
+          </a:xfrm>
+          <a:prstGeom prst="line">
+            <a:avLst/>
+          </a:prstGeom>
+          <a:ln w="28575">
+            <a:gradFill>
+              <a:gsLst>
+                <a:gs pos="0">
+                  <a:schemeClr val="accent1">
+                    <a:lumMod val="60000"/>
+                    <a:lumOff val="40000"/>
+                  </a:schemeClr>
+                </a:gs>
+                <a:gs pos="100000">
+                  <a:schemeClr val="accent2">
+                    <a:lumMod val="60000"/>
+                    <a:lumOff val="40000"/>
+                  </a:schemeClr>
+                </a:gs>
+              </a:gsLst>
+              <a:lin ang="2160000" scaled="0"/>
+            </a:gradFill>
+          </a:ln>
+        </p:spPr>
+        <p:style>
+          <a:lnRef idx="1">
+            <a:schemeClr val="accent1"/>
+          </a:lnRef>
+          <a:fillRef idx="0">
+            <a:schemeClr val="accent1"/>
+          </a:fillRef>
+          <a:effectRef idx="0">
+            <a:schemeClr val="accent1"/>
+          </a:effectRef>
+          <a:fontRef idx="minor">
+            <a:schemeClr val="tx1"/>
+          </a:fontRef>
+        </p:style>
+      </p:cxnSp>
       <p:pic>
         <p:nvPicPr>
-          <p:cNvPr id="462" name="Picture Placeholder 33" descr="Question mark with solid fill">
-            <a:extLst>
-              <a:ext uri="{FF2B5EF4-FFF2-40B4-BE49-F238E27FC236}">
-                <a16:creationId xmlns:a16="http://schemas.microsoft.com/office/drawing/2014/main" id="{FD98C290-CD08-D4C8-C929-10AFCAE392E7}"/>
+          <p:cNvPr id="41" name="Picture 40">
+            <a:extLst>
+              <a:ext uri="{FF2B5EF4-FFF2-40B4-BE49-F238E27FC236}">
+                <a16:creationId xmlns:a16="http://schemas.microsoft.com/office/drawing/2014/main" id="{8F13D3BE-934C-8F0A-7F14-A4A6002998ED}"/>
               </a:ext>
             </a:extLst>
           </p:cNvPr>
@@ -8850,35 +10147,42 @@
           <p:nvPr/>
         </p:nvPicPr>
         <p:blipFill>
-          <a:blip>
-            <a:extLst>
-              <a:ext uri="{96DAC541-7B7A-43D3-8B79-37D633B846F1}">
-                <asvg:svgBlip xmlns:asvg="http://schemas.microsoft.com/office/drawing/2016/SVG/main" r:embed="rId13"/>
-              </a:ext>
-            </a:extLst>
-          </a:blip>
-          <a:srcRect/>
-          <a:stretch/>
+          <a:blip r:embed="rId16"/>
+          <a:srcRect l="608" t="15273" r="-608" b="13970"/>
+          <a:stretch>
+            <a:fillRect/>
+          </a:stretch>
         </p:blipFill>
         <p:spPr>
           <a:xfrm>
-            <a:off x="4607871" y="1235696"/>
-            <a:ext cx="1520321" cy="1520321"/>
-          </a:xfrm>
-          <a:prstGeom prst="ellipse">
+            <a:off x="3647745" y="1397303"/>
+            <a:ext cx="2233675" cy="1313222"/>
+          </a:xfrm>
+          <a:prstGeom prst="rect">
             <a:avLst/>
           </a:prstGeom>
-          <a:ln w="22225">
-            <a:noFill/>
+          <a:ln w="38100" cap="sq">
+            <a:solidFill>
+              <a:srgbClr val="000000"/>
+            </a:solidFill>
+            <a:prstDash val="solid"/>
+            <a:miter lim="800000"/>
           </a:ln>
+          <a:effectLst>
+            <a:outerShdw blurRad="50800" dist="38100" dir="2700000" algn="tl" rotWithShape="0">
+              <a:srgbClr val="000000">
+                <a:alpha val="43000"/>
+              </a:srgbClr>
+            </a:outerShdw>
+          </a:effectLst>
         </p:spPr>
       </p:pic>
       <p:pic>
         <p:nvPicPr>
-          <p:cNvPr id="463" name="Picture Placeholder 33" descr="Question mark with solid fill">
-            <a:extLst>
-              <a:ext uri="{FF2B5EF4-FFF2-40B4-BE49-F238E27FC236}">
-                <a16:creationId xmlns:a16="http://schemas.microsoft.com/office/drawing/2014/main" id="{627744F8-D50D-AA72-F5E3-C00E4FC17768}"/>
+          <p:cNvPr id="45" name="Picture 44">
+            <a:extLst>
+              <a:ext uri="{FF2B5EF4-FFF2-40B4-BE49-F238E27FC236}">
+                <a16:creationId xmlns:a16="http://schemas.microsoft.com/office/drawing/2014/main" id="{037669C3-50E5-D9D4-72CB-F4B3AAB9DEEE}"/>
               </a:ext>
             </a:extLst>
           </p:cNvPr>
@@ -8888,35 +10192,28 @@
           <p:nvPr/>
         </p:nvPicPr>
         <p:blipFill>
-          <a:blip>
-            <a:extLst>
-              <a:ext uri="{96DAC541-7B7A-43D3-8B79-37D633B846F1}">
-                <asvg:svgBlip xmlns:asvg="http://schemas.microsoft.com/office/drawing/2016/SVG/main" r:embed="rId13"/>
-              </a:ext>
-            </a:extLst>
-          </a:blip>
-          <a:srcRect/>
-          <a:stretch/>
+          <a:blip r:embed="rId17"/>
+          <a:srcRect l="933" t="3180" r="3871" b="21086"/>
+          <a:stretch>
+            <a:fillRect/>
+          </a:stretch>
         </p:blipFill>
         <p:spPr>
           <a:xfrm>
-            <a:off x="4449951" y="5071506"/>
-            <a:ext cx="1520321" cy="1520321"/>
-          </a:xfrm>
-          <a:prstGeom prst="ellipse">
+            <a:off x="1160470" y="4147169"/>
+            <a:ext cx="2486456" cy="449437"/>
+          </a:xfrm>
+          <a:prstGeom prst="rect">
             <a:avLst/>
           </a:prstGeom>
-          <a:ln w="22225">
-            <a:noFill/>
-          </a:ln>
         </p:spPr>
       </p:pic>
       <p:pic>
         <p:nvPicPr>
-          <p:cNvPr id="464" name="Picture Placeholder 33" descr="Question mark with solid fill">
-            <a:extLst>
-              <a:ext uri="{FF2B5EF4-FFF2-40B4-BE49-F238E27FC236}">
-                <a16:creationId xmlns:a16="http://schemas.microsoft.com/office/drawing/2014/main" id="{09211515-5B3C-0F2A-AC32-B033439D40A7}"/>
+          <p:cNvPr id="47" name="Picture 46">
+            <a:extLst>
+              <a:ext uri="{FF2B5EF4-FFF2-40B4-BE49-F238E27FC236}">
+                <a16:creationId xmlns:a16="http://schemas.microsoft.com/office/drawing/2014/main" id="{BFDE0753-056F-C374-0FF8-33E01B87FE9C}"/>
               </a:ext>
             </a:extLst>
           </p:cNvPr>
@@ -8926,29 +10223,239 @@
           <p:nvPr/>
         </p:nvPicPr>
         <p:blipFill>
-          <a:blip>
-            <a:extLst>
-              <a:ext uri="{96DAC541-7B7A-43D3-8B79-37D633B846F1}">
-                <asvg:svgBlip xmlns:asvg="http://schemas.microsoft.com/office/drawing/2016/SVG/main" r:embed="rId13"/>
-              </a:ext>
-            </a:extLst>
-          </a:blip>
-          <a:srcRect/>
-          <a:stretch/>
+          <a:blip r:embed="rId18"/>
+          <a:srcRect b="18555"/>
+          <a:stretch>
+            <a:fillRect/>
+          </a:stretch>
         </p:blipFill>
         <p:spPr>
           <a:xfrm>
-            <a:off x="8650799" y="1944291"/>
-            <a:ext cx="1520321" cy="1520321"/>
-          </a:xfrm>
-          <a:prstGeom prst="ellipse">
+            <a:off x="3713909" y="5039408"/>
+            <a:ext cx="2682805" cy="1496886"/>
+          </a:xfrm>
+          <a:prstGeom prst="rect">
             <a:avLst/>
           </a:prstGeom>
-          <a:ln w="22225">
-            <a:noFill/>
+          <a:ln w="38100" cap="sq">
+            <a:solidFill>
+              <a:srgbClr val="000000"/>
+            </a:solidFill>
+            <a:prstDash val="solid"/>
+            <a:miter lim="800000"/>
           </a:ln>
+          <a:effectLst>
+            <a:outerShdw blurRad="50800" dist="38100" dir="2700000" algn="tl" rotWithShape="0">
+              <a:srgbClr val="000000">
+                <a:alpha val="43000"/>
+              </a:srgbClr>
+            </a:outerShdw>
+          </a:effectLst>
         </p:spPr>
       </p:pic>
+      <p:sp>
+        <p:nvSpPr>
+          <p:cNvPr id="48" name="Text Placeholder 13">
+            <a:extLst>
+              <a:ext uri="{FF2B5EF4-FFF2-40B4-BE49-F238E27FC236}">
+                <a16:creationId xmlns:a16="http://schemas.microsoft.com/office/drawing/2014/main" id="{76289639-2865-1374-7CE0-28AB5C41F2D6}"/>
+              </a:ext>
+            </a:extLst>
+          </p:cNvPr>
+          <p:cNvSpPr txBox="1">
+            <a:spLocks/>
+          </p:cNvSpPr>
+          <p:nvPr/>
+        </p:nvSpPr>
+        <p:spPr>
+          <a:xfrm>
+            <a:off x="7380474" y="3514885"/>
+            <a:ext cx="4676255" cy="1422654"/>
+          </a:xfrm>
+          <a:prstGeom prst="rect">
+            <a:avLst/>
+          </a:prstGeom>
+        </p:spPr>
+        <p:txBody>
+          <a:bodyPr vert="horz" lIns="91440" tIns="0" rIns="91440" bIns="45720" rtlCol="0">
+            <a:noAutofit/>
+          </a:bodyPr>
+          <a:lstStyle>
+            <a:lvl1pPr marL="0" indent="0" algn="l" defTabSz="914400" rtl="0" eaLnBrk="1" latinLnBrk="0" hangingPunct="1">
+              <a:lnSpc>
+                <a:spcPct val="90000"/>
+              </a:lnSpc>
+              <a:spcBef>
+                <a:spcPts val="1000"/>
+              </a:spcBef>
+              <a:buFont typeface="Arial" panose="020B0604020202020204" pitchFamily="34" charset="0"/>
+              <a:buNone/>
+              <a:defRPr sz="1200" kern="1200" cap="none" baseline="0">
+                <a:solidFill>
+                  <a:schemeClr val="bg1"/>
+                </a:solidFill>
+                <a:latin typeface="+mn-lt"/>
+                <a:ea typeface="+mn-ea"/>
+                <a:cs typeface="+mn-cs"/>
+              </a:defRPr>
+            </a:lvl1pPr>
+            <a:lvl2pPr marL="457200" indent="0" algn="l" defTabSz="914400" rtl="0" eaLnBrk="1" latinLnBrk="0" hangingPunct="1">
+              <a:lnSpc>
+                <a:spcPct val="90000"/>
+              </a:lnSpc>
+              <a:spcBef>
+                <a:spcPts val="500"/>
+              </a:spcBef>
+              <a:buFont typeface="Arial" panose="020B0604020202020204" pitchFamily="34" charset="0"/>
+              <a:buNone/>
+              <a:defRPr sz="1800" kern="1200">
+                <a:solidFill>
+                  <a:schemeClr val="bg1"/>
+                </a:solidFill>
+                <a:latin typeface="+mn-lt"/>
+                <a:ea typeface="+mn-ea"/>
+                <a:cs typeface="+mn-cs"/>
+              </a:defRPr>
+            </a:lvl2pPr>
+            <a:lvl3pPr marL="914400" indent="0" algn="l" defTabSz="914400" rtl="0" eaLnBrk="1" latinLnBrk="0" hangingPunct="1">
+              <a:lnSpc>
+                <a:spcPct val="90000"/>
+              </a:lnSpc>
+              <a:spcBef>
+                <a:spcPts val="500"/>
+              </a:spcBef>
+              <a:buFont typeface="Arial" panose="020B0604020202020204" pitchFamily="34" charset="0"/>
+              <a:buNone/>
+              <a:defRPr sz="1800" kern="1200">
+                <a:solidFill>
+                  <a:schemeClr val="bg1"/>
+                </a:solidFill>
+                <a:latin typeface="+mn-lt"/>
+                <a:ea typeface="+mn-ea"/>
+                <a:cs typeface="+mn-cs"/>
+              </a:defRPr>
+            </a:lvl3pPr>
+            <a:lvl4pPr marL="1371600" indent="0" algn="l" defTabSz="914400" rtl="0" eaLnBrk="1" latinLnBrk="0" hangingPunct="1">
+              <a:lnSpc>
+                <a:spcPct val="90000"/>
+              </a:lnSpc>
+              <a:spcBef>
+                <a:spcPts val="500"/>
+              </a:spcBef>
+              <a:buFont typeface="Arial" panose="020B0604020202020204" pitchFamily="34" charset="0"/>
+              <a:buNone/>
+              <a:defRPr sz="1800" kern="1200">
+                <a:solidFill>
+                  <a:schemeClr val="bg1"/>
+                </a:solidFill>
+                <a:latin typeface="+mn-lt"/>
+                <a:ea typeface="+mn-ea"/>
+                <a:cs typeface="+mn-cs"/>
+              </a:defRPr>
+            </a:lvl4pPr>
+            <a:lvl5pPr marL="1828800" indent="0" algn="l" defTabSz="914400" rtl="0" eaLnBrk="1" latinLnBrk="0" hangingPunct="1">
+              <a:lnSpc>
+                <a:spcPct val="90000"/>
+              </a:lnSpc>
+              <a:spcBef>
+                <a:spcPts val="500"/>
+              </a:spcBef>
+              <a:buFont typeface="Arial" panose="020B0604020202020204" pitchFamily="34" charset="0"/>
+              <a:buNone/>
+              <a:defRPr sz="1800" kern="1200">
+                <a:solidFill>
+                  <a:schemeClr val="bg1"/>
+                </a:solidFill>
+                <a:latin typeface="+mn-lt"/>
+                <a:ea typeface="+mn-ea"/>
+                <a:cs typeface="+mn-cs"/>
+              </a:defRPr>
+            </a:lvl5pPr>
+            <a:lvl6pPr marL="2514600" indent="-228600" algn="l" defTabSz="914400" rtl="0" eaLnBrk="1" latinLnBrk="0" hangingPunct="1">
+              <a:lnSpc>
+                <a:spcPct val="90000"/>
+              </a:lnSpc>
+              <a:spcBef>
+                <a:spcPts val="500"/>
+              </a:spcBef>
+              <a:buFont typeface="Arial" panose="020B0604020202020204" pitchFamily="34" charset="0"/>
+              <a:buChar char="•"/>
+              <a:defRPr sz="1800" kern="1200">
+                <a:solidFill>
+                  <a:schemeClr val="tx1"/>
+                </a:solidFill>
+                <a:latin typeface="+mn-lt"/>
+                <a:ea typeface="+mn-ea"/>
+                <a:cs typeface="+mn-cs"/>
+              </a:defRPr>
+            </a:lvl6pPr>
+            <a:lvl7pPr marL="2971800" indent="-228600" algn="l" defTabSz="914400" rtl="0" eaLnBrk="1" latinLnBrk="0" hangingPunct="1">
+              <a:lnSpc>
+                <a:spcPct val="90000"/>
+              </a:lnSpc>
+              <a:spcBef>
+                <a:spcPts val="500"/>
+              </a:spcBef>
+              <a:buFont typeface="Arial" panose="020B0604020202020204" pitchFamily="34" charset="0"/>
+              <a:buChar char="•"/>
+              <a:defRPr sz="1800" kern="1200">
+                <a:solidFill>
+                  <a:schemeClr val="tx1"/>
+                </a:solidFill>
+                <a:latin typeface="+mn-lt"/>
+                <a:ea typeface="+mn-ea"/>
+                <a:cs typeface="+mn-cs"/>
+              </a:defRPr>
+            </a:lvl7pPr>
+            <a:lvl8pPr marL="3429000" indent="-228600" algn="l" defTabSz="914400" rtl="0" eaLnBrk="1" latinLnBrk="0" hangingPunct="1">
+              <a:lnSpc>
+                <a:spcPct val="90000"/>
+              </a:lnSpc>
+              <a:spcBef>
+                <a:spcPts val="500"/>
+              </a:spcBef>
+              <a:buFont typeface="Arial" panose="020B0604020202020204" pitchFamily="34" charset="0"/>
+              <a:buChar char="•"/>
+              <a:defRPr sz="1800" kern="1200">
+                <a:solidFill>
+                  <a:schemeClr val="tx1"/>
+                </a:solidFill>
+                <a:latin typeface="+mn-lt"/>
+                <a:ea typeface="+mn-ea"/>
+                <a:cs typeface="+mn-cs"/>
+              </a:defRPr>
+            </a:lvl8pPr>
+            <a:lvl9pPr marL="3886200" indent="-228600" algn="l" defTabSz="914400" rtl="0" eaLnBrk="1" latinLnBrk="0" hangingPunct="1">
+              <a:lnSpc>
+                <a:spcPct val="90000"/>
+              </a:lnSpc>
+              <a:spcBef>
+                <a:spcPts val="500"/>
+              </a:spcBef>
+              <a:buFont typeface="Arial" panose="020B0604020202020204" pitchFamily="34" charset="0"/>
+              <a:buChar char="•"/>
+              <a:defRPr sz="1800" kern="1200">
+                <a:solidFill>
+                  <a:schemeClr val="tx1"/>
+                </a:solidFill>
+                <a:latin typeface="+mn-lt"/>
+                <a:ea typeface="+mn-ea"/>
+                <a:cs typeface="+mn-cs"/>
+              </a:defRPr>
+            </a:lvl9pPr>
+          </a:lstStyle>
+          <a:p>
+            <a:r>
+              <a:rPr lang="en-US" sz="900" dirty="0">
+                <a:solidFill>
+                  <a:srgbClr val="FF0000"/>
+                </a:solidFill>
+              </a:rPr>
+              <a:t>Notes about results here.</a:t>
+            </a:r>
+          </a:p>
+        </p:txBody>
+      </p:sp>
     </p:spTree>
     <p:extLst>
       <p:ext uri="{BB962C8B-B14F-4D97-AF65-F5344CB8AC3E}">
@@ -10843,6 +12350,35 @@
 </file>
 
 <file path=customXml/item1.xml><?xml version="1.0" encoding="utf-8"?>
+<p:properties xmlns:p="http://schemas.microsoft.com/office/2006/metadata/properties" xmlns:xsi="http://www.w3.org/2001/XMLSchema-instance" xmlns:pc="http://schemas.microsoft.com/office/infopath/2007/PartnerControls">
+  <documentManagement>
+    <_ip_UnifiedCompliancePolicyUIAction xmlns="http://schemas.microsoft.com/sharepoint/v3" xsi:nil="true"/>
+    <Image xmlns="71af3243-3dd4-4a8d-8c0d-dd76da1f02a5">
+      <Url xsi:nil="true"/>
+      <Description xsi:nil="true"/>
+    </Image>
+    <Status xmlns="71af3243-3dd4-4a8d-8c0d-dd76da1f02a5">Not started</Status>
+    <Background xmlns="71af3243-3dd4-4a8d-8c0d-dd76da1f02a5">false</Background>
+    <_ip_UnifiedCompliancePolicyProperties xmlns="http://schemas.microsoft.com/sharepoint/v3" xsi:nil="true"/>
+    <ImageTagsTaxHTField xmlns="71af3243-3dd4-4a8d-8c0d-dd76da1f02a5">
+      <Terms xmlns="http://schemas.microsoft.com/office/infopath/2007/PartnerControls"/>
+    </ImageTagsTaxHTField>
+    <TaxCatchAll xmlns="230e9df3-be65-4c73-a93b-d1236ebd677e" xsi:nil="true"/>
+    <MediaServiceKeyPoints xmlns="71af3243-3dd4-4a8d-8c0d-dd76da1f02a5" xsi:nil="true"/>
+  </documentManagement>
+</p:properties>
+</file>
+
+<file path=customXml/item2.xml><?xml version="1.0" encoding="utf-8"?>
+<?mso-contentType ?>
+<FormTemplates xmlns="http://schemas.microsoft.com/sharepoint/v3/contenttype/forms">
+  <Display>DocumentLibraryForm</Display>
+  <Edit>DocumentLibraryForm</Edit>
+  <New>DocumentLibraryForm</New>
+</FormTemplates>
+</file>
+
+<file path=customXml/item3.xml><?xml version="1.0" encoding="utf-8"?>
 <ct:contentTypeSchema xmlns:ct="http://schemas.microsoft.com/office/2006/metadata/contentType" xmlns:ma="http://schemas.microsoft.com/office/2006/metadata/properties/metaAttributes" ct:_="" ma:_="" ma:contentTypeName="Document" ma:contentTypeID="0x01010079F111ED35F8CC479449609E8A0923A6" ma:contentTypeVersion="27" ma:contentTypeDescription="Create a new document." ma:contentTypeScope="" ma:versionID="c6f9a84f66a9c8b9a21755b9ffafb945">
   <xsd:schema xmlns:xsd="http://www.w3.org/2001/XMLSchema" xmlns:xs="http://www.w3.org/2001/XMLSchema" xmlns:p="http://schemas.microsoft.com/office/2006/metadata/properties" xmlns:ns1="http://schemas.microsoft.com/sharepoint/v3" xmlns:ns2="71af3243-3dd4-4a8d-8c0d-dd76da1f02a5" xmlns:ns3="16c05727-aa75-4e4a-9b5f-8a80a1165891" xmlns:ns4="230e9df3-be65-4c73-a93b-d1236ebd677e" targetNamespace="http://schemas.microsoft.com/office/2006/metadata/properties" ma:root="true" ma:fieldsID="27df39e3e7036dff54f89ddd5805ce72" ns1:_="" ns2:_="" ns3:_="" ns4:_="">
     <xsd:import namespace="http://schemas.microsoft.com/sharepoint/v3"/>
@@ -11148,36 +12684,27 @@
 </ct:contentTypeSchema>
 </file>
 
-<file path=customXml/item2.xml><?xml version="1.0" encoding="utf-8"?>
-<?mso-contentType ?>
-<FormTemplates xmlns="http://schemas.microsoft.com/sharepoint/v3/contenttype/forms">
-  <Display>DocumentLibraryForm</Display>
-  <Edit>DocumentLibraryForm</Edit>
-  <New>DocumentLibraryForm</New>
-</FormTemplates>
+<file path=customXml/itemProps1.xml><?xml version="1.0" encoding="utf-8"?>
+<ds:datastoreItem xmlns:ds="http://schemas.openxmlformats.org/officeDocument/2006/customXml" ds:itemID="{A0FF118E-0388-4333-9D85-CA81E2C8D164}">
+  <ds:schemaRefs>
+    <ds:schemaRef ds:uri="http://schemas.microsoft.com/office/2006/metadata/properties"/>
+    <ds:schemaRef ds:uri="http://schemas.microsoft.com/office/infopath/2007/PartnerControls"/>
+    <ds:schemaRef ds:uri="http://schemas.microsoft.com/sharepoint/v3"/>
+    <ds:schemaRef ds:uri="71af3243-3dd4-4a8d-8c0d-dd76da1f02a5"/>
+    <ds:schemaRef ds:uri="230e9df3-be65-4c73-a93b-d1236ebd677e"/>
+  </ds:schemaRefs>
+</ds:datastoreItem>
 </file>
 
-<file path=customXml/item3.xml><?xml version="1.0" encoding="utf-8"?>
-<p:properties xmlns:p="http://schemas.microsoft.com/office/2006/metadata/properties" xmlns:xsi="http://www.w3.org/2001/XMLSchema-instance" xmlns:pc="http://schemas.microsoft.com/office/infopath/2007/PartnerControls">
-  <documentManagement>
-    <_ip_UnifiedCompliancePolicyUIAction xmlns="http://schemas.microsoft.com/sharepoint/v3" xsi:nil="true"/>
-    <Image xmlns="71af3243-3dd4-4a8d-8c0d-dd76da1f02a5">
-      <Url xsi:nil="true"/>
-      <Description xsi:nil="true"/>
-    </Image>
-    <Status xmlns="71af3243-3dd4-4a8d-8c0d-dd76da1f02a5">Not started</Status>
-    <Background xmlns="71af3243-3dd4-4a8d-8c0d-dd76da1f02a5">false</Background>
-    <_ip_UnifiedCompliancePolicyProperties xmlns="http://schemas.microsoft.com/sharepoint/v3" xsi:nil="true"/>
-    <ImageTagsTaxHTField xmlns="71af3243-3dd4-4a8d-8c0d-dd76da1f02a5">
-      <Terms xmlns="http://schemas.microsoft.com/office/infopath/2007/PartnerControls"/>
-    </ImageTagsTaxHTField>
-    <TaxCatchAll xmlns="230e9df3-be65-4c73-a93b-d1236ebd677e" xsi:nil="true"/>
-    <MediaServiceKeyPoints xmlns="71af3243-3dd4-4a8d-8c0d-dd76da1f02a5" xsi:nil="true"/>
-  </documentManagement>
-</p:properties>
+<file path=customXml/itemProps2.xml><?xml version="1.0" encoding="utf-8"?>
+<ds:datastoreItem xmlns:ds="http://schemas.openxmlformats.org/officeDocument/2006/customXml" ds:itemID="{836CDCFB-1550-438B-8C76-AE76FBCD3159}">
+  <ds:schemaRefs>
+    <ds:schemaRef ds:uri="http://schemas.microsoft.com/sharepoint/v3/contenttype/forms"/>
+  </ds:schemaRefs>
+</ds:datastoreItem>
 </file>
 
-<file path=customXml/itemProps1.xml><?xml version="1.0" encoding="utf-8"?>
+<file path=customXml/itemProps3.xml><?xml version="1.0" encoding="utf-8"?>
 <ds:datastoreItem xmlns:ds="http://schemas.openxmlformats.org/officeDocument/2006/customXml" ds:itemID="{B0A68F62-F174-4677-B07F-B071C4E6C2C1}">
   <ds:schemaRefs>
     <ds:schemaRef ds:uri="http://schemas.microsoft.com/office/2006/metadata/contentType"/>
@@ -11198,26 +12725,6 @@
 </ds:datastoreItem>
 </file>
 
-<file path=customXml/itemProps2.xml><?xml version="1.0" encoding="utf-8"?>
-<ds:datastoreItem xmlns:ds="http://schemas.openxmlformats.org/officeDocument/2006/customXml" ds:itemID="{836CDCFB-1550-438B-8C76-AE76FBCD3159}">
-  <ds:schemaRefs>
-    <ds:schemaRef ds:uri="http://schemas.microsoft.com/sharepoint/v3/contenttype/forms"/>
-  </ds:schemaRefs>
-</ds:datastoreItem>
-</file>
-
-<file path=customXml/itemProps3.xml><?xml version="1.0" encoding="utf-8"?>
-<ds:datastoreItem xmlns:ds="http://schemas.openxmlformats.org/officeDocument/2006/customXml" ds:itemID="{A0FF118E-0388-4333-9D85-CA81E2C8D164}">
-  <ds:schemaRefs>
-    <ds:schemaRef ds:uri="http://schemas.microsoft.com/office/2006/metadata/properties"/>
-    <ds:schemaRef ds:uri="http://schemas.microsoft.com/office/infopath/2007/PartnerControls"/>
-    <ds:schemaRef ds:uri="http://schemas.microsoft.com/sharepoint/v3"/>
-    <ds:schemaRef ds:uri="71af3243-3dd4-4a8d-8c0d-dd76da1f02a5"/>
-    <ds:schemaRef ds:uri="230e9df3-be65-4c73-a93b-d1236ebd677e"/>
-  </ds:schemaRefs>
-</ds:datastoreItem>
-</file>
-
 <file path=docMetadata/LabelInfo.xml><?xml version="1.0" encoding="utf-8"?>
 <clbl:labelList xmlns:clbl="http://schemas.microsoft.com/office/2020/mipLabelMetadata"/>
 </file>
--- a/IRP Poster.pptx
+++ b/IRP Poster.pptx
@@ -8563,12 +8563,50 @@
           <a:chExt cx="0" cy="0"/>
         </a:xfrm>
       </p:grpSpPr>
-      <p:sp>
-        <p:nvSpPr>
-          <p:cNvPr id="49" name="Rectangle: Rounded Corners 48">
-            <a:extLst>
-              <a:ext uri="{FF2B5EF4-FFF2-40B4-BE49-F238E27FC236}">
-                <a16:creationId xmlns:a16="http://schemas.microsoft.com/office/drawing/2014/main" id="{2B149DF3-3518-107D-96F5-57AB88FD68F6}"/>
+      <p:pic>
+        <p:nvPicPr>
+          <p:cNvPr id="21" name="Picture 20">
+            <a:extLst>
+              <a:ext uri="{FF2B5EF4-FFF2-40B4-BE49-F238E27FC236}">
+                <a16:creationId xmlns:a16="http://schemas.microsoft.com/office/drawing/2014/main" id="{31D42FCE-69C5-E03D-091A-3A10E42ECD0F}"/>
+              </a:ext>
+            </a:extLst>
+          </p:cNvPr>
+          <p:cNvPicPr>
+            <a:picLocks noChangeAspect="1"/>
+          </p:cNvPicPr>
+          <p:nvPr/>
+        </p:nvPicPr>
+        <p:blipFill>
+          <a:blip r:embed="rId3">
+            <a:duotone>
+              <a:prstClr val="black"/>
+              <a:schemeClr val="accent4">
+                <a:tint val="45000"/>
+                <a:satMod val="400000"/>
+              </a:schemeClr>
+            </a:duotone>
+          </a:blip>
+          <a:stretch>
+            <a:fillRect/>
+          </a:stretch>
+        </p:blipFill>
+        <p:spPr>
+          <a:xfrm>
+            <a:off x="-7289" y="1051642"/>
+            <a:ext cx="12199289" cy="5888349"/>
+          </a:xfrm>
+          <a:prstGeom prst="rect">
+            <a:avLst/>
+          </a:prstGeom>
+        </p:spPr>
+      </p:pic>
+      <p:sp>
+        <p:nvSpPr>
+          <p:cNvPr id="13" name="Rectangle: Rounded Corners 12">
+            <a:extLst>
+              <a:ext uri="{FF2B5EF4-FFF2-40B4-BE49-F238E27FC236}">
+                <a16:creationId xmlns:a16="http://schemas.microsoft.com/office/drawing/2014/main" id="{5036CD6E-6F2A-2E8A-B424-5E000C0AD5F8}"/>
               </a:ext>
             </a:extLst>
           </p:cNvPr>
@@ -8577,8 +8615,8 @@
         </p:nvSpPr>
         <p:spPr>
           <a:xfrm>
-            <a:off x="7438257" y="5095622"/>
-            <a:ext cx="4605665" cy="1613224"/>
+            <a:off x="7368851" y="1124365"/>
+            <a:ext cx="3419288" cy="2009449"/>
           </a:xfrm>
           <a:prstGeom prst="roundRect">
             <a:avLst>
@@ -8615,12 +8653,50 @@
           </a:p>
         </p:txBody>
       </p:sp>
-      <p:sp>
-        <p:nvSpPr>
-          <p:cNvPr id="26" name="Rectangle: Rounded Corners 25">
-            <a:extLst>
-              <a:ext uri="{FF2B5EF4-FFF2-40B4-BE49-F238E27FC236}">
-                <a16:creationId xmlns:a16="http://schemas.microsoft.com/office/drawing/2014/main" id="{E3702137-7B68-0942-D341-7B268DDDF63D}"/>
+      <p:pic>
+        <p:nvPicPr>
+          <p:cNvPr id="37" name="Picture Placeholder 33" descr="Music notation with solid fill">
+            <a:extLst>
+              <a:ext uri="{FF2B5EF4-FFF2-40B4-BE49-F238E27FC236}">
+                <a16:creationId xmlns:a16="http://schemas.microsoft.com/office/drawing/2014/main" id="{D5F5E0E8-7F9D-1052-4DB0-3C9EB2B06384}"/>
+              </a:ext>
+            </a:extLst>
+          </p:cNvPr>
+          <p:cNvPicPr>
+            <a:picLocks noChangeAspect="1"/>
+          </p:cNvPicPr>
+          <p:nvPr/>
+        </p:nvPicPr>
+        <p:blipFill>
+          <a:blip>
+            <a:extLst>
+              <a:ext uri="{96DAC541-7B7A-43D3-8B79-37D633B846F1}">
+                <asvg:svgBlip xmlns:asvg="http://schemas.microsoft.com/office/drawing/2016/SVG/main" r:embed="rId4"/>
+              </a:ext>
+            </a:extLst>
+          </a:blip>
+          <a:srcRect/>
+          <a:stretch/>
+        </p:blipFill>
+        <p:spPr>
+          <a:xfrm>
+            <a:off x="-1144339" y="-2453227"/>
+            <a:ext cx="981345" cy="12510591"/>
+          </a:xfrm>
+          <a:prstGeom prst="ellipse">
+            <a:avLst/>
+          </a:prstGeom>
+          <a:ln w="22225">
+            <a:noFill/>
+          </a:ln>
+        </p:spPr>
+      </p:pic>
+      <p:sp>
+        <p:nvSpPr>
+          <p:cNvPr id="49" name="Rectangle: Rounded Corners 48">
+            <a:extLst>
+              <a:ext uri="{FF2B5EF4-FFF2-40B4-BE49-F238E27FC236}">
+                <a16:creationId xmlns:a16="http://schemas.microsoft.com/office/drawing/2014/main" id="{2B149DF3-3518-107D-96F5-57AB88FD68F6}"/>
               </a:ext>
             </a:extLst>
           </p:cNvPr>
@@ -8629,8 +8705,8 @@
         </p:nvSpPr>
         <p:spPr>
           <a:xfrm>
-            <a:off x="3760032" y="3124857"/>
-            <a:ext cx="3298786" cy="1613224"/>
+            <a:off x="7422105" y="3175223"/>
+            <a:ext cx="4676255" cy="2680596"/>
           </a:xfrm>
           <a:prstGeom prst="roundRect">
             <a:avLst>
@@ -8667,42 +8743,12 @@
           </a:p>
         </p:txBody>
       </p:sp>
-      <p:pic>
-        <p:nvPicPr>
-          <p:cNvPr id="21" name="Picture 20">
-            <a:extLst>
-              <a:ext uri="{FF2B5EF4-FFF2-40B4-BE49-F238E27FC236}">
-                <a16:creationId xmlns:a16="http://schemas.microsoft.com/office/drawing/2014/main" id="{31D42FCE-69C5-E03D-091A-3A10E42ECD0F}"/>
-              </a:ext>
-            </a:extLst>
-          </p:cNvPr>
-          <p:cNvPicPr>
-            <a:picLocks noChangeAspect="1"/>
-          </p:cNvPicPr>
-          <p:nvPr/>
-        </p:nvPicPr>
-        <p:blipFill>
-          <a:blip r:embed="rId3"/>
-          <a:stretch>
-            <a:fillRect/>
-          </a:stretch>
-        </p:blipFill>
-        <p:spPr>
-          <a:xfrm>
-            <a:off x="12615550" y="1830991"/>
-            <a:ext cx="1683475" cy="778897"/>
-          </a:xfrm>
-          <a:prstGeom prst="rect">
-            <a:avLst/>
-          </a:prstGeom>
-        </p:spPr>
-      </p:pic>
-      <p:sp>
-        <p:nvSpPr>
-          <p:cNvPr id="23" name="Rectangle: Rounded Corners 22">
-            <a:extLst>
-              <a:ext uri="{FF2B5EF4-FFF2-40B4-BE49-F238E27FC236}">
-                <a16:creationId xmlns:a16="http://schemas.microsoft.com/office/drawing/2014/main" id="{7B161D79-24C0-1DBA-EC5D-4ACC645FBC7D}"/>
+      <p:sp>
+        <p:nvSpPr>
+          <p:cNvPr id="26" name="Rectangle: Rounded Corners 25">
+            <a:extLst>
+              <a:ext uri="{FF2B5EF4-FFF2-40B4-BE49-F238E27FC236}">
+                <a16:creationId xmlns:a16="http://schemas.microsoft.com/office/drawing/2014/main" id="{E3702137-7B68-0942-D341-7B268DDDF63D}"/>
               </a:ext>
             </a:extLst>
           </p:cNvPr>
@@ -8711,12 +8757,12 @@
         </p:nvSpPr>
         <p:spPr>
           <a:xfrm>
-            <a:off x="157982" y="4892716"/>
-            <a:ext cx="3367573" cy="1865169"/>
+            <a:off x="3760032" y="3124857"/>
+            <a:ext cx="3298786" cy="1613224"/>
           </a:xfrm>
           <a:prstGeom prst="roundRect">
             <a:avLst>
-              <a:gd name="adj" fmla="val 4163"/>
+              <a:gd name="adj" fmla="val 7621"/>
             </a:avLst>
           </a:prstGeom>
           <a:solidFill>
@@ -8745,16 +8791,16 @@
           <a:lstStyle/>
           <a:p>
             <a:pPr algn="ctr"/>
-            <a:endParaRPr lang="en-GB" dirty="0"/>
-          </a:p>
-        </p:txBody>
-      </p:sp>
-      <p:sp>
-        <p:nvSpPr>
-          <p:cNvPr id="22" name="Rectangle: Rounded Corners 21">
-            <a:extLst>
-              <a:ext uri="{FF2B5EF4-FFF2-40B4-BE49-F238E27FC236}">
-                <a16:creationId xmlns:a16="http://schemas.microsoft.com/office/drawing/2014/main" id="{D5F40875-B05D-EA92-6D1C-618B270BAC36}"/>
+            <a:endParaRPr lang="en-GB"/>
+          </a:p>
+        </p:txBody>
+      </p:sp>
+      <p:sp>
+        <p:nvSpPr>
+          <p:cNvPr id="23" name="Rectangle: Rounded Corners 22">
+            <a:extLst>
+              <a:ext uri="{FF2B5EF4-FFF2-40B4-BE49-F238E27FC236}">
+                <a16:creationId xmlns:a16="http://schemas.microsoft.com/office/drawing/2014/main" id="{7B161D79-24C0-1DBA-EC5D-4ACC645FBC7D}"/>
               </a:ext>
             </a:extLst>
           </p:cNvPr>
@@ -8763,12 +8809,12 @@
         </p:nvSpPr>
         <p:spPr>
           <a:xfrm>
-            <a:off x="171671" y="1222490"/>
-            <a:ext cx="3328054" cy="1684745"/>
+            <a:off x="157982" y="4892716"/>
+            <a:ext cx="3367573" cy="1865169"/>
           </a:xfrm>
           <a:prstGeom prst="roundRect">
             <a:avLst>
-              <a:gd name="adj" fmla="val 7621"/>
+              <a:gd name="adj" fmla="val 4163"/>
             </a:avLst>
           </a:prstGeom>
           <a:solidFill>
@@ -8797,6 +8843,58 @@
           <a:lstStyle/>
           <a:p>
             <a:pPr algn="ctr"/>
+            <a:endParaRPr lang="en-GB" dirty="0"/>
+          </a:p>
+        </p:txBody>
+      </p:sp>
+      <p:sp>
+        <p:nvSpPr>
+          <p:cNvPr id="22" name="Rectangle: Rounded Corners 21">
+            <a:extLst>
+              <a:ext uri="{FF2B5EF4-FFF2-40B4-BE49-F238E27FC236}">
+                <a16:creationId xmlns:a16="http://schemas.microsoft.com/office/drawing/2014/main" id="{D5F40875-B05D-EA92-6D1C-618B270BAC36}"/>
+              </a:ext>
+            </a:extLst>
+          </p:cNvPr>
+          <p:cNvSpPr/>
+          <p:nvPr/>
+        </p:nvSpPr>
+        <p:spPr>
+          <a:xfrm>
+            <a:off x="171671" y="1222490"/>
+            <a:ext cx="3328054" cy="1684745"/>
+          </a:xfrm>
+          <a:prstGeom prst="roundRect">
+            <a:avLst>
+              <a:gd name="adj" fmla="val 7621"/>
+            </a:avLst>
+          </a:prstGeom>
+          <a:solidFill>
+            <a:schemeClr val="dk1"/>
+          </a:solidFill>
+          <a:ln>
+            <a:noFill/>
+          </a:ln>
+        </p:spPr>
+        <p:style>
+          <a:lnRef idx="0">
+            <a:scrgbClr r="0" g="0" b="0"/>
+          </a:lnRef>
+          <a:fillRef idx="0">
+            <a:scrgbClr r="0" g="0" b="0"/>
+          </a:fillRef>
+          <a:effectRef idx="0">
+            <a:scrgbClr r="0" g="0" b="0"/>
+          </a:effectRef>
+          <a:fontRef idx="minor">
+            <a:schemeClr val="lt1"/>
+          </a:fontRef>
+        </p:style>
+        <p:txBody>
+          <a:bodyPr rtlCol="0" anchor="ctr"/>
+          <a:lstStyle/>
+          <a:p>
+            <a:pPr algn="ctr"/>
             <a:endParaRPr lang="en-GB"/>
           </a:p>
         </p:txBody>
@@ -8964,7 +9062,7 @@
           <a:blip>
             <a:extLst>
               <a:ext uri="{96DAC541-7B7A-43D3-8B79-37D633B846F1}">
-                <asvg:svgBlip xmlns:asvg="http://schemas.microsoft.com/office/drawing/2016/SVG/main" r:embed="rId4"/>
+                <asvg:svgBlip xmlns:asvg="http://schemas.microsoft.com/office/drawing/2016/SVG/main" r:embed="rId5"/>
               </a:ext>
             </a:extLst>
           </a:blip>
@@ -9122,7 +9220,7 @@
           <a:blip>
             <a:extLst>
               <a:ext uri="{96DAC541-7B7A-43D3-8B79-37D633B846F1}">
-                <asvg:svgBlip xmlns:asvg="http://schemas.microsoft.com/office/drawing/2016/SVG/main" r:embed="rId5"/>
+                <asvg:svgBlip xmlns:asvg="http://schemas.microsoft.com/office/drawing/2016/SVG/main" r:embed="rId6"/>
               </a:ext>
             </a:extLst>
           </a:blip>
@@ -9245,7 +9343,7 @@
           <a:blip>
             <a:extLst>
               <a:ext uri="{96DAC541-7B7A-43D3-8B79-37D633B846F1}">
-                <asvg:svgBlip xmlns:asvg="http://schemas.microsoft.com/office/drawing/2016/SVG/main" r:embed="rId6"/>
+                <asvg:svgBlip xmlns:asvg="http://schemas.microsoft.com/office/drawing/2016/SVG/main" r:embed="rId7"/>
               </a:ext>
             </a:extLst>
           </a:blip>
@@ -9277,8 +9375,8 @@
         </p:nvSpPr>
         <p:spPr>
           <a:xfrm>
-            <a:off x="7426418" y="1220894"/>
-            <a:ext cx="1996440" cy="381190"/>
+            <a:off x="7474270" y="1201611"/>
+            <a:ext cx="1586982" cy="281908"/>
           </a:xfrm>
         </p:spPr>
         <p:txBody>
@@ -9312,7 +9410,7 @@
           <a:blip>
             <a:extLst>
               <a:ext uri="{96DAC541-7B7A-43D3-8B79-37D633B846F1}">
-                <asvg:svgBlip xmlns:asvg="http://schemas.microsoft.com/office/drawing/2016/SVG/main" r:embed="rId7"/>
+                <asvg:svgBlip xmlns:asvg="http://schemas.microsoft.com/office/drawing/2016/SVG/main" r:embed="rId8"/>
               </a:ext>
             </a:extLst>
           </a:blip>
@@ -9321,8 +9419,8 @@
         </p:blipFill>
         <p:spPr>
           <a:xfrm>
-            <a:off x="8751201" y="1160761"/>
-            <a:ext cx="457200" cy="457200"/>
+            <a:off x="8799053" y="1141478"/>
+            <a:ext cx="363431" cy="363431"/>
           </a:xfrm>
         </p:spPr>
       </p:pic>
@@ -9344,7 +9442,7 @@
         </p:nvSpPr>
         <p:spPr>
           <a:xfrm>
-            <a:off x="7455374" y="4638422"/>
+            <a:off x="7439222" y="3321168"/>
             <a:ext cx="2656332" cy="381190"/>
           </a:xfrm>
         </p:spPr>
@@ -9377,8 +9475,8 @@
         </p:nvSpPr>
         <p:spPr>
           <a:xfrm>
-            <a:off x="7469382" y="5165445"/>
-            <a:ext cx="4676255" cy="1422654"/>
+            <a:off x="7453230" y="3848190"/>
+            <a:ext cx="4676255" cy="2007629"/>
           </a:xfrm>
         </p:spPr>
         <p:txBody>
@@ -9386,34 +9484,69 @@
           <a:lstStyle/>
           <a:p>
             <a:r>
-              <a:rPr lang="en-US" sz="900" dirty="0"/>
+              <a:rPr lang="en-US" sz="800" dirty="0"/>
               <a:t>In conclusion, the results demonstrate …………………………………………………………………………………….</a:t>
             </a:r>
           </a:p>
           <a:p>
             <a:r>
-              <a:rPr lang="en-US" sz="900" dirty="0"/>
-              <a:t>Producing track sequencer music files can easily be created and altered, but require specialist tools and training. Using a track sequencer only requires music knowledge; implementing it into a project needs programming skills.</a:t>
+              <a:rPr lang="en-US" sz="800" dirty="0"/>
+              <a:t>This method requires further study to ascertain its functionality within the creative industry.</a:t>
             </a:r>
           </a:p>
           <a:p>
+            <a:endParaRPr lang="en-US" sz="800" dirty="0"/>
+          </a:p>
+          <a:p>
+            <a:pPr marL="171450" indent="-171450">
+              <a:spcBef>
+                <a:spcPts val="0"/>
+              </a:spcBef>
+              <a:buFont typeface="Arial" panose="020B0604020202020204" pitchFamily="34" charset="0"/>
+              <a:buChar char="•"/>
+            </a:pPr>
             <a:r>
-              <a:rPr lang="en-US" sz="900" dirty="0"/>
-              <a:t>This method of game music requires </a:t>
+              <a:rPr lang="en-US" sz="800" dirty="0"/>
+              <a:t>Producing track sequencer music files can easily be created and altered but require specialist tools and training. Using a track sequencer only requires music knowledge; implementing it into a project needs programming skills.</a:t>
             </a:r>
+          </a:p>
+          <a:p>
+            <a:pPr marL="171450" indent="-171450">
+              <a:spcBef>
+                <a:spcPts val="0"/>
+              </a:spcBef>
+              <a:buFont typeface="Arial" panose="020B0604020202020204" pitchFamily="34" charset="0"/>
+              <a:buChar char="•"/>
+            </a:pPr>
             <a:r>
-              <a:rPr lang="en-US" sz="900"/>
-              <a:t>further study to </a:t>
+              <a:rPr lang="en-US" sz="800" dirty="0"/>
+              <a:t>There is much potential for functionality such as musical event triggers, parameter-driven audio, generative and transformative music due to the text-style music commands.</a:t>
             </a:r>
+          </a:p>
+          <a:p>
+            <a:pPr marL="171450" indent="-171450">
+              <a:spcBef>
+                <a:spcPts val="0"/>
+              </a:spcBef>
+              <a:buFont typeface="Arial" panose="020B0604020202020204" pitchFamily="34" charset="0"/>
+              <a:buChar char="•"/>
+            </a:pPr>
             <a:r>
-              <a:rPr lang="en-US" sz="900" dirty="0"/>
-              <a:t>ascertain its functionality within the creative industry.</a:t>
+              <a:rPr lang="en-US" sz="800" dirty="0"/>
+              <a:t>The current showcase is limited to certain platforms and needs further technical improvement to work across projects. The output of this method of music writing is dependent on the quality of audio samples used.</a:t>
             </a:r>
           </a:p>
           <a:p>
+            <a:pPr marL="171450" indent="-171450">
+              <a:spcBef>
+                <a:spcPts val="0"/>
+              </a:spcBef>
+              <a:buFont typeface="Arial" panose="020B0604020202020204" pitchFamily="34" charset="0"/>
+              <a:buChar char="•"/>
+            </a:pPr>
             <a:r>
-              <a:rPr lang="en-US" sz="900" dirty="0"/>
-              <a:t>A larger demographic of game testers would improve the feedback and </a:t>
+              <a:rPr lang="en-US" sz="800" dirty="0"/>
+              <a:t>A larger demographic of user and usability testing would aid in creating a streamlined tool and improving the standards of the output audio. </a:t>
             </a:r>
           </a:p>
         </p:txBody>
@@ -9438,7 +9571,7 @@
           <a:blip>
             <a:extLst>
               <a:ext uri="{96DAC541-7B7A-43D3-8B79-37D633B846F1}">
-                <asvg:svgBlip xmlns:asvg="http://schemas.microsoft.com/office/drawing/2016/SVG/main" r:embed="rId8"/>
+                <asvg:svgBlip xmlns:asvg="http://schemas.microsoft.com/office/drawing/2016/SVG/main" r:embed="rId9"/>
               </a:ext>
             </a:extLst>
           </a:blip>
@@ -9447,7 +9580,7 @@
         </p:blipFill>
         <p:spPr>
           <a:xfrm>
-            <a:off x="9621304" y="4562410"/>
+            <a:off x="9605152" y="3245156"/>
             <a:ext cx="457200" cy="457200"/>
           </a:xfrm>
         </p:spPr>
@@ -9532,7 +9665,7 @@
           <a:blip>
             <a:extLst>
               <a:ext uri="{96DAC541-7B7A-43D3-8B79-37D633B846F1}">
-                <asvg:svgBlip xmlns:asvg="http://schemas.microsoft.com/office/drawing/2016/SVG/main" r:embed="rId9"/>
+                <asvg:svgBlip xmlns:asvg="http://schemas.microsoft.com/office/drawing/2016/SVG/main" r:embed="rId10"/>
               </a:ext>
             </a:extLst>
           </a:blip>
@@ -9541,17 +9674,17 @@
         </p:blipFill>
         <p:spPr>
           <a:xfrm>
-            <a:off x="11359547" y="50519"/>
+            <a:off x="12514453" y="-8701"/>
             <a:ext cx="635766" cy="635766"/>
           </a:xfrm>
         </p:spPr>
       </p:pic>
       <p:pic>
         <p:nvPicPr>
-          <p:cNvPr id="37" name="Picture Placeholder 33" descr="Music notation with solid fill">
-            <a:extLst>
-              <a:ext uri="{FF2B5EF4-FFF2-40B4-BE49-F238E27FC236}">
-                <a16:creationId xmlns:a16="http://schemas.microsoft.com/office/drawing/2014/main" id="{D5F5E0E8-7F9D-1052-4DB0-3C9EB2B06384}"/>
+          <p:cNvPr id="38" name="Picture Placeholder 33" descr="Harvey Balls 0% with solid fill">
+            <a:extLst>
+              <a:ext uri="{FF2B5EF4-FFF2-40B4-BE49-F238E27FC236}">
+                <a16:creationId xmlns:a16="http://schemas.microsoft.com/office/drawing/2014/main" id="{FE7CF5C5-05D7-5829-85F6-0D447310E6F5}"/>
               </a:ext>
             </a:extLst>
           </p:cNvPr>
@@ -9564,7 +9697,7 @@
           <a:blip>
             <a:extLst>
               <a:ext uri="{96DAC541-7B7A-43D3-8B79-37D633B846F1}">
-                <asvg:svgBlip xmlns:asvg="http://schemas.microsoft.com/office/drawing/2016/SVG/main" r:embed="rId10"/>
+                <asvg:svgBlip xmlns:asvg="http://schemas.microsoft.com/office/drawing/2016/SVG/main" r:embed="rId11"/>
               </a:ext>
             </a:extLst>
           </a:blip>
@@ -9573,8 +9706,8 @@
         </p:blipFill>
         <p:spPr>
           <a:xfrm>
-            <a:off x="-908906" y="-2611848"/>
-            <a:ext cx="727809" cy="12510591"/>
+            <a:off x="11233769" y="-19688"/>
+            <a:ext cx="822960" cy="822960"/>
           </a:xfrm>
           <a:prstGeom prst="ellipse">
             <a:avLst/>
@@ -9586,10 +9719,10 @@
       </p:pic>
       <p:pic>
         <p:nvPicPr>
-          <p:cNvPr id="38" name="Picture Placeholder 33" descr="Harvey Balls 0% with solid fill">
-            <a:extLst>
-              <a:ext uri="{FF2B5EF4-FFF2-40B4-BE49-F238E27FC236}">
-                <a16:creationId xmlns:a16="http://schemas.microsoft.com/office/drawing/2014/main" id="{FE7CF5C5-05D7-5829-85F6-0D447310E6F5}"/>
+          <p:cNvPr id="60" name="Picture Placeholder 33" descr="Music note with solid fill">
+            <a:extLst>
+              <a:ext uri="{FF2B5EF4-FFF2-40B4-BE49-F238E27FC236}">
+                <a16:creationId xmlns:a16="http://schemas.microsoft.com/office/drawing/2014/main" id="{19C70016-CA91-A324-6556-3E43A969D592}"/>
               </a:ext>
             </a:extLst>
           </p:cNvPr>
@@ -9602,7 +9735,7 @@
           <a:blip>
             <a:extLst>
               <a:ext uri="{96DAC541-7B7A-43D3-8B79-37D633B846F1}">
-                <asvg:svgBlip xmlns:asvg="http://schemas.microsoft.com/office/drawing/2016/SVG/main" r:embed="rId11"/>
+                <asvg:svgBlip xmlns:asvg="http://schemas.microsoft.com/office/drawing/2016/SVG/main" r:embed="rId12"/>
               </a:ext>
             </a:extLst>
           </a:blip>
@@ -9611,8 +9744,8 @@
         </p:blipFill>
         <p:spPr>
           <a:xfrm>
-            <a:off x="10312301" y="-8817"/>
-            <a:ext cx="822960" cy="822960"/>
+            <a:off x="11622499" y="149441"/>
+            <a:ext cx="210484" cy="210484"/>
           </a:xfrm>
           <a:prstGeom prst="ellipse">
             <a:avLst/>
@@ -9624,10 +9757,10 @@
       </p:pic>
       <p:pic>
         <p:nvPicPr>
-          <p:cNvPr id="60" name="Picture Placeholder 33" descr="Music note with solid fill">
-            <a:extLst>
-              <a:ext uri="{FF2B5EF4-FFF2-40B4-BE49-F238E27FC236}">
-                <a16:creationId xmlns:a16="http://schemas.microsoft.com/office/drawing/2014/main" id="{19C70016-CA91-A324-6556-3E43A969D592}"/>
+          <p:cNvPr id="61" name="Picture Placeholder 33" descr="Music notes with solid fill">
+            <a:extLst>
+              <a:ext uri="{FF2B5EF4-FFF2-40B4-BE49-F238E27FC236}">
+                <a16:creationId xmlns:a16="http://schemas.microsoft.com/office/drawing/2014/main" id="{CD72E53F-305F-3E70-77AF-8ED3E1F1FF43}"/>
               </a:ext>
             </a:extLst>
           </p:cNvPr>
@@ -9640,44 +9773,6 @@
           <a:blip>
             <a:extLst>
               <a:ext uri="{96DAC541-7B7A-43D3-8B79-37D633B846F1}">
-                <asvg:svgBlip xmlns:asvg="http://schemas.microsoft.com/office/drawing/2016/SVG/main" r:embed="rId12"/>
-              </a:ext>
-            </a:extLst>
-          </a:blip>
-          <a:srcRect/>
-          <a:stretch/>
-        </p:blipFill>
-        <p:spPr>
-          <a:xfrm>
-            <a:off x="11034621" y="214272"/>
-            <a:ext cx="324926" cy="324926"/>
-          </a:xfrm>
-          <a:prstGeom prst="ellipse">
-            <a:avLst/>
-          </a:prstGeom>
-          <a:ln w="22225">
-            <a:noFill/>
-          </a:ln>
-        </p:spPr>
-      </p:pic>
-      <p:pic>
-        <p:nvPicPr>
-          <p:cNvPr id="61" name="Picture Placeholder 33" descr="Music notes with solid fill">
-            <a:extLst>
-              <a:ext uri="{FF2B5EF4-FFF2-40B4-BE49-F238E27FC236}">
-                <a16:creationId xmlns:a16="http://schemas.microsoft.com/office/drawing/2014/main" id="{CD72E53F-305F-3E70-77AF-8ED3E1F1FF43}"/>
-              </a:ext>
-            </a:extLst>
-          </p:cNvPr>
-          <p:cNvPicPr>
-            <a:picLocks noChangeAspect="1"/>
-          </p:cNvPicPr>
-          <p:nvPr/>
-        </p:nvPicPr>
-        <p:blipFill>
-          <a:blip>
-            <a:extLst>
-              <a:ext uri="{96DAC541-7B7A-43D3-8B79-37D633B846F1}">
                 <asvg:svgBlip xmlns:asvg="http://schemas.microsoft.com/office/drawing/2016/SVG/main" r:embed="rId13"/>
               </a:ext>
             </a:extLst>
@@ -9689,8 +9784,8 @@
         </p:blipFill>
         <p:spPr>
           <a:xfrm>
-            <a:off x="11489288" y="152278"/>
-            <a:ext cx="376284" cy="376284"/>
+            <a:off x="11375057" y="222575"/>
+            <a:ext cx="426652" cy="426652"/>
           </a:xfrm>
           <a:prstGeom prst="ellipse">
             <a:avLst/>
@@ -9899,8 +9994,8 @@
         </p:nvCxnSpPr>
         <p:spPr>
           <a:xfrm>
-            <a:off x="7515632" y="1540141"/>
-            <a:ext cx="1226542" cy="837"/>
+            <a:off x="7563484" y="1520858"/>
+            <a:ext cx="974986" cy="619"/>
           </a:xfrm>
           <a:prstGeom prst="line">
             <a:avLst/>
@@ -9959,7 +10054,7 @@
         </p:nvCxnSpPr>
         <p:spPr>
           <a:xfrm>
-            <a:off x="7548495" y="4935102"/>
+            <a:off x="7532343" y="3617848"/>
             <a:ext cx="2115155" cy="0"/>
           </a:xfrm>
           <a:prstGeom prst="line">
@@ -10013,14 +10108,14 @@
           <p:nvPr>
             <p:extLst>
               <p:ext uri="{D42A27DB-BD31-4B8C-83A1-F6EECF244321}">
-                <p14:modId xmlns:p14="http://schemas.microsoft.com/office/powerpoint/2010/main" val="1243006662"/>
+                <p14:modId xmlns:p14="http://schemas.microsoft.com/office/powerpoint/2010/main" val="1423307786"/>
               </p:ext>
             </p:extLst>
           </p:nvPr>
         </p:nvGraphicFramePr>
         <p:xfrm>
-          <a:off x="7426418" y="1658543"/>
-          <a:ext cx="2700585" cy="1795236"/>
+          <a:off x="7474270" y="1639260"/>
+          <a:ext cx="3006241" cy="1327659"/>
         </p:xfrm>
         <a:graphic>
           <a:graphicData uri="http://schemas.openxmlformats.org/drawingml/2006/chart">
@@ -10269,7 +10364,7 @@
         </p:nvSpPr>
         <p:spPr>
           <a:xfrm>
-            <a:off x="7380474" y="3514885"/>
+            <a:off x="7515744" y="2983877"/>
             <a:ext cx="4676255" cy="1422654"/>
           </a:xfrm>
           <a:prstGeom prst="rect">
@@ -10451,7 +10546,258 @@
                   <a:srgbClr val="FF0000"/>
                 </a:solidFill>
               </a:rPr>
-              <a:t>Notes about results here.</a:t>
+              <a:t>Notes about results here?</a:t>
+            </a:r>
+          </a:p>
+        </p:txBody>
+      </p:sp>
+      <p:sp>
+        <p:nvSpPr>
+          <p:cNvPr id="19" name="Rectangle: Rounded Corners 18">
+            <a:extLst>
+              <a:ext uri="{FF2B5EF4-FFF2-40B4-BE49-F238E27FC236}">
+                <a16:creationId xmlns:a16="http://schemas.microsoft.com/office/drawing/2014/main" id="{74E9BD1E-F8EB-4F53-3201-64EB6ACA93FC}"/>
+              </a:ext>
+            </a:extLst>
+          </p:cNvPr>
+          <p:cNvSpPr/>
+          <p:nvPr/>
+        </p:nvSpPr>
+        <p:spPr>
+          <a:xfrm>
+            <a:off x="7473960" y="6087344"/>
+            <a:ext cx="4327750" cy="699847"/>
+          </a:xfrm>
+          <a:prstGeom prst="roundRect">
+            <a:avLst>
+              <a:gd name="adj" fmla="val 7621"/>
+            </a:avLst>
+          </a:prstGeom>
+          <a:solidFill>
+            <a:schemeClr val="dk1"/>
+          </a:solidFill>
+          <a:ln>
+            <a:noFill/>
+          </a:ln>
+        </p:spPr>
+        <p:style>
+          <a:lnRef idx="0">
+            <a:scrgbClr r="0" g="0" b="0"/>
+          </a:lnRef>
+          <a:fillRef idx="0">
+            <a:scrgbClr r="0" g="0" b="0"/>
+          </a:fillRef>
+          <a:effectRef idx="0">
+            <a:scrgbClr r="0" g="0" b="0"/>
+          </a:effectRef>
+          <a:fontRef idx="minor">
+            <a:schemeClr val="lt1"/>
+          </a:fontRef>
+        </p:style>
+        <p:txBody>
+          <a:bodyPr rtlCol="0" anchor="ctr"/>
+          <a:lstStyle/>
+          <a:p>
+            <a:pPr algn="ctr"/>
+            <a:endParaRPr lang="en-GB"/>
+          </a:p>
+        </p:txBody>
+      </p:sp>
+      <p:sp>
+        <p:nvSpPr>
+          <p:cNvPr id="20" name="Text Placeholder 13">
+            <a:extLst>
+              <a:ext uri="{FF2B5EF4-FFF2-40B4-BE49-F238E27FC236}">
+                <a16:creationId xmlns:a16="http://schemas.microsoft.com/office/drawing/2014/main" id="{F3362837-5AC8-25C8-92BC-47CEFA1E9C79}"/>
+              </a:ext>
+            </a:extLst>
+          </p:cNvPr>
+          <p:cNvSpPr txBox="1">
+            <a:spLocks/>
+          </p:cNvSpPr>
+          <p:nvPr/>
+        </p:nvSpPr>
+        <p:spPr>
+          <a:xfrm>
+            <a:off x="7515745" y="6347168"/>
+            <a:ext cx="4676255" cy="1021663"/>
+          </a:xfrm>
+          <a:prstGeom prst="rect">
+            <a:avLst/>
+          </a:prstGeom>
+        </p:spPr>
+        <p:txBody>
+          <a:bodyPr vert="horz" lIns="91440" tIns="0" rIns="91440" bIns="45720" rtlCol="0">
+            <a:noAutofit/>
+          </a:bodyPr>
+          <a:lstStyle>
+            <a:lvl1pPr marL="0" indent="0" algn="l" defTabSz="914400" rtl="0" eaLnBrk="1" latinLnBrk="0" hangingPunct="1">
+              <a:lnSpc>
+                <a:spcPct val="90000"/>
+              </a:lnSpc>
+              <a:spcBef>
+                <a:spcPts val="1000"/>
+              </a:spcBef>
+              <a:buFont typeface="Arial" panose="020B0604020202020204" pitchFamily="34" charset="0"/>
+              <a:buNone/>
+              <a:defRPr sz="1200" kern="1200" cap="none" baseline="0">
+                <a:solidFill>
+                  <a:schemeClr val="bg1"/>
+                </a:solidFill>
+                <a:latin typeface="+mn-lt"/>
+                <a:ea typeface="+mn-ea"/>
+                <a:cs typeface="+mn-cs"/>
+              </a:defRPr>
+            </a:lvl1pPr>
+            <a:lvl2pPr marL="457200" indent="0" algn="l" defTabSz="914400" rtl="0" eaLnBrk="1" latinLnBrk="0" hangingPunct="1">
+              <a:lnSpc>
+                <a:spcPct val="90000"/>
+              </a:lnSpc>
+              <a:spcBef>
+                <a:spcPts val="500"/>
+              </a:spcBef>
+              <a:buFont typeface="Arial" panose="020B0604020202020204" pitchFamily="34" charset="0"/>
+              <a:buNone/>
+              <a:defRPr sz="1800" kern="1200">
+                <a:solidFill>
+                  <a:schemeClr val="bg1"/>
+                </a:solidFill>
+                <a:latin typeface="+mn-lt"/>
+                <a:ea typeface="+mn-ea"/>
+                <a:cs typeface="+mn-cs"/>
+              </a:defRPr>
+            </a:lvl2pPr>
+            <a:lvl3pPr marL="914400" indent="0" algn="l" defTabSz="914400" rtl="0" eaLnBrk="1" latinLnBrk="0" hangingPunct="1">
+              <a:lnSpc>
+                <a:spcPct val="90000"/>
+              </a:lnSpc>
+              <a:spcBef>
+                <a:spcPts val="500"/>
+              </a:spcBef>
+              <a:buFont typeface="Arial" panose="020B0604020202020204" pitchFamily="34" charset="0"/>
+              <a:buNone/>
+              <a:defRPr sz="1800" kern="1200">
+                <a:solidFill>
+                  <a:schemeClr val="bg1"/>
+                </a:solidFill>
+                <a:latin typeface="+mn-lt"/>
+                <a:ea typeface="+mn-ea"/>
+                <a:cs typeface="+mn-cs"/>
+              </a:defRPr>
+            </a:lvl3pPr>
+            <a:lvl4pPr marL="1371600" indent="0" algn="l" defTabSz="914400" rtl="0" eaLnBrk="1" latinLnBrk="0" hangingPunct="1">
+              <a:lnSpc>
+                <a:spcPct val="90000"/>
+              </a:lnSpc>
+              <a:spcBef>
+                <a:spcPts val="500"/>
+              </a:spcBef>
+              <a:buFont typeface="Arial" panose="020B0604020202020204" pitchFamily="34" charset="0"/>
+              <a:buNone/>
+              <a:defRPr sz="1800" kern="1200">
+                <a:solidFill>
+                  <a:schemeClr val="bg1"/>
+                </a:solidFill>
+                <a:latin typeface="+mn-lt"/>
+                <a:ea typeface="+mn-ea"/>
+                <a:cs typeface="+mn-cs"/>
+              </a:defRPr>
+            </a:lvl4pPr>
+            <a:lvl5pPr marL="1828800" indent="0" algn="l" defTabSz="914400" rtl="0" eaLnBrk="1" latinLnBrk="0" hangingPunct="1">
+              <a:lnSpc>
+                <a:spcPct val="90000"/>
+              </a:lnSpc>
+              <a:spcBef>
+                <a:spcPts val="500"/>
+              </a:spcBef>
+              <a:buFont typeface="Arial" panose="020B0604020202020204" pitchFamily="34" charset="0"/>
+              <a:buNone/>
+              <a:defRPr sz="1800" kern="1200">
+                <a:solidFill>
+                  <a:schemeClr val="bg1"/>
+                </a:solidFill>
+                <a:latin typeface="+mn-lt"/>
+                <a:ea typeface="+mn-ea"/>
+                <a:cs typeface="+mn-cs"/>
+              </a:defRPr>
+            </a:lvl5pPr>
+            <a:lvl6pPr marL="2514600" indent="-228600" algn="l" defTabSz="914400" rtl="0" eaLnBrk="1" latinLnBrk="0" hangingPunct="1">
+              <a:lnSpc>
+                <a:spcPct val="90000"/>
+              </a:lnSpc>
+              <a:spcBef>
+                <a:spcPts val="500"/>
+              </a:spcBef>
+              <a:buFont typeface="Arial" panose="020B0604020202020204" pitchFamily="34" charset="0"/>
+              <a:buChar char="•"/>
+              <a:defRPr sz="1800" kern="1200">
+                <a:solidFill>
+                  <a:schemeClr val="tx1"/>
+                </a:solidFill>
+                <a:latin typeface="+mn-lt"/>
+                <a:ea typeface="+mn-ea"/>
+                <a:cs typeface="+mn-cs"/>
+              </a:defRPr>
+            </a:lvl6pPr>
+            <a:lvl7pPr marL="2971800" indent="-228600" algn="l" defTabSz="914400" rtl="0" eaLnBrk="1" latinLnBrk="0" hangingPunct="1">
+              <a:lnSpc>
+                <a:spcPct val="90000"/>
+              </a:lnSpc>
+              <a:spcBef>
+                <a:spcPts val="500"/>
+              </a:spcBef>
+              <a:buFont typeface="Arial" panose="020B0604020202020204" pitchFamily="34" charset="0"/>
+              <a:buChar char="•"/>
+              <a:defRPr sz="1800" kern="1200">
+                <a:solidFill>
+                  <a:schemeClr val="tx1"/>
+                </a:solidFill>
+                <a:latin typeface="+mn-lt"/>
+                <a:ea typeface="+mn-ea"/>
+                <a:cs typeface="+mn-cs"/>
+              </a:defRPr>
+            </a:lvl7pPr>
+            <a:lvl8pPr marL="3429000" indent="-228600" algn="l" defTabSz="914400" rtl="0" eaLnBrk="1" latinLnBrk="0" hangingPunct="1">
+              <a:lnSpc>
+                <a:spcPct val="90000"/>
+              </a:lnSpc>
+              <a:spcBef>
+                <a:spcPts val="500"/>
+              </a:spcBef>
+              <a:buFont typeface="Arial" panose="020B0604020202020204" pitchFamily="34" charset="0"/>
+              <a:buChar char="•"/>
+              <a:defRPr sz="1800" kern="1200">
+                <a:solidFill>
+                  <a:schemeClr val="tx1"/>
+                </a:solidFill>
+                <a:latin typeface="+mn-lt"/>
+                <a:ea typeface="+mn-ea"/>
+                <a:cs typeface="+mn-cs"/>
+              </a:defRPr>
+            </a:lvl8pPr>
+            <a:lvl9pPr marL="3886200" indent="-228600" algn="l" defTabSz="914400" rtl="0" eaLnBrk="1" latinLnBrk="0" hangingPunct="1">
+              <a:lnSpc>
+                <a:spcPct val="90000"/>
+              </a:lnSpc>
+              <a:spcBef>
+                <a:spcPts val="500"/>
+              </a:spcBef>
+              <a:buFont typeface="Arial" panose="020B0604020202020204" pitchFamily="34" charset="0"/>
+              <a:buChar char="•"/>
+              <a:defRPr sz="1800" kern="1200">
+                <a:solidFill>
+                  <a:schemeClr val="tx1"/>
+                </a:solidFill>
+                <a:latin typeface="+mn-lt"/>
+                <a:ea typeface="+mn-ea"/>
+                <a:cs typeface="+mn-cs"/>
+              </a:defRPr>
+            </a:lvl9pPr>
+          </a:lstStyle>
+          <a:p>
+            <a:r>
+              <a:rPr lang="en-US" sz="800" dirty="0"/>
+              <a:t>REFERENCES</a:t>
             </a:r>
           </a:p>
         </p:txBody>
@@ -12350,35 +12696,6 @@
 </file>
 
 <file path=customXml/item1.xml><?xml version="1.0" encoding="utf-8"?>
-<p:properties xmlns:p="http://schemas.microsoft.com/office/2006/metadata/properties" xmlns:xsi="http://www.w3.org/2001/XMLSchema-instance" xmlns:pc="http://schemas.microsoft.com/office/infopath/2007/PartnerControls">
-  <documentManagement>
-    <_ip_UnifiedCompliancePolicyUIAction xmlns="http://schemas.microsoft.com/sharepoint/v3" xsi:nil="true"/>
-    <Image xmlns="71af3243-3dd4-4a8d-8c0d-dd76da1f02a5">
-      <Url xsi:nil="true"/>
-      <Description xsi:nil="true"/>
-    </Image>
-    <Status xmlns="71af3243-3dd4-4a8d-8c0d-dd76da1f02a5">Not started</Status>
-    <Background xmlns="71af3243-3dd4-4a8d-8c0d-dd76da1f02a5">false</Background>
-    <_ip_UnifiedCompliancePolicyProperties xmlns="http://schemas.microsoft.com/sharepoint/v3" xsi:nil="true"/>
-    <ImageTagsTaxHTField xmlns="71af3243-3dd4-4a8d-8c0d-dd76da1f02a5">
-      <Terms xmlns="http://schemas.microsoft.com/office/infopath/2007/PartnerControls"/>
-    </ImageTagsTaxHTField>
-    <TaxCatchAll xmlns="230e9df3-be65-4c73-a93b-d1236ebd677e" xsi:nil="true"/>
-    <MediaServiceKeyPoints xmlns="71af3243-3dd4-4a8d-8c0d-dd76da1f02a5" xsi:nil="true"/>
-  </documentManagement>
-</p:properties>
-</file>
-
-<file path=customXml/item2.xml><?xml version="1.0" encoding="utf-8"?>
-<?mso-contentType ?>
-<FormTemplates xmlns="http://schemas.microsoft.com/sharepoint/v3/contenttype/forms">
-  <Display>DocumentLibraryForm</Display>
-  <Edit>DocumentLibraryForm</Edit>
-  <New>DocumentLibraryForm</New>
-</FormTemplates>
-</file>
-
-<file path=customXml/item3.xml><?xml version="1.0" encoding="utf-8"?>
 <ct:contentTypeSchema xmlns:ct="http://schemas.microsoft.com/office/2006/metadata/contentType" xmlns:ma="http://schemas.microsoft.com/office/2006/metadata/properties/metaAttributes" ct:_="" ma:_="" ma:contentTypeName="Document" ma:contentTypeID="0x01010079F111ED35F8CC479449609E8A0923A6" ma:contentTypeVersion="27" ma:contentTypeDescription="Create a new document." ma:contentTypeScope="" ma:versionID="c6f9a84f66a9c8b9a21755b9ffafb945">
   <xsd:schema xmlns:xsd="http://www.w3.org/2001/XMLSchema" xmlns:xs="http://www.w3.org/2001/XMLSchema" xmlns:p="http://schemas.microsoft.com/office/2006/metadata/properties" xmlns:ns1="http://schemas.microsoft.com/sharepoint/v3" xmlns:ns2="71af3243-3dd4-4a8d-8c0d-dd76da1f02a5" xmlns:ns3="16c05727-aa75-4e4a-9b5f-8a80a1165891" xmlns:ns4="230e9df3-be65-4c73-a93b-d1236ebd677e" targetNamespace="http://schemas.microsoft.com/office/2006/metadata/properties" ma:root="true" ma:fieldsID="27df39e3e7036dff54f89ddd5805ce72" ns1:_="" ns2:_="" ns3:_="" ns4:_="">
     <xsd:import namespace="http://schemas.microsoft.com/sharepoint/v3"/>
@@ -12684,27 +13001,36 @@
 </ct:contentTypeSchema>
 </file>
 
-<file path=customXml/itemProps1.xml><?xml version="1.0" encoding="utf-8"?>
-<ds:datastoreItem xmlns:ds="http://schemas.openxmlformats.org/officeDocument/2006/customXml" ds:itemID="{A0FF118E-0388-4333-9D85-CA81E2C8D164}">
-  <ds:schemaRefs>
-    <ds:schemaRef ds:uri="http://schemas.microsoft.com/office/2006/metadata/properties"/>
-    <ds:schemaRef ds:uri="http://schemas.microsoft.com/office/infopath/2007/PartnerControls"/>
-    <ds:schemaRef ds:uri="http://schemas.microsoft.com/sharepoint/v3"/>
-    <ds:schemaRef ds:uri="71af3243-3dd4-4a8d-8c0d-dd76da1f02a5"/>
-    <ds:schemaRef ds:uri="230e9df3-be65-4c73-a93b-d1236ebd677e"/>
-  </ds:schemaRefs>
-</ds:datastoreItem>
+<file path=customXml/item2.xml><?xml version="1.0" encoding="utf-8"?>
+<?mso-contentType ?>
+<FormTemplates xmlns="http://schemas.microsoft.com/sharepoint/v3/contenttype/forms">
+  <Display>DocumentLibraryForm</Display>
+  <Edit>DocumentLibraryForm</Edit>
+  <New>DocumentLibraryForm</New>
+</FormTemplates>
 </file>
 
-<file path=customXml/itemProps2.xml><?xml version="1.0" encoding="utf-8"?>
-<ds:datastoreItem xmlns:ds="http://schemas.openxmlformats.org/officeDocument/2006/customXml" ds:itemID="{836CDCFB-1550-438B-8C76-AE76FBCD3159}">
-  <ds:schemaRefs>
-    <ds:schemaRef ds:uri="http://schemas.microsoft.com/sharepoint/v3/contenttype/forms"/>
-  </ds:schemaRefs>
-</ds:datastoreItem>
+<file path=customXml/item3.xml><?xml version="1.0" encoding="utf-8"?>
+<p:properties xmlns:p="http://schemas.microsoft.com/office/2006/metadata/properties" xmlns:xsi="http://www.w3.org/2001/XMLSchema-instance" xmlns:pc="http://schemas.microsoft.com/office/infopath/2007/PartnerControls">
+  <documentManagement>
+    <_ip_UnifiedCompliancePolicyUIAction xmlns="http://schemas.microsoft.com/sharepoint/v3" xsi:nil="true"/>
+    <Image xmlns="71af3243-3dd4-4a8d-8c0d-dd76da1f02a5">
+      <Url xsi:nil="true"/>
+      <Description xsi:nil="true"/>
+    </Image>
+    <Status xmlns="71af3243-3dd4-4a8d-8c0d-dd76da1f02a5">Not started</Status>
+    <Background xmlns="71af3243-3dd4-4a8d-8c0d-dd76da1f02a5">false</Background>
+    <_ip_UnifiedCompliancePolicyProperties xmlns="http://schemas.microsoft.com/sharepoint/v3" xsi:nil="true"/>
+    <ImageTagsTaxHTField xmlns="71af3243-3dd4-4a8d-8c0d-dd76da1f02a5">
+      <Terms xmlns="http://schemas.microsoft.com/office/infopath/2007/PartnerControls"/>
+    </ImageTagsTaxHTField>
+    <TaxCatchAll xmlns="230e9df3-be65-4c73-a93b-d1236ebd677e" xsi:nil="true"/>
+    <MediaServiceKeyPoints xmlns="71af3243-3dd4-4a8d-8c0d-dd76da1f02a5" xsi:nil="true"/>
+  </documentManagement>
+</p:properties>
 </file>
 
-<file path=customXml/itemProps3.xml><?xml version="1.0" encoding="utf-8"?>
+<file path=customXml/itemProps1.xml><?xml version="1.0" encoding="utf-8"?>
 <ds:datastoreItem xmlns:ds="http://schemas.openxmlformats.org/officeDocument/2006/customXml" ds:itemID="{B0A68F62-F174-4677-B07F-B071C4E6C2C1}">
   <ds:schemaRefs>
     <ds:schemaRef ds:uri="http://schemas.microsoft.com/office/2006/metadata/contentType"/>
@@ -12725,6 +13051,26 @@
 </ds:datastoreItem>
 </file>
 
+<file path=customXml/itemProps2.xml><?xml version="1.0" encoding="utf-8"?>
+<ds:datastoreItem xmlns:ds="http://schemas.openxmlformats.org/officeDocument/2006/customXml" ds:itemID="{836CDCFB-1550-438B-8C76-AE76FBCD3159}">
+  <ds:schemaRefs>
+    <ds:schemaRef ds:uri="http://schemas.microsoft.com/sharepoint/v3/contenttype/forms"/>
+  </ds:schemaRefs>
+</ds:datastoreItem>
+</file>
+
+<file path=customXml/itemProps3.xml><?xml version="1.0" encoding="utf-8"?>
+<ds:datastoreItem xmlns:ds="http://schemas.openxmlformats.org/officeDocument/2006/customXml" ds:itemID="{A0FF118E-0388-4333-9D85-CA81E2C8D164}">
+  <ds:schemaRefs>
+    <ds:schemaRef ds:uri="http://schemas.microsoft.com/office/2006/metadata/properties"/>
+    <ds:schemaRef ds:uri="http://schemas.microsoft.com/office/infopath/2007/PartnerControls"/>
+    <ds:schemaRef ds:uri="http://schemas.microsoft.com/sharepoint/v3"/>
+    <ds:schemaRef ds:uri="71af3243-3dd4-4a8d-8c0d-dd76da1f02a5"/>
+    <ds:schemaRef ds:uri="230e9df3-be65-4c73-a93b-d1236ebd677e"/>
+  </ds:schemaRefs>
+</ds:datastoreItem>
+</file>
+
 <file path=docMetadata/LabelInfo.xml><?xml version="1.0" encoding="utf-8"?>
 <clbl:labelList xmlns:clbl="http://schemas.microsoft.com/office/2020/mipLabelMetadata"/>
 </file>
--- a/IRP Poster.pptx
+++ b/IRP Poster.pptx
@@ -14,14 +14,14 @@
     <p:sldId id="286" r:id="rId5"/>
     <p:sldId id="287" r:id="rId6"/>
   </p:sldIdLst>
-  <p:sldSz cx="12192000" cy="6858000"/>
+  <p:sldSz cx="15119350" cy="10691813"/>
   <p:notesSz cx="6858000" cy="9144000"/>
   <p:defaultTextStyle>
     <a:defPPr>
       <a:defRPr lang="ru-RU"/>
     </a:defPPr>
-    <a:lvl1pPr marL="0" algn="l" defTabSz="914400" rtl="0" eaLnBrk="1" latinLnBrk="0" hangingPunct="1">
-      <a:defRPr sz="1800" kern="1200">
+    <a:lvl1pPr marL="0" algn="l" defTabSz="1238898" rtl="0" eaLnBrk="1" latinLnBrk="0" hangingPunct="1">
+      <a:defRPr sz="2439" kern="1200">
         <a:solidFill>
           <a:schemeClr val="tx1"/>
         </a:solidFill>
@@ -30,8 +30,8 @@
         <a:cs typeface="+mn-cs"/>
       </a:defRPr>
     </a:lvl1pPr>
-    <a:lvl2pPr marL="457200" algn="l" defTabSz="914400" rtl="0" eaLnBrk="1" latinLnBrk="0" hangingPunct="1">
-      <a:defRPr sz="1800" kern="1200">
+    <a:lvl2pPr marL="619449" algn="l" defTabSz="1238898" rtl="0" eaLnBrk="1" latinLnBrk="0" hangingPunct="1">
+      <a:defRPr sz="2439" kern="1200">
         <a:solidFill>
           <a:schemeClr val="tx1"/>
         </a:solidFill>
@@ -40,8 +40,8 @@
         <a:cs typeface="+mn-cs"/>
       </a:defRPr>
     </a:lvl2pPr>
-    <a:lvl3pPr marL="914400" algn="l" defTabSz="914400" rtl="0" eaLnBrk="1" latinLnBrk="0" hangingPunct="1">
-      <a:defRPr sz="1800" kern="1200">
+    <a:lvl3pPr marL="1238898" algn="l" defTabSz="1238898" rtl="0" eaLnBrk="1" latinLnBrk="0" hangingPunct="1">
+      <a:defRPr sz="2439" kern="1200">
         <a:solidFill>
           <a:schemeClr val="tx1"/>
         </a:solidFill>
@@ -50,8 +50,8 @@
         <a:cs typeface="+mn-cs"/>
       </a:defRPr>
     </a:lvl3pPr>
-    <a:lvl4pPr marL="1371600" algn="l" defTabSz="914400" rtl="0" eaLnBrk="1" latinLnBrk="0" hangingPunct="1">
-      <a:defRPr sz="1800" kern="1200">
+    <a:lvl4pPr marL="1858347" algn="l" defTabSz="1238898" rtl="0" eaLnBrk="1" latinLnBrk="0" hangingPunct="1">
+      <a:defRPr sz="2439" kern="1200">
         <a:solidFill>
           <a:schemeClr val="tx1"/>
         </a:solidFill>
@@ -60,8 +60,8 @@
         <a:cs typeface="+mn-cs"/>
       </a:defRPr>
     </a:lvl4pPr>
-    <a:lvl5pPr marL="1828800" algn="l" defTabSz="914400" rtl="0" eaLnBrk="1" latinLnBrk="0" hangingPunct="1">
-      <a:defRPr sz="1800" kern="1200">
+    <a:lvl5pPr marL="2477795" algn="l" defTabSz="1238898" rtl="0" eaLnBrk="1" latinLnBrk="0" hangingPunct="1">
+      <a:defRPr sz="2439" kern="1200">
         <a:solidFill>
           <a:schemeClr val="tx1"/>
         </a:solidFill>
@@ -70,8 +70,8 @@
         <a:cs typeface="+mn-cs"/>
       </a:defRPr>
     </a:lvl5pPr>
-    <a:lvl6pPr marL="2286000" algn="l" defTabSz="914400" rtl="0" eaLnBrk="1" latinLnBrk="0" hangingPunct="1">
-      <a:defRPr sz="1800" kern="1200">
+    <a:lvl6pPr marL="3097244" algn="l" defTabSz="1238898" rtl="0" eaLnBrk="1" latinLnBrk="0" hangingPunct="1">
+      <a:defRPr sz="2439" kern="1200">
         <a:solidFill>
           <a:schemeClr val="tx1"/>
         </a:solidFill>
@@ -80,8 +80,8 @@
         <a:cs typeface="+mn-cs"/>
       </a:defRPr>
     </a:lvl6pPr>
-    <a:lvl7pPr marL="2743200" algn="l" defTabSz="914400" rtl="0" eaLnBrk="1" latinLnBrk="0" hangingPunct="1">
-      <a:defRPr sz="1800" kern="1200">
+    <a:lvl7pPr marL="3716693" algn="l" defTabSz="1238898" rtl="0" eaLnBrk="1" latinLnBrk="0" hangingPunct="1">
+      <a:defRPr sz="2439" kern="1200">
         <a:solidFill>
           <a:schemeClr val="tx1"/>
         </a:solidFill>
@@ -90,8 +90,8 @@
         <a:cs typeface="+mn-cs"/>
       </a:defRPr>
     </a:lvl7pPr>
-    <a:lvl8pPr marL="3200400" algn="l" defTabSz="914400" rtl="0" eaLnBrk="1" latinLnBrk="0" hangingPunct="1">
-      <a:defRPr sz="1800" kern="1200">
+    <a:lvl8pPr marL="4336142" algn="l" defTabSz="1238898" rtl="0" eaLnBrk="1" latinLnBrk="0" hangingPunct="1">
+      <a:defRPr sz="2439" kern="1200">
         <a:solidFill>
           <a:schemeClr val="tx1"/>
         </a:solidFill>
@@ -100,8 +100,8 @@
         <a:cs typeface="+mn-cs"/>
       </a:defRPr>
     </a:lvl8pPr>
-    <a:lvl9pPr marL="3657600" algn="l" defTabSz="914400" rtl="0" eaLnBrk="1" latinLnBrk="0" hangingPunct="1">
-      <a:defRPr sz="1800" kern="1200">
+    <a:lvl9pPr marL="4955591" algn="l" defTabSz="1238898" rtl="0" eaLnBrk="1" latinLnBrk="0" hangingPunct="1">
+      <a:defRPr sz="2439" kern="1200">
         <a:solidFill>
           <a:schemeClr val="tx1"/>
         </a:solidFill>
@@ -114,12 +114,12 @@
   <p:extLst>
     <p:ext uri="{EFAFB233-063F-42B5-8137-9DF3F51BA10A}">
       <p15:sldGuideLst xmlns:p15="http://schemas.microsoft.com/office/powerpoint/2012/main">
-        <p15:guide id="1" orient="horz" pos="1728" userDrawn="1">
+        <p15:guide id="1" orient="horz" pos="2694" userDrawn="1">
           <p15:clr>
             <a:srgbClr val="A4A3A4"/>
           </p15:clr>
         </p15:guide>
-        <p15:guide id="2" pos="3840" userDrawn="1">
+        <p15:guide id="2" pos="4762" userDrawn="1">
           <p15:clr>
             <a:srgbClr val="A4A3A4"/>
           </p15:clr>
@@ -1202,7 +1202,7 @@
           <a:p>
             <a:fld id="{FC851B3E-1325-48C3-8E2C-998D0099FC98}" type="datetimeFigureOut">
               <a:rPr lang="en-US" smtClean="0"/>
-              <a:t>5/22/2026</a:t>
+              <a:t>6/1/2026</a:t>
             </a:fld>
             <a:endParaRPr lang="en-US" dirty="0"/>
           </a:p>
@@ -1379,7 +1379,7 @@
           <a:p>
             <a:fld id="{04D39CC4-BC6F-4E80-BC0D-03833D02DC81}" type="datetimeFigureOut">
               <a:rPr lang="en-US" noProof="0" smtClean="0"/>
-              <a:t>5/22/2026</a:t>
+              <a:t>6/1/2026</a:t>
             </a:fld>
             <a:endParaRPr lang="en-US" noProof="0" dirty="0"/>
           </a:p>
@@ -1397,8 +1397,8 @@
         </p:nvSpPr>
         <p:spPr>
           <a:xfrm>
-            <a:off x="685800" y="1143000"/>
-            <a:ext cx="5486400" cy="3086100"/>
+            <a:off x="1246188" y="1143000"/>
+            <a:ext cx="4365625" cy="3086100"/>
           </a:xfrm>
           <a:prstGeom prst="rect">
             <a:avLst/>
@@ -1552,8 +1552,8 @@
   </p:cSld>
   <p:clrMap bg1="lt1" tx1="dk1" bg2="lt2" tx2="dk2" accent1="accent1" accent2="accent2" accent3="accent3" accent4="accent4" accent5="accent5" accent6="accent6" hlink="hlink" folHlink="folHlink"/>
   <p:notesStyle>
-    <a:lvl1pPr marL="0" algn="l" defTabSz="914400" rtl="0" eaLnBrk="1" latinLnBrk="0" hangingPunct="1">
-      <a:defRPr sz="1200" kern="1200">
+    <a:lvl1pPr marL="0" algn="l" defTabSz="1238898" rtl="0" eaLnBrk="1" latinLnBrk="0" hangingPunct="1">
+      <a:defRPr sz="1626" kern="1200">
         <a:solidFill>
           <a:schemeClr val="tx1"/>
         </a:solidFill>
@@ -1562,8 +1562,8 @@
         <a:cs typeface="+mn-cs"/>
       </a:defRPr>
     </a:lvl1pPr>
-    <a:lvl2pPr marL="457200" algn="l" defTabSz="914400" rtl="0" eaLnBrk="1" latinLnBrk="0" hangingPunct="1">
-      <a:defRPr sz="1200" kern="1200">
+    <a:lvl2pPr marL="619449" algn="l" defTabSz="1238898" rtl="0" eaLnBrk="1" latinLnBrk="0" hangingPunct="1">
+      <a:defRPr sz="1626" kern="1200">
         <a:solidFill>
           <a:schemeClr val="tx1"/>
         </a:solidFill>
@@ -1572,8 +1572,8 @@
         <a:cs typeface="+mn-cs"/>
       </a:defRPr>
     </a:lvl2pPr>
-    <a:lvl3pPr marL="914400" algn="l" defTabSz="914400" rtl="0" eaLnBrk="1" latinLnBrk="0" hangingPunct="1">
-      <a:defRPr sz="1200" kern="1200">
+    <a:lvl3pPr marL="1238898" algn="l" defTabSz="1238898" rtl="0" eaLnBrk="1" latinLnBrk="0" hangingPunct="1">
+      <a:defRPr sz="1626" kern="1200">
         <a:solidFill>
           <a:schemeClr val="tx1"/>
         </a:solidFill>
@@ -1582,8 +1582,8 @@
         <a:cs typeface="+mn-cs"/>
       </a:defRPr>
     </a:lvl3pPr>
-    <a:lvl4pPr marL="1371600" algn="l" defTabSz="914400" rtl="0" eaLnBrk="1" latinLnBrk="0" hangingPunct="1">
-      <a:defRPr sz="1200" kern="1200">
+    <a:lvl4pPr marL="1858347" algn="l" defTabSz="1238898" rtl="0" eaLnBrk="1" latinLnBrk="0" hangingPunct="1">
+      <a:defRPr sz="1626" kern="1200">
         <a:solidFill>
           <a:schemeClr val="tx1"/>
         </a:solidFill>
@@ -1592,8 +1592,8 @@
         <a:cs typeface="+mn-cs"/>
       </a:defRPr>
     </a:lvl4pPr>
-    <a:lvl5pPr marL="1828800" algn="l" defTabSz="914400" rtl="0" eaLnBrk="1" latinLnBrk="0" hangingPunct="1">
-      <a:defRPr sz="1200" kern="1200">
+    <a:lvl5pPr marL="2477795" algn="l" defTabSz="1238898" rtl="0" eaLnBrk="1" latinLnBrk="0" hangingPunct="1">
+      <a:defRPr sz="1626" kern="1200">
         <a:solidFill>
           <a:schemeClr val="tx1"/>
         </a:solidFill>
@@ -1602,8 +1602,8 @@
         <a:cs typeface="+mn-cs"/>
       </a:defRPr>
     </a:lvl5pPr>
-    <a:lvl6pPr marL="2286000" algn="l" defTabSz="914400" rtl="0" eaLnBrk="1" latinLnBrk="0" hangingPunct="1">
-      <a:defRPr sz="1200" kern="1200">
+    <a:lvl6pPr marL="3097244" algn="l" defTabSz="1238898" rtl="0" eaLnBrk="1" latinLnBrk="0" hangingPunct="1">
+      <a:defRPr sz="1626" kern="1200">
         <a:solidFill>
           <a:schemeClr val="tx1"/>
         </a:solidFill>
@@ -1612,8 +1612,8 @@
         <a:cs typeface="+mn-cs"/>
       </a:defRPr>
     </a:lvl6pPr>
-    <a:lvl7pPr marL="2743200" algn="l" defTabSz="914400" rtl="0" eaLnBrk="1" latinLnBrk="0" hangingPunct="1">
-      <a:defRPr sz="1200" kern="1200">
+    <a:lvl7pPr marL="3716693" algn="l" defTabSz="1238898" rtl="0" eaLnBrk="1" latinLnBrk="0" hangingPunct="1">
+      <a:defRPr sz="1626" kern="1200">
         <a:solidFill>
           <a:schemeClr val="tx1"/>
         </a:solidFill>
@@ -1622,8 +1622,8 @@
         <a:cs typeface="+mn-cs"/>
       </a:defRPr>
     </a:lvl7pPr>
-    <a:lvl8pPr marL="3200400" algn="l" defTabSz="914400" rtl="0" eaLnBrk="1" latinLnBrk="0" hangingPunct="1">
-      <a:defRPr sz="1200" kern="1200">
+    <a:lvl8pPr marL="4336142" algn="l" defTabSz="1238898" rtl="0" eaLnBrk="1" latinLnBrk="0" hangingPunct="1">
+      <a:defRPr sz="1626" kern="1200">
         <a:solidFill>
           <a:schemeClr val="tx1"/>
         </a:solidFill>
@@ -1632,8 +1632,8 @@
         <a:cs typeface="+mn-cs"/>
       </a:defRPr>
     </a:lvl8pPr>
-    <a:lvl9pPr marL="3657600" algn="l" defTabSz="914400" rtl="0" eaLnBrk="1" latinLnBrk="0" hangingPunct="1">
-      <a:defRPr sz="1200" kern="1200">
+    <a:lvl9pPr marL="4955591" algn="l" defTabSz="1238898" rtl="0" eaLnBrk="1" latinLnBrk="0" hangingPunct="1">
+      <a:defRPr sz="1626" kern="1200">
         <a:solidFill>
           <a:schemeClr val="tx1"/>
         </a:solidFill>
@@ -1673,7 +1673,12 @@
             <p:ph type="sldImg"/>
           </p:nvPr>
         </p:nvSpPr>
-        <p:spPr/>
+        <p:spPr>
+          <a:xfrm>
+            <a:off x="1246188" y="1143000"/>
+            <a:ext cx="4365625" cy="3086100"/>
+          </a:xfrm>
+        </p:spPr>
       </p:sp>
       <p:sp>
         <p:nvSpPr>
@@ -1775,8 +1780,8 @@
         </p:nvSpPr>
         <p:spPr>
           <a:xfrm>
-            <a:off x="618744" y="209677"/>
-            <a:ext cx="9064752" cy="1097915"/>
+            <a:off x="767307" y="326893"/>
+            <a:ext cx="11241237" cy="1711680"/>
           </a:xfrm>
         </p:spPr>
         <p:txBody>
@@ -1785,7 +1790,7 @@
           </a:bodyPr>
           <a:lstStyle>
             <a:lvl1pPr>
-              <a:defRPr sz="5400">
+              <a:defRPr sz="4050">
                 <a:solidFill>
                   <a:schemeClr val="bg1"/>
                 </a:solidFill>
@@ -1819,8 +1824,8 @@
         </p:nvSpPr>
         <p:spPr>
           <a:xfrm>
-            <a:off x="618745" y="1344676"/>
-            <a:ext cx="9064752" cy="511175"/>
+            <a:off x="767309" y="2096390"/>
+            <a:ext cx="11241237" cy="796936"/>
           </a:xfrm>
         </p:spPr>
         <p:txBody>
@@ -1830,39 +1835,39 @@
           <a:lstStyle>
             <a:lvl1pPr marL="0" indent="0">
               <a:buNone/>
-              <a:defRPr sz="1800">
+              <a:defRPr sz="1350">
                 <a:solidFill>
                   <a:schemeClr val="bg1"/>
                 </a:solidFill>
               </a:defRPr>
             </a:lvl1pPr>
-            <a:lvl2pPr marL="457200" indent="0">
-              <a:buNone/>
-              <a:defRPr sz="1800">
+            <a:lvl2pPr marL="342900" indent="0">
+              <a:buNone/>
+              <a:defRPr sz="1350">
                 <a:solidFill>
                   <a:schemeClr val="bg1"/>
                 </a:solidFill>
               </a:defRPr>
             </a:lvl2pPr>
-            <a:lvl3pPr marL="914400" indent="0">
-              <a:buNone/>
-              <a:defRPr sz="1800">
+            <a:lvl3pPr marL="685800" indent="0">
+              <a:buNone/>
+              <a:defRPr sz="1350">
                 <a:solidFill>
                   <a:schemeClr val="bg1"/>
                 </a:solidFill>
               </a:defRPr>
             </a:lvl3pPr>
-            <a:lvl4pPr marL="1371600" indent="0">
-              <a:buNone/>
-              <a:defRPr sz="1800">
+            <a:lvl4pPr marL="1028700" indent="0">
+              <a:buNone/>
+              <a:defRPr sz="1350">
                 <a:solidFill>
                   <a:schemeClr val="bg1"/>
                 </a:solidFill>
               </a:defRPr>
             </a:lvl4pPr>
-            <a:lvl5pPr marL="1828800" indent="0">
-              <a:buNone/>
-              <a:defRPr sz="1800">
+            <a:lvl5pPr marL="1371600" indent="0">
+              <a:buNone/>
+              <a:defRPr sz="1350">
                 <a:solidFill>
                   <a:schemeClr val="bg1"/>
                 </a:solidFill>
@@ -1895,8 +1900,8 @@
         </p:nvSpPr>
         <p:spPr>
           <a:xfrm>
-            <a:off x="10396346" y="585334"/>
-            <a:ext cx="1005840" cy="1005840"/>
+            <a:off x="12892553" y="912553"/>
+            <a:ext cx="1247346" cy="1568133"/>
           </a:xfrm>
           <a:prstGeom prst="ellipse">
             <a:avLst/>
@@ -1932,7 +1937,7 @@
           <a:lstStyle/>
           <a:p>
             <a:pPr algn="ctr"/>
-            <a:endParaRPr lang="en-US" dirty="0"/>
+            <a:endParaRPr lang="en-US" sz="1013" dirty="0"/>
           </a:p>
         </p:txBody>
       </p:sp>
@@ -1954,8 +1959,8 @@
         </p:nvSpPr>
         <p:spPr>
           <a:xfrm>
-            <a:off x="10487786" y="649342"/>
-            <a:ext cx="822960" cy="822960"/>
+            <a:off x="13005948" y="1012343"/>
+            <a:ext cx="1020556" cy="1283018"/>
           </a:xfrm>
           <a:prstGeom prst="ellipse">
             <a:avLst/>
@@ -1971,7 +1976,7 @@
           <a:lstStyle>
             <a:lvl1pPr marL="0" indent="0" algn="ctr">
               <a:buNone/>
-              <a:defRPr sz="1000">
+              <a:defRPr sz="750">
                 <a:solidFill>
                   <a:schemeClr val="bg1"/>
                 </a:solidFill>
@@ -2005,8 +2010,8 @@
         </p:nvSpPr>
         <p:spPr>
           <a:xfrm>
-            <a:off x="673608" y="2556796"/>
-            <a:ext cx="1996440" cy="381190"/>
+            <a:off x="835344" y="3986117"/>
+            <a:ext cx="2475794" cy="594287"/>
           </a:xfrm>
         </p:spPr>
         <p:txBody>
@@ -2016,40 +2021,40 @@
           <a:lstStyle>
             <a:lvl1pPr marL="0" indent="0">
               <a:buNone/>
-              <a:defRPr sz="2200" b="1" cap="all" spc="100" baseline="0">
+              <a:defRPr sz="1650" b="1" cap="all" spc="75" baseline="0">
                 <a:solidFill>
                   <a:schemeClr val="bg1"/>
                 </a:solidFill>
                 <a:latin typeface="+mj-lt"/>
               </a:defRPr>
             </a:lvl1pPr>
-            <a:lvl2pPr marL="457200" indent="0">
-              <a:buNone/>
-              <a:defRPr sz="1800">
+            <a:lvl2pPr marL="342900" indent="0">
+              <a:buNone/>
+              <a:defRPr sz="1350">
                 <a:solidFill>
                   <a:schemeClr val="bg1"/>
                 </a:solidFill>
               </a:defRPr>
             </a:lvl2pPr>
-            <a:lvl3pPr marL="914400" indent="0">
-              <a:buNone/>
-              <a:defRPr sz="1800">
+            <a:lvl3pPr marL="685800" indent="0">
+              <a:buNone/>
+              <a:defRPr sz="1350">
                 <a:solidFill>
                   <a:schemeClr val="bg1"/>
                 </a:solidFill>
               </a:defRPr>
             </a:lvl3pPr>
-            <a:lvl4pPr marL="1371600" indent="0">
-              <a:buNone/>
-              <a:defRPr sz="1800">
+            <a:lvl4pPr marL="1028700" indent="0">
+              <a:buNone/>
+              <a:defRPr sz="1350">
                 <a:solidFill>
                   <a:schemeClr val="bg1"/>
                 </a:solidFill>
               </a:defRPr>
             </a:lvl4pPr>
-            <a:lvl5pPr marL="1828800" indent="0">
-              <a:buNone/>
-              <a:defRPr sz="1800">
+            <a:lvl5pPr marL="1371600" indent="0">
+              <a:buNone/>
+              <a:defRPr sz="1350">
                 <a:solidFill>
                   <a:schemeClr val="bg1"/>
                 </a:solidFill>
@@ -2082,8 +2087,8 @@
         </p:nvSpPr>
         <p:spPr>
           <a:xfrm>
-            <a:off x="753404" y="3046075"/>
-            <a:ext cx="1828633" cy="96903"/>
+            <a:off x="934300" y="4748918"/>
+            <a:ext cx="2267696" cy="151074"/>
           </a:xfrm>
           <a:prstGeom prst="rect">
             <a:avLst/>
@@ -2130,7 +2135,7 @@
           <a:lstStyle/>
           <a:p>
             <a:pPr algn="ctr"/>
-            <a:endParaRPr lang="en-US" dirty="0">
+            <a:endParaRPr lang="en-US" sz="1013" dirty="0">
               <a:solidFill>
                 <a:schemeClr val="bg1">
                   <a:lumMod val="95000"/>
@@ -2158,8 +2163,8 @@
         </p:nvSpPr>
         <p:spPr>
           <a:xfrm>
-            <a:off x="673608" y="3391012"/>
-            <a:ext cx="1996440" cy="778652"/>
+            <a:off x="835344" y="5286683"/>
+            <a:ext cx="2475794" cy="1213940"/>
           </a:xfrm>
         </p:spPr>
         <p:txBody>
@@ -2169,40 +2174,40 @@
           <a:lstStyle>
             <a:lvl1pPr marL="0" indent="0">
               <a:buNone/>
-              <a:defRPr sz="1200" cap="none" baseline="0">
+              <a:defRPr sz="900" cap="none" baseline="0">
                 <a:solidFill>
                   <a:schemeClr val="bg1"/>
                 </a:solidFill>
                 <a:latin typeface="+mn-lt"/>
               </a:defRPr>
             </a:lvl1pPr>
-            <a:lvl2pPr marL="457200" indent="0">
-              <a:buNone/>
-              <a:defRPr sz="1800">
+            <a:lvl2pPr marL="342900" indent="0">
+              <a:buNone/>
+              <a:defRPr sz="1350">
                 <a:solidFill>
                   <a:schemeClr val="bg1"/>
                 </a:solidFill>
               </a:defRPr>
             </a:lvl2pPr>
-            <a:lvl3pPr marL="914400" indent="0">
-              <a:buNone/>
-              <a:defRPr sz="1800">
+            <a:lvl3pPr marL="685800" indent="0">
+              <a:buNone/>
+              <a:defRPr sz="1350">
                 <a:solidFill>
                   <a:schemeClr val="bg1"/>
                 </a:solidFill>
               </a:defRPr>
             </a:lvl3pPr>
-            <a:lvl4pPr marL="1371600" indent="0">
-              <a:buNone/>
-              <a:defRPr sz="1800">
+            <a:lvl4pPr marL="1028700" indent="0">
+              <a:buNone/>
+              <a:defRPr sz="1350">
                 <a:solidFill>
                   <a:schemeClr val="bg1"/>
                 </a:solidFill>
               </a:defRPr>
             </a:lvl4pPr>
-            <a:lvl5pPr marL="1828800" indent="0">
-              <a:buNone/>
-              <a:defRPr sz="1800">
+            <a:lvl5pPr marL="1371600" indent="0">
+              <a:buNone/>
+              <a:defRPr sz="1350">
                 <a:solidFill>
                   <a:schemeClr val="bg1"/>
                 </a:solidFill>
@@ -2236,8 +2241,8 @@
         </p:nvSpPr>
         <p:spPr>
           <a:xfrm>
-            <a:off x="670560" y="4505738"/>
-            <a:ext cx="893064" cy="335470"/>
+            <a:off x="831564" y="7024571"/>
+            <a:ext cx="1107492" cy="523008"/>
           </a:xfrm>
         </p:spPr>
         <p:txBody>
@@ -2247,7 +2252,7 @@
           <a:lstStyle>
             <a:lvl1pPr marL="0" indent="0">
               <a:buNone/>
-              <a:defRPr sz="2000" cap="all" baseline="0">
+              <a:defRPr sz="1500" cap="all" baseline="0">
                 <a:solidFill>
                   <a:schemeClr val="accent1">
                     <a:lumMod val="40000"/>
@@ -2257,33 +2262,33 @@
                 <a:latin typeface="+mj-lt"/>
               </a:defRPr>
             </a:lvl1pPr>
-            <a:lvl2pPr marL="457200" indent="0">
-              <a:buNone/>
-              <a:defRPr sz="1800">
+            <a:lvl2pPr marL="342900" indent="0">
+              <a:buNone/>
+              <a:defRPr sz="1350">
                 <a:solidFill>
                   <a:schemeClr val="bg1"/>
                 </a:solidFill>
               </a:defRPr>
             </a:lvl2pPr>
-            <a:lvl3pPr marL="914400" indent="0">
-              <a:buNone/>
-              <a:defRPr sz="1800">
+            <a:lvl3pPr marL="685800" indent="0">
+              <a:buNone/>
+              <a:defRPr sz="1350">
                 <a:solidFill>
                   <a:schemeClr val="bg1"/>
                 </a:solidFill>
               </a:defRPr>
             </a:lvl3pPr>
-            <a:lvl4pPr marL="1371600" indent="0">
-              <a:buNone/>
-              <a:defRPr sz="1800">
+            <a:lvl4pPr marL="1028700" indent="0">
+              <a:buNone/>
+              <a:defRPr sz="1350">
                 <a:solidFill>
                   <a:schemeClr val="bg1"/>
                 </a:solidFill>
               </a:defRPr>
             </a:lvl4pPr>
-            <a:lvl5pPr marL="1828800" indent="0">
-              <a:buNone/>
-              <a:defRPr sz="1800">
+            <a:lvl5pPr marL="1371600" indent="0">
+              <a:buNone/>
+              <a:defRPr sz="1350">
                 <a:solidFill>
                   <a:schemeClr val="bg1"/>
                 </a:solidFill>
@@ -2316,8 +2321,8 @@
         </p:nvSpPr>
         <p:spPr>
           <a:xfrm>
-            <a:off x="1682496" y="4399153"/>
-            <a:ext cx="685800" cy="685800"/>
+            <a:off x="2086471" y="6858403"/>
+            <a:ext cx="850463" cy="1069181"/>
           </a:xfrm>
           <a:prstGeom prst="ellipse">
             <a:avLst/>
@@ -2353,7 +2358,7 @@
           <a:lstStyle/>
           <a:p>
             <a:pPr algn="ctr"/>
-            <a:endParaRPr lang="en-US" dirty="0"/>
+            <a:endParaRPr lang="en-US" sz="1013" dirty="0"/>
           </a:p>
         </p:txBody>
       </p:sp>
@@ -2375,8 +2380,8 @@
         </p:nvSpPr>
         <p:spPr>
           <a:xfrm>
-            <a:off x="1796796" y="4513453"/>
-            <a:ext cx="457200" cy="457200"/>
+            <a:off x="2228214" y="7036599"/>
+            <a:ext cx="566976" cy="712788"/>
           </a:xfrm>
           <a:prstGeom prst="ellipse">
             <a:avLst/>
@@ -2392,7 +2397,7 @@
           <a:lstStyle>
             <a:lvl1pPr marL="0" indent="0" algn="ctr">
               <a:buNone/>
-              <a:defRPr sz="600">
+              <a:defRPr sz="450">
                 <a:solidFill>
                   <a:schemeClr val="bg1"/>
                 </a:solidFill>
@@ -2426,8 +2431,8 @@
         </p:nvSpPr>
         <p:spPr>
           <a:xfrm>
-            <a:off x="670560" y="4894756"/>
-            <a:ext cx="893064" cy="335470"/>
+            <a:off x="831564" y="7631062"/>
+            <a:ext cx="1107492" cy="523008"/>
           </a:xfrm>
         </p:spPr>
         <p:txBody>
@@ -2437,40 +2442,40 @@
           <a:lstStyle>
             <a:lvl1pPr marL="0" indent="0">
               <a:buNone/>
-              <a:defRPr sz="1400" cap="none" baseline="0">
+              <a:defRPr sz="1050" cap="none" baseline="0">
                 <a:solidFill>
                   <a:schemeClr val="bg1"/>
                 </a:solidFill>
                 <a:latin typeface="+mn-lt"/>
               </a:defRPr>
             </a:lvl1pPr>
-            <a:lvl2pPr marL="457200" indent="0">
-              <a:buNone/>
-              <a:defRPr sz="1800">
+            <a:lvl2pPr marL="342900" indent="0">
+              <a:buNone/>
+              <a:defRPr sz="1350">
                 <a:solidFill>
                   <a:schemeClr val="bg1"/>
                 </a:solidFill>
               </a:defRPr>
             </a:lvl2pPr>
-            <a:lvl3pPr marL="914400" indent="0">
-              <a:buNone/>
-              <a:defRPr sz="1800">
+            <a:lvl3pPr marL="685800" indent="0">
+              <a:buNone/>
+              <a:defRPr sz="1350">
                 <a:solidFill>
                   <a:schemeClr val="bg1"/>
                 </a:solidFill>
               </a:defRPr>
             </a:lvl3pPr>
-            <a:lvl4pPr marL="1371600" indent="0">
-              <a:buNone/>
-              <a:defRPr sz="1800">
+            <a:lvl4pPr marL="1028700" indent="0">
+              <a:buNone/>
+              <a:defRPr sz="1350">
                 <a:solidFill>
                   <a:schemeClr val="bg1"/>
                 </a:solidFill>
               </a:defRPr>
             </a:lvl4pPr>
-            <a:lvl5pPr marL="1828800" indent="0">
-              <a:buNone/>
-              <a:defRPr sz="1800">
+            <a:lvl5pPr marL="1371600" indent="0">
+              <a:buNone/>
+              <a:defRPr sz="1350">
                 <a:solidFill>
                   <a:schemeClr val="bg1"/>
                 </a:solidFill>
@@ -2505,8 +2510,8 @@
         </p:nvCxnSpPr>
         <p:spPr>
           <a:xfrm>
-            <a:off x="753404" y="5377870"/>
-            <a:ext cx="1827083" cy="0"/>
+            <a:off x="934301" y="8384248"/>
+            <a:ext cx="2265773" cy="0"/>
           </a:xfrm>
           <a:prstGeom prst="straightConnector1">
             <a:avLst/>
@@ -2566,8 +2571,8 @@
         </p:nvSpPr>
         <p:spPr>
           <a:xfrm>
-            <a:off x="2862072" y="2556796"/>
-            <a:ext cx="1996440" cy="381190"/>
+            <a:off x="3549267" y="3986117"/>
+            <a:ext cx="2475794" cy="594287"/>
           </a:xfrm>
         </p:spPr>
         <p:txBody>
@@ -2577,40 +2582,40 @@
           <a:lstStyle>
             <a:lvl1pPr marL="0" indent="0">
               <a:buNone/>
-              <a:defRPr sz="2200" b="1" cap="all" spc="100" baseline="0">
+              <a:defRPr sz="1650" b="1" cap="all" spc="75" baseline="0">
                 <a:solidFill>
                   <a:schemeClr val="bg1"/>
                 </a:solidFill>
                 <a:latin typeface="+mj-lt"/>
               </a:defRPr>
             </a:lvl1pPr>
-            <a:lvl2pPr marL="457200" indent="0">
-              <a:buNone/>
-              <a:defRPr sz="1800">
+            <a:lvl2pPr marL="342900" indent="0">
+              <a:buNone/>
+              <a:defRPr sz="1350">
                 <a:solidFill>
                   <a:schemeClr val="bg1"/>
                 </a:solidFill>
               </a:defRPr>
             </a:lvl2pPr>
-            <a:lvl3pPr marL="914400" indent="0">
-              <a:buNone/>
-              <a:defRPr sz="1800">
+            <a:lvl3pPr marL="685800" indent="0">
+              <a:buNone/>
+              <a:defRPr sz="1350">
                 <a:solidFill>
                   <a:schemeClr val="bg1"/>
                 </a:solidFill>
               </a:defRPr>
             </a:lvl3pPr>
-            <a:lvl4pPr marL="1371600" indent="0">
-              <a:buNone/>
-              <a:defRPr sz="1800">
+            <a:lvl4pPr marL="1028700" indent="0">
+              <a:buNone/>
+              <a:defRPr sz="1350">
                 <a:solidFill>
                   <a:schemeClr val="bg1"/>
                 </a:solidFill>
               </a:defRPr>
             </a:lvl4pPr>
-            <a:lvl5pPr marL="1828800" indent="0">
-              <a:buNone/>
-              <a:defRPr sz="1800">
+            <a:lvl5pPr marL="1371600" indent="0">
+              <a:buNone/>
+              <a:defRPr sz="1350">
                 <a:solidFill>
                   <a:schemeClr val="bg1"/>
                 </a:solidFill>
@@ -2643,8 +2648,8 @@
         </p:nvSpPr>
         <p:spPr>
           <a:xfrm>
-            <a:off x="2946272" y="3046075"/>
-            <a:ext cx="1828633" cy="96903"/>
+            <a:off x="3653685" y="4748918"/>
+            <a:ext cx="2267696" cy="151074"/>
           </a:xfrm>
           <a:prstGeom prst="rect">
             <a:avLst/>
@@ -2691,7 +2696,7 @@
           <a:lstStyle/>
           <a:p>
             <a:pPr algn="ctr"/>
-            <a:endParaRPr lang="en-US" dirty="0">
+            <a:endParaRPr lang="en-US" sz="1013" dirty="0">
               <a:solidFill>
                 <a:schemeClr val="bg1">
                   <a:lumMod val="95000"/>
@@ -2719,8 +2724,8 @@
         </p:nvSpPr>
         <p:spPr>
           <a:xfrm>
-            <a:off x="2862072" y="3391012"/>
-            <a:ext cx="1996440" cy="778652"/>
+            <a:off x="3549267" y="5286683"/>
+            <a:ext cx="2475794" cy="1213940"/>
           </a:xfrm>
         </p:spPr>
         <p:txBody>
@@ -2730,40 +2735,40 @@
           <a:lstStyle>
             <a:lvl1pPr marL="0" indent="0">
               <a:buNone/>
-              <a:defRPr sz="1200" cap="none" baseline="0">
+              <a:defRPr sz="900" cap="none" baseline="0">
                 <a:solidFill>
                   <a:schemeClr val="bg1"/>
                 </a:solidFill>
                 <a:latin typeface="+mn-lt"/>
               </a:defRPr>
             </a:lvl1pPr>
-            <a:lvl2pPr marL="457200" indent="0">
-              <a:buNone/>
-              <a:defRPr sz="1800">
+            <a:lvl2pPr marL="342900" indent="0">
+              <a:buNone/>
+              <a:defRPr sz="1350">
                 <a:solidFill>
                   <a:schemeClr val="bg1"/>
                 </a:solidFill>
               </a:defRPr>
             </a:lvl2pPr>
-            <a:lvl3pPr marL="914400" indent="0">
-              <a:buNone/>
-              <a:defRPr sz="1800">
+            <a:lvl3pPr marL="685800" indent="0">
+              <a:buNone/>
+              <a:defRPr sz="1350">
                 <a:solidFill>
                   <a:schemeClr val="bg1"/>
                 </a:solidFill>
               </a:defRPr>
             </a:lvl3pPr>
-            <a:lvl4pPr marL="1371600" indent="0">
-              <a:buNone/>
-              <a:defRPr sz="1800">
+            <a:lvl4pPr marL="1028700" indent="0">
+              <a:buNone/>
+              <a:defRPr sz="1350">
                 <a:solidFill>
                   <a:schemeClr val="bg1"/>
                 </a:solidFill>
               </a:defRPr>
             </a:lvl4pPr>
-            <a:lvl5pPr marL="1828800" indent="0">
-              <a:buNone/>
-              <a:defRPr sz="1800">
+            <a:lvl5pPr marL="1371600" indent="0">
+              <a:buNone/>
+              <a:defRPr sz="1350">
                 <a:solidFill>
                   <a:schemeClr val="bg1"/>
                 </a:solidFill>
@@ -2797,8 +2802,8 @@
         </p:nvSpPr>
         <p:spPr>
           <a:xfrm>
-            <a:off x="2862072" y="4505738"/>
-            <a:ext cx="893064" cy="335470"/>
+            <a:off x="3549268" y="7024571"/>
+            <a:ext cx="1107492" cy="523008"/>
           </a:xfrm>
         </p:spPr>
         <p:txBody>
@@ -2808,7 +2813,7 @@
           <a:lstStyle>
             <a:lvl1pPr marL="0" indent="0">
               <a:buNone/>
-              <a:defRPr sz="2000" cap="all" baseline="0">
+              <a:defRPr sz="1500" cap="all" baseline="0">
                 <a:solidFill>
                   <a:schemeClr val="accent3">
                     <a:lumMod val="40000"/>
@@ -2818,33 +2823,33 @@
                 <a:latin typeface="+mj-lt"/>
               </a:defRPr>
             </a:lvl1pPr>
-            <a:lvl2pPr marL="457200" indent="0">
-              <a:buNone/>
-              <a:defRPr sz="1800">
+            <a:lvl2pPr marL="342900" indent="0">
+              <a:buNone/>
+              <a:defRPr sz="1350">
                 <a:solidFill>
                   <a:schemeClr val="bg1"/>
                 </a:solidFill>
               </a:defRPr>
             </a:lvl2pPr>
-            <a:lvl3pPr marL="914400" indent="0">
-              <a:buNone/>
-              <a:defRPr sz="1800">
+            <a:lvl3pPr marL="685800" indent="0">
+              <a:buNone/>
+              <a:defRPr sz="1350">
                 <a:solidFill>
                   <a:schemeClr val="bg1"/>
                 </a:solidFill>
               </a:defRPr>
             </a:lvl3pPr>
-            <a:lvl4pPr marL="1371600" indent="0">
-              <a:buNone/>
-              <a:defRPr sz="1800">
+            <a:lvl4pPr marL="1028700" indent="0">
+              <a:buNone/>
+              <a:defRPr sz="1350">
                 <a:solidFill>
                   <a:schemeClr val="bg1"/>
                 </a:solidFill>
               </a:defRPr>
             </a:lvl4pPr>
-            <a:lvl5pPr marL="1828800" indent="0">
-              <a:buNone/>
-              <a:defRPr sz="1800">
+            <a:lvl5pPr marL="1371600" indent="0">
+              <a:buNone/>
+              <a:defRPr sz="1350">
                 <a:solidFill>
                   <a:schemeClr val="bg1"/>
                 </a:solidFill>
@@ -2877,8 +2882,8 @@
         </p:nvSpPr>
         <p:spPr>
           <a:xfrm>
-            <a:off x="3887724" y="4399153"/>
-            <a:ext cx="685800" cy="685800"/>
+            <a:off x="4821183" y="6858403"/>
+            <a:ext cx="850463" cy="1069181"/>
           </a:xfrm>
           <a:prstGeom prst="ellipse">
             <a:avLst/>
@@ -2914,7 +2919,7 @@
           <a:lstStyle/>
           <a:p>
             <a:pPr algn="ctr"/>
-            <a:endParaRPr lang="en-US" dirty="0"/>
+            <a:endParaRPr lang="en-US" sz="1013" dirty="0"/>
           </a:p>
         </p:txBody>
       </p:sp>
@@ -2936,8 +2941,8 @@
         </p:nvSpPr>
         <p:spPr>
           <a:xfrm>
-            <a:off x="4002024" y="4513453"/>
-            <a:ext cx="457200" cy="457200"/>
+            <a:off x="4962926" y="7036599"/>
+            <a:ext cx="566976" cy="712788"/>
           </a:xfrm>
           <a:prstGeom prst="ellipse">
             <a:avLst/>
@@ -2953,7 +2958,7 @@
           <a:lstStyle>
             <a:lvl1pPr marL="0" indent="0" algn="ctr">
               <a:buNone/>
-              <a:defRPr sz="600">
+              <a:defRPr sz="450">
                 <a:solidFill>
                   <a:schemeClr val="bg1"/>
                 </a:solidFill>
@@ -2987,8 +2992,8 @@
         </p:nvSpPr>
         <p:spPr>
           <a:xfrm>
-            <a:off x="2862072" y="4894756"/>
-            <a:ext cx="893064" cy="335470"/>
+            <a:off x="3549268" y="7631062"/>
+            <a:ext cx="1107492" cy="523008"/>
           </a:xfrm>
         </p:spPr>
         <p:txBody>
@@ -2998,40 +3003,40 @@
           <a:lstStyle>
             <a:lvl1pPr marL="0" indent="0">
               <a:buNone/>
-              <a:defRPr sz="1400" cap="none" baseline="0">
+              <a:defRPr sz="1050" cap="none" baseline="0">
                 <a:solidFill>
                   <a:schemeClr val="bg1"/>
                 </a:solidFill>
                 <a:latin typeface="+mn-lt"/>
               </a:defRPr>
             </a:lvl1pPr>
-            <a:lvl2pPr marL="457200" indent="0">
-              <a:buNone/>
-              <a:defRPr sz="1800">
+            <a:lvl2pPr marL="342900" indent="0">
+              <a:buNone/>
+              <a:defRPr sz="1350">
                 <a:solidFill>
                   <a:schemeClr val="bg1"/>
                 </a:solidFill>
               </a:defRPr>
             </a:lvl2pPr>
-            <a:lvl3pPr marL="914400" indent="0">
-              <a:buNone/>
-              <a:defRPr sz="1800">
+            <a:lvl3pPr marL="685800" indent="0">
+              <a:buNone/>
+              <a:defRPr sz="1350">
                 <a:solidFill>
                   <a:schemeClr val="bg1"/>
                 </a:solidFill>
               </a:defRPr>
             </a:lvl3pPr>
-            <a:lvl4pPr marL="1371600" indent="0">
-              <a:buNone/>
-              <a:defRPr sz="1800">
+            <a:lvl4pPr marL="1028700" indent="0">
+              <a:buNone/>
+              <a:defRPr sz="1350">
                 <a:solidFill>
                   <a:schemeClr val="bg1"/>
                 </a:solidFill>
               </a:defRPr>
             </a:lvl4pPr>
-            <a:lvl5pPr marL="1828800" indent="0">
-              <a:buNone/>
-              <a:defRPr sz="1800">
+            <a:lvl5pPr marL="1371600" indent="0">
+              <a:buNone/>
+              <a:defRPr sz="1350">
                 <a:solidFill>
                   <a:schemeClr val="bg1"/>
                 </a:solidFill>
@@ -3066,8 +3071,8 @@
         </p:nvCxnSpPr>
         <p:spPr>
           <a:xfrm>
-            <a:off x="2943485" y="5377870"/>
-            <a:ext cx="1836387" cy="0"/>
+            <a:off x="3650228" y="8384248"/>
+            <a:ext cx="2277311" cy="0"/>
           </a:xfrm>
           <a:prstGeom prst="straightConnector1">
             <a:avLst/>
@@ -3125,8 +3130,8 @@
         </p:nvSpPr>
         <p:spPr>
           <a:xfrm>
-            <a:off x="5050536" y="2556796"/>
-            <a:ext cx="1996440" cy="381190"/>
+            <a:off x="6263191" y="3986117"/>
+            <a:ext cx="2475794" cy="594287"/>
           </a:xfrm>
         </p:spPr>
         <p:txBody>
@@ -3136,40 +3141,40 @@
           <a:lstStyle>
             <a:lvl1pPr marL="0" indent="0">
               <a:buNone/>
-              <a:defRPr sz="2200" b="1" cap="all" spc="100" baseline="0">
+              <a:defRPr sz="1650" b="1" cap="all" spc="75" baseline="0">
                 <a:solidFill>
                   <a:schemeClr val="bg1"/>
                 </a:solidFill>
                 <a:latin typeface="+mj-lt"/>
               </a:defRPr>
             </a:lvl1pPr>
-            <a:lvl2pPr marL="457200" indent="0">
-              <a:buNone/>
-              <a:defRPr sz="1800">
+            <a:lvl2pPr marL="342900" indent="0">
+              <a:buNone/>
+              <a:defRPr sz="1350">
                 <a:solidFill>
                   <a:schemeClr val="bg1"/>
                 </a:solidFill>
               </a:defRPr>
             </a:lvl2pPr>
-            <a:lvl3pPr marL="914400" indent="0">
-              <a:buNone/>
-              <a:defRPr sz="1800">
+            <a:lvl3pPr marL="685800" indent="0">
+              <a:buNone/>
+              <a:defRPr sz="1350">
                 <a:solidFill>
                   <a:schemeClr val="bg1"/>
                 </a:solidFill>
               </a:defRPr>
             </a:lvl3pPr>
-            <a:lvl4pPr marL="1371600" indent="0">
-              <a:buNone/>
-              <a:defRPr sz="1800">
+            <a:lvl4pPr marL="1028700" indent="0">
+              <a:buNone/>
+              <a:defRPr sz="1350">
                 <a:solidFill>
                   <a:schemeClr val="bg1"/>
                 </a:solidFill>
               </a:defRPr>
             </a:lvl4pPr>
-            <a:lvl5pPr marL="1828800" indent="0">
-              <a:buNone/>
-              <a:defRPr sz="1800">
+            <a:lvl5pPr marL="1371600" indent="0">
+              <a:buNone/>
+              <a:defRPr sz="1350">
                 <a:solidFill>
                   <a:schemeClr val="bg1"/>
                 </a:solidFill>
@@ -3202,8 +3207,8 @@
         </p:nvSpPr>
         <p:spPr>
           <a:xfrm>
-            <a:off x="5139140" y="3046075"/>
-            <a:ext cx="1828634" cy="96903"/>
+            <a:off x="6373069" y="4748918"/>
+            <a:ext cx="2267697" cy="151074"/>
           </a:xfrm>
           <a:prstGeom prst="rect">
             <a:avLst/>
@@ -3250,7 +3255,7 @@
           <a:lstStyle/>
           <a:p>
             <a:pPr algn="ctr"/>
-            <a:endParaRPr lang="en-US" dirty="0">
+            <a:endParaRPr lang="en-US" sz="1013" dirty="0">
               <a:solidFill>
                 <a:schemeClr val="bg1">
                   <a:lumMod val="95000"/>
@@ -3278,8 +3283,8 @@
         </p:nvSpPr>
         <p:spPr>
           <a:xfrm>
-            <a:off x="5050536" y="3391012"/>
-            <a:ext cx="1996440" cy="778652"/>
+            <a:off x="6263191" y="5286683"/>
+            <a:ext cx="2475794" cy="1213940"/>
           </a:xfrm>
         </p:spPr>
         <p:txBody>
@@ -3289,40 +3294,40 @@
           <a:lstStyle>
             <a:lvl1pPr marL="0" indent="0">
               <a:buNone/>
-              <a:defRPr sz="1200" cap="none" baseline="0">
+              <a:defRPr sz="900" cap="none" baseline="0">
                 <a:solidFill>
                   <a:schemeClr val="bg1"/>
                 </a:solidFill>
                 <a:latin typeface="+mn-lt"/>
               </a:defRPr>
             </a:lvl1pPr>
-            <a:lvl2pPr marL="457200" indent="0">
-              <a:buNone/>
-              <a:defRPr sz="1800">
+            <a:lvl2pPr marL="342900" indent="0">
+              <a:buNone/>
+              <a:defRPr sz="1350">
                 <a:solidFill>
                   <a:schemeClr val="bg1"/>
                 </a:solidFill>
               </a:defRPr>
             </a:lvl2pPr>
-            <a:lvl3pPr marL="914400" indent="0">
-              <a:buNone/>
-              <a:defRPr sz="1800">
+            <a:lvl3pPr marL="685800" indent="0">
+              <a:buNone/>
+              <a:defRPr sz="1350">
                 <a:solidFill>
                   <a:schemeClr val="bg1"/>
                 </a:solidFill>
               </a:defRPr>
             </a:lvl3pPr>
-            <a:lvl4pPr marL="1371600" indent="0">
-              <a:buNone/>
-              <a:defRPr sz="1800">
+            <a:lvl4pPr marL="1028700" indent="0">
+              <a:buNone/>
+              <a:defRPr sz="1350">
                 <a:solidFill>
                   <a:schemeClr val="bg1"/>
                 </a:solidFill>
               </a:defRPr>
             </a:lvl4pPr>
-            <a:lvl5pPr marL="1828800" indent="0">
-              <a:buNone/>
-              <a:defRPr sz="1800">
+            <a:lvl5pPr marL="1371600" indent="0">
+              <a:buNone/>
+              <a:defRPr sz="1350">
                 <a:solidFill>
                   <a:schemeClr val="bg1"/>
                 </a:solidFill>
@@ -3356,8 +3361,8 @@
         </p:nvSpPr>
         <p:spPr>
           <a:xfrm>
-            <a:off x="5065776" y="4505738"/>
-            <a:ext cx="893064" cy="335470"/>
+            <a:off x="6282090" y="7024571"/>
+            <a:ext cx="1107492" cy="523008"/>
           </a:xfrm>
         </p:spPr>
         <p:txBody>
@@ -3367,7 +3372,7 @@
           <a:lstStyle>
             <a:lvl1pPr marL="0" indent="0">
               <a:buNone/>
-              <a:defRPr sz="2000" cap="all" baseline="0">
+              <a:defRPr sz="1500" cap="all" baseline="0">
                 <a:solidFill>
                   <a:schemeClr val="accent2">
                     <a:lumMod val="40000"/>
@@ -3377,33 +3382,33 @@
                 <a:latin typeface="+mj-lt"/>
               </a:defRPr>
             </a:lvl1pPr>
-            <a:lvl2pPr marL="457200" indent="0">
-              <a:buNone/>
-              <a:defRPr sz="1800">
+            <a:lvl2pPr marL="342900" indent="0">
+              <a:buNone/>
+              <a:defRPr sz="1350">
                 <a:solidFill>
                   <a:schemeClr val="bg1"/>
                 </a:solidFill>
               </a:defRPr>
             </a:lvl2pPr>
-            <a:lvl3pPr marL="914400" indent="0">
-              <a:buNone/>
-              <a:defRPr sz="1800">
+            <a:lvl3pPr marL="685800" indent="0">
+              <a:buNone/>
+              <a:defRPr sz="1350">
                 <a:solidFill>
                   <a:schemeClr val="bg1"/>
                 </a:solidFill>
               </a:defRPr>
             </a:lvl3pPr>
-            <a:lvl4pPr marL="1371600" indent="0">
-              <a:buNone/>
-              <a:defRPr sz="1800">
+            <a:lvl4pPr marL="1028700" indent="0">
+              <a:buNone/>
+              <a:defRPr sz="1350">
                 <a:solidFill>
                   <a:schemeClr val="bg1"/>
                 </a:solidFill>
               </a:defRPr>
             </a:lvl4pPr>
-            <a:lvl5pPr marL="1828800" indent="0">
-              <a:buNone/>
-              <a:defRPr sz="1800">
+            <a:lvl5pPr marL="1371600" indent="0">
+              <a:buNone/>
+              <a:defRPr sz="1350">
                 <a:solidFill>
                   <a:schemeClr val="bg1"/>
                 </a:solidFill>
@@ -3436,8 +3441,8 @@
         </p:nvSpPr>
         <p:spPr>
           <a:xfrm>
-            <a:off x="6092952" y="4402872"/>
-            <a:ext cx="685800" cy="685800"/>
+            <a:off x="7555895" y="6864200"/>
+            <a:ext cx="850463" cy="1069181"/>
           </a:xfrm>
           <a:prstGeom prst="ellipse">
             <a:avLst/>
@@ -3473,7 +3478,7 @@
           <a:lstStyle/>
           <a:p>
             <a:pPr algn="ctr"/>
-            <a:endParaRPr lang="en-US" dirty="0"/>
+            <a:endParaRPr lang="en-US" sz="1013" dirty="0"/>
           </a:p>
         </p:txBody>
       </p:sp>
@@ -3495,8 +3500,8 @@
         </p:nvSpPr>
         <p:spPr>
           <a:xfrm>
-            <a:off x="6207252" y="4517172"/>
-            <a:ext cx="457200" cy="457200"/>
+            <a:off x="7697639" y="7042397"/>
+            <a:ext cx="566976" cy="712788"/>
           </a:xfrm>
           <a:prstGeom prst="ellipse">
             <a:avLst/>
@@ -3512,7 +3517,7 @@
           <a:lstStyle>
             <a:lvl1pPr marL="0" indent="0" algn="ctr">
               <a:buNone/>
-              <a:defRPr sz="600">
+              <a:defRPr sz="450">
                 <a:solidFill>
                   <a:schemeClr val="bg1"/>
                 </a:solidFill>
@@ -3546,8 +3551,8 @@
         </p:nvSpPr>
         <p:spPr>
           <a:xfrm>
-            <a:off x="5065776" y="4894756"/>
-            <a:ext cx="893064" cy="335470"/>
+            <a:off x="6282090" y="7631062"/>
+            <a:ext cx="1107492" cy="523008"/>
           </a:xfrm>
         </p:spPr>
         <p:txBody>
@@ -3557,40 +3562,40 @@
           <a:lstStyle>
             <a:lvl1pPr marL="0" indent="0">
               <a:buNone/>
-              <a:defRPr sz="1400" cap="none" baseline="0">
+              <a:defRPr sz="1050" cap="none" baseline="0">
                 <a:solidFill>
                   <a:schemeClr val="bg1"/>
                 </a:solidFill>
                 <a:latin typeface="+mn-lt"/>
               </a:defRPr>
             </a:lvl1pPr>
-            <a:lvl2pPr marL="457200" indent="0">
-              <a:buNone/>
-              <a:defRPr sz="1800">
+            <a:lvl2pPr marL="342900" indent="0">
+              <a:buNone/>
+              <a:defRPr sz="1350">
                 <a:solidFill>
                   <a:schemeClr val="bg1"/>
                 </a:solidFill>
               </a:defRPr>
             </a:lvl2pPr>
-            <a:lvl3pPr marL="914400" indent="0">
-              <a:buNone/>
-              <a:defRPr sz="1800">
+            <a:lvl3pPr marL="685800" indent="0">
+              <a:buNone/>
+              <a:defRPr sz="1350">
                 <a:solidFill>
                   <a:schemeClr val="bg1"/>
                 </a:solidFill>
               </a:defRPr>
             </a:lvl3pPr>
-            <a:lvl4pPr marL="1371600" indent="0">
-              <a:buNone/>
-              <a:defRPr sz="1800">
+            <a:lvl4pPr marL="1028700" indent="0">
+              <a:buNone/>
+              <a:defRPr sz="1350">
                 <a:solidFill>
                   <a:schemeClr val="bg1"/>
                 </a:solidFill>
               </a:defRPr>
             </a:lvl4pPr>
-            <a:lvl5pPr marL="1828800" indent="0">
-              <a:buNone/>
-              <a:defRPr sz="1800">
+            <a:lvl5pPr marL="1371600" indent="0">
+              <a:buNone/>
+              <a:defRPr sz="1350">
                 <a:solidFill>
                   <a:schemeClr val="bg1"/>
                 </a:solidFill>
@@ -3625,8 +3630,8 @@
         </p:nvCxnSpPr>
         <p:spPr>
           <a:xfrm>
-            <a:off x="5142870" y="5377870"/>
-            <a:ext cx="1827639" cy="0"/>
+            <a:off x="6377696" y="8384248"/>
+            <a:ext cx="2266462" cy="0"/>
           </a:xfrm>
           <a:prstGeom prst="straightConnector1">
             <a:avLst/>
@@ -3685,8 +3690,8 @@
         </p:nvSpPr>
         <p:spPr>
           <a:xfrm>
-            <a:off x="7239000" y="2556796"/>
-            <a:ext cx="1996440" cy="381190"/>
+            <a:off x="8977114" y="3986117"/>
+            <a:ext cx="2475794" cy="594287"/>
           </a:xfrm>
         </p:spPr>
         <p:txBody>
@@ -3696,40 +3701,40 @@
           <a:lstStyle>
             <a:lvl1pPr marL="0" indent="0">
               <a:buNone/>
-              <a:defRPr sz="2200" b="1" cap="all" spc="100" baseline="0">
+              <a:defRPr sz="1650" b="1" cap="all" spc="75" baseline="0">
                 <a:solidFill>
                   <a:schemeClr val="bg1"/>
                 </a:solidFill>
                 <a:latin typeface="+mj-lt"/>
               </a:defRPr>
             </a:lvl1pPr>
-            <a:lvl2pPr marL="457200" indent="0">
-              <a:buNone/>
-              <a:defRPr sz="1800">
+            <a:lvl2pPr marL="342900" indent="0">
+              <a:buNone/>
+              <a:defRPr sz="1350">
                 <a:solidFill>
                   <a:schemeClr val="bg1"/>
                 </a:solidFill>
               </a:defRPr>
             </a:lvl2pPr>
-            <a:lvl3pPr marL="914400" indent="0">
-              <a:buNone/>
-              <a:defRPr sz="1800">
+            <a:lvl3pPr marL="685800" indent="0">
+              <a:buNone/>
+              <a:defRPr sz="1350">
                 <a:solidFill>
                   <a:schemeClr val="bg1"/>
                 </a:solidFill>
               </a:defRPr>
             </a:lvl3pPr>
-            <a:lvl4pPr marL="1371600" indent="0">
-              <a:buNone/>
-              <a:defRPr sz="1800">
+            <a:lvl4pPr marL="1028700" indent="0">
+              <a:buNone/>
+              <a:defRPr sz="1350">
                 <a:solidFill>
                   <a:schemeClr val="bg1"/>
                 </a:solidFill>
               </a:defRPr>
             </a:lvl4pPr>
-            <a:lvl5pPr marL="1828800" indent="0">
-              <a:buNone/>
-              <a:defRPr sz="1800">
+            <a:lvl5pPr marL="1371600" indent="0">
+              <a:buNone/>
+              <a:defRPr sz="1350">
                 <a:solidFill>
                   <a:schemeClr val="bg1"/>
                 </a:solidFill>
@@ -3762,8 +3767,8 @@
         </p:nvSpPr>
         <p:spPr>
           <a:xfrm>
-            <a:off x="7332009" y="3046075"/>
-            <a:ext cx="1828635" cy="96903"/>
+            <a:off x="9092456" y="4748918"/>
+            <a:ext cx="2267697" cy="151074"/>
           </a:xfrm>
           <a:prstGeom prst="rect">
             <a:avLst/>
@@ -3810,7 +3815,7 @@
           <a:lstStyle/>
           <a:p>
             <a:pPr algn="ctr"/>
-            <a:endParaRPr lang="en-US" dirty="0">
+            <a:endParaRPr lang="en-US" sz="1013" dirty="0">
               <a:solidFill>
                 <a:schemeClr val="bg1">
                   <a:lumMod val="95000"/>
@@ -3838,8 +3843,8 @@
         </p:nvSpPr>
         <p:spPr>
           <a:xfrm>
-            <a:off x="7239000" y="3391012"/>
-            <a:ext cx="1996440" cy="778652"/>
+            <a:off x="8977114" y="5286683"/>
+            <a:ext cx="2475794" cy="1213940"/>
           </a:xfrm>
         </p:spPr>
         <p:txBody>
@@ -3849,40 +3854,40 @@
           <a:lstStyle>
             <a:lvl1pPr marL="0" indent="0">
               <a:buNone/>
-              <a:defRPr sz="1200" cap="none" baseline="0">
+              <a:defRPr sz="900" cap="none" baseline="0">
                 <a:solidFill>
                   <a:schemeClr val="bg1"/>
                 </a:solidFill>
                 <a:latin typeface="+mn-lt"/>
               </a:defRPr>
             </a:lvl1pPr>
-            <a:lvl2pPr marL="457200" indent="0">
-              <a:buNone/>
-              <a:defRPr sz="1800">
+            <a:lvl2pPr marL="342900" indent="0">
+              <a:buNone/>
+              <a:defRPr sz="1350">
                 <a:solidFill>
                   <a:schemeClr val="bg1"/>
                 </a:solidFill>
               </a:defRPr>
             </a:lvl2pPr>
-            <a:lvl3pPr marL="914400" indent="0">
-              <a:buNone/>
-              <a:defRPr sz="1800">
+            <a:lvl3pPr marL="685800" indent="0">
+              <a:buNone/>
+              <a:defRPr sz="1350">
                 <a:solidFill>
                   <a:schemeClr val="bg1"/>
                 </a:solidFill>
               </a:defRPr>
             </a:lvl3pPr>
-            <a:lvl4pPr marL="1371600" indent="0">
-              <a:buNone/>
-              <a:defRPr sz="1800">
+            <a:lvl4pPr marL="1028700" indent="0">
+              <a:buNone/>
+              <a:defRPr sz="1350">
                 <a:solidFill>
                   <a:schemeClr val="bg1"/>
                 </a:solidFill>
               </a:defRPr>
             </a:lvl4pPr>
-            <a:lvl5pPr marL="1828800" indent="0">
-              <a:buNone/>
-              <a:defRPr sz="1800">
+            <a:lvl5pPr marL="1371600" indent="0">
+              <a:buNone/>
+              <a:defRPr sz="1350">
                 <a:solidFill>
                   <a:schemeClr val="bg1"/>
                 </a:solidFill>
@@ -3916,8 +3921,8 @@
         </p:nvSpPr>
         <p:spPr>
           <a:xfrm>
-            <a:off x="7257288" y="4505738"/>
-            <a:ext cx="893064" cy="335470"/>
+            <a:off x="8999793" y="7024571"/>
+            <a:ext cx="1107492" cy="523008"/>
           </a:xfrm>
         </p:spPr>
         <p:txBody>
@@ -3927,7 +3932,7 @@
           <a:lstStyle>
             <a:lvl1pPr marL="0" indent="0">
               <a:buNone/>
-              <a:defRPr sz="2000" cap="all" baseline="0">
+              <a:defRPr sz="1500" cap="all" baseline="0">
                 <a:solidFill>
                   <a:schemeClr val="accent5">
                     <a:lumMod val="40000"/>
@@ -3937,33 +3942,33 @@
                 <a:latin typeface="+mj-lt"/>
               </a:defRPr>
             </a:lvl1pPr>
-            <a:lvl2pPr marL="457200" indent="0">
-              <a:buNone/>
-              <a:defRPr sz="1800">
+            <a:lvl2pPr marL="342900" indent="0">
+              <a:buNone/>
+              <a:defRPr sz="1350">
                 <a:solidFill>
                   <a:schemeClr val="bg1"/>
                 </a:solidFill>
               </a:defRPr>
             </a:lvl2pPr>
-            <a:lvl3pPr marL="914400" indent="0">
-              <a:buNone/>
-              <a:defRPr sz="1800">
+            <a:lvl3pPr marL="685800" indent="0">
+              <a:buNone/>
+              <a:defRPr sz="1350">
                 <a:solidFill>
                   <a:schemeClr val="bg1"/>
                 </a:solidFill>
               </a:defRPr>
             </a:lvl3pPr>
-            <a:lvl4pPr marL="1371600" indent="0">
-              <a:buNone/>
-              <a:defRPr sz="1800">
+            <a:lvl4pPr marL="1028700" indent="0">
+              <a:buNone/>
+              <a:defRPr sz="1350">
                 <a:solidFill>
                   <a:schemeClr val="bg1"/>
                 </a:solidFill>
               </a:defRPr>
             </a:lvl4pPr>
-            <a:lvl5pPr marL="1828800" indent="0">
-              <a:buNone/>
-              <a:defRPr sz="1800">
+            <a:lvl5pPr marL="1371600" indent="0">
+              <a:buNone/>
+              <a:defRPr sz="1350">
                 <a:solidFill>
                   <a:schemeClr val="bg1"/>
                 </a:solidFill>
@@ -3996,8 +4001,8 @@
         </p:nvSpPr>
         <p:spPr>
           <a:xfrm>
-            <a:off x="8298180" y="4402872"/>
-            <a:ext cx="685800" cy="685800"/>
+            <a:off x="10290608" y="6864200"/>
+            <a:ext cx="850463" cy="1069181"/>
           </a:xfrm>
           <a:prstGeom prst="ellipse">
             <a:avLst/>
@@ -4033,7 +4038,7 @@
           <a:lstStyle/>
           <a:p>
             <a:pPr algn="ctr"/>
-            <a:endParaRPr lang="en-US" dirty="0"/>
+            <a:endParaRPr lang="en-US" sz="1013" dirty="0"/>
           </a:p>
         </p:txBody>
       </p:sp>
@@ -4055,8 +4060,8 @@
         </p:nvSpPr>
         <p:spPr>
           <a:xfrm>
-            <a:off x="8412480" y="4517172"/>
-            <a:ext cx="457200" cy="457200"/>
+            <a:off x="10432351" y="7042397"/>
+            <a:ext cx="566976" cy="712788"/>
           </a:xfrm>
           <a:prstGeom prst="ellipse">
             <a:avLst/>
@@ -4072,7 +4077,7 @@
           <a:lstStyle>
             <a:lvl1pPr marL="0" indent="0" algn="ctr">
               <a:buNone/>
-              <a:defRPr sz="600">
+              <a:defRPr sz="450">
                 <a:solidFill>
                   <a:schemeClr val="bg1"/>
                 </a:solidFill>
@@ -4106,8 +4111,8 @@
         </p:nvSpPr>
         <p:spPr>
           <a:xfrm>
-            <a:off x="7257288" y="4894756"/>
-            <a:ext cx="893064" cy="335470"/>
+            <a:off x="8999793" y="7631062"/>
+            <a:ext cx="1107492" cy="523008"/>
           </a:xfrm>
         </p:spPr>
         <p:txBody>
@@ -4117,40 +4122,40 @@
           <a:lstStyle>
             <a:lvl1pPr marL="0" indent="0">
               <a:buNone/>
-              <a:defRPr sz="1400" cap="none" baseline="0">
+              <a:defRPr sz="1050" cap="none" baseline="0">
                 <a:solidFill>
                   <a:schemeClr val="bg1"/>
                 </a:solidFill>
                 <a:latin typeface="+mn-lt"/>
               </a:defRPr>
             </a:lvl1pPr>
-            <a:lvl2pPr marL="457200" indent="0">
-              <a:buNone/>
-              <a:defRPr sz="1800">
+            <a:lvl2pPr marL="342900" indent="0">
+              <a:buNone/>
+              <a:defRPr sz="1350">
                 <a:solidFill>
                   <a:schemeClr val="bg1"/>
                 </a:solidFill>
               </a:defRPr>
             </a:lvl2pPr>
-            <a:lvl3pPr marL="914400" indent="0">
-              <a:buNone/>
-              <a:defRPr sz="1800">
+            <a:lvl3pPr marL="685800" indent="0">
+              <a:buNone/>
+              <a:defRPr sz="1350">
                 <a:solidFill>
                   <a:schemeClr val="bg1"/>
                 </a:solidFill>
               </a:defRPr>
             </a:lvl3pPr>
-            <a:lvl4pPr marL="1371600" indent="0">
-              <a:buNone/>
-              <a:defRPr sz="1800">
+            <a:lvl4pPr marL="1028700" indent="0">
+              <a:buNone/>
+              <a:defRPr sz="1350">
                 <a:solidFill>
                   <a:schemeClr val="bg1"/>
                 </a:solidFill>
               </a:defRPr>
             </a:lvl4pPr>
-            <a:lvl5pPr marL="1828800" indent="0">
-              <a:buNone/>
-              <a:defRPr sz="1800">
+            <a:lvl5pPr marL="1371600" indent="0">
+              <a:buNone/>
+              <a:defRPr sz="1350">
                 <a:solidFill>
                   <a:schemeClr val="bg1"/>
                 </a:solidFill>
@@ -4185,8 +4190,8 @@
         </p:nvCxnSpPr>
         <p:spPr>
           <a:xfrm>
-            <a:off x="7333507" y="5377870"/>
-            <a:ext cx="1828375" cy="0"/>
+            <a:off x="9094315" y="8384248"/>
+            <a:ext cx="2267375" cy="0"/>
           </a:xfrm>
           <a:prstGeom prst="straightConnector1">
             <a:avLst/>
@@ -4245,8 +4250,8 @@
         </p:nvSpPr>
         <p:spPr>
           <a:xfrm>
-            <a:off x="9427464" y="2556796"/>
-            <a:ext cx="1996440" cy="381190"/>
+            <a:off x="11691037" y="3986117"/>
+            <a:ext cx="2475794" cy="594287"/>
           </a:xfrm>
         </p:spPr>
         <p:txBody>
@@ -4256,40 +4261,40 @@
           <a:lstStyle>
             <a:lvl1pPr marL="0" indent="0">
               <a:buNone/>
-              <a:defRPr sz="2200" b="1" cap="all" spc="100" baseline="0">
+              <a:defRPr sz="1650" b="1" cap="all" spc="75" baseline="0">
                 <a:solidFill>
                   <a:schemeClr val="bg1"/>
                 </a:solidFill>
                 <a:latin typeface="+mj-lt"/>
               </a:defRPr>
             </a:lvl1pPr>
-            <a:lvl2pPr marL="457200" indent="0">
-              <a:buNone/>
-              <a:defRPr sz="1800">
+            <a:lvl2pPr marL="342900" indent="0">
+              <a:buNone/>
+              <a:defRPr sz="1350">
                 <a:solidFill>
                   <a:schemeClr val="bg1"/>
                 </a:solidFill>
               </a:defRPr>
             </a:lvl2pPr>
-            <a:lvl3pPr marL="914400" indent="0">
-              <a:buNone/>
-              <a:defRPr sz="1800">
+            <a:lvl3pPr marL="685800" indent="0">
+              <a:buNone/>
+              <a:defRPr sz="1350">
                 <a:solidFill>
                   <a:schemeClr val="bg1"/>
                 </a:solidFill>
               </a:defRPr>
             </a:lvl3pPr>
-            <a:lvl4pPr marL="1371600" indent="0">
-              <a:buNone/>
-              <a:defRPr sz="1800">
+            <a:lvl4pPr marL="1028700" indent="0">
+              <a:buNone/>
+              <a:defRPr sz="1350">
                 <a:solidFill>
                   <a:schemeClr val="bg1"/>
                 </a:solidFill>
               </a:defRPr>
             </a:lvl4pPr>
-            <a:lvl5pPr marL="1828800" indent="0">
-              <a:buNone/>
-              <a:defRPr sz="1800">
+            <a:lvl5pPr marL="1371600" indent="0">
+              <a:buNone/>
+              <a:defRPr sz="1350">
                 <a:solidFill>
                   <a:schemeClr val="bg1"/>
                 </a:solidFill>
@@ -4322,8 +4327,8 @@
         </p:nvSpPr>
         <p:spPr>
           <a:xfrm>
-            <a:off x="9524879" y="3046075"/>
-            <a:ext cx="1828635" cy="96903"/>
+            <a:off x="11811844" y="4748918"/>
+            <a:ext cx="2267697" cy="151074"/>
           </a:xfrm>
           <a:prstGeom prst="rect">
             <a:avLst/>
@@ -4370,7 +4375,7 @@
           <a:lstStyle/>
           <a:p>
             <a:pPr algn="ctr"/>
-            <a:endParaRPr lang="en-US" dirty="0">
+            <a:endParaRPr lang="en-US" sz="1013" dirty="0">
               <a:solidFill>
                 <a:schemeClr val="bg1">
                   <a:lumMod val="95000"/>
@@ -4398,8 +4403,8 @@
         </p:nvSpPr>
         <p:spPr>
           <a:xfrm>
-            <a:off x="9427464" y="3391012"/>
-            <a:ext cx="1996440" cy="778652"/>
+            <a:off x="11691037" y="5286683"/>
+            <a:ext cx="2475794" cy="1213940"/>
           </a:xfrm>
         </p:spPr>
         <p:txBody>
@@ -4409,40 +4414,40 @@
           <a:lstStyle>
             <a:lvl1pPr marL="0" indent="0">
               <a:buNone/>
-              <a:defRPr sz="1200" cap="none" baseline="0">
+              <a:defRPr sz="900" cap="none" baseline="0">
                 <a:solidFill>
                   <a:schemeClr val="bg1"/>
                 </a:solidFill>
                 <a:latin typeface="+mn-lt"/>
               </a:defRPr>
             </a:lvl1pPr>
-            <a:lvl2pPr marL="457200" indent="0">
-              <a:buNone/>
-              <a:defRPr sz="1800">
+            <a:lvl2pPr marL="342900" indent="0">
+              <a:buNone/>
+              <a:defRPr sz="1350">
                 <a:solidFill>
                   <a:schemeClr val="bg1"/>
                 </a:solidFill>
               </a:defRPr>
             </a:lvl2pPr>
-            <a:lvl3pPr marL="914400" indent="0">
-              <a:buNone/>
-              <a:defRPr sz="1800">
+            <a:lvl3pPr marL="685800" indent="0">
+              <a:buNone/>
+              <a:defRPr sz="1350">
                 <a:solidFill>
                   <a:schemeClr val="bg1"/>
                 </a:solidFill>
               </a:defRPr>
             </a:lvl3pPr>
-            <a:lvl4pPr marL="1371600" indent="0">
-              <a:buNone/>
-              <a:defRPr sz="1800">
+            <a:lvl4pPr marL="1028700" indent="0">
+              <a:buNone/>
+              <a:defRPr sz="1350">
                 <a:solidFill>
                   <a:schemeClr val="bg1"/>
                 </a:solidFill>
               </a:defRPr>
             </a:lvl4pPr>
-            <a:lvl5pPr marL="1828800" indent="0">
-              <a:buNone/>
-              <a:defRPr sz="1800">
+            <a:lvl5pPr marL="1371600" indent="0">
+              <a:buNone/>
+              <a:defRPr sz="1350">
                 <a:solidFill>
                   <a:schemeClr val="bg1"/>
                 </a:solidFill>
@@ -4476,8 +4481,8 @@
         </p:nvSpPr>
         <p:spPr>
           <a:xfrm>
-            <a:off x="9448800" y="4505738"/>
-            <a:ext cx="893064" cy="335470"/>
+            <a:off x="11717496" y="7024571"/>
+            <a:ext cx="1107492" cy="523008"/>
           </a:xfrm>
         </p:spPr>
         <p:txBody>
@@ -4487,7 +4492,7 @@
           <a:lstStyle>
             <a:lvl1pPr marL="0" indent="0">
               <a:buNone/>
-              <a:defRPr sz="2000" cap="all" baseline="0">
+              <a:defRPr sz="1500" cap="all" baseline="0">
                 <a:solidFill>
                   <a:schemeClr val="accent6">
                     <a:lumMod val="40000"/>
@@ -4497,33 +4502,33 @@
                 <a:latin typeface="+mj-lt"/>
               </a:defRPr>
             </a:lvl1pPr>
-            <a:lvl2pPr marL="457200" indent="0">
-              <a:buNone/>
-              <a:defRPr sz="1800">
+            <a:lvl2pPr marL="342900" indent="0">
+              <a:buNone/>
+              <a:defRPr sz="1350">
                 <a:solidFill>
                   <a:schemeClr val="bg1"/>
                 </a:solidFill>
               </a:defRPr>
             </a:lvl2pPr>
-            <a:lvl3pPr marL="914400" indent="0">
-              <a:buNone/>
-              <a:defRPr sz="1800">
+            <a:lvl3pPr marL="685800" indent="0">
+              <a:buNone/>
+              <a:defRPr sz="1350">
                 <a:solidFill>
                   <a:schemeClr val="bg1"/>
                 </a:solidFill>
               </a:defRPr>
             </a:lvl3pPr>
-            <a:lvl4pPr marL="1371600" indent="0">
-              <a:buNone/>
-              <a:defRPr sz="1800">
+            <a:lvl4pPr marL="1028700" indent="0">
+              <a:buNone/>
+              <a:defRPr sz="1350">
                 <a:solidFill>
                   <a:schemeClr val="bg1"/>
                 </a:solidFill>
               </a:defRPr>
             </a:lvl4pPr>
-            <a:lvl5pPr marL="1828800" indent="0">
-              <a:buNone/>
-              <a:defRPr sz="1800">
+            <a:lvl5pPr marL="1371600" indent="0">
+              <a:buNone/>
+              <a:defRPr sz="1350">
                 <a:solidFill>
                   <a:schemeClr val="bg1"/>
                 </a:solidFill>
@@ -4556,8 +4561,8 @@
         </p:nvSpPr>
         <p:spPr>
           <a:xfrm>
-            <a:off x="10484738" y="4399153"/>
-            <a:ext cx="685800" cy="685800"/>
+            <a:off x="13002168" y="6858403"/>
+            <a:ext cx="850463" cy="1069181"/>
           </a:xfrm>
           <a:prstGeom prst="ellipse">
             <a:avLst/>
@@ -4593,7 +4598,7 @@
           <a:lstStyle/>
           <a:p>
             <a:pPr algn="ctr"/>
-            <a:endParaRPr lang="en-US" dirty="0"/>
+            <a:endParaRPr lang="en-US" sz="1013" dirty="0"/>
           </a:p>
         </p:txBody>
       </p:sp>
@@ -4615,8 +4620,8 @@
         </p:nvSpPr>
         <p:spPr>
           <a:xfrm>
-            <a:off x="10599038" y="4513453"/>
-            <a:ext cx="457200" cy="457200"/>
+            <a:off x="13143912" y="7036599"/>
+            <a:ext cx="566976" cy="712788"/>
           </a:xfrm>
           <a:prstGeom prst="ellipse">
             <a:avLst/>
@@ -4632,7 +4637,7 @@
           <a:lstStyle>
             <a:lvl1pPr marL="0" indent="0" algn="ctr">
               <a:buNone/>
-              <a:defRPr sz="600">
+              <a:defRPr sz="450">
                 <a:solidFill>
                   <a:schemeClr val="bg1"/>
                 </a:solidFill>
@@ -4666,8 +4671,8 @@
         </p:nvSpPr>
         <p:spPr>
           <a:xfrm>
-            <a:off x="9448800" y="4894756"/>
-            <a:ext cx="893064" cy="335470"/>
+            <a:off x="11717496" y="7631062"/>
+            <a:ext cx="1107492" cy="523008"/>
           </a:xfrm>
         </p:spPr>
         <p:txBody>
@@ -4677,40 +4682,40 @@
           <a:lstStyle>
             <a:lvl1pPr marL="0" indent="0">
               <a:buNone/>
-              <a:defRPr sz="1400" cap="none" baseline="0">
+              <a:defRPr sz="1050" cap="none" baseline="0">
                 <a:solidFill>
                   <a:schemeClr val="bg1"/>
                 </a:solidFill>
                 <a:latin typeface="+mn-lt"/>
               </a:defRPr>
             </a:lvl1pPr>
-            <a:lvl2pPr marL="457200" indent="0">
-              <a:buNone/>
-              <a:defRPr sz="1800">
+            <a:lvl2pPr marL="342900" indent="0">
+              <a:buNone/>
+              <a:defRPr sz="1350">
                 <a:solidFill>
                   <a:schemeClr val="bg1"/>
                 </a:solidFill>
               </a:defRPr>
             </a:lvl2pPr>
-            <a:lvl3pPr marL="914400" indent="0">
-              <a:buNone/>
-              <a:defRPr sz="1800">
+            <a:lvl3pPr marL="685800" indent="0">
+              <a:buNone/>
+              <a:defRPr sz="1350">
                 <a:solidFill>
                   <a:schemeClr val="bg1"/>
                 </a:solidFill>
               </a:defRPr>
             </a:lvl3pPr>
-            <a:lvl4pPr marL="1371600" indent="0">
-              <a:buNone/>
-              <a:defRPr sz="1800">
+            <a:lvl4pPr marL="1028700" indent="0">
+              <a:buNone/>
+              <a:defRPr sz="1350">
                 <a:solidFill>
                   <a:schemeClr val="bg1"/>
                 </a:solidFill>
               </a:defRPr>
             </a:lvl4pPr>
-            <a:lvl5pPr marL="1828800" indent="0">
-              <a:buNone/>
-              <a:defRPr sz="1800">
+            <a:lvl5pPr marL="1371600" indent="0">
+              <a:buNone/>
+              <a:defRPr sz="1350">
                 <a:solidFill>
                   <a:schemeClr val="bg1"/>
                 </a:solidFill>
@@ -4745,8 +4750,8 @@
         </p:nvCxnSpPr>
         <p:spPr>
           <a:xfrm>
-            <a:off x="9524879" y="5376344"/>
-            <a:ext cx="1828635" cy="3053"/>
+            <a:off x="11811844" y="8381870"/>
+            <a:ext cx="2267697" cy="4760"/>
           </a:xfrm>
           <a:prstGeom prst="straightConnector1">
             <a:avLst/>
@@ -4805,8 +4810,8 @@
         </p:nvSpPr>
         <p:spPr>
           <a:xfrm>
-            <a:off x="670560" y="6072886"/>
-            <a:ext cx="4114800" cy="365125"/>
+            <a:off x="831564" y="9467799"/>
+            <a:ext cx="5102781" cy="569241"/>
           </a:xfrm>
           <a:prstGeom prst="rect">
             <a:avLst/>
@@ -4816,7 +4821,7 @@
           <a:bodyPr/>
           <a:lstStyle>
             <a:lvl1pPr algn="l">
-              <a:defRPr sz="1000" cap="all" baseline="0">
+              <a:defRPr sz="750" cap="all" baseline="0">
                 <a:solidFill>
                   <a:schemeClr val="bg1"/>
                 </a:solidFill>
@@ -4846,8 +4851,8 @@
         </p:nvSpPr>
         <p:spPr>
           <a:xfrm>
-            <a:off x="8738616" y="6072886"/>
-            <a:ext cx="2743200" cy="365125"/>
+            <a:off x="10836794" y="9467799"/>
+            <a:ext cx="3401854" cy="569241"/>
           </a:xfrm>
           <a:prstGeom prst="rect">
             <a:avLst/>
@@ -4857,7 +4862,7 @@
           <a:bodyPr/>
           <a:lstStyle>
             <a:lvl1pPr>
-              <a:defRPr sz="1000">
+              <a:defRPr sz="750">
                 <a:solidFill>
                   <a:schemeClr val="bg1"/>
                 </a:solidFill>
@@ -4936,8 +4941,8 @@
         </p:nvSpPr>
         <p:spPr>
           <a:xfrm>
-            <a:off x="618744" y="209677"/>
-            <a:ext cx="9064752" cy="1097915"/>
+            <a:off x="767307" y="326893"/>
+            <a:ext cx="11241237" cy="1711680"/>
           </a:xfrm>
           <a:noFill/>
         </p:spPr>
@@ -4947,7 +4952,7 @@
           </a:bodyPr>
           <a:lstStyle>
             <a:lvl1pPr>
-              <a:defRPr sz="5400">
+              <a:defRPr sz="4050">
                 <a:solidFill>
                   <a:schemeClr val="tx1"/>
                 </a:solidFill>
@@ -4981,8 +4986,8 @@
         </p:nvSpPr>
         <p:spPr>
           <a:xfrm>
-            <a:off x="618745" y="1344676"/>
-            <a:ext cx="9064752" cy="511175"/>
+            <a:off x="767309" y="2096390"/>
+            <a:ext cx="11241237" cy="796936"/>
           </a:xfrm>
         </p:spPr>
         <p:txBody>
@@ -4992,39 +4997,39 @@
           <a:lstStyle>
             <a:lvl1pPr marL="0" indent="0">
               <a:buNone/>
-              <a:defRPr sz="1800">
+              <a:defRPr sz="1350">
                 <a:solidFill>
                   <a:schemeClr val="tx1"/>
                 </a:solidFill>
               </a:defRPr>
             </a:lvl1pPr>
-            <a:lvl2pPr marL="457200" indent="0">
-              <a:buNone/>
-              <a:defRPr sz="1800">
+            <a:lvl2pPr marL="342900" indent="0">
+              <a:buNone/>
+              <a:defRPr sz="1350">
                 <a:solidFill>
                   <a:schemeClr val="bg1"/>
                 </a:solidFill>
               </a:defRPr>
             </a:lvl2pPr>
-            <a:lvl3pPr marL="914400" indent="0">
-              <a:buNone/>
-              <a:defRPr sz="1800">
+            <a:lvl3pPr marL="685800" indent="0">
+              <a:buNone/>
+              <a:defRPr sz="1350">
                 <a:solidFill>
                   <a:schemeClr val="bg1"/>
                 </a:solidFill>
               </a:defRPr>
             </a:lvl3pPr>
-            <a:lvl4pPr marL="1371600" indent="0">
-              <a:buNone/>
-              <a:defRPr sz="1800">
+            <a:lvl4pPr marL="1028700" indent="0">
+              <a:buNone/>
+              <a:defRPr sz="1350">
                 <a:solidFill>
                   <a:schemeClr val="bg1"/>
                 </a:solidFill>
               </a:defRPr>
             </a:lvl4pPr>
-            <a:lvl5pPr marL="1828800" indent="0">
-              <a:buNone/>
-              <a:defRPr sz="1800">
+            <a:lvl5pPr marL="1371600" indent="0">
+              <a:buNone/>
+              <a:defRPr sz="1350">
                 <a:solidFill>
                   <a:schemeClr val="bg1"/>
                 </a:solidFill>
@@ -5057,8 +5062,8 @@
         </p:nvSpPr>
         <p:spPr>
           <a:xfrm>
-            <a:off x="10396346" y="585334"/>
-            <a:ext cx="1005840" cy="1005840"/>
+            <a:off x="12892553" y="912553"/>
+            <a:ext cx="1247346" cy="1568133"/>
           </a:xfrm>
           <a:prstGeom prst="ellipse">
             <a:avLst/>
@@ -5094,7 +5099,7 @@
           <a:lstStyle/>
           <a:p>
             <a:pPr algn="ctr"/>
-            <a:endParaRPr lang="en-US" dirty="0"/>
+            <a:endParaRPr lang="en-US" sz="1013" dirty="0"/>
           </a:p>
         </p:txBody>
       </p:sp>
@@ -5116,8 +5121,8 @@
         </p:nvSpPr>
         <p:spPr>
           <a:xfrm>
-            <a:off x="10487786" y="649342"/>
-            <a:ext cx="822960" cy="822960"/>
+            <a:off x="13005948" y="1012343"/>
+            <a:ext cx="1020556" cy="1283018"/>
           </a:xfrm>
           <a:prstGeom prst="ellipse">
             <a:avLst/>
@@ -5133,7 +5138,7 @@
           <a:lstStyle>
             <a:lvl1pPr marL="0" indent="0" algn="ctr">
               <a:buNone/>
-              <a:defRPr sz="1000">
+              <a:defRPr sz="750">
                 <a:solidFill>
                   <a:schemeClr val="tx1"/>
                 </a:solidFill>
@@ -5167,8 +5172,8 @@
         </p:nvSpPr>
         <p:spPr>
           <a:xfrm>
-            <a:off x="673608" y="2556796"/>
-            <a:ext cx="1996440" cy="381190"/>
+            <a:off x="835344" y="3986117"/>
+            <a:ext cx="2475794" cy="594287"/>
           </a:xfrm>
         </p:spPr>
         <p:txBody>
@@ -5178,40 +5183,40 @@
           <a:lstStyle>
             <a:lvl1pPr marL="0" indent="0">
               <a:buNone/>
-              <a:defRPr sz="2200" b="1" cap="all" spc="100" baseline="0">
+              <a:defRPr sz="1650" b="1" cap="all" spc="75" baseline="0">
                 <a:solidFill>
                   <a:schemeClr val="tx1"/>
                 </a:solidFill>
                 <a:latin typeface="+mj-lt"/>
               </a:defRPr>
             </a:lvl1pPr>
-            <a:lvl2pPr marL="457200" indent="0">
-              <a:buNone/>
-              <a:defRPr sz="1800">
+            <a:lvl2pPr marL="342900" indent="0">
+              <a:buNone/>
+              <a:defRPr sz="1350">
                 <a:solidFill>
                   <a:schemeClr val="bg1"/>
                 </a:solidFill>
               </a:defRPr>
             </a:lvl2pPr>
-            <a:lvl3pPr marL="914400" indent="0">
-              <a:buNone/>
-              <a:defRPr sz="1800">
+            <a:lvl3pPr marL="685800" indent="0">
+              <a:buNone/>
+              <a:defRPr sz="1350">
                 <a:solidFill>
                   <a:schemeClr val="bg1"/>
                 </a:solidFill>
               </a:defRPr>
             </a:lvl3pPr>
-            <a:lvl4pPr marL="1371600" indent="0">
-              <a:buNone/>
-              <a:defRPr sz="1800">
+            <a:lvl4pPr marL="1028700" indent="0">
+              <a:buNone/>
+              <a:defRPr sz="1350">
                 <a:solidFill>
                   <a:schemeClr val="bg1"/>
                 </a:solidFill>
               </a:defRPr>
             </a:lvl4pPr>
-            <a:lvl5pPr marL="1828800" indent="0">
-              <a:buNone/>
-              <a:defRPr sz="1800">
+            <a:lvl5pPr marL="1371600" indent="0">
+              <a:buNone/>
+              <a:defRPr sz="1350">
                 <a:solidFill>
                   <a:schemeClr val="bg1"/>
                 </a:solidFill>
@@ -5244,8 +5249,8 @@
         </p:nvSpPr>
         <p:spPr>
           <a:xfrm>
-            <a:off x="753404" y="3046075"/>
-            <a:ext cx="1828633" cy="96903"/>
+            <a:off x="934300" y="4748918"/>
+            <a:ext cx="2267696" cy="151074"/>
           </a:xfrm>
           <a:prstGeom prst="rect">
             <a:avLst/>
@@ -5292,7 +5297,7 @@
           <a:lstStyle/>
           <a:p>
             <a:pPr algn="ctr"/>
-            <a:endParaRPr lang="en-US" dirty="0">
+            <a:endParaRPr lang="en-US" sz="1013" dirty="0">
               <a:solidFill>
                 <a:schemeClr val="bg1">
                   <a:lumMod val="95000"/>
@@ -5320,8 +5325,8 @@
         </p:nvSpPr>
         <p:spPr>
           <a:xfrm>
-            <a:off x="673608" y="3391012"/>
-            <a:ext cx="1996440" cy="778652"/>
+            <a:off x="835344" y="5286683"/>
+            <a:ext cx="2475794" cy="1213940"/>
           </a:xfrm>
         </p:spPr>
         <p:txBody>
@@ -5331,40 +5336,40 @@
           <a:lstStyle>
             <a:lvl1pPr marL="0" indent="0">
               <a:buNone/>
-              <a:defRPr sz="1200" cap="none" baseline="0">
+              <a:defRPr sz="900" cap="none" baseline="0">
                 <a:solidFill>
                   <a:schemeClr val="tx1"/>
                 </a:solidFill>
                 <a:latin typeface="+mn-lt"/>
               </a:defRPr>
             </a:lvl1pPr>
-            <a:lvl2pPr marL="457200" indent="0">
-              <a:buNone/>
-              <a:defRPr sz="1800">
+            <a:lvl2pPr marL="342900" indent="0">
+              <a:buNone/>
+              <a:defRPr sz="1350">
                 <a:solidFill>
                   <a:schemeClr val="bg1"/>
                 </a:solidFill>
               </a:defRPr>
             </a:lvl2pPr>
-            <a:lvl3pPr marL="914400" indent="0">
-              <a:buNone/>
-              <a:defRPr sz="1800">
+            <a:lvl3pPr marL="685800" indent="0">
+              <a:buNone/>
+              <a:defRPr sz="1350">
                 <a:solidFill>
                   <a:schemeClr val="bg1"/>
                 </a:solidFill>
               </a:defRPr>
             </a:lvl3pPr>
-            <a:lvl4pPr marL="1371600" indent="0">
-              <a:buNone/>
-              <a:defRPr sz="1800">
+            <a:lvl4pPr marL="1028700" indent="0">
+              <a:buNone/>
+              <a:defRPr sz="1350">
                 <a:solidFill>
                   <a:schemeClr val="bg1"/>
                 </a:solidFill>
               </a:defRPr>
             </a:lvl4pPr>
-            <a:lvl5pPr marL="1828800" indent="0">
-              <a:buNone/>
-              <a:defRPr sz="1800">
+            <a:lvl5pPr marL="1371600" indent="0">
+              <a:buNone/>
+              <a:defRPr sz="1350">
                 <a:solidFill>
                   <a:schemeClr val="bg1"/>
                 </a:solidFill>
@@ -5398,8 +5403,8 @@
         </p:nvSpPr>
         <p:spPr>
           <a:xfrm>
-            <a:off x="670560" y="4505738"/>
-            <a:ext cx="893064" cy="335470"/>
+            <a:off x="831564" y="7024571"/>
+            <a:ext cx="1107492" cy="523008"/>
           </a:xfrm>
         </p:spPr>
         <p:txBody>
@@ -5409,40 +5414,40 @@
           <a:lstStyle>
             <a:lvl1pPr marL="0" indent="0">
               <a:buNone/>
-              <a:defRPr sz="2000" cap="all" baseline="0">
+              <a:defRPr sz="1500" cap="all" baseline="0">
                 <a:solidFill>
                   <a:schemeClr val="tx1"/>
                 </a:solidFill>
                 <a:latin typeface="+mj-lt"/>
               </a:defRPr>
             </a:lvl1pPr>
-            <a:lvl2pPr marL="457200" indent="0">
-              <a:buNone/>
-              <a:defRPr sz="1800">
+            <a:lvl2pPr marL="342900" indent="0">
+              <a:buNone/>
+              <a:defRPr sz="1350">
                 <a:solidFill>
                   <a:schemeClr val="bg1"/>
                 </a:solidFill>
               </a:defRPr>
             </a:lvl2pPr>
-            <a:lvl3pPr marL="914400" indent="0">
-              <a:buNone/>
-              <a:defRPr sz="1800">
+            <a:lvl3pPr marL="685800" indent="0">
+              <a:buNone/>
+              <a:defRPr sz="1350">
                 <a:solidFill>
                   <a:schemeClr val="bg1"/>
                 </a:solidFill>
               </a:defRPr>
             </a:lvl3pPr>
-            <a:lvl4pPr marL="1371600" indent="0">
-              <a:buNone/>
-              <a:defRPr sz="1800">
+            <a:lvl4pPr marL="1028700" indent="0">
+              <a:buNone/>
+              <a:defRPr sz="1350">
                 <a:solidFill>
                   <a:schemeClr val="bg1"/>
                 </a:solidFill>
               </a:defRPr>
             </a:lvl4pPr>
-            <a:lvl5pPr marL="1828800" indent="0">
-              <a:buNone/>
-              <a:defRPr sz="1800">
+            <a:lvl5pPr marL="1371600" indent="0">
+              <a:buNone/>
+              <a:defRPr sz="1350">
                 <a:solidFill>
                   <a:schemeClr val="bg1"/>
                 </a:solidFill>
@@ -5475,8 +5480,8 @@
         </p:nvSpPr>
         <p:spPr>
           <a:xfrm>
-            <a:off x="1682496" y="4399153"/>
-            <a:ext cx="685800" cy="685800"/>
+            <a:off x="2086471" y="6858403"/>
+            <a:ext cx="850463" cy="1069181"/>
           </a:xfrm>
           <a:prstGeom prst="ellipse">
             <a:avLst/>
@@ -5511,7 +5516,7 @@
           <a:lstStyle/>
           <a:p>
             <a:pPr algn="ctr"/>
-            <a:endParaRPr lang="en-US" dirty="0"/>
+            <a:endParaRPr lang="en-US" sz="1013" dirty="0"/>
           </a:p>
         </p:txBody>
       </p:sp>
@@ -5533,8 +5538,8 @@
         </p:nvSpPr>
         <p:spPr>
           <a:xfrm>
-            <a:off x="1796796" y="4513453"/>
-            <a:ext cx="457200" cy="457200"/>
+            <a:off x="2228214" y="7036599"/>
+            <a:ext cx="566976" cy="712788"/>
           </a:xfrm>
           <a:prstGeom prst="ellipse">
             <a:avLst/>
@@ -5550,7 +5555,7 @@
           <a:lstStyle>
             <a:lvl1pPr marL="0" indent="0" algn="ctr">
               <a:buNone/>
-              <a:defRPr sz="600">
+              <a:defRPr sz="450">
                 <a:solidFill>
                   <a:schemeClr val="tx1"/>
                 </a:solidFill>
@@ -5584,8 +5589,8 @@
         </p:nvSpPr>
         <p:spPr>
           <a:xfrm>
-            <a:off x="670560" y="4894756"/>
-            <a:ext cx="893064" cy="335470"/>
+            <a:off x="831564" y="7631062"/>
+            <a:ext cx="1107492" cy="523008"/>
           </a:xfrm>
         </p:spPr>
         <p:txBody>
@@ -5595,40 +5600,40 @@
           <a:lstStyle>
             <a:lvl1pPr marL="0" indent="0">
               <a:buNone/>
-              <a:defRPr sz="1400" cap="none" baseline="0">
+              <a:defRPr sz="1050" cap="none" baseline="0">
                 <a:solidFill>
                   <a:schemeClr val="tx1"/>
                 </a:solidFill>
                 <a:latin typeface="+mn-lt"/>
               </a:defRPr>
             </a:lvl1pPr>
-            <a:lvl2pPr marL="457200" indent="0">
-              <a:buNone/>
-              <a:defRPr sz="1800">
+            <a:lvl2pPr marL="342900" indent="0">
+              <a:buNone/>
+              <a:defRPr sz="1350">
                 <a:solidFill>
                   <a:schemeClr val="bg1"/>
                 </a:solidFill>
               </a:defRPr>
             </a:lvl2pPr>
-            <a:lvl3pPr marL="914400" indent="0">
-              <a:buNone/>
-              <a:defRPr sz="1800">
+            <a:lvl3pPr marL="685800" indent="0">
+              <a:buNone/>
+              <a:defRPr sz="1350">
                 <a:solidFill>
                   <a:schemeClr val="bg1"/>
                 </a:solidFill>
               </a:defRPr>
             </a:lvl3pPr>
-            <a:lvl4pPr marL="1371600" indent="0">
-              <a:buNone/>
-              <a:defRPr sz="1800">
+            <a:lvl4pPr marL="1028700" indent="0">
+              <a:buNone/>
+              <a:defRPr sz="1350">
                 <a:solidFill>
                   <a:schemeClr val="bg1"/>
                 </a:solidFill>
               </a:defRPr>
             </a:lvl4pPr>
-            <a:lvl5pPr marL="1828800" indent="0">
-              <a:buNone/>
-              <a:defRPr sz="1800">
+            <a:lvl5pPr marL="1371600" indent="0">
+              <a:buNone/>
+              <a:defRPr sz="1350">
                 <a:solidFill>
                   <a:schemeClr val="bg1"/>
                 </a:solidFill>
@@ -5663,8 +5668,8 @@
         </p:nvCxnSpPr>
         <p:spPr>
           <a:xfrm>
-            <a:off x="753404" y="5377870"/>
-            <a:ext cx="1827083" cy="0"/>
+            <a:off x="934301" y="8384248"/>
+            <a:ext cx="2265773" cy="0"/>
           </a:xfrm>
           <a:prstGeom prst="straightConnector1">
             <a:avLst/>
@@ -5724,8 +5729,8 @@
         </p:nvSpPr>
         <p:spPr>
           <a:xfrm>
-            <a:off x="2862072" y="2556796"/>
-            <a:ext cx="1996440" cy="381190"/>
+            <a:off x="3549267" y="3986117"/>
+            <a:ext cx="2475794" cy="594287"/>
           </a:xfrm>
         </p:spPr>
         <p:txBody>
@@ -5735,40 +5740,40 @@
           <a:lstStyle>
             <a:lvl1pPr marL="0" indent="0">
               <a:buNone/>
-              <a:defRPr sz="2200" b="1" cap="all" spc="100" baseline="0">
+              <a:defRPr sz="1650" b="1" cap="all" spc="75" baseline="0">
                 <a:solidFill>
                   <a:schemeClr val="tx1"/>
                 </a:solidFill>
                 <a:latin typeface="+mj-lt"/>
               </a:defRPr>
             </a:lvl1pPr>
-            <a:lvl2pPr marL="457200" indent="0">
-              <a:buNone/>
-              <a:defRPr sz="1800">
+            <a:lvl2pPr marL="342900" indent="0">
+              <a:buNone/>
+              <a:defRPr sz="1350">
                 <a:solidFill>
                   <a:schemeClr val="bg1"/>
                 </a:solidFill>
               </a:defRPr>
             </a:lvl2pPr>
-            <a:lvl3pPr marL="914400" indent="0">
-              <a:buNone/>
-              <a:defRPr sz="1800">
+            <a:lvl3pPr marL="685800" indent="0">
+              <a:buNone/>
+              <a:defRPr sz="1350">
                 <a:solidFill>
                   <a:schemeClr val="bg1"/>
                 </a:solidFill>
               </a:defRPr>
             </a:lvl3pPr>
-            <a:lvl4pPr marL="1371600" indent="0">
-              <a:buNone/>
-              <a:defRPr sz="1800">
+            <a:lvl4pPr marL="1028700" indent="0">
+              <a:buNone/>
+              <a:defRPr sz="1350">
                 <a:solidFill>
                   <a:schemeClr val="bg1"/>
                 </a:solidFill>
               </a:defRPr>
             </a:lvl4pPr>
-            <a:lvl5pPr marL="1828800" indent="0">
-              <a:buNone/>
-              <a:defRPr sz="1800">
+            <a:lvl5pPr marL="1371600" indent="0">
+              <a:buNone/>
+              <a:defRPr sz="1350">
                 <a:solidFill>
                   <a:schemeClr val="bg1"/>
                 </a:solidFill>
@@ -5801,8 +5806,8 @@
         </p:nvSpPr>
         <p:spPr>
           <a:xfrm>
-            <a:off x="2946272" y="3046075"/>
-            <a:ext cx="1828633" cy="96903"/>
+            <a:off x="3653685" y="4748918"/>
+            <a:ext cx="2267696" cy="151074"/>
           </a:xfrm>
           <a:prstGeom prst="rect">
             <a:avLst/>
@@ -5849,7 +5854,7 @@
           <a:lstStyle/>
           <a:p>
             <a:pPr algn="ctr"/>
-            <a:endParaRPr lang="en-US" dirty="0">
+            <a:endParaRPr lang="en-US" sz="1013" dirty="0">
               <a:solidFill>
                 <a:schemeClr val="bg1">
                   <a:lumMod val="95000"/>
@@ -5877,8 +5882,8 @@
         </p:nvSpPr>
         <p:spPr>
           <a:xfrm>
-            <a:off x="2862072" y="3391012"/>
-            <a:ext cx="1996440" cy="778652"/>
+            <a:off x="3549267" y="5286683"/>
+            <a:ext cx="2475794" cy="1213940"/>
           </a:xfrm>
         </p:spPr>
         <p:txBody>
@@ -5888,40 +5893,40 @@
           <a:lstStyle>
             <a:lvl1pPr marL="0" indent="0">
               <a:buNone/>
-              <a:defRPr sz="1200" cap="none" baseline="0">
+              <a:defRPr sz="900" cap="none" baseline="0">
                 <a:solidFill>
                   <a:schemeClr val="tx1"/>
                 </a:solidFill>
                 <a:latin typeface="+mn-lt"/>
               </a:defRPr>
             </a:lvl1pPr>
-            <a:lvl2pPr marL="457200" indent="0">
-              <a:buNone/>
-              <a:defRPr sz="1800">
+            <a:lvl2pPr marL="342900" indent="0">
+              <a:buNone/>
+              <a:defRPr sz="1350">
                 <a:solidFill>
                   <a:schemeClr val="bg1"/>
                 </a:solidFill>
               </a:defRPr>
             </a:lvl2pPr>
-            <a:lvl3pPr marL="914400" indent="0">
-              <a:buNone/>
-              <a:defRPr sz="1800">
+            <a:lvl3pPr marL="685800" indent="0">
+              <a:buNone/>
+              <a:defRPr sz="1350">
                 <a:solidFill>
                   <a:schemeClr val="bg1"/>
                 </a:solidFill>
               </a:defRPr>
             </a:lvl3pPr>
-            <a:lvl4pPr marL="1371600" indent="0">
-              <a:buNone/>
-              <a:defRPr sz="1800">
+            <a:lvl4pPr marL="1028700" indent="0">
+              <a:buNone/>
+              <a:defRPr sz="1350">
                 <a:solidFill>
                   <a:schemeClr val="bg1"/>
                 </a:solidFill>
               </a:defRPr>
             </a:lvl4pPr>
-            <a:lvl5pPr marL="1828800" indent="0">
-              <a:buNone/>
-              <a:defRPr sz="1800">
+            <a:lvl5pPr marL="1371600" indent="0">
+              <a:buNone/>
+              <a:defRPr sz="1350">
                 <a:solidFill>
                   <a:schemeClr val="bg1"/>
                 </a:solidFill>
@@ -5955,8 +5960,8 @@
         </p:nvSpPr>
         <p:spPr>
           <a:xfrm>
-            <a:off x="2862072" y="4505738"/>
-            <a:ext cx="893064" cy="335470"/>
+            <a:off x="3549268" y="7024571"/>
+            <a:ext cx="1107492" cy="523008"/>
           </a:xfrm>
         </p:spPr>
         <p:txBody>
@@ -5966,40 +5971,40 @@
           <a:lstStyle>
             <a:lvl1pPr marL="0" indent="0">
               <a:buNone/>
-              <a:defRPr sz="2000" cap="all" baseline="0">
+              <a:defRPr sz="1500" cap="all" baseline="0">
                 <a:solidFill>
                   <a:schemeClr val="tx1"/>
                 </a:solidFill>
                 <a:latin typeface="+mj-lt"/>
               </a:defRPr>
             </a:lvl1pPr>
-            <a:lvl2pPr marL="457200" indent="0">
-              <a:buNone/>
-              <a:defRPr sz="1800">
+            <a:lvl2pPr marL="342900" indent="0">
+              <a:buNone/>
+              <a:defRPr sz="1350">
                 <a:solidFill>
                   <a:schemeClr val="bg1"/>
                 </a:solidFill>
               </a:defRPr>
             </a:lvl2pPr>
-            <a:lvl3pPr marL="914400" indent="0">
-              <a:buNone/>
-              <a:defRPr sz="1800">
+            <a:lvl3pPr marL="685800" indent="0">
+              <a:buNone/>
+              <a:defRPr sz="1350">
                 <a:solidFill>
                   <a:schemeClr val="bg1"/>
                 </a:solidFill>
               </a:defRPr>
             </a:lvl3pPr>
-            <a:lvl4pPr marL="1371600" indent="0">
-              <a:buNone/>
-              <a:defRPr sz="1800">
+            <a:lvl4pPr marL="1028700" indent="0">
+              <a:buNone/>
+              <a:defRPr sz="1350">
                 <a:solidFill>
                   <a:schemeClr val="bg1"/>
                 </a:solidFill>
               </a:defRPr>
             </a:lvl4pPr>
-            <a:lvl5pPr marL="1828800" indent="0">
-              <a:buNone/>
-              <a:defRPr sz="1800">
+            <a:lvl5pPr marL="1371600" indent="0">
+              <a:buNone/>
+              <a:defRPr sz="1350">
                 <a:solidFill>
                   <a:schemeClr val="bg1"/>
                 </a:solidFill>
@@ -6032,8 +6037,8 @@
         </p:nvSpPr>
         <p:spPr>
           <a:xfrm>
-            <a:off x="3887724" y="4399153"/>
-            <a:ext cx="685800" cy="685800"/>
+            <a:off x="4821183" y="6858403"/>
+            <a:ext cx="850463" cy="1069181"/>
           </a:xfrm>
           <a:prstGeom prst="ellipse">
             <a:avLst/>
@@ -6066,7 +6071,7 @@
           <a:lstStyle/>
           <a:p>
             <a:pPr algn="ctr"/>
-            <a:endParaRPr lang="en-US" dirty="0"/>
+            <a:endParaRPr lang="en-US" sz="1013" dirty="0"/>
           </a:p>
         </p:txBody>
       </p:sp>
@@ -6088,8 +6093,8 @@
         </p:nvSpPr>
         <p:spPr>
           <a:xfrm>
-            <a:off x="4002024" y="4513453"/>
-            <a:ext cx="457200" cy="457200"/>
+            <a:off x="4962926" y="7036599"/>
+            <a:ext cx="566976" cy="712788"/>
           </a:xfrm>
           <a:prstGeom prst="ellipse">
             <a:avLst/>
@@ -6105,7 +6110,7 @@
           <a:lstStyle>
             <a:lvl1pPr marL="0" indent="0" algn="ctr">
               <a:buNone/>
-              <a:defRPr sz="600">
+              <a:defRPr sz="450">
                 <a:solidFill>
                   <a:schemeClr val="tx1"/>
                 </a:solidFill>
@@ -6139,8 +6144,8 @@
         </p:nvSpPr>
         <p:spPr>
           <a:xfrm>
-            <a:off x="2862072" y="4894756"/>
-            <a:ext cx="893064" cy="335470"/>
+            <a:off x="3549268" y="7631062"/>
+            <a:ext cx="1107492" cy="523008"/>
           </a:xfrm>
         </p:spPr>
         <p:txBody>
@@ -6150,40 +6155,40 @@
           <a:lstStyle>
             <a:lvl1pPr marL="0" indent="0">
               <a:buNone/>
-              <a:defRPr sz="1400" cap="none" baseline="0">
+              <a:defRPr sz="1050" cap="none" baseline="0">
                 <a:solidFill>
                   <a:schemeClr val="tx1"/>
                 </a:solidFill>
                 <a:latin typeface="+mn-lt"/>
               </a:defRPr>
             </a:lvl1pPr>
-            <a:lvl2pPr marL="457200" indent="0">
-              <a:buNone/>
-              <a:defRPr sz="1800">
+            <a:lvl2pPr marL="342900" indent="0">
+              <a:buNone/>
+              <a:defRPr sz="1350">
                 <a:solidFill>
                   <a:schemeClr val="bg1"/>
                 </a:solidFill>
               </a:defRPr>
             </a:lvl2pPr>
-            <a:lvl3pPr marL="914400" indent="0">
-              <a:buNone/>
-              <a:defRPr sz="1800">
+            <a:lvl3pPr marL="685800" indent="0">
+              <a:buNone/>
+              <a:defRPr sz="1350">
                 <a:solidFill>
                   <a:schemeClr val="bg1"/>
                 </a:solidFill>
               </a:defRPr>
             </a:lvl3pPr>
-            <a:lvl4pPr marL="1371600" indent="0">
-              <a:buNone/>
-              <a:defRPr sz="1800">
+            <a:lvl4pPr marL="1028700" indent="0">
+              <a:buNone/>
+              <a:defRPr sz="1350">
                 <a:solidFill>
                   <a:schemeClr val="bg1"/>
                 </a:solidFill>
               </a:defRPr>
             </a:lvl4pPr>
-            <a:lvl5pPr marL="1828800" indent="0">
-              <a:buNone/>
-              <a:defRPr sz="1800">
+            <a:lvl5pPr marL="1371600" indent="0">
+              <a:buNone/>
+              <a:defRPr sz="1350">
                 <a:solidFill>
                   <a:schemeClr val="bg1"/>
                 </a:solidFill>
@@ -6218,8 +6223,8 @@
         </p:nvCxnSpPr>
         <p:spPr>
           <a:xfrm>
-            <a:off x="2943485" y="5377870"/>
-            <a:ext cx="1836387" cy="0"/>
+            <a:off x="3650228" y="8384248"/>
+            <a:ext cx="2277311" cy="0"/>
           </a:xfrm>
           <a:prstGeom prst="straightConnector1">
             <a:avLst/>
@@ -6277,8 +6282,8 @@
         </p:nvSpPr>
         <p:spPr>
           <a:xfrm>
-            <a:off x="5050536" y="2556796"/>
-            <a:ext cx="1996440" cy="381190"/>
+            <a:off x="6263191" y="3986117"/>
+            <a:ext cx="2475794" cy="594287"/>
           </a:xfrm>
         </p:spPr>
         <p:txBody>
@@ -6288,40 +6293,40 @@
           <a:lstStyle>
             <a:lvl1pPr marL="0" indent="0">
               <a:buNone/>
-              <a:defRPr sz="2200" b="1" cap="all" spc="100" baseline="0">
+              <a:defRPr sz="1650" b="1" cap="all" spc="75" baseline="0">
                 <a:solidFill>
                   <a:schemeClr val="tx1"/>
                 </a:solidFill>
                 <a:latin typeface="+mj-lt"/>
               </a:defRPr>
             </a:lvl1pPr>
-            <a:lvl2pPr marL="457200" indent="0">
-              <a:buNone/>
-              <a:defRPr sz="1800">
+            <a:lvl2pPr marL="342900" indent="0">
+              <a:buNone/>
+              <a:defRPr sz="1350">
                 <a:solidFill>
                   <a:schemeClr val="bg1"/>
                 </a:solidFill>
               </a:defRPr>
             </a:lvl2pPr>
-            <a:lvl3pPr marL="914400" indent="0">
-              <a:buNone/>
-              <a:defRPr sz="1800">
+            <a:lvl3pPr marL="685800" indent="0">
+              <a:buNone/>
+              <a:defRPr sz="1350">
                 <a:solidFill>
                   <a:schemeClr val="bg1"/>
                 </a:solidFill>
               </a:defRPr>
             </a:lvl3pPr>
-            <a:lvl4pPr marL="1371600" indent="0">
-              <a:buNone/>
-              <a:defRPr sz="1800">
+            <a:lvl4pPr marL="1028700" indent="0">
+              <a:buNone/>
+              <a:defRPr sz="1350">
                 <a:solidFill>
                   <a:schemeClr val="bg1"/>
                 </a:solidFill>
               </a:defRPr>
             </a:lvl4pPr>
-            <a:lvl5pPr marL="1828800" indent="0">
-              <a:buNone/>
-              <a:defRPr sz="1800">
+            <a:lvl5pPr marL="1371600" indent="0">
+              <a:buNone/>
+              <a:defRPr sz="1350">
                 <a:solidFill>
                   <a:schemeClr val="bg1"/>
                 </a:solidFill>
@@ -6354,8 +6359,8 @@
         </p:nvSpPr>
         <p:spPr>
           <a:xfrm>
-            <a:off x="5139140" y="3046075"/>
-            <a:ext cx="1828634" cy="96903"/>
+            <a:off x="6373069" y="4748918"/>
+            <a:ext cx="2267697" cy="151074"/>
           </a:xfrm>
           <a:prstGeom prst="rect">
             <a:avLst/>
@@ -6402,7 +6407,7 @@
           <a:lstStyle/>
           <a:p>
             <a:pPr algn="ctr"/>
-            <a:endParaRPr lang="en-US" dirty="0">
+            <a:endParaRPr lang="en-US" sz="1013" dirty="0">
               <a:solidFill>
                 <a:schemeClr val="bg1">
                   <a:lumMod val="95000"/>
@@ -6430,8 +6435,8 @@
         </p:nvSpPr>
         <p:spPr>
           <a:xfrm>
-            <a:off x="5050536" y="3391012"/>
-            <a:ext cx="1996440" cy="778652"/>
+            <a:off x="6263191" y="5286683"/>
+            <a:ext cx="2475794" cy="1213940"/>
           </a:xfrm>
         </p:spPr>
         <p:txBody>
@@ -6441,40 +6446,40 @@
           <a:lstStyle>
             <a:lvl1pPr marL="0" indent="0">
               <a:buNone/>
-              <a:defRPr sz="1200" cap="none" baseline="0">
+              <a:defRPr sz="900" cap="none" baseline="0">
                 <a:solidFill>
                   <a:schemeClr val="tx1"/>
                 </a:solidFill>
                 <a:latin typeface="+mn-lt"/>
               </a:defRPr>
             </a:lvl1pPr>
-            <a:lvl2pPr marL="457200" indent="0">
-              <a:buNone/>
-              <a:defRPr sz="1800">
+            <a:lvl2pPr marL="342900" indent="0">
+              <a:buNone/>
+              <a:defRPr sz="1350">
                 <a:solidFill>
                   <a:schemeClr val="bg1"/>
                 </a:solidFill>
               </a:defRPr>
             </a:lvl2pPr>
-            <a:lvl3pPr marL="914400" indent="0">
-              <a:buNone/>
-              <a:defRPr sz="1800">
+            <a:lvl3pPr marL="685800" indent="0">
+              <a:buNone/>
+              <a:defRPr sz="1350">
                 <a:solidFill>
                   <a:schemeClr val="bg1"/>
                 </a:solidFill>
               </a:defRPr>
             </a:lvl3pPr>
-            <a:lvl4pPr marL="1371600" indent="0">
-              <a:buNone/>
-              <a:defRPr sz="1800">
+            <a:lvl4pPr marL="1028700" indent="0">
+              <a:buNone/>
+              <a:defRPr sz="1350">
                 <a:solidFill>
                   <a:schemeClr val="bg1"/>
                 </a:solidFill>
               </a:defRPr>
             </a:lvl4pPr>
-            <a:lvl5pPr marL="1828800" indent="0">
-              <a:buNone/>
-              <a:defRPr sz="1800">
+            <a:lvl5pPr marL="1371600" indent="0">
+              <a:buNone/>
+              <a:defRPr sz="1350">
                 <a:solidFill>
                   <a:schemeClr val="bg1"/>
                 </a:solidFill>
@@ -6508,8 +6513,8 @@
         </p:nvSpPr>
         <p:spPr>
           <a:xfrm>
-            <a:off x="5065776" y="4505738"/>
-            <a:ext cx="893064" cy="335470"/>
+            <a:off x="6282090" y="7024571"/>
+            <a:ext cx="1107492" cy="523008"/>
           </a:xfrm>
         </p:spPr>
         <p:txBody>
@@ -6519,40 +6524,40 @@
           <a:lstStyle>
             <a:lvl1pPr marL="0" indent="0">
               <a:buNone/>
-              <a:defRPr sz="2000" cap="all" baseline="0">
+              <a:defRPr sz="1500" cap="all" baseline="0">
                 <a:solidFill>
                   <a:schemeClr val="tx1"/>
                 </a:solidFill>
                 <a:latin typeface="+mj-lt"/>
               </a:defRPr>
             </a:lvl1pPr>
-            <a:lvl2pPr marL="457200" indent="0">
-              <a:buNone/>
-              <a:defRPr sz="1800">
+            <a:lvl2pPr marL="342900" indent="0">
+              <a:buNone/>
+              <a:defRPr sz="1350">
                 <a:solidFill>
                   <a:schemeClr val="bg1"/>
                 </a:solidFill>
               </a:defRPr>
             </a:lvl2pPr>
-            <a:lvl3pPr marL="914400" indent="0">
-              <a:buNone/>
-              <a:defRPr sz="1800">
+            <a:lvl3pPr marL="685800" indent="0">
+              <a:buNone/>
+              <a:defRPr sz="1350">
                 <a:solidFill>
                   <a:schemeClr val="bg1"/>
                 </a:solidFill>
               </a:defRPr>
             </a:lvl3pPr>
-            <a:lvl4pPr marL="1371600" indent="0">
-              <a:buNone/>
-              <a:defRPr sz="1800">
+            <a:lvl4pPr marL="1028700" indent="0">
+              <a:buNone/>
+              <a:defRPr sz="1350">
                 <a:solidFill>
                   <a:schemeClr val="bg1"/>
                 </a:solidFill>
               </a:defRPr>
             </a:lvl4pPr>
-            <a:lvl5pPr marL="1828800" indent="0">
-              <a:buNone/>
-              <a:defRPr sz="1800">
+            <a:lvl5pPr marL="1371600" indent="0">
+              <a:buNone/>
+              <a:defRPr sz="1350">
                 <a:solidFill>
                   <a:schemeClr val="bg1"/>
                 </a:solidFill>
@@ -6585,8 +6590,8 @@
         </p:nvSpPr>
         <p:spPr>
           <a:xfrm>
-            <a:off x="6092952" y="4402872"/>
-            <a:ext cx="685800" cy="685800"/>
+            <a:off x="7555895" y="6864200"/>
+            <a:ext cx="850463" cy="1069181"/>
           </a:xfrm>
           <a:prstGeom prst="ellipse">
             <a:avLst/>
@@ -6619,7 +6624,7 @@
           <a:lstStyle/>
           <a:p>
             <a:pPr algn="ctr"/>
-            <a:endParaRPr lang="en-US" dirty="0"/>
+            <a:endParaRPr lang="en-US" sz="1013" dirty="0"/>
           </a:p>
         </p:txBody>
       </p:sp>
@@ -6641,8 +6646,8 @@
         </p:nvSpPr>
         <p:spPr>
           <a:xfrm>
-            <a:off x="6207252" y="4517172"/>
-            <a:ext cx="457200" cy="457200"/>
+            <a:off x="7697639" y="7042397"/>
+            <a:ext cx="566976" cy="712788"/>
           </a:xfrm>
           <a:prstGeom prst="ellipse">
             <a:avLst/>
@@ -6658,7 +6663,7 @@
           <a:lstStyle>
             <a:lvl1pPr marL="0" indent="0" algn="ctr">
               <a:buNone/>
-              <a:defRPr sz="600">
+              <a:defRPr sz="450">
                 <a:solidFill>
                   <a:schemeClr val="tx1"/>
                 </a:solidFill>
@@ -6692,8 +6697,8 @@
         </p:nvSpPr>
         <p:spPr>
           <a:xfrm>
-            <a:off x="5065776" y="4894756"/>
-            <a:ext cx="893064" cy="335470"/>
+            <a:off x="6282090" y="7631062"/>
+            <a:ext cx="1107492" cy="523008"/>
           </a:xfrm>
         </p:spPr>
         <p:txBody>
@@ -6703,40 +6708,40 @@
           <a:lstStyle>
             <a:lvl1pPr marL="0" indent="0">
               <a:buNone/>
-              <a:defRPr sz="1400" cap="none" baseline="0">
+              <a:defRPr sz="1050" cap="none" baseline="0">
                 <a:solidFill>
                   <a:schemeClr val="tx1"/>
                 </a:solidFill>
                 <a:latin typeface="+mn-lt"/>
               </a:defRPr>
             </a:lvl1pPr>
-            <a:lvl2pPr marL="457200" indent="0">
-              <a:buNone/>
-              <a:defRPr sz="1800">
+            <a:lvl2pPr marL="342900" indent="0">
+              <a:buNone/>
+              <a:defRPr sz="1350">
                 <a:solidFill>
                   <a:schemeClr val="bg1"/>
                 </a:solidFill>
               </a:defRPr>
             </a:lvl2pPr>
-            <a:lvl3pPr marL="914400" indent="0">
-              <a:buNone/>
-              <a:defRPr sz="1800">
+            <a:lvl3pPr marL="685800" indent="0">
+              <a:buNone/>
+              <a:defRPr sz="1350">
                 <a:solidFill>
                   <a:schemeClr val="bg1"/>
                 </a:solidFill>
               </a:defRPr>
             </a:lvl3pPr>
-            <a:lvl4pPr marL="1371600" indent="0">
-              <a:buNone/>
-              <a:defRPr sz="1800">
+            <a:lvl4pPr marL="1028700" indent="0">
+              <a:buNone/>
+              <a:defRPr sz="1350">
                 <a:solidFill>
                   <a:schemeClr val="bg1"/>
                 </a:solidFill>
               </a:defRPr>
             </a:lvl4pPr>
-            <a:lvl5pPr marL="1828800" indent="0">
-              <a:buNone/>
-              <a:defRPr sz="1800">
+            <a:lvl5pPr marL="1371600" indent="0">
+              <a:buNone/>
+              <a:defRPr sz="1350">
                 <a:solidFill>
                   <a:schemeClr val="bg1"/>
                 </a:solidFill>
@@ -6771,8 +6776,8 @@
         </p:nvCxnSpPr>
         <p:spPr>
           <a:xfrm>
-            <a:off x="5142870" y="5377870"/>
-            <a:ext cx="1827639" cy="0"/>
+            <a:off x="6377696" y="8384248"/>
+            <a:ext cx="2266462" cy="0"/>
           </a:xfrm>
           <a:prstGeom prst="straightConnector1">
             <a:avLst/>
@@ -6831,8 +6836,8 @@
         </p:nvSpPr>
         <p:spPr>
           <a:xfrm>
-            <a:off x="7239000" y="2556796"/>
-            <a:ext cx="1996440" cy="381190"/>
+            <a:off x="8977114" y="3986117"/>
+            <a:ext cx="2475794" cy="594287"/>
           </a:xfrm>
         </p:spPr>
         <p:txBody>
@@ -6842,40 +6847,40 @@
           <a:lstStyle>
             <a:lvl1pPr marL="0" indent="0">
               <a:buNone/>
-              <a:defRPr sz="2200" b="1" cap="all" spc="100" baseline="0">
+              <a:defRPr sz="1650" b="1" cap="all" spc="75" baseline="0">
                 <a:solidFill>
                   <a:schemeClr val="tx1"/>
                 </a:solidFill>
                 <a:latin typeface="+mj-lt"/>
               </a:defRPr>
             </a:lvl1pPr>
-            <a:lvl2pPr marL="457200" indent="0">
-              <a:buNone/>
-              <a:defRPr sz="1800">
+            <a:lvl2pPr marL="342900" indent="0">
+              <a:buNone/>
+              <a:defRPr sz="1350">
                 <a:solidFill>
                   <a:schemeClr val="bg1"/>
                 </a:solidFill>
               </a:defRPr>
             </a:lvl2pPr>
-            <a:lvl3pPr marL="914400" indent="0">
-              <a:buNone/>
-              <a:defRPr sz="1800">
+            <a:lvl3pPr marL="685800" indent="0">
+              <a:buNone/>
+              <a:defRPr sz="1350">
                 <a:solidFill>
                   <a:schemeClr val="bg1"/>
                 </a:solidFill>
               </a:defRPr>
             </a:lvl3pPr>
-            <a:lvl4pPr marL="1371600" indent="0">
-              <a:buNone/>
-              <a:defRPr sz="1800">
+            <a:lvl4pPr marL="1028700" indent="0">
+              <a:buNone/>
+              <a:defRPr sz="1350">
                 <a:solidFill>
                   <a:schemeClr val="bg1"/>
                 </a:solidFill>
               </a:defRPr>
             </a:lvl4pPr>
-            <a:lvl5pPr marL="1828800" indent="0">
-              <a:buNone/>
-              <a:defRPr sz="1800">
+            <a:lvl5pPr marL="1371600" indent="0">
+              <a:buNone/>
+              <a:defRPr sz="1350">
                 <a:solidFill>
                   <a:schemeClr val="bg1"/>
                 </a:solidFill>
@@ -6908,8 +6913,8 @@
         </p:nvSpPr>
         <p:spPr>
           <a:xfrm>
-            <a:off x="7332009" y="3046075"/>
-            <a:ext cx="1828635" cy="96903"/>
+            <a:off x="9092456" y="4748918"/>
+            <a:ext cx="2267697" cy="151074"/>
           </a:xfrm>
           <a:prstGeom prst="rect">
             <a:avLst/>
@@ -6956,7 +6961,7 @@
           <a:lstStyle/>
           <a:p>
             <a:pPr algn="ctr"/>
-            <a:endParaRPr lang="en-US" dirty="0">
+            <a:endParaRPr lang="en-US" sz="1013" dirty="0">
               <a:solidFill>
                 <a:schemeClr val="bg1">
                   <a:lumMod val="95000"/>
@@ -6984,8 +6989,8 @@
         </p:nvSpPr>
         <p:spPr>
           <a:xfrm>
-            <a:off x="7239000" y="3391012"/>
-            <a:ext cx="1996440" cy="778652"/>
+            <a:off x="8977114" y="5286683"/>
+            <a:ext cx="2475794" cy="1213940"/>
           </a:xfrm>
         </p:spPr>
         <p:txBody>
@@ -6995,40 +7000,40 @@
           <a:lstStyle>
             <a:lvl1pPr marL="0" indent="0">
               <a:buNone/>
-              <a:defRPr sz="1200" cap="none" baseline="0">
+              <a:defRPr sz="900" cap="none" baseline="0">
                 <a:solidFill>
                   <a:schemeClr val="tx1"/>
                 </a:solidFill>
                 <a:latin typeface="+mn-lt"/>
               </a:defRPr>
             </a:lvl1pPr>
-            <a:lvl2pPr marL="457200" indent="0">
-              <a:buNone/>
-              <a:defRPr sz="1800">
+            <a:lvl2pPr marL="342900" indent="0">
+              <a:buNone/>
+              <a:defRPr sz="1350">
                 <a:solidFill>
                   <a:schemeClr val="bg1"/>
                 </a:solidFill>
               </a:defRPr>
             </a:lvl2pPr>
-            <a:lvl3pPr marL="914400" indent="0">
-              <a:buNone/>
-              <a:defRPr sz="1800">
+            <a:lvl3pPr marL="685800" indent="0">
+              <a:buNone/>
+              <a:defRPr sz="1350">
                 <a:solidFill>
                   <a:schemeClr val="bg1"/>
                 </a:solidFill>
               </a:defRPr>
             </a:lvl3pPr>
-            <a:lvl4pPr marL="1371600" indent="0">
-              <a:buNone/>
-              <a:defRPr sz="1800">
+            <a:lvl4pPr marL="1028700" indent="0">
+              <a:buNone/>
+              <a:defRPr sz="1350">
                 <a:solidFill>
                   <a:schemeClr val="bg1"/>
                 </a:solidFill>
               </a:defRPr>
             </a:lvl4pPr>
-            <a:lvl5pPr marL="1828800" indent="0">
-              <a:buNone/>
-              <a:defRPr sz="1800">
+            <a:lvl5pPr marL="1371600" indent="0">
+              <a:buNone/>
+              <a:defRPr sz="1350">
                 <a:solidFill>
                   <a:schemeClr val="bg1"/>
                 </a:solidFill>
@@ -7062,8 +7067,8 @@
         </p:nvSpPr>
         <p:spPr>
           <a:xfrm>
-            <a:off x="7257288" y="4505738"/>
-            <a:ext cx="893064" cy="335470"/>
+            <a:off x="8999793" y="7024571"/>
+            <a:ext cx="1107492" cy="523008"/>
           </a:xfrm>
         </p:spPr>
         <p:txBody>
@@ -7073,40 +7078,40 @@
           <a:lstStyle>
             <a:lvl1pPr marL="0" indent="0">
               <a:buNone/>
-              <a:defRPr sz="2000" cap="all" baseline="0">
+              <a:defRPr sz="1500" cap="all" baseline="0">
                 <a:solidFill>
                   <a:schemeClr val="tx1"/>
                 </a:solidFill>
                 <a:latin typeface="+mj-lt"/>
               </a:defRPr>
             </a:lvl1pPr>
-            <a:lvl2pPr marL="457200" indent="0">
-              <a:buNone/>
-              <a:defRPr sz="1800">
+            <a:lvl2pPr marL="342900" indent="0">
+              <a:buNone/>
+              <a:defRPr sz="1350">
                 <a:solidFill>
                   <a:schemeClr val="bg1"/>
                 </a:solidFill>
               </a:defRPr>
             </a:lvl2pPr>
-            <a:lvl3pPr marL="914400" indent="0">
-              <a:buNone/>
-              <a:defRPr sz="1800">
+            <a:lvl3pPr marL="685800" indent="0">
+              <a:buNone/>
+              <a:defRPr sz="1350">
                 <a:solidFill>
                   <a:schemeClr val="bg1"/>
                 </a:solidFill>
               </a:defRPr>
             </a:lvl3pPr>
-            <a:lvl4pPr marL="1371600" indent="0">
-              <a:buNone/>
-              <a:defRPr sz="1800">
+            <a:lvl4pPr marL="1028700" indent="0">
+              <a:buNone/>
+              <a:defRPr sz="1350">
                 <a:solidFill>
                   <a:schemeClr val="bg1"/>
                 </a:solidFill>
               </a:defRPr>
             </a:lvl4pPr>
-            <a:lvl5pPr marL="1828800" indent="0">
-              <a:buNone/>
-              <a:defRPr sz="1800">
+            <a:lvl5pPr marL="1371600" indent="0">
+              <a:buNone/>
+              <a:defRPr sz="1350">
                 <a:solidFill>
                   <a:schemeClr val="bg1"/>
                 </a:solidFill>
@@ -7139,8 +7144,8 @@
         </p:nvSpPr>
         <p:spPr>
           <a:xfrm>
-            <a:off x="8298180" y="4402872"/>
-            <a:ext cx="685800" cy="685800"/>
+            <a:off x="10290608" y="6864200"/>
+            <a:ext cx="850463" cy="1069181"/>
           </a:xfrm>
           <a:prstGeom prst="ellipse">
             <a:avLst/>
@@ -7173,7 +7178,7 @@
           <a:lstStyle/>
           <a:p>
             <a:pPr algn="ctr"/>
-            <a:endParaRPr lang="en-US" dirty="0"/>
+            <a:endParaRPr lang="en-US" sz="1013" dirty="0"/>
           </a:p>
         </p:txBody>
       </p:sp>
@@ -7195,8 +7200,8 @@
         </p:nvSpPr>
         <p:spPr>
           <a:xfrm>
-            <a:off x="8412480" y="4517172"/>
-            <a:ext cx="457200" cy="457200"/>
+            <a:off x="10432351" y="7042397"/>
+            <a:ext cx="566976" cy="712788"/>
           </a:xfrm>
           <a:prstGeom prst="ellipse">
             <a:avLst/>
@@ -7212,7 +7217,7 @@
           <a:lstStyle>
             <a:lvl1pPr marL="0" indent="0" algn="ctr">
               <a:buNone/>
-              <a:defRPr sz="600">
+              <a:defRPr sz="450">
                 <a:solidFill>
                   <a:schemeClr val="tx1"/>
                 </a:solidFill>
@@ -7246,8 +7251,8 @@
         </p:nvSpPr>
         <p:spPr>
           <a:xfrm>
-            <a:off x="7257288" y="4894756"/>
-            <a:ext cx="893064" cy="335470"/>
+            <a:off x="8999793" y="7631062"/>
+            <a:ext cx="1107492" cy="523008"/>
           </a:xfrm>
         </p:spPr>
         <p:txBody>
@@ -7257,40 +7262,40 @@
           <a:lstStyle>
             <a:lvl1pPr marL="0" indent="0">
               <a:buNone/>
-              <a:defRPr sz="1400" cap="none" baseline="0">
+              <a:defRPr sz="1050" cap="none" baseline="0">
                 <a:solidFill>
                   <a:schemeClr val="tx1"/>
                 </a:solidFill>
                 <a:latin typeface="+mn-lt"/>
               </a:defRPr>
             </a:lvl1pPr>
-            <a:lvl2pPr marL="457200" indent="0">
-              <a:buNone/>
-              <a:defRPr sz="1800">
+            <a:lvl2pPr marL="342900" indent="0">
+              <a:buNone/>
+              <a:defRPr sz="1350">
                 <a:solidFill>
                   <a:schemeClr val="bg1"/>
                 </a:solidFill>
               </a:defRPr>
             </a:lvl2pPr>
-            <a:lvl3pPr marL="914400" indent="0">
-              <a:buNone/>
-              <a:defRPr sz="1800">
+            <a:lvl3pPr marL="685800" indent="0">
+              <a:buNone/>
+              <a:defRPr sz="1350">
                 <a:solidFill>
                   <a:schemeClr val="bg1"/>
                 </a:solidFill>
               </a:defRPr>
             </a:lvl3pPr>
-            <a:lvl4pPr marL="1371600" indent="0">
-              <a:buNone/>
-              <a:defRPr sz="1800">
+            <a:lvl4pPr marL="1028700" indent="0">
+              <a:buNone/>
+              <a:defRPr sz="1350">
                 <a:solidFill>
                   <a:schemeClr val="bg1"/>
                 </a:solidFill>
               </a:defRPr>
             </a:lvl4pPr>
-            <a:lvl5pPr marL="1828800" indent="0">
-              <a:buNone/>
-              <a:defRPr sz="1800">
+            <a:lvl5pPr marL="1371600" indent="0">
+              <a:buNone/>
+              <a:defRPr sz="1350">
                 <a:solidFill>
                   <a:schemeClr val="bg1"/>
                 </a:solidFill>
@@ -7325,8 +7330,8 @@
         </p:nvCxnSpPr>
         <p:spPr>
           <a:xfrm>
-            <a:off x="7333507" y="5377870"/>
-            <a:ext cx="1828375" cy="0"/>
+            <a:off x="9094315" y="8384248"/>
+            <a:ext cx="2267375" cy="0"/>
           </a:xfrm>
           <a:prstGeom prst="straightConnector1">
             <a:avLst/>
@@ -7385,8 +7390,8 @@
         </p:nvSpPr>
         <p:spPr>
           <a:xfrm>
-            <a:off x="9427464" y="2556796"/>
-            <a:ext cx="1996440" cy="381190"/>
+            <a:off x="11691037" y="3986117"/>
+            <a:ext cx="2475794" cy="594287"/>
           </a:xfrm>
         </p:spPr>
         <p:txBody>
@@ -7396,40 +7401,40 @@
           <a:lstStyle>
             <a:lvl1pPr marL="0" indent="0">
               <a:buNone/>
-              <a:defRPr sz="2200" b="1" cap="all" spc="100" baseline="0">
+              <a:defRPr sz="1650" b="1" cap="all" spc="75" baseline="0">
                 <a:solidFill>
                   <a:schemeClr val="tx1"/>
                 </a:solidFill>
                 <a:latin typeface="+mj-lt"/>
               </a:defRPr>
             </a:lvl1pPr>
-            <a:lvl2pPr marL="457200" indent="0">
-              <a:buNone/>
-              <a:defRPr sz="1800">
+            <a:lvl2pPr marL="342900" indent="0">
+              <a:buNone/>
+              <a:defRPr sz="1350">
                 <a:solidFill>
                   <a:schemeClr val="bg1"/>
                 </a:solidFill>
               </a:defRPr>
             </a:lvl2pPr>
-            <a:lvl3pPr marL="914400" indent="0">
-              <a:buNone/>
-              <a:defRPr sz="1800">
+            <a:lvl3pPr marL="685800" indent="0">
+              <a:buNone/>
+              <a:defRPr sz="1350">
                 <a:solidFill>
                   <a:schemeClr val="bg1"/>
                 </a:solidFill>
               </a:defRPr>
             </a:lvl3pPr>
-            <a:lvl4pPr marL="1371600" indent="0">
-              <a:buNone/>
-              <a:defRPr sz="1800">
+            <a:lvl4pPr marL="1028700" indent="0">
+              <a:buNone/>
+              <a:defRPr sz="1350">
                 <a:solidFill>
                   <a:schemeClr val="bg1"/>
                 </a:solidFill>
               </a:defRPr>
             </a:lvl4pPr>
-            <a:lvl5pPr marL="1828800" indent="0">
-              <a:buNone/>
-              <a:defRPr sz="1800">
+            <a:lvl5pPr marL="1371600" indent="0">
+              <a:buNone/>
+              <a:defRPr sz="1350">
                 <a:solidFill>
                   <a:schemeClr val="bg1"/>
                 </a:solidFill>
@@ -7462,8 +7467,8 @@
         </p:nvSpPr>
         <p:spPr>
           <a:xfrm>
-            <a:off x="9524879" y="3046075"/>
-            <a:ext cx="1828635" cy="96903"/>
+            <a:off x="11811844" y="4748918"/>
+            <a:ext cx="2267697" cy="151074"/>
           </a:xfrm>
           <a:prstGeom prst="rect">
             <a:avLst/>
@@ -7510,7 +7515,7 @@
           <a:lstStyle/>
           <a:p>
             <a:pPr algn="ctr"/>
-            <a:endParaRPr lang="en-US" dirty="0">
+            <a:endParaRPr lang="en-US" sz="1013" dirty="0">
               <a:solidFill>
                 <a:schemeClr val="bg1">
                   <a:lumMod val="95000"/>
@@ -7538,8 +7543,8 @@
         </p:nvSpPr>
         <p:spPr>
           <a:xfrm>
-            <a:off x="9427464" y="3391012"/>
-            <a:ext cx="1996440" cy="778652"/>
+            <a:off x="11691037" y="5286683"/>
+            <a:ext cx="2475794" cy="1213940"/>
           </a:xfrm>
         </p:spPr>
         <p:txBody>
@@ -7549,40 +7554,40 @@
           <a:lstStyle>
             <a:lvl1pPr marL="0" indent="0">
               <a:buNone/>
-              <a:defRPr sz="1200" cap="none" baseline="0">
+              <a:defRPr sz="900" cap="none" baseline="0">
                 <a:solidFill>
                   <a:schemeClr val="tx1"/>
                 </a:solidFill>
                 <a:latin typeface="+mn-lt"/>
               </a:defRPr>
             </a:lvl1pPr>
-            <a:lvl2pPr marL="457200" indent="0">
-              <a:buNone/>
-              <a:defRPr sz="1800">
+            <a:lvl2pPr marL="342900" indent="0">
+              <a:buNone/>
+              <a:defRPr sz="1350">
                 <a:solidFill>
                   <a:schemeClr val="bg1"/>
                 </a:solidFill>
               </a:defRPr>
             </a:lvl2pPr>
-            <a:lvl3pPr marL="914400" indent="0">
-              <a:buNone/>
-              <a:defRPr sz="1800">
+            <a:lvl3pPr marL="685800" indent="0">
+              <a:buNone/>
+              <a:defRPr sz="1350">
                 <a:solidFill>
                   <a:schemeClr val="bg1"/>
                 </a:solidFill>
               </a:defRPr>
             </a:lvl3pPr>
-            <a:lvl4pPr marL="1371600" indent="0">
-              <a:buNone/>
-              <a:defRPr sz="1800">
+            <a:lvl4pPr marL="1028700" indent="0">
+              <a:buNone/>
+              <a:defRPr sz="1350">
                 <a:solidFill>
                   <a:schemeClr val="bg1"/>
                 </a:solidFill>
               </a:defRPr>
             </a:lvl4pPr>
-            <a:lvl5pPr marL="1828800" indent="0">
-              <a:buNone/>
-              <a:defRPr sz="1800">
+            <a:lvl5pPr marL="1371600" indent="0">
+              <a:buNone/>
+              <a:defRPr sz="1350">
                 <a:solidFill>
                   <a:schemeClr val="bg1"/>
                 </a:solidFill>
@@ -7616,8 +7621,8 @@
         </p:nvSpPr>
         <p:spPr>
           <a:xfrm>
-            <a:off x="9448800" y="4505738"/>
-            <a:ext cx="893064" cy="335470"/>
+            <a:off x="11717496" y="7024571"/>
+            <a:ext cx="1107492" cy="523008"/>
           </a:xfrm>
         </p:spPr>
         <p:txBody>
@@ -7627,40 +7632,40 @@
           <a:lstStyle>
             <a:lvl1pPr marL="0" indent="0">
               <a:buNone/>
-              <a:defRPr sz="2000" cap="all" baseline="0">
+              <a:defRPr sz="1500" cap="all" baseline="0">
                 <a:solidFill>
                   <a:schemeClr val="tx1"/>
                 </a:solidFill>
                 <a:latin typeface="+mj-lt"/>
               </a:defRPr>
             </a:lvl1pPr>
-            <a:lvl2pPr marL="457200" indent="0">
-              <a:buNone/>
-              <a:defRPr sz="1800">
+            <a:lvl2pPr marL="342900" indent="0">
+              <a:buNone/>
+              <a:defRPr sz="1350">
                 <a:solidFill>
                   <a:schemeClr val="bg1"/>
                 </a:solidFill>
               </a:defRPr>
             </a:lvl2pPr>
-            <a:lvl3pPr marL="914400" indent="0">
-              <a:buNone/>
-              <a:defRPr sz="1800">
+            <a:lvl3pPr marL="685800" indent="0">
+              <a:buNone/>
+              <a:defRPr sz="1350">
                 <a:solidFill>
                   <a:schemeClr val="bg1"/>
                 </a:solidFill>
               </a:defRPr>
             </a:lvl3pPr>
-            <a:lvl4pPr marL="1371600" indent="0">
-              <a:buNone/>
-              <a:defRPr sz="1800">
+            <a:lvl4pPr marL="1028700" indent="0">
+              <a:buNone/>
+              <a:defRPr sz="1350">
                 <a:solidFill>
                   <a:schemeClr val="bg1"/>
                 </a:solidFill>
               </a:defRPr>
             </a:lvl4pPr>
-            <a:lvl5pPr marL="1828800" indent="0">
-              <a:buNone/>
-              <a:defRPr sz="1800">
+            <a:lvl5pPr marL="1371600" indent="0">
+              <a:buNone/>
+              <a:defRPr sz="1350">
                 <a:solidFill>
                   <a:schemeClr val="bg1"/>
                 </a:solidFill>
@@ -7693,8 +7698,8 @@
         </p:nvSpPr>
         <p:spPr>
           <a:xfrm>
-            <a:off x="10484738" y="4399153"/>
-            <a:ext cx="685800" cy="685800"/>
+            <a:off x="13002168" y="6858403"/>
+            <a:ext cx="850463" cy="1069181"/>
           </a:xfrm>
           <a:prstGeom prst="ellipse">
             <a:avLst/>
@@ -7727,7 +7732,7 @@
           <a:lstStyle/>
           <a:p>
             <a:pPr algn="ctr"/>
-            <a:endParaRPr lang="en-US" dirty="0"/>
+            <a:endParaRPr lang="en-US" sz="1013" dirty="0"/>
           </a:p>
         </p:txBody>
       </p:sp>
@@ -7749,8 +7754,8 @@
         </p:nvSpPr>
         <p:spPr>
           <a:xfrm>
-            <a:off x="10599038" y="4513453"/>
-            <a:ext cx="457200" cy="457200"/>
+            <a:off x="13143912" y="7036599"/>
+            <a:ext cx="566976" cy="712788"/>
           </a:xfrm>
           <a:prstGeom prst="ellipse">
             <a:avLst/>
@@ -7766,7 +7771,7 @@
           <a:lstStyle>
             <a:lvl1pPr marL="0" indent="0" algn="ctr">
               <a:buNone/>
-              <a:defRPr sz="600">
+              <a:defRPr sz="450">
                 <a:solidFill>
                   <a:schemeClr val="tx1"/>
                 </a:solidFill>
@@ -7800,8 +7805,8 @@
         </p:nvSpPr>
         <p:spPr>
           <a:xfrm>
-            <a:off x="9448800" y="4894756"/>
-            <a:ext cx="893064" cy="335470"/>
+            <a:off x="11717496" y="7631062"/>
+            <a:ext cx="1107492" cy="523008"/>
           </a:xfrm>
         </p:spPr>
         <p:txBody>
@@ -7811,40 +7816,40 @@
           <a:lstStyle>
             <a:lvl1pPr marL="0" indent="0">
               <a:buNone/>
-              <a:defRPr sz="1400" cap="none" baseline="0">
+              <a:defRPr sz="1050" cap="none" baseline="0">
                 <a:solidFill>
                   <a:schemeClr val="tx1"/>
                 </a:solidFill>
                 <a:latin typeface="+mn-lt"/>
               </a:defRPr>
             </a:lvl1pPr>
-            <a:lvl2pPr marL="457200" indent="0">
-              <a:buNone/>
-              <a:defRPr sz="1800">
+            <a:lvl2pPr marL="342900" indent="0">
+              <a:buNone/>
+              <a:defRPr sz="1350">
                 <a:solidFill>
                   <a:schemeClr val="bg1"/>
                 </a:solidFill>
               </a:defRPr>
             </a:lvl2pPr>
-            <a:lvl3pPr marL="914400" indent="0">
-              <a:buNone/>
-              <a:defRPr sz="1800">
+            <a:lvl3pPr marL="685800" indent="0">
+              <a:buNone/>
+              <a:defRPr sz="1350">
                 <a:solidFill>
                   <a:schemeClr val="bg1"/>
                 </a:solidFill>
               </a:defRPr>
             </a:lvl3pPr>
-            <a:lvl4pPr marL="1371600" indent="0">
-              <a:buNone/>
-              <a:defRPr sz="1800">
+            <a:lvl4pPr marL="1028700" indent="0">
+              <a:buNone/>
+              <a:defRPr sz="1350">
                 <a:solidFill>
                   <a:schemeClr val="bg1"/>
                 </a:solidFill>
               </a:defRPr>
             </a:lvl4pPr>
-            <a:lvl5pPr marL="1828800" indent="0">
-              <a:buNone/>
-              <a:defRPr sz="1800">
+            <a:lvl5pPr marL="1371600" indent="0">
+              <a:buNone/>
+              <a:defRPr sz="1350">
                 <a:solidFill>
                   <a:schemeClr val="bg1"/>
                 </a:solidFill>
@@ -7879,8 +7884,8 @@
         </p:nvCxnSpPr>
         <p:spPr>
           <a:xfrm>
-            <a:off x="9524879" y="5376344"/>
-            <a:ext cx="1828635" cy="3053"/>
+            <a:off x="11811844" y="8381870"/>
+            <a:ext cx="2267697" cy="4760"/>
           </a:xfrm>
           <a:prstGeom prst="straightConnector1">
             <a:avLst/>
@@ -7939,8 +7944,8 @@
         </p:nvSpPr>
         <p:spPr>
           <a:xfrm>
-            <a:off x="670560" y="6072886"/>
-            <a:ext cx="4114800" cy="365125"/>
+            <a:off x="831564" y="9467799"/>
+            <a:ext cx="5102781" cy="569241"/>
           </a:xfrm>
           <a:prstGeom prst="rect">
             <a:avLst/>
@@ -7950,7 +7955,7 @@
           <a:bodyPr/>
           <a:lstStyle>
             <a:lvl1pPr algn="l">
-              <a:defRPr sz="1000" cap="all" baseline="0">
+              <a:defRPr sz="750" cap="all" baseline="0">
                 <a:solidFill>
                   <a:schemeClr val="tx1"/>
                 </a:solidFill>
@@ -7980,8 +7985,8 @@
         </p:nvSpPr>
         <p:spPr>
           <a:xfrm>
-            <a:off x="8738616" y="6072886"/>
-            <a:ext cx="2743200" cy="365125"/>
+            <a:off x="10836794" y="9467799"/>
+            <a:ext cx="3401854" cy="569241"/>
           </a:xfrm>
           <a:prstGeom prst="rect">
             <a:avLst/>
@@ -7991,7 +7996,7 @@
           <a:bodyPr/>
           <a:lstStyle>
             <a:lvl1pPr>
-              <a:defRPr sz="1000">
+              <a:defRPr sz="750">
                 <a:solidFill>
                   <a:schemeClr val="tx1"/>
                 </a:solidFill>
@@ -8065,8 +8070,8 @@
         </p:nvSpPr>
         <p:spPr>
           <a:xfrm>
-            <a:off x="594804" y="365125"/>
-            <a:ext cx="10887012" cy="1325563"/>
+            <a:off x="737620" y="569241"/>
+            <a:ext cx="13501029" cy="2066589"/>
           </a:xfrm>
           <a:prstGeom prst="rect">
             <a:avLst/>
@@ -8103,8 +8108,8 @@
         </p:nvSpPr>
         <p:spPr>
           <a:xfrm>
-            <a:off x="594804" y="1825625"/>
-            <a:ext cx="10887012" cy="4113536"/>
+            <a:off x="737620" y="2846201"/>
+            <a:ext cx="13501029" cy="6413117"/>
           </a:xfrm>
           <a:prstGeom prst="rect">
             <a:avLst/>
@@ -8170,8 +8175,8 @@
         </p:nvSpPr>
         <p:spPr>
           <a:xfrm>
-            <a:off x="670560" y="6072886"/>
-            <a:ext cx="4114800" cy="365125"/>
+            <a:off x="831564" y="9467799"/>
+            <a:ext cx="5102781" cy="569241"/>
           </a:xfrm>
           <a:prstGeom prst="rect">
             <a:avLst/>
@@ -8181,7 +8186,7 @@
           <a:bodyPr/>
           <a:lstStyle>
             <a:lvl1pPr algn="l">
-              <a:defRPr sz="1000" cap="all" baseline="0">
+              <a:defRPr sz="750" cap="all" baseline="0">
                 <a:solidFill>
                   <a:schemeClr val="tx1"/>
                 </a:solidFill>
@@ -8211,8 +8216,8 @@
         </p:nvSpPr>
         <p:spPr>
           <a:xfrm>
-            <a:off x="8738616" y="6072886"/>
-            <a:ext cx="2743200" cy="365125"/>
+            <a:off x="10836794" y="9467799"/>
+            <a:ext cx="3401854" cy="569241"/>
           </a:xfrm>
           <a:prstGeom prst="rect">
             <a:avLst/>
@@ -8222,7 +8227,7 @@
           <a:bodyPr/>
           <a:lstStyle>
             <a:lvl1pPr algn="r">
-              <a:defRPr sz="1000">
+              <a:defRPr sz="750">
                 <a:solidFill>
                   <a:schemeClr val="tx1"/>
                 </a:solidFill>
@@ -8257,7 +8262,7 @@
   </p:sldLayoutIdLst>
   <p:txStyles>
     <p:titleStyle>
-      <a:lvl1pPr algn="l" defTabSz="914400" rtl="0" eaLnBrk="1" latinLnBrk="0" hangingPunct="1">
+      <a:lvl1pPr algn="l" defTabSz="685800" rtl="0" eaLnBrk="1" latinLnBrk="0" hangingPunct="1">
         <a:lnSpc>
           <a:spcPct val="90000"/>
         </a:lnSpc>
@@ -8265,7 +8270,7 @@
           <a:spcPct val="0"/>
         </a:spcBef>
         <a:buNone/>
-        <a:defRPr sz="4400" kern="1200">
+        <a:defRPr sz="3300" kern="1200">
           <a:solidFill>
             <a:schemeClr val="tx1"/>
           </a:solidFill>
@@ -8276,16 +8281,16 @@
       </a:lvl1pPr>
     </p:titleStyle>
     <p:bodyStyle>
-      <a:lvl1pPr marL="228600" indent="-228600" algn="l" defTabSz="914400" rtl="0" eaLnBrk="1" latinLnBrk="0" hangingPunct="1">
+      <a:lvl1pPr marL="171450" indent="-171450" algn="l" defTabSz="685800" rtl="0" eaLnBrk="1" latinLnBrk="0" hangingPunct="1">
         <a:lnSpc>
           <a:spcPct val="90000"/>
         </a:lnSpc>
         <a:spcBef>
-          <a:spcPts val="1000"/>
+          <a:spcPts val="750"/>
         </a:spcBef>
         <a:buFont typeface="Arial" panose="020B0604020202020204" pitchFamily="34" charset="0"/>
         <a:buChar char="•"/>
-        <a:defRPr sz="2800" kern="1200">
+        <a:defRPr sz="2100" kern="1200">
           <a:solidFill>
             <a:schemeClr val="tx1"/>
           </a:solidFill>
@@ -8294,48 +8299,12 @@
           <a:cs typeface="+mn-cs"/>
         </a:defRPr>
       </a:lvl1pPr>
-      <a:lvl2pPr marL="685800" indent="-228600" algn="l" defTabSz="914400" rtl="0" eaLnBrk="1" latinLnBrk="0" hangingPunct="1">
+      <a:lvl2pPr marL="514350" indent="-171450" algn="l" defTabSz="685800" rtl="0" eaLnBrk="1" latinLnBrk="0" hangingPunct="1">
         <a:lnSpc>
           <a:spcPct val="90000"/>
         </a:lnSpc>
         <a:spcBef>
-          <a:spcPts val="500"/>
-        </a:spcBef>
-        <a:buFont typeface="Arial" panose="020B0604020202020204" pitchFamily="34" charset="0"/>
-        <a:buChar char="•"/>
-        <a:defRPr sz="2400" kern="1200">
-          <a:solidFill>
-            <a:schemeClr val="tx1"/>
-          </a:solidFill>
-          <a:latin typeface="+mn-lt"/>
-          <a:ea typeface="+mn-ea"/>
-          <a:cs typeface="+mn-cs"/>
-        </a:defRPr>
-      </a:lvl2pPr>
-      <a:lvl3pPr marL="1143000" indent="-228600" algn="l" defTabSz="914400" rtl="0" eaLnBrk="1" latinLnBrk="0" hangingPunct="1">
-        <a:lnSpc>
-          <a:spcPct val="90000"/>
-        </a:lnSpc>
-        <a:spcBef>
-          <a:spcPts val="500"/>
-        </a:spcBef>
-        <a:buFont typeface="Arial" panose="020B0604020202020204" pitchFamily="34" charset="0"/>
-        <a:buChar char="•"/>
-        <a:defRPr sz="2000" kern="1200">
-          <a:solidFill>
-            <a:schemeClr val="tx1"/>
-          </a:solidFill>
-          <a:latin typeface="+mn-lt"/>
-          <a:ea typeface="+mn-ea"/>
-          <a:cs typeface="+mn-cs"/>
-        </a:defRPr>
-      </a:lvl3pPr>
-      <a:lvl4pPr marL="1600200" indent="-228600" algn="l" defTabSz="914400" rtl="0" eaLnBrk="1" latinLnBrk="0" hangingPunct="1">
-        <a:lnSpc>
-          <a:spcPct val="90000"/>
-        </a:lnSpc>
-        <a:spcBef>
-          <a:spcPts val="500"/>
+          <a:spcPts val="375"/>
         </a:spcBef>
         <a:buFont typeface="Arial" panose="020B0604020202020204" pitchFamily="34" charset="0"/>
         <a:buChar char="•"/>
@@ -8347,17 +8316,53 @@
           <a:ea typeface="+mn-ea"/>
           <a:cs typeface="+mn-cs"/>
         </a:defRPr>
-      </a:lvl4pPr>
-      <a:lvl5pPr marL="2057400" indent="-228600" algn="l" defTabSz="914400" rtl="0" eaLnBrk="1" latinLnBrk="0" hangingPunct="1">
+      </a:lvl2pPr>
+      <a:lvl3pPr marL="857250" indent="-171450" algn="l" defTabSz="685800" rtl="0" eaLnBrk="1" latinLnBrk="0" hangingPunct="1">
         <a:lnSpc>
           <a:spcPct val="90000"/>
         </a:lnSpc>
         <a:spcBef>
-          <a:spcPts val="500"/>
+          <a:spcPts val="375"/>
         </a:spcBef>
         <a:buFont typeface="Arial" panose="020B0604020202020204" pitchFamily="34" charset="0"/>
         <a:buChar char="•"/>
-        <a:defRPr sz="1800" kern="1200">
+        <a:defRPr sz="1500" kern="1200">
+          <a:solidFill>
+            <a:schemeClr val="tx1"/>
+          </a:solidFill>
+          <a:latin typeface="+mn-lt"/>
+          <a:ea typeface="+mn-ea"/>
+          <a:cs typeface="+mn-cs"/>
+        </a:defRPr>
+      </a:lvl3pPr>
+      <a:lvl4pPr marL="1200150" indent="-171450" algn="l" defTabSz="685800" rtl="0" eaLnBrk="1" latinLnBrk="0" hangingPunct="1">
+        <a:lnSpc>
+          <a:spcPct val="90000"/>
+        </a:lnSpc>
+        <a:spcBef>
+          <a:spcPts val="375"/>
+        </a:spcBef>
+        <a:buFont typeface="Arial" panose="020B0604020202020204" pitchFamily="34" charset="0"/>
+        <a:buChar char="•"/>
+        <a:defRPr sz="1350" kern="1200">
+          <a:solidFill>
+            <a:schemeClr val="tx1"/>
+          </a:solidFill>
+          <a:latin typeface="+mn-lt"/>
+          <a:ea typeface="+mn-ea"/>
+          <a:cs typeface="+mn-cs"/>
+        </a:defRPr>
+      </a:lvl4pPr>
+      <a:lvl5pPr marL="1543050" indent="-171450" algn="l" defTabSz="685800" rtl="0" eaLnBrk="1" latinLnBrk="0" hangingPunct="1">
+        <a:lnSpc>
+          <a:spcPct val="90000"/>
+        </a:lnSpc>
+        <a:spcBef>
+          <a:spcPts val="375"/>
+        </a:spcBef>
+        <a:buFont typeface="Arial" panose="020B0604020202020204" pitchFamily="34" charset="0"/>
+        <a:buChar char="•"/>
+        <a:defRPr sz="1350" kern="1200">
           <a:solidFill>
             <a:schemeClr val="tx1"/>
           </a:solidFill>
@@ -8366,16 +8371,16 @@
           <a:cs typeface="+mn-cs"/>
         </a:defRPr>
       </a:lvl5pPr>
-      <a:lvl6pPr marL="2514600" indent="-228600" algn="l" defTabSz="914400" rtl="0" eaLnBrk="1" latinLnBrk="0" hangingPunct="1">
+      <a:lvl6pPr marL="1885950" indent="-171450" algn="l" defTabSz="685800" rtl="0" eaLnBrk="1" latinLnBrk="0" hangingPunct="1">
         <a:lnSpc>
           <a:spcPct val="90000"/>
         </a:lnSpc>
         <a:spcBef>
-          <a:spcPts val="500"/>
+          <a:spcPts val="375"/>
         </a:spcBef>
         <a:buFont typeface="Arial" panose="020B0604020202020204" pitchFamily="34" charset="0"/>
         <a:buChar char="•"/>
-        <a:defRPr sz="1800" kern="1200">
+        <a:defRPr sz="1350" kern="1200">
           <a:solidFill>
             <a:schemeClr val="tx1"/>
           </a:solidFill>
@@ -8384,16 +8389,16 @@
           <a:cs typeface="+mn-cs"/>
         </a:defRPr>
       </a:lvl6pPr>
-      <a:lvl7pPr marL="2971800" indent="-228600" algn="l" defTabSz="914400" rtl="0" eaLnBrk="1" latinLnBrk="0" hangingPunct="1">
+      <a:lvl7pPr marL="2228850" indent="-171450" algn="l" defTabSz="685800" rtl="0" eaLnBrk="1" latinLnBrk="0" hangingPunct="1">
         <a:lnSpc>
           <a:spcPct val="90000"/>
         </a:lnSpc>
         <a:spcBef>
-          <a:spcPts val="500"/>
+          <a:spcPts val="375"/>
         </a:spcBef>
         <a:buFont typeface="Arial" panose="020B0604020202020204" pitchFamily="34" charset="0"/>
         <a:buChar char="•"/>
-        <a:defRPr sz="1800" kern="1200">
+        <a:defRPr sz="1350" kern="1200">
           <a:solidFill>
             <a:schemeClr val="tx1"/>
           </a:solidFill>
@@ -8402,16 +8407,16 @@
           <a:cs typeface="+mn-cs"/>
         </a:defRPr>
       </a:lvl7pPr>
-      <a:lvl8pPr marL="3429000" indent="-228600" algn="l" defTabSz="914400" rtl="0" eaLnBrk="1" latinLnBrk="0" hangingPunct="1">
+      <a:lvl8pPr marL="2571750" indent="-171450" algn="l" defTabSz="685800" rtl="0" eaLnBrk="1" latinLnBrk="0" hangingPunct="1">
         <a:lnSpc>
           <a:spcPct val="90000"/>
         </a:lnSpc>
         <a:spcBef>
-          <a:spcPts val="500"/>
+          <a:spcPts val="375"/>
         </a:spcBef>
         <a:buFont typeface="Arial" panose="020B0604020202020204" pitchFamily="34" charset="0"/>
         <a:buChar char="•"/>
-        <a:defRPr sz="1800" kern="1200">
+        <a:defRPr sz="1350" kern="1200">
           <a:solidFill>
             <a:schemeClr val="tx1"/>
           </a:solidFill>
@@ -8420,16 +8425,16 @@
           <a:cs typeface="+mn-cs"/>
         </a:defRPr>
       </a:lvl8pPr>
-      <a:lvl9pPr marL="3886200" indent="-228600" algn="l" defTabSz="914400" rtl="0" eaLnBrk="1" latinLnBrk="0" hangingPunct="1">
+      <a:lvl9pPr marL="2914650" indent="-171450" algn="l" defTabSz="685800" rtl="0" eaLnBrk="1" latinLnBrk="0" hangingPunct="1">
         <a:lnSpc>
           <a:spcPct val="90000"/>
         </a:lnSpc>
         <a:spcBef>
-          <a:spcPts val="500"/>
+          <a:spcPts val="375"/>
         </a:spcBef>
         <a:buFont typeface="Arial" panose="020B0604020202020204" pitchFamily="34" charset="0"/>
         <a:buChar char="•"/>
-        <a:defRPr sz="1800" kern="1200">
+        <a:defRPr sz="1350" kern="1200">
           <a:solidFill>
             <a:schemeClr val="tx1"/>
           </a:solidFill>
@@ -8443,8 +8448,8 @@
       <a:defPPr>
         <a:defRPr lang="en-US"/>
       </a:defPPr>
-      <a:lvl1pPr marL="0" algn="l" defTabSz="914400" rtl="0" eaLnBrk="1" latinLnBrk="0" hangingPunct="1">
-        <a:defRPr sz="1800" kern="1200">
+      <a:lvl1pPr marL="0" algn="l" defTabSz="685800" rtl="0" eaLnBrk="1" latinLnBrk="0" hangingPunct="1">
+        <a:defRPr sz="1350" kern="1200">
           <a:solidFill>
             <a:schemeClr val="tx1"/>
           </a:solidFill>
@@ -8453,8 +8458,8 @@
           <a:cs typeface="+mn-cs"/>
         </a:defRPr>
       </a:lvl1pPr>
-      <a:lvl2pPr marL="457200" algn="l" defTabSz="914400" rtl="0" eaLnBrk="1" latinLnBrk="0" hangingPunct="1">
-        <a:defRPr sz="1800" kern="1200">
+      <a:lvl2pPr marL="342900" algn="l" defTabSz="685800" rtl="0" eaLnBrk="1" latinLnBrk="0" hangingPunct="1">
+        <a:defRPr sz="1350" kern="1200">
           <a:solidFill>
             <a:schemeClr val="tx1"/>
           </a:solidFill>
@@ -8463,8 +8468,8 @@
           <a:cs typeface="+mn-cs"/>
         </a:defRPr>
       </a:lvl2pPr>
-      <a:lvl3pPr marL="914400" algn="l" defTabSz="914400" rtl="0" eaLnBrk="1" latinLnBrk="0" hangingPunct="1">
-        <a:defRPr sz="1800" kern="1200">
+      <a:lvl3pPr marL="685800" algn="l" defTabSz="685800" rtl="0" eaLnBrk="1" latinLnBrk="0" hangingPunct="1">
+        <a:defRPr sz="1350" kern="1200">
           <a:solidFill>
             <a:schemeClr val="tx1"/>
           </a:solidFill>
@@ -8473,8 +8478,8 @@
           <a:cs typeface="+mn-cs"/>
         </a:defRPr>
       </a:lvl3pPr>
-      <a:lvl4pPr marL="1371600" algn="l" defTabSz="914400" rtl="0" eaLnBrk="1" latinLnBrk="0" hangingPunct="1">
-        <a:defRPr sz="1800" kern="1200">
+      <a:lvl4pPr marL="1028700" algn="l" defTabSz="685800" rtl="0" eaLnBrk="1" latinLnBrk="0" hangingPunct="1">
+        <a:defRPr sz="1350" kern="1200">
           <a:solidFill>
             <a:schemeClr val="tx1"/>
           </a:solidFill>
@@ -8483,8 +8488,8 @@
           <a:cs typeface="+mn-cs"/>
         </a:defRPr>
       </a:lvl4pPr>
-      <a:lvl5pPr marL="1828800" algn="l" defTabSz="914400" rtl="0" eaLnBrk="1" latinLnBrk="0" hangingPunct="1">
-        <a:defRPr sz="1800" kern="1200">
+      <a:lvl5pPr marL="1371600" algn="l" defTabSz="685800" rtl="0" eaLnBrk="1" latinLnBrk="0" hangingPunct="1">
+        <a:defRPr sz="1350" kern="1200">
           <a:solidFill>
             <a:schemeClr val="tx1"/>
           </a:solidFill>
@@ -8493,8 +8498,8 @@
           <a:cs typeface="+mn-cs"/>
         </a:defRPr>
       </a:lvl5pPr>
-      <a:lvl6pPr marL="2286000" algn="l" defTabSz="914400" rtl="0" eaLnBrk="1" latinLnBrk="0" hangingPunct="1">
-        <a:defRPr sz="1800" kern="1200">
+      <a:lvl6pPr marL="1714500" algn="l" defTabSz="685800" rtl="0" eaLnBrk="1" latinLnBrk="0" hangingPunct="1">
+        <a:defRPr sz="1350" kern="1200">
           <a:solidFill>
             <a:schemeClr val="tx1"/>
           </a:solidFill>
@@ -8503,8 +8508,8 @@
           <a:cs typeface="+mn-cs"/>
         </a:defRPr>
       </a:lvl6pPr>
-      <a:lvl7pPr marL="2743200" algn="l" defTabSz="914400" rtl="0" eaLnBrk="1" latinLnBrk="0" hangingPunct="1">
-        <a:defRPr sz="1800" kern="1200">
+      <a:lvl7pPr marL="2057400" algn="l" defTabSz="685800" rtl="0" eaLnBrk="1" latinLnBrk="0" hangingPunct="1">
+        <a:defRPr sz="1350" kern="1200">
           <a:solidFill>
             <a:schemeClr val="tx1"/>
           </a:solidFill>
@@ -8513,8 +8518,8 @@
           <a:cs typeface="+mn-cs"/>
         </a:defRPr>
       </a:lvl7pPr>
-      <a:lvl8pPr marL="3200400" algn="l" defTabSz="914400" rtl="0" eaLnBrk="1" latinLnBrk="0" hangingPunct="1">
-        <a:defRPr sz="1800" kern="1200">
+      <a:lvl8pPr marL="2400300" algn="l" defTabSz="685800" rtl="0" eaLnBrk="1" latinLnBrk="0" hangingPunct="1">
+        <a:defRPr sz="1350" kern="1200">
           <a:solidFill>
             <a:schemeClr val="tx1"/>
           </a:solidFill>
@@ -8523,8 +8528,8 @@
           <a:cs typeface="+mn-cs"/>
         </a:defRPr>
       </a:lvl8pPr>
-      <a:lvl9pPr marL="3657600" algn="l" defTabSz="914400" rtl="0" eaLnBrk="1" latinLnBrk="0" hangingPunct="1">
-        <a:defRPr sz="1800" kern="1200">
+      <a:lvl9pPr marL="2743200" algn="l" defTabSz="685800" rtl="0" eaLnBrk="1" latinLnBrk="0" hangingPunct="1">
+        <a:defRPr sz="1350" kern="1200">
           <a:solidFill>
             <a:schemeClr val="tx1"/>
           </a:solidFill>
@@ -8593,8 +8598,8 @@
         </p:blipFill>
         <p:spPr>
           <a:xfrm>
-            <a:off x="-7289" y="1051642"/>
-            <a:ext cx="12199289" cy="5888349"/>
+            <a:off x="-22294" y="888881"/>
+            <a:ext cx="13968889" cy="9919376"/>
           </a:xfrm>
           <a:prstGeom prst="rect">
             <a:avLst/>
@@ -8615,8 +8620,8 @@
         </p:nvSpPr>
         <p:spPr>
           <a:xfrm>
-            <a:off x="7368851" y="1124365"/>
-            <a:ext cx="3419288" cy="2009449"/>
+            <a:off x="11340624" y="3290669"/>
+            <a:ext cx="2564466" cy="1507087"/>
           </a:xfrm>
           <a:prstGeom prst="roundRect">
             <a:avLst>
@@ -8649,7 +8654,7 @@
           <a:lstStyle/>
           <a:p>
             <a:pPr algn="ctr"/>
-            <a:endParaRPr lang="en-GB"/>
+            <a:endParaRPr lang="en-GB" sz="1013"/>
           </a:p>
         </p:txBody>
       </p:sp>
@@ -8680,8 +8685,8 @@
         </p:blipFill>
         <p:spPr>
           <a:xfrm>
-            <a:off x="-1144339" y="-2453227"/>
-            <a:ext cx="981345" cy="12510591"/>
+            <a:off x="-1089225" y="796071"/>
+            <a:ext cx="736009" cy="9382943"/>
           </a:xfrm>
           <a:prstGeom prst="ellipse">
             <a:avLst/>
@@ -8705,8 +8710,8 @@
         </p:nvSpPr>
         <p:spPr>
           <a:xfrm>
-            <a:off x="7422105" y="3175223"/>
-            <a:ext cx="4676255" cy="2680596"/>
+            <a:off x="11380566" y="4828812"/>
+            <a:ext cx="3507191" cy="2010447"/>
           </a:xfrm>
           <a:prstGeom prst="roundRect">
             <a:avLst>
@@ -8739,16 +8744,16 @@
           <a:lstStyle/>
           <a:p>
             <a:pPr algn="ctr"/>
-            <a:endParaRPr lang="en-GB"/>
-          </a:p>
-        </p:txBody>
-      </p:sp>
-      <p:sp>
-        <p:nvSpPr>
-          <p:cNvPr id="26" name="Rectangle: Rounded Corners 25">
-            <a:extLst>
-              <a:ext uri="{FF2B5EF4-FFF2-40B4-BE49-F238E27FC236}">
-                <a16:creationId xmlns:a16="http://schemas.microsoft.com/office/drawing/2014/main" id="{E3702137-7B68-0942-D341-7B268DDDF63D}"/>
+            <a:endParaRPr lang="en-GB" sz="1013"/>
+          </a:p>
+        </p:txBody>
+      </p:sp>
+      <p:sp>
+        <p:nvSpPr>
+          <p:cNvPr id="22" name="Rectangle: Rounded Corners 21">
+            <a:extLst>
+              <a:ext uri="{FF2B5EF4-FFF2-40B4-BE49-F238E27FC236}">
+                <a16:creationId xmlns:a16="http://schemas.microsoft.com/office/drawing/2014/main" id="{D5F40875-B05D-EA92-6D1C-618B270BAC36}"/>
               </a:ext>
             </a:extLst>
           </p:cNvPr>
@@ -8757,8 +8762,8 @@
         </p:nvSpPr>
         <p:spPr>
           <a:xfrm>
-            <a:off x="3760032" y="3124857"/>
-            <a:ext cx="3298786" cy="1613224"/>
+            <a:off x="393807" y="1575295"/>
+            <a:ext cx="5064750" cy="2513716"/>
           </a:xfrm>
           <a:prstGeom prst="roundRect">
             <a:avLst>
@@ -8791,111 +8796,7 @@
           <a:lstStyle/>
           <a:p>
             <a:pPr algn="ctr"/>
-            <a:endParaRPr lang="en-GB"/>
-          </a:p>
-        </p:txBody>
-      </p:sp>
-      <p:sp>
-        <p:nvSpPr>
-          <p:cNvPr id="23" name="Rectangle: Rounded Corners 22">
-            <a:extLst>
-              <a:ext uri="{FF2B5EF4-FFF2-40B4-BE49-F238E27FC236}">
-                <a16:creationId xmlns:a16="http://schemas.microsoft.com/office/drawing/2014/main" id="{7B161D79-24C0-1DBA-EC5D-4ACC645FBC7D}"/>
-              </a:ext>
-            </a:extLst>
-          </p:cNvPr>
-          <p:cNvSpPr/>
-          <p:nvPr/>
-        </p:nvSpPr>
-        <p:spPr>
-          <a:xfrm>
-            <a:off x="157982" y="4892716"/>
-            <a:ext cx="3367573" cy="1865169"/>
-          </a:xfrm>
-          <a:prstGeom prst="roundRect">
-            <a:avLst>
-              <a:gd name="adj" fmla="val 4163"/>
-            </a:avLst>
-          </a:prstGeom>
-          <a:solidFill>
-            <a:schemeClr val="dk1"/>
-          </a:solidFill>
-          <a:ln>
-            <a:noFill/>
-          </a:ln>
-        </p:spPr>
-        <p:style>
-          <a:lnRef idx="0">
-            <a:scrgbClr r="0" g="0" b="0"/>
-          </a:lnRef>
-          <a:fillRef idx="0">
-            <a:scrgbClr r="0" g="0" b="0"/>
-          </a:fillRef>
-          <a:effectRef idx="0">
-            <a:scrgbClr r="0" g="0" b="0"/>
-          </a:effectRef>
-          <a:fontRef idx="minor">
-            <a:schemeClr val="lt1"/>
-          </a:fontRef>
-        </p:style>
-        <p:txBody>
-          <a:bodyPr rtlCol="0" anchor="ctr"/>
-          <a:lstStyle/>
-          <a:p>
-            <a:pPr algn="ctr"/>
-            <a:endParaRPr lang="en-GB" dirty="0"/>
-          </a:p>
-        </p:txBody>
-      </p:sp>
-      <p:sp>
-        <p:nvSpPr>
-          <p:cNvPr id="22" name="Rectangle: Rounded Corners 21">
-            <a:extLst>
-              <a:ext uri="{FF2B5EF4-FFF2-40B4-BE49-F238E27FC236}">
-                <a16:creationId xmlns:a16="http://schemas.microsoft.com/office/drawing/2014/main" id="{D5F40875-B05D-EA92-6D1C-618B270BAC36}"/>
-              </a:ext>
-            </a:extLst>
-          </p:cNvPr>
-          <p:cNvSpPr/>
-          <p:nvPr/>
-        </p:nvSpPr>
-        <p:spPr>
-          <a:xfrm>
-            <a:off x="171671" y="1222490"/>
-            <a:ext cx="3328054" cy="1684745"/>
-          </a:xfrm>
-          <a:prstGeom prst="roundRect">
-            <a:avLst>
-              <a:gd name="adj" fmla="val 7621"/>
-            </a:avLst>
-          </a:prstGeom>
-          <a:solidFill>
-            <a:schemeClr val="dk1"/>
-          </a:solidFill>
-          <a:ln>
-            <a:noFill/>
-          </a:ln>
-        </p:spPr>
-        <p:style>
-          <a:lnRef idx="0">
-            <a:scrgbClr r="0" g="0" b="0"/>
-          </a:lnRef>
-          <a:fillRef idx="0">
-            <a:scrgbClr r="0" g="0" b="0"/>
-          </a:fillRef>
-          <a:effectRef idx="0">
-            <a:scrgbClr r="0" g="0" b="0"/>
-          </a:effectRef>
-          <a:fontRef idx="minor">
-            <a:schemeClr val="lt1"/>
-          </a:fontRef>
-        </p:style>
-        <p:txBody>
-          <a:bodyPr rtlCol="0" anchor="ctr"/>
-          <a:lstStyle/>
-          <a:p>
-            <a:pPr algn="ctr"/>
-            <a:endParaRPr lang="en-GB"/>
+            <a:endParaRPr lang="en-GB" sz="1013"/>
           </a:p>
         </p:txBody>
       </p:sp>
@@ -8917,8 +8818,8 @@
         </p:nvSpPr>
         <p:spPr>
           <a:xfrm>
-            <a:off x="0" y="-100098"/>
-            <a:ext cx="12191999" cy="1097915"/>
+            <a:off x="0" y="0"/>
+            <a:ext cx="15119350" cy="823436"/>
           </a:xfrm>
         </p:spPr>
         <p:txBody>
@@ -8928,7 +8829,7 @@
           <a:lstStyle/>
           <a:p>
             <a:r>
-              <a:rPr lang="en-US" sz="3000" b="1" dirty="0"/>
+              <a:rPr lang="en-US" sz="2250" b="1" dirty="0"/>
               <a:t>Can Track Sequencers be Relevant in Modern Game Development?</a:t>
             </a:r>
           </a:p>
@@ -8952,8 +8853,8 @@
         </p:nvSpPr>
         <p:spPr>
           <a:xfrm>
-            <a:off x="6802821" y="728275"/>
-            <a:ext cx="9064752" cy="511175"/>
+            <a:off x="9859539" y="492305"/>
+            <a:ext cx="6798564" cy="383381"/>
           </a:xfrm>
         </p:spPr>
         <p:txBody>
@@ -8985,8 +8886,8 @@
         </p:nvSpPr>
         <p:spPr>
           <a:xfrm>
-            <a:off x="218434" y="1287121"/>
-            <a:ext cx="2721668" cy="381190"/>
+            <a:off x="539685" y="1702193"/>
+            <a:ext cx="3659243" cy="365172"/>
           </a:xfrm>
         </p:spPr>
         <p:txBody>
@@ -8994,7 +8895,7 @@
           <a:lstStyle/>
           <a:p>
             <a:r>
-              <a:rPr lang="en-US" dirty="0"/>
+              <a:rPr lang="en-US" sz="2500" dirty="0"/>
               <a:t>Introduction</a:t>
             </a:r>
           </a:p>
@@ -9018,8 +8919,8 @@
         </p:nvSpPr>
         <p:spPr>
           <a:xfrm>
-            <a:off x="218434" y="1690648"/>
-            <a:ext cx="3364992" cy="1266834"/>
+            <a:off x="539685" y="2171255"/>
+            <a:ext cx="4908924" cy="1818224"/>
           </a:xfrm>
         </p:spPr>
         <p:txBody>
@@ -9027,18 +8928,36 @@
           <a:lstStyle/>
           <a:p>
             <a:r>
-              <a:rPr lang="en-US" sz="800" dirty="0"/>
+              <a:rPr lang="en-US" sz="1200" dirty="0">
+                <a:solidFill>
+                  <a:schemeClr val="accent3">
+                    <a:lumMod val="20000"/>
+                    <a:lumOff val="80000"/>
+                  </a:schemeClr>
+                </a:solidFill>
+                <a:ea typeface="ADLaM Display" panose="02010000000000000000" pitchFamily="2" charset="0"/>
+                <a:cs typeface="ADLaM Display" panose="02010000000000000000" pitchFamily="2" charset="0"/>
+              </a:rPr>
               <a:t>Music track sequencing was used in older game consoles where storage space and audio capabilities were limited. Music used to be a list of text commands that played preset instrumental tones. Audio has since been upgraded to pre-recorded tracks, creating greater immersive experiences.</a:t>
             </a:r>
           </a:p>
           <a:p>
             <a:r>
-              <a:rPr lang="en-US" sz="800" dirty="0"/>
+              <a:rPr lang="en-US" sz="1200" dirty="0">
+                <a:solidFill>
+                  <a:schemeClr val="accent3">
+                    <a:lumMod val="20000"/>
+                    <a:lumOff val="80000"/>
+                  </a:schemeClr>
+                </a:solidFill>
+                <a:ea typeface="ADLaM Display" panose="02010000000000000000" pitchFamily="2" charset="0"/>
+                <a:cs typeface="ADLaM Display" panose="02010000000000000000" pitchFamily="2" charset="0"/>
+              </a:rPr>
               <a:t>This research dives into the history of music in gaming and explores the question “Can track sequencers be relevant in modern game development?”.</a:t>
             </a:r>
           </a:p>
           <a:p>
-            <a:endParaRPr lang="en-US" sz="900" dirty="0"/>
+            <a:endParaRPr lang="en-US" sz="1200" dirty="0"/>
           </a:p>
         </p:txBody>
       </p:sp>
@@ -9071,135 +8990,11 @@
         </p:blipFill>
         <p:spPr>
           <a:xfrm>
-            <a:off x="2733149" y="1224191"/>
-            <a:ext cx="457200" cy="457200"/>
+            <a:off x="3443479" y="1630850"/>
+            <a:ext cx="488459" cy="488459"/>
           </a:xfrm>
         </p:spPr>
       </p:pic>
-      <p:sp>
-        <p:nvSpPr>
-          <p:cNvPr id="6" name="Text Placeholder 5">
-            <a:extLst>
-              <a:ext uri="{FF2B5EF4-FFF2-40B4-BE49-F238E27FC236}">
-                <a16:creationId xmlns:a16="http://schemas.microsoft.com/office/drawing/2014/main" id="{D392FED6-AAD8-5F8E-79B4-DF24A782374A}"/>
-              </a:ext>
-            </a:extLst>
-          </p:cNvPr>
-          <p:cNvSpPr>
-            <a:spLocks noGrp="1"/>
-          </p:cNvSpPr>
-          <p:nvPr>
-            <p:ph type="body" sz="quarter" idx="16"/>
-          </p:nvPr>
-        </p:nvSpPr>
-        <p:spPr>
-          <a:xfrm>
-            <a:off x="3762835" y="3221973"/>
-            <a:ext cx="1996440" cy="381190"/>
-          </a:xfrm>
-        </p:spPr>
-        <p:txBody>
-          <a:bodyPr/>
-          <a:lstStyle/>
-          <a:p>
-            <a:r>
-              <a:rPr lang="en-US" dirty="0"/>
-              <a:t>Objectives</a:t>
-            </a:r>
-          </a:p>
-        </p:txBody>
-      </p:sp>
-      <p:sp>
-        <p:nvSpPr>
-          <p:cNvPr id="11" name="Text Placeholder 10">
-            <a:extLst>
-              <a:ext uri="{FF2B5EF4-FFF2-40B4-BE49-F238E27FC236}">
-                <a16:creationId xmlns:a16="http://schemas.microsoft.com/office/drawing/2014/main" id="{743309AC-45B9-55D7-27D2-36A3565F37F2}"/>
-              </a:ext>
-            </a:extLst>
-          </p:cNvPr>
-          <p:cNvSpPr>
-            <a:spLocks noGrp="1"/>
-          </p:cNvSpPr>
-          <p:nvPr>
-            <p:ph type="body" sz="quarter" idx="21"/>
-          </p:nvPr>
-        </p:nvSpPr>
-        <p:spPr>
-          <a:xfrm>
-            <a:off x="3760032" y="3648979"/>
-            <a:ext cx="3298785" cy="1099024"/>
-          </a:xfrm>
-        </p:spPr>
-        <p:txBody>
-          <a:bodyPr/>
-          <a:lstStyle/>
-          <a:p>
-            <a:pPr marL="171450" indent="-171450" fontAlgn="base">
-              <a:lnSpc>
-                <a:spcPct val="100000"/>
-              </a:lnSpc>
-              <a:spcBef>
-                <a:spcPts val="0"/>
-              </a:spcBef>
-              <a:buFont typeface="Arial" panose="020B0604020202020204" pitchFamily="34" charset="0"/>
-              <a:buChar char="•"/>
-            </a:pPr>
-            <a:r>
-              <a:rPr lang="en-GB" sz="800" dirty="0"/>
-              <a:t>Demonstrate the potential of legacy music playback formats in modern systems. </a:t>
-            </a:r>
-          </a:p>
-          <a:p>
-            <a:pPr marL="171450" indent="-171450" fontAlgn="base">
-              <a:lnSpc>
-                <a:spcPct val="100000"/>
-              </a:lnSpc>
-              <a:spcBef>
-                <a:spcPts val="0"/>
-              </a:spcBef>
-              <a:buFont typeface="Arial" panose="020B0604020202020204" pitchFamily="34" charset="0"/>
-              <a:buChar char="•"/>
-            </a:pPr>
-            <a:r>
-              <a:rPr lang="en-GB" sz="800" dirty="0"/>
-              <a:t>Allow quick prototype or full music production for a game developer.</a:t>
-            </a:r>
-          </a:p>
-          <a:p>
-            <a:pPr marL="171450" indent="-171450" fontAlgn="base">
-              <a:lnSpc>
-                <a:spcPct val="100000"/>
-              </a:lnSpc>
-              <a:spcBef>
-                <a:spcPts val="0"/>
-              </a:spcBef>
-              <a:buFont typeface="Arial" panose="020B0604020202020204" pitchFamily="34" charset="0"/>
-              <a:buChar char="•"/>
-            </a:pPr>
-            <a:r>
-              <a:rPr lang="en-GB" sz="800" dirty="0"/>
-              <a:t>Removes the barrier between level design/gameplay programming and music creation.</a:t>
-            </a:r>
-          </a:p>
-          <a:p>
-            <a:pPr marL="171450" indent="-171450" fontAlgn="base">
-              <a:lnSpc>
-                <a:spcPct val="100000"/>
-              </a:lnSpc>
-              <a:spcBef>
-                <a:spcPts val="0"/>
-              </a:spcBef>
-              <a:buFont typeface="Arial" panose="020B0604020202020204" pitchFamily="34" charset="0"/>
-              <a:buChar char="•"/>
-            </a:pPr>
-            <a:r>
-              <a:rPr lang="en-GB" sz="800" dirty="0"/>
-              <a:t>Allow for future modification of tracks due to the text-command style of music files such as transformative or generative music.</a:t>
-            </a:r>
-          </a:p>
-        </p:txBody>
-      </p:sp>
       <p:pic>
         <p:nvPicPr>
           <p:cNvPr id="248" name="Picture Placeholder 247" descr="Notebook">
@@ -9229,100 +9024,11 @@
         </p:blipFill>
         <p:spPr>
           <a:xfrm>
-            <a:off x="5754248" y="3140405"/>
-            <a:ext cx="457200" cy="457200"/>
+            <a:off x="3650298" y="4169120"/>
+            <a:ext cx="342900" cy="342900"/>
           </a:xfrm>
         </p:spPr>
       </p:pic>
-      <p:sp>
-        <p:nvSpPr>
-          <p:cNvPr id="7" name="Text Placeholder 6">
-            <a:extLst>
-              <a:ext uri="{FF2B5EF4-FFF2-40B4-BE49-F238E27FC236}">
-                <a16:creationId xmlns:a16="http://schemas.microsoft.com/office/drawing/2014/main" id="{8C718A59-7FF0-150D-65DA-7E2BCFAC70CD}"/>
-              </a:ext>
-            </a:extLst>
-          </p:cNvPr>
-          <p:cNvSpPr>
-            <a:spLocks noGrp="1"/>
-          </p:cNvSpPr>
-          <p:nvPr>
-            <p:ph type="body" sz="quarter" idx="17"/>
-          </p:nvPr>
-        </p:nvSpPr>
-        <p:spPr>
-          <a:xfrm>
-            <a:off x="148078" y="4977984"/>
-            <a:ext cx="2587752" cy="381190"/>
-          </a:xfrm>
-        </p:spPr>
-        <p:txBody>
-          <a:bodyPr/>
-          <a:lstStyle/>
-          <a:p>
-            <a:r>
-              <a:rPr lang="en-US" dirty="0"/>
-              <a:t>Methodology</a:t>
-            </a:r>
-          </a:p>
-        </p:txBody>
-      </p:sp>
-      <p:sp>
-        <p:nvSpPr>
-          <p:cNvPr id="12" name="Text Placeholder 11">
-            <a:extLst>
-              <a:ext uri="{FF2B5EF4-FFF2-40B4-BE49-F238E27FC236}">
-                <a16:creationId xmlns:a16="http://schemas.microsoft.com/office/drawing/2014/main" id="{8AD98222-E384-9A18-1F02-89CAC7CC3BB8}"/>
-              </a:ext>
-            </a:extLst>
-          </p:cNvPr>
-          <p:cNvSpPr>
-            <a:spLocks noGrp="1"/>
-          </p:cNvSpPr>
-          <p:nvPr>
-            <p:ph type="body" sz="quarter" idx="22"/>
-          </p:nvPr>
-        </p:nvSpPr>
-        <p:spPr>
-          <a:xfrm>
-            <a:off x="157983" y="5409420"/>
-            <a:ext cx="3430295" cy="1355848"/>
-          </a:xfrm>
-        </p:spPr>
-        <p:txBody>
-          <a:bodyPr/>
-          <a:lstStyle/>
-          <a:p>
-            <a:pPr fontAlgn="base"/>
-            <a:r>
-              <a:rPr lang="en-GB" sz="800" dirty="0"/>
-              <a:t>The first step is creating an sf2 file playback method, using </a:t>
-            </a:r>
-            <a:r>
-              <a:rPr lang="en-GB" sz="800" dirty="0" err="1"/>
-              <a:t>TinySoundFont</a:t>
-            </a:r>
-            <a:r>
-              <a:rPr lang="en-GB" sz="800" dirty="0"/>
-              <a:t> in C, that can be read by other applications. A sequence editor tool !!!!!!! will be created to create and adjust musical files.</a:t>
-            </a:r>
-          </a:p>
-          <a:p>
-            <a:pPr fontAlgn="base"/>
-            <a:r>
-              <a:rPr lang="en-GB" sz="800" dirty="0"/>
-              <a:t>Samples of tracker sequence playback will be implemented in a Unity project for game testers to play. An accompanying questionnaire will provide input on the authenticity and immersion of the music. </a:t>
-            </a:r>
-          </a:p>
-          <a:p>
-            <a:pPr fontAlgn="base"/>
-            <a:r>
-              <a:rPr lang="en-GB" sz="800" dirty="0"/>
-              <a:t>The results of these playtest will allow insight into the direction and potential that this type of music format holds.</a:t>
-            </a:r>
-          </a:p>
-        </p:txBody>
-      </p:sp>
       <p:pic>
         <p:nvPicPr>
           <p:cNvPr id="250" name="Picture Placeholder 249" descr="Notebook Cover Icon">
@@ -9352,8 +9058,8 @@
         </p:blipFill>
         <p:spPr>
           <a:xfrm>
-            <a:off x="2626591" y="4892717"/>
-            <a:ext cx="457200" cy="457200"/>
+            <a:off x="3807850" y="7241260"/>
+            <a:ext cx="342900" cy="342900"/>
           </a:xfrm>
         </p:spPr>
       </p:pic>
@@ -9375,8 +9081,8 @@
         </p:nvSpPr>
         <p:spPr>
           <a:xfrm>
-            <a:off x="7474270" y="1201611"/>
-            <a:ext cx="1586982" cy="281908"/>
+            <a:off x="11419689" y="3348603"/>
+            <a:ext cx="1190237" cy="211431"/>
           </a:xfrm>
         </p:spPr>
         <p:txBody>
@@ -9419,8 +9125,8 @@
         </p:blipFill>
         <p:spPr>
           <a:xfrm>
-            <a:off x="8799053" y="1141478"/>
-            <a:ext cx="363431" cy="363431"/>
+            <a:off x="12413277" y="3303504"/>
+            <a:ext cx="272573" cy="272573"/>
           </a:xfrm>
         </p:spPr>
       </p:pic>
@@ -9442,8 +9148,8 @@
         </p:nvSpPr>
         <p:spPr>
           <a:xfrm>
-            <a:off x="7439222" y="3321168"/>
-            <a:ext cx="2656332" cy="381190"/>
+            <a:off x="11393404" y="4938271"/>
+            <a:ext cx="1992249" cy="285893"/>
           </a:xfrm>
         </p:spPr>
         <p:txBody>
@@ -9475,8 +9181,8 @@
         </p:nvSpPr>
         <p:spPr>
           <a:xfrm>
-            <a:off x="7453230" y="3848190"/>
-            <a:ext cx="4676255" cy="2007629"/>
+            <a:off x="11403910" y="5333537"/>
+            <a:ext cx="3507191" cy="1505722"/>
           </a:xfrm>
         </p:spPr>
         <p:txBody>
@@ -9484,21 +9190,42 @@
           <a:lstStyle/>
           <a:p>
             <a:r>
-              <a:rPr lang="en-US" sz="800" dirty="0"/>
+              <a:rPr lang="en-US" sz="600" dirty="0">
+                <a:solidFill>
+                  <a:schemeClr val="accent3">
+                    <a:lumMod val="20000"/>
+                    <a:lumOff val="80000"/>
+                  </a:schemeClr>
+                </a:solidFill>
+              </a:rPr>
               <a:t>In conclusion, the results demonstrate …………………………………………………………………………………….</a:t>
             </a:r>
           </a:p>
           <a:p>
             <a:r>
-              <a:rPr lang="en-US" sz="800" dirty="0"/>
+              <a:rPr lang="en-US" sz="600" dirty="0">
+                <a:solidFill>
+                  <a:schemeClr val="accent3">
+                    <a:lumMod val="20000"/>
+                    <a:lumOff val="80000"/>
+                  </a:schemeClr>
+                </a:solidFill>
+              </a:rPr>
               <a:t>This method requires further study to ascertain its functionality within the creative industry.</a:t>
             </a:r>
           </a:p>
           <a:p>
-            <a:endParaRPr lang="en-US" sz="800" dirty="0"/>
-          </a:p>
-          <a:p>
-            <a:pPr marL="171450" indent="-171450">
+            <a:endParaRPr lang="en-US" sz="600" dirty="0">
+              <a:solidFill>
+                <a:schemeClr val="accent3">
+                  <a:lumMod val="20000"/>
+                  <a:lumOff val="80000"/>
+                </a:schemeClr>
+              </a:solidFill>
+            </a:endParaRPr>
+          </a:p>
+          <a:p>
+            <a:pPr marL="128588" indent="-128588">
               <a:spcBef>
                 <a:spcPts val="0"/>
               </a:spcBef>
@@ -9506,12 +9233,19 @@
               <a:buChar char="•"/>
             </a:pPr>
             <a:r>
-              <a:rPr lang="en-US" sz="800" dirty="0"/>
+              <a:rPr lang="en-US" sz="600" dirty="0">
+                <a:solidFill>
+                  <a:schemeClr val="accent3">
+                    <a:lumMod val="20000"/>
+                    <a:lumOff val="80000"/>
+                  </a:schemeClr>
+                </a:solidFill>
+              </a:rPr>
               <a:t>Producing track sequencer music files can easily be created and altered but require specialist tools and training. Using a track sequencer only requires music knowledge; implementing it into a project needs programming skills.</a:t>
             </a:r>
           </a:p>
           <a:p>
-            <a:pPr marL="171450" indent="-171450">
+            <a:pPr marL="128588" indent="-128588">
               <a:spcBef>
                 <a:spcPts val="0"/>
               </a:spcBef>
@@ -9519,12 +9253,19 @@
               <a:buChar char="•"/>
             </a:pPr>
             <a:r>
-              <a:rPr lang="en-US" sz="800" dirty="0"/>
+              <a:rPr lang="en-US" sz="600" dirty="0">
+                <a:solidFill>
+                  <a:schemeClr val="accent3">
+                    <a:lumMod val="20000"/>
+                    <a:lumOff val="80000"/>
+                  </a:schemeClr>
+                </a:solidFill>
+              </a:rPr>
               <a:t>There is much potential for functionality such as musical event triggers, parameter-driven audio, generative and transformative music due to the text-style music commands.</a:t>
             </a:r>
           </a:p>
           <a:p>
-            <a:pPr marL="171450" indent="-171450">
+            <a:pPr marL="128588" indent="-128588">
               <a:spcBef>
                 <a:spcPts val="0"/>
               </a:spcBef>
@@ -9532,12 +9273,19 @@
               <a:buChar char="•"/>
             </a:pPr>
             <a:r>
-              <a:rPr lang="en-US" sz="800" dirty="0"/>
+              <a:rPr lang="en-US" sz="600" dirty="0">
+                <a:solidFill>
+                  <a:schemeClr val="accent3">
+                    <a:lumMod val="20000"/>
+                    <a:lumOff val="80000"/>
+                  </a:schemeClr>
+                </a:solidFill>
+              </a:rPr>
               <a:t>The current showcase is limited to certain platforms and needs further technical improvement to work across projects. The output of this method of music writing is dependent on the quality of audio samples used.</a:t>
             </a:r>
           </a:p>
           <a:p>
-            <a:pPr marL="171450" indent="-171450">
+            <a:pPr marL="128588" indent="-128588">
               <a:spcBef>
                 <a:spcPts val="0"/>
               </a:spcBef>
@@ -9545,7 +9293,14 @@
               <a:buChar char="•"/>
             </a:pPr>
             <a:r>
-              <a:rPr lang="en-US" sz="800" dirty="0"/>
+              <a:rPr lang="en-US" sz="600" dirty="0">
+                <a:solidFill>
+                  <a:schemeClr val="accent3">
+                    <a:lumMod val="20000"/>
+                    <a:lumOff val="80000"/>
+                  </a:schemeClr>
+                </a:solidFill>
+              </a:rPr>
               <a:t>A larger demographic of user and usability testing would aid in creating a streamlined tool and improving the standards of the output audio. </a:t>
             </a:r>
           </a:p>
@@ -9580,8 +9335,8 @@
         </p:blipFill>
         <p:spPr>
           <a:xfrm>
-            <a:off x="9605152" y="3245156"/>
-            <a:ext cx="457200" cy="457200"/>
+            <a:off x="13017850" y="4881261"/>
+            <a:ext cx="342900" cy="342900"/>
           </a:xfrm>
         </p:spPr>
       </p:pic>
@@ -9603,9 +9358,9 @@
           <p:nvPr/>
         </p:nvCxnSpPr>
         <p:spPr>
-          <a:xfrm>
-            <a:off x="-98675" y="1032699"/>
-            <a:ext cx="12714225" cy="1985"/>
+          <a:xfrm flipV="1">
+            <a:off x="-46756" y="842768"/>
+            <a:ext cx="15166106" cy="32918"/>
           </a:xfrm>
           <a:prstGeom prst="line">
             <a:avLst/>
@@ -9674,8 +9429,8 @@
         </p:blipFill>
         <p:spPr>
           <a:xfrm>
-            <a:off x="12514453" y="-8701"/>
-            <a:ext cx="635766" cy="635766"/>
+            <a:off x="15361190" y="2767631"/>
+            <a:ext cx="476825" cy="476825"/>
           </a:xfrm>
         </p:spPr>
       </p:pic>
@@ -9706,8 +9461,8 @@
         </p:blipFill>
         <p:spPr>
           <a:xfrm>
-            <a:off x="11233769" y="-19688"/>
-            <a:ext cx="822960" cy="822960"/>
+            <a:off x="14239313" y="2432628"/>
+            <a:ext cx="617220" cy="617220"/>
           </a:xfrm>
           <a:prstGeom prst="ellipse">
             <a:avLst/>
@@ -9744,8 +9499,8 @@
         </p:blipFill>
         <p:spPr>
           <a:xfrm>
-            <a:off x="11622499" y="149441"/>
-            <a:ext cx="210484" cy="210484"/>
+            <a:off x="14530861" y="2559476"/>
+            <a:ext cx="157863" cy="157863"/>
           </a:xfrm>
           <a:prstGeom prst="ellipse">
             <a:avLst/>
@@ -9784,8 +9539,8 @@
         </p:blipFill>
         <p:spPr>
           <a:xfrm>
-            <a:off x="11375057" y="222575"/>
-            <a:ext cx="426652" cy="426652"/>
+            <a:off x="14345280" y="2614326"/>
+            <a:ext cx="319989" cy="319989"/>
           </a:xfrm>
           <a:prstGeom prst="ellipse">
             <a:avLst/>
@@ -9814,8 +9569,8 @@
         </p:nvCxnSpPr>
         <p:spPr>
           <a:xfrm>
-            <a:off x="244146" y="1602448"/>
-            <a:ext cx="2424684" cy="0"/>
+            <a:off x="614819" y="2022915"/>
+            <a:ext cx="2680041" cy="0"/>
           </a:xfrm>
           <a:prstGeom prst="line">
             <a:avLst/>
@@ -9857,10 +9612,10 @@
       </p:cxnSp>
       <p:cxnSp>
         <p:nvCxnSpPr>
-          <p:cNvPr id="452" name="Straight Connector 451">
-            <a:extLst>
-              <a:ext uri="{FF2B5EF4-FFF2-40B4-BE49-F238E27FC236}">
-                <a16:creationId xmlns:a16="http://schemas.microsoft.com/office/drawing/2014/main" id="{00485201-EBCD-3B17-CFB3-F3E6C6091C82}"/>
+          <p:cNvPr id="457" name="Straight Connector 456">
+            <a:extLst>
+              <a:ext uri="{FF2B5EF4-FFF2-40B4-BE49-F238E27FC236}">
+                <a16:creationId xmlns:a16="http://schemas.microsoft.com/office/drawing/2014/main" id="{E0381664-FDE6-1C61-B792-B04EF1F062B8}"/>
               </a:ext>
               <a:ext uri="{C183D7F6-B498-43B3-948B-1728B52AA6E4}">
                 <adec:decorative xmlns:adec="http://schemas.microsoft.com/office/drawing/2017/decorative" val="1"/>
@@ -9874,8 +9629,8 @@
         </p:nvCxnSpPr>
         <p:spPr>
           <a:xfrm>
-            <a:off x="3826848" y="3529833"/>
-            <a:ext cx="1813153" cy="0"/>
+            <a:off x="11486599" y="3588038"/>
+            <a:ext cx="731240" cy="464"/>
           </a:xfrm>
           <a:prstGeom prst="line">
             <a:avLst/>
@@ -9917,10 +9672,10 @@
       </p:cxnSp>
       <p:cxnSp>
         <p:nvCxnSpPr>
-          <p:cNvPr id="454" name="Straight Connector 453">
-            <a:extLst>
-              <a:ext uri="{FF2B5EF4-FFF2-40B4-BE49-F238E27FC236}">
-                <a16:creationId xmlns:a16="http://schemas.microsoft.com/office/drawing/2014/main" id="{477D483A-1F7C-6EE9-5C3F-35F88011515B}"/>
+          <p:cNvPr id="459" name="Straight Connector 458">
+            <a:extLst>
+              <a:ext uri="{FF2B5EF4-FFF2-40B4-BE49-F238E27FC236}">
+                <a16:creationId xmlns:a16="http://schemas.microsoft.com/office/drawing/2014/main" id="{774EA625-3F51-B2CE-1BAD-BD842A45F343}"/>
               </a:ext>
               <a:ext uri="{C183D7F6-B498-43B3-948B-1728B52AA6E4}">
                 <adec:decorative xmlns:adec="http://schemas.microsoft.com/office/drawing/2017/decorative" val="1"/>
@@ -9934,8 +9689,8 @@
         </p:nvCxnSpPr>
         <p:spPr>
           <a:xfrm>
-            <a:off x="216092" y="5268023"/>
-            <a:ext cx="2328476" cy="0"/>
+            <a:off x="11463244" y="5160780"/>
+            <a:ext cx="1586366" cy="0"/>
           </a:xfrm>
           <a:prstGeom prst="line">
             <a:avLst/>
@@ -9975,12 +9730,84 @@
           </a:fontRef>
         </p:style>
       </p:cxnSp>
+      <p:graphicFrame>
+        <p:nvGraphicFramePr>
+          <p:cNvPr id="17" name="Chart 16">
+            <a:extLst>
+              <a:ext uri="{FF2B5EF4-FFF2-40B4-BE49-F238E27FC236}">
+                <a16:creationId xmlns:a16="http://schemas.microsoft.com/office/drawing/2014/main" id="{5AE5CE50-ADD5-9554-96C4-76188162E714}"/>
+              </a:ext>
+            </a:extLst>
+          </p:cNvPr>
+          <p:cNvGraphicFramePr/>
+          <p:nvPr>
+            <p:extLst>
+              <p:ext uri="{D42A27DB-BD31-4B8C-83A1-F6EECF244321}">
+                <p14:modId xmlns:p14="http://schemas.microsoft.com/office/powerpoint/2010/main" val="845460369"/>
+              </p:ext>
+            </p:extLst>
+          </p:nvPr>
+        </p:nvGraphicFramePr>
+        <p:xfrm>
+          <a:off x="11419690" y="3676840"/>
+          <a:ext cx="2254681" cy="995744"/>
+        </p:xfrm>
+        <a:graphic>
+          <a:graphicData uri="http://schemas.openxmlformats.org/drawingml/2006/chart">
+            <c:chart xmlns:c="http://schemas.openxmlformats.org/drawingml/2006/chart" xmlns:r="http://schemas.openxmlformats.org/officeDocument/2006/relationships" r:id="rId14"/>
+          </a:graphicData>
+        </a:graphic>
+      </p:graphicFrame>
+      <p:pic>
+        <p:nvPicPr>
+          <p:cNvPr id="30" name="Picture 29">
+            <a:extLst>
+              <a:ext uri="{FF2B5EF4-FFF2-40B4-BE49-F238E27FC236}">
+                <a16:creationId xmlns:a16="http://schemas.microsoft.com/office/drawing/2014/main" id="{F94EFD76-C369-ECF3-6857-B780AE3F8D93}"/>
+              </a:ext>
+            </a:extLst>
+          </p:cNvPr>
+          <p:cNvPicPr>
+            <a:picLocks noChangeAspect="1"/>
+          </p:cNvPicPr>
+          <p:nvPr/>
+        </p:nvPicPr>
+        <p:blipFill>
+          <a:blip r:embed="rId15"/>
+          <a:stretch>
+            <a:fillRect/>
+          </a:stretch>
+        </p:blipFill>
+        <p:spPr>
+          <a:xfrm>
+            <a:off x="5679328" y="4579831"/>
+            <a:ext cx="3688529" cy="2236322"/>
+          </a:xfrm>
+          <a:prstGeom prst="rect">
+            <a:avLst/>
+          </a:prstGeom>
+          <a:ln w="38100" cap="sq">
+            <a:solidFill>
+              <a:srgbClr val="000000"/>
+            </a:solidFill>
+            <a:prstDash val="solid"/>
+            <a:miter lim="800000"/>
+          </a:ln>
+          <a:effectLst>
+            <a:outerShdw blurRad="50800" dist="38100" dir="2700000" algn="tl" rotWithShape="0">
+              <a:srgbClr val="000000">
+                <a:alpha val="43000"/>
+              </a:srgbClr>
+            </a:outerShdw>
+          </a:effectLst>
+        </p:spPr>
+      </p:pic>
       <p:cxnSp>
         <p:nvCxnSpPr>
-          <p:cNvPr id="457" name="Straight Connector 456">
-            <a:extLst>
-              <a:ext uri="{FF2B5EF4-FFF2-40B4-BE49-F238E27FC236}">
-                <a16:creationId xmlns:a16="http://schemas.microsoft.com/office/drawing/2014/main" id="{E0381664-FDE6-1C61-B792-B04EF1F062B8}"/>
+          <p:cNvPr id="31" name="Straight Connector 30">
+            <a:extLst>
+              <a:ext uri="{FF2B5EF4-FFF2-40B4-BE49-F238E27FC236}">
+                <a16:creationId xmlns:a16="http://schemas.microsoft.com/office/drawing/2014/main" id="{FD5CE708-A853-2C3E-983C-35C803DD1CC8}"/>
               </a:ext>
               <a:ext uri="{C183D7F6-B498-43B3-948B-1728B52AA6E4}">
                 <adec:decorative xmlns:adec="http://schemas.microsoft.com/office/drawing/2017/decorative" val="1"/>
@@ -9994,8 +9821,8 @@
         </p:nvCxnSpPr>
         <p:spPr>
           <a:xfrm>
-            <a:off x="7563484" y="1520858"/>
-            <a:ext cx="974986" cy="619"/>
+            <a:off x="15826860" y="4101287"/>
+            <a:ext cx="0" cy="4361075"/>
           </a:xfrm>
           <a:prstGeom prst="line">
             <a:avLst/>
@@ -10035,12 +9862,1178 @@
           </a:fontRef>
         </p:style>
       </p:cxnSp>
+      <p:pic>
+        <p:nvPicPr>
+          <p:cNvPr id="41" name="Picture 40">
+            <a:extLst>
+              <a:ext uri="{FF2B5EF4-FFF2-40B4-BE49-F238E27FC236}">
+                <a16:creationId xmlns:a16="http://schemas.microsoft.com/office/drawing/2014/main" id="{8F13D3BE-934C-8F0A-7F14-A4A6002998ED}"/>
+              </a:ext>
+            </a:extLst>
+          </p:cNvPr>
+          <p:cNvPicPr>
+            <a:picLocks noChangeAspect="1"/>
+          </p:cNvPicPr>
+          <p:nvPr/>
+        </p:nvPicPr>
+        <p:blipFill>
+          <a:blip r:embed="rId16"/>
+          <a:srcRect l="608" t="15273" r="-608" b="13970"/>
+          <a:stretch>
+            <a:fillRect/>
+          </a:stretch>
+        </p:blipFill>
+        <p:spPr>
+          <a:xfrm>
+            <a:off x="5874658" y="1742299"/>
+            <a:ext cx="3048397" cy="1792215"/>
+          </a:xfrm>
+          <a:prstGeom prst="rect">
+            <a:avLst/>
+          </a:prstGeom>
+          <a:ln w="38100" cap="sq">
+            <a:solidFill>
+              <a:srgbClr val="000000"/>
+            </a:solidFill>
+            <a:prstDash val="solid"/>
+            <a:miter lim="800000"/>
+          </a:ln>
+          <a:effectLst>
+            <a:outerShdw blurRad="50800" dist="38100" dir="2700000" algn="tl" rotWithShape="0">
+              <a:srgbClr val="000000">
+                <a:alpha val="43000"/>
+              </a:srgbClr>
+            </a:outerShdw>
+          </a:effectLst>
+        </p:spPr>
+      </p:pic>
+      <p:pic>
+        <p:nvPicPr>
+          <p:cNvPr id="45" name="Picture 44">
+            <a:extLst>
+              <a:ext uri="{FF2B5EF4-FFF2-40B4-BE49-F238E27FC236}">
+                <a16:creationId xmlns:a16="http://schemas.microsoft.com/office/drawing/2014/main" id="{037669C3-50E5-D9D4-72CB-F4B3AAB9DEEE}"/>
+              </a:ext>
+            </a:extLst>
+          </p:cNvPr>
+          <p:cNvPicPr>
+            <a:picLocks noChangeAspect="1"/>
+          </p:cNvPicPr>
+          <p:nvPr/>
+        </p:nvPicPr>
+        <p:blipFill>
+          <a:blip r:embed="rId17"/>
+          <a:srcRect l="933" t="3180" r="3871" b="21086"/>
+          <a:stretch>
+            <a:fillRect/>
+          </a:stretch>
+        </p:blipFill>
+        <p:spPr>
+          <a:xfrm>
+            <a:off x="5685068" y="6119873"/>
+            <a:ext cx="3683195" cy="696279"/>
+          </a:xfrm>
+          <a:prstGeom prst="rect">
+            <a:avLst/>
+          </a:prstGeom>
+        </p:spPr>
+      </p:pic>
+      <p:pic>
+        <p:nvPicPr>
+          <p:cNvPr id="47" name="Picture 46">
+            <a:extLst>
+              <a:ext uri="{FF2B5EF4-FFF2-40B4-BE49-F238E27FC236}">
+                <a16:creationId xmlns:a16="http://schemas.microsoft.com/office/drawing/2014/main" id="{BFDE0753-056F-C374-0FF8-33E01B87FE9C}"/>
+              </a:ext>
+            </a:extLst>
+          </p:cNvPr>
+          <p:cNvPicPr>
+            <a:picLocks noChangeAspect="1"/>
+          </p:cNvPicPr>
+          <p:nvPr/>
+        </p:nvPicPr>
+        <p:blipFill>
+          <a:blip r:embed="rId18"/>
+          <a:srcRect b="18555"/>
+          <a:stretch>
+            <a:fillRect/>
+          </a:stretch>
+        </p:blipFill>
+        <p:spPr>
+          <a:xfrm>
+            <a:off x="5711042" y="7830404"/>
+            <a:ext cx="3625099" cy="2183503"/>
+          </a:xfrm>
+          <a:prstGeom prst="rect">
+            <a:avLst/>
+          </a:prstGeom>
+          <a:ln w="38100" cap="sq">
+            <a:solidFill>
+              <a:srgbClr val="000000"/>
+            </a:solidFill>
+            <a:prstDash val="solid"/>
+            <a:miter lim="800000"/>
+          </a:ln>
+          <a:effectLst>
+            <a:outerShdw blurRad="50800" dist="38100" dir="2700000" algn="tl" rotWithShape="0">
+              <a:srgbClr val="000000">
+                <a:alpha val="43000"/>
+              </a:srgbClr>
+            </a:outerShdw>
+          </a:effectLst>
+        </p:spPr>
+      </p:pic>
+      <p:sp>
+        <p:nvSpPr>
+          <p:cNvPr id="48" name="Text Placeholder 13">
+            <a:extLst>
+              <a:ext uri="{FF2B5EF4-FFF2-40B4-BE49-F238E27FC236}">
+                <a16:creationId xmlns:a16="http://schemas.microsoft.com/office/drawing/2014/main" id="{76289639-2865-1374-7CE0-28AB5C41F2D6}"/>
+              </a:ext>
+            </a:extLst>
+          </p:cNvPr>
+          <p:cNvSpPr txBox="1">
+            <a:spLocks/>
+          </p:cNvSpPr>
+          <p:nvPr/>
+        </p:nvSpPr>
+        <p:spPr>
+          <a:xfrm>
+            <a:off x="11450796" y="4685303"/>
+            <a:ext cx="3507191" cy="1066991"/>
+          </a:xfrm>
+          <a:prstGeom prst="rect">
+            <a:avLst/>
+          </a:prstGeom>
+        </p:spPr>
+        <p:txBody>
+          <a:bodyPr vert="horz" lIns="68580" tIns="0" rIns="68580" bIns="34290" rtlCol="0">
+            <a:noAutofit/>
+          </a:bodyPr>
+          <a:lstStyle>
+            <a:lvl1pPr marL="0" indent="0" algn="l" defTabSz="914400" rtl="0" eaLnBrk="1" latinLnBrk="0" hangingPunct="1">
+              <a:lnSpc>
+                <a:spcPct val="90000"/>
+              </a:lnSpc>
+              <a:spcBef>
+                <a:spcPts val="1000"/>
+              </a:spcBef>
+              <a:buFont typeface="Arial" panose="020B0604020202020204" pitchFamily="34" charset="0"/>
+              <a:buNone/>
+              <a:defRPr sz="1200" kern="1200" cap="none" baseline="0">
+                <a:solidFill>
+                  <a:schemeClr val="bg1"/>
+                </a:solidFill>
+                <a:latin typeface="+mn-lt"/>
+                <a:ea typeface="+mn-ea"/>
+                <a:cs typeface="+mn-cs"/>
+              </a:defRPr>
+            </a:lvl1pPr>
+            <a:lvl2pPr marL="457200" indent="0" algn="l" defTabSz="914400" rtl="0" eaLnBrk="1" latinLnBrk="0" hangingPunct="1">
+              <a:lnSpc>
+                <a:spcPct val="90000"/>
+              </a:lnSpc>
+              <a:spcBef>
+                <a:spcPts val="500"/>
+              </a:spcBef>
+              <a:buFont typeface="Arial" panose="020B0604020202020204" pitchFamily="34" charset="0"/>
+              <a:buNone/>
+              <a:defRPr sz="1800" kern="1200">
+                <a:solidFill>
+                  <a:schemeClr val="bg1"/>
+                </a:solidFill>
+                <a:latin typeface="+mn-lt"/>
+                <a:ea typeface="+mn-ea"/>
+                <a:cs typeface="+mn-cs"/>
+              </a:defRPr>
+            </a:lvl2pPr>
+            <a:lvl3pPr marL="914400" indent="0" algn="l" defTabSz="914400" rtl="0" eaLnBrk="1" latinLnBrk="0" hangingPunct="1">
+              <a:lnSpc>
+                <a:spcPct val="90000"/>
+              </a:lnSpc>
+              <a:spcBef>
+                <a:spcPts val="500"/>
+              </a:spcBef>
+              <a:buFont typeface="Arial" panose="020B0604020202020204" pitchFamily="34" charset="0"/>
+              <a:buNone/>
+              <a:defRPr sz="1800" kern="1200">
+                <a:solidFill>
+                  <a:schemeClr val="bg1"/>
+                </a:solidFill>
+                <a:latin typeface="+mn-lt"/>
+                <a:ea typeface="+mn-ea"/>
+                <a:cs typeface="+mn-cs"/>
+              </a:defRPr>
+            </a:lvl3pPr>
+            <a:lvl4pPr marL="1371600" indent="0" algn="l" defTabSz="914400" rtl="0" eaLnBrk="1" latinLnBrk="0" hangingPunct="1">
+              <a:lnSpc>
+                <a:spcPct val="90000"/>
+              </a:lnSpc>
+              <a:spcBef>
+                <a:spcPts val="500"/>
+              </a:spcBef>
+              <a:buFont typeface="Arial" panose="020B0604020202020204" pitchFamily="34" charset="0"/>
+              <a:buNone/>
+              <a:defRPr sz="1800" kern="1200">
+                <a:solidFill>
+                  <a:schemeClr val="bg1"/>
+                </a:solidFill>
+                <a:latin typeface="+mn-lt"/>
+                <a:ea typeface="+mn-ea"/>
+                <a:cs typeface="+mn-cs"/>
+              </a:defRPr>
+            </a:lvl4pPr>
+            <a:lvl5pPr marL="1828800" indent="0" algn="l" defTabSz="914400" rtl="0" eaLnBrk="1" latinLnBrk="0" hangingPunct="1">
+              <a:lnSpc>
+                <a:spcPct val="90000"/>
+              </a:lnSpc>
+              <a:spcBef>
+                <a:spcPts val="500"/>
+              </a:spcBef>
+              <a:buFont typeface="Arial" panose="020B0604020202020204" pitchFamily="34" charset="0"/>
+              <a:buNone/>
+              <a:defRPr sz="1800" kern="1200">
+                <a:solidFill>
+                  <a:schemeClr val="bg1"/>
+                </a:solidFill>
+                <a:latin typeface="+mn-lt"/>
+                <a:ea typeface="+mn-ea"/>
+                <a:cs typeface="+mn-cs"/>
+              </a:defRPr>
+            </a:lvl5pPr>
+            <a:lvl6pPr marL="2514600" indent="-228600" algn="l" defTabSz="914400" rtl="0" eaLnBrk="1" latinLnBrk="0" hangingPunct="1">
+              <a:lnSpc>
+                <a:spcPct val="90000"/>
+              </a:lnSpc>
+              <a:spcBef>
+                <a:spcPts val="500"/>
+              </a:spcBef>
+              <a:buFont typeface="Arial" panose="020B0604020202020204" pitchFamily="34" charset="0"/>
+              <a:buChar char="•"/>
+              <a:defRPr sz="1800" kern="1200">
+                <a:solidFill>
+                  <a:schemeClr val="tx1"/>
+                </a:solidFill>
+                <a:latin typeface="+mn-lt"/>
+                <a:ea typeface="+mn-ea"/>
+                <a:cs typeface="+mn-cs"/>
+              </a:defRPr>
+            </a:lvl6pPr>
+            <a:lvl7pPr marL="2971800" indent="-228600" algn="l" defTabSz="914400" rtl="0" eaLnBrk="1" latinLnBrk="0" hangingPunct="1">
+              <a:lnSpc>
+                <a:spcPct val="90000"/>
+              </a:lnSpc>
+              <a:spcBef>
+                <a:spcPts val="500"/>
+              </a:spcBef>
+              <a:buFont typeface="Arial" panose="020B0604020202020204" pitchFamily="34" charset="0"/>
+              <a:buChar char="•"/>
+              <a:defRPr sz="1800" kern="1200">
+                <a:solidFill>
+                  <a:schemeClr val="tx1"/>
+                </a:solidFill>
+                <a:latin typeface="+mn-lt"/>
+                <a:ea typeface="+mn-ea"/>
+                <a:cs typeface="+mn-cs"/>
+              </a:defRPr>
+            </a:lvl7pPr>
+            <a:lvl8pPr marL="3429000" indent="-228600" algn="l" defTabSz="914400" rtl="0" eaLnBrk="1" latinLnBrk="0" hangingPunct="1">
+              <a:lnSpc>
+                <a:spcPct val="90000"/>
+              </a:lnSpc>
+              <a:spcBef>
+                <a:spcPts val="500"/>
+              </a:spcBef>
+              <a:buFont typeface="Arial" panose="020B0604020202020204" pitchFamily="34" charset="0"/>
+              <a:buChar char="•"/>
+              <a:defRPr sz="1800" kern="1200">
+                <a:solidFill>
+                  <a:schemeClr val="tx1"/>
+                </a:solidFill>
+                <a:latin typeface="+mn-lt"/>
+                <a:ea typeface="+mn-ea"/>
+                <a:cs typeface="+mn-cs"/>
+              </a:defRPr>
+            </a:lvl8pPr>
+            <a:lvl9pPr marL="3886200" indent="-228600" algn="l" defTabSz="914400" rtl="0" eaLnBrk="1" latinLnBrk="0" hangingPunct="1">
+              <a:lnSpc>
+                <a:spcPct val="90000"/>
+              </a:lnSpc>
+              <a:spcBef>
+                <a:spcPts val="500"/>
+              </a:spcBef>
+              <a:buFont typeface="Arial" panose="020B0604020202020204" pitchFamily="34" charset="0"/>
+              <a:buChar char="•"/>
+              <a:defRPr sz="1800" kern="1200">
+                <a:solidFill>
+                  <a:schemeClr val="tx1"/>
+                </a:solidFill>
+                <a:latin typeface="+mn-lt"/>
+                <a:ea typeface="+mn-ea"/>
+                <a:cs typeface="+mn-cs"/>
+              </a:defRPr>
+            </a:lvl9pPr>
+          </a:lstStyle>
+          <a:p>
+            <a:r>
+              <a:rPr lang="en-US" sz="675" dirty="0">
+                <a:solidFill>
+                  <a:srgbClr val="FF0000"/>
+                </a:solidFill>
+              </a:rPr>
+              <a:t>Notes about results here?</a:t>
+            </a:r>
+          </a:p>
+        </p:txBody>
+      </p:sp>
+      <p:sp>
+        <p:nvSpPr>
+          <p:cNvPr id="19" name="Rectangle: Rounded Corners 18">
+            <a:extLst>
+              <a:ext uri="{FF2B5EF4-FFF2-40B4-BE49-F238E27FC236}">
+                <a16:creationId xmlns:a16="http://schemas.microsoft.com/office/drawing/2014/main" id="{74E9BD1E-F8EB-4F53-3201-64EB6ACA93FC}"/>
+              </a:ext>
+            </a:extLst>
+          </p:cNvPr>
+          <p:cNvSpPr/>
+          <p:nvPr/>
+        </p:nvSpPr>
+        <p:spPr>
+          <a:xfrm>
+            <a:off x="11419457" y="7012904"/>
+            <a:ext cx="3245813" cy="524885"/>
+          </a:xfrm>
+          <a:prstGeom prst="roundRect">
+            <a:avLst>
+              <a:gd name="adj" fmla="val 7621"/>
+            </a:avLst>
+          </a:prstGeom>
+          <a:solidFill>
+            <a:schemeClr val="dk1"/>
+          </a:solidFill>
+          <a:ln>
+            <a:noFill/>
+          </a:ln>
+        </p:spPr>
+        <p:style>
+          <a:lnRef idx="0">
+            <a:scrgbClr r="0" g="0" b="0"/>
+          </a:lnRef>
+          <a:fillRef idx="0">
+            <a:scrgbClr r="0" g="0" b="0"/>
+          </a:fillRef>
+          <a:effectRef idx="0">
+            <a:scrgbClr r="0" g="0" b="0"/>
+          </a:effectRef>
+          <a:fontRef idx="minor">
+            <a:schemeClr val="lt1"/>
+          </a:fontRef>
+        </p:style>
+        <p:txBody>
+          <a:bodyPr rtlCol="0" anchor="ctr"/>
+          <a:lstStyle/>
+          <a:p>
+            <a:pPr algn="ctr"/>
+            <a:endParaRPr lang="en-GB" sz="1013"/>
+          </a:p>
+        </p:txBody>
+      </p:sp>
+      <p:sp>
+        <p:nvSpPr>
+          <p:cNvPr id="20" name="Text Placeholder 13">
+            <a:extLst>
+              <a:ext uri="{FF2B5EF4-FFF2-40B4-BE49-F238E27FC236}">
+                <a16:creationId xmlns:a16="http://schemas.microsoft.com/office/drawing/2014/main" id="{F3362837-5AC8-25C8-92BC-47CEFA1E9C79}"/>
+              </a:ext>
+            </a:extLst>
+          </p:cNvPr>
+          <p:cNvSpPr txBox="1">
+            <a:spLocks/>
+          </p:cNvSpPr>
+          <p:nvPr/>
+        </p:nvSpPr>
+        <p:spPr>
+          <a:xfrm>
+            <a:off x="11450796" y="7207772"/>
+            <a:ext cx="3507191" cy="766247"/>
+          </a:xfrm>
+          <a:prstGeom prst="rect">
+            <a:avLst/>
+          </a:prstGeom>
+        </p:spPr>
+        <p:txBody>
+          <a:bodyPr vert="horz" lIns="68580" tIns="0" rIns="68580" bIns="34290" rtlCol="0">
+            <a:noAutofit/>
+          </a:bodyPr>
+          <a:lstStyle>
+            <a:lvl1pPr marL="0" indent="0" algn="l" defTabSz="914400" rtl="0" eaLnBrk="1" latinLnBrk="0" hangingPunct="1">
+              <a:lnSpc>
+                <a:spcPct val="90000"/>
+              </a:lnSpc>
+              <a:spcBef>
+                <a:spcPts val="1000"/>
+              </a:spcBef>
+              <a:buFont typeface="Arial" panose="020B0604020202020204" pitchFamily="34" charset="0"/>
+              <a:buNone/>
+              <a:defRPr sz="1200" kern="1200" cap="none" baseline="0">
+                <a:solidFill>
+                  <a:schemeClr val="bg1"/>
+                </a:solidFill>
+                <a:latin typeface="+mn-lt"/>
+                <a:ea typeface="+mn-ea"/>
+                <a:cs typeface="+mn-cs"/>
+              </a:defRPr>
+            </a:lvl1pPr>
+            <a:lvl2pPr marL="457200" indent="0" algn="l" defTabSz="914400" rtl="0" eaLnBrk="1" latinLnBrk="0" hangingPunct="1">
+              <a:lnSpc>
+                <a:spcPct val="90000"/>
+              </a:lnSpc>
+              <a:spcBef>
+                <a:spcPts val="500"/>
+              </a:spcBef>
+              <a:buFont typeface="Arial" panose="020B0604020202020204" pitchFamily="34" charset="0"/>
+              <a:buNone/>
+              <a:defRPr sz="1800" kern="1200">
+                <a:solidFill>
+                  <a:schemeClr val="bg1"/>
+                </a:solidFill>
+                <a:latin typeface="+mn-lt"/>
+                <a:ea typeface="+mn-ea"/>
+                <a:cs typeface="+mn-cs"/>
+              </a:defRPr>
+            </a:lvl2pPr>
+            <a:lvl3pPr marL="914400" indent="0" algn="l" defTabSz="914400" rtl="0" eaLnBrk="1" latinLnBrk="0" hangingPunct="1">
+              <a:lnSpc>
+                <a:spcPct val="90000"/>
+              </a:lnSpc>
+              <a:spcBef>
+                <a:spcPts val="500"/>
+              </a:spcBef>
+              <a:buFont typeface="Arial" panose="020B0604020202020204" pitchFamily="34" charset="0"/>
+              <a:buNone/>
+              <a:defRPr sz="1800" kern="1200">
+                <a:solidFill>
+                  <a:schemeClr val="bg1"/>
+                </a:solidFill>
+                <a:latin typeface="+mn-lt"/>
+                <a:ea typeface="+mn-ea"/>
+                <a:cs typeface="+mn-cs"/>
+              </a:defRPr>
+            </a:lvl3pPr>
+            <a:lvl4pPr marL="1371600" indent="0" algn="l" defTabSz="914400" rtl="0" eaLnBrk="1" latinLnBrk="0" hangingPunct="1">
+              <a:lnSpc>
+                <a:spcPct val="90000"/>
+              </a:lnSpc>
+              <a:spcBef>
+                <a:spcPts val="500"/>
+              </a:spcBef>
+              <a:buFont typeface="Arial" panose="020B0604020202020204" pitchFamily="34" charset="0"/>
+              <a:buNone/>
+              <a:defRPr sz="1800" kern="1200">
+                <a:solidFill>
+                  <a:schemeClr val="bg1"/>
+                </a:solidFill>
+                <a:latin typeface="+mn-lt"/>
+                <a:ea typeface="+mn-ea"/>
+                <a:cs typeface="+mn-cs"/>
+              </a:defRPr>
+            </a:lvl4pPr>
+            <a:lvl5pPr marL="1828800" indent="0" algn="l" defTabSz="914400" rtl="0" eaLnBrk="1" latinLnBrk="0" hangingPunct="1">
+              <a:lnSpc>
+                <a:spcPct val="90000"/>
+              </a:lnSpc>
+              <a:spcBef>
+                <a:spcPts val="500"/>
+              </a:spcBef>
+              <a:buFont typeface="Arial" panose="020B0604020202020204" pitchFamily="34" charset="0"/>
+              <a:buNone/>
+              <a:defRPr sz="1800" kern="1200">
+                <a:solidFill>
+                  <a:schemeClr val="bg1"/>
+                </a:solidFill>
+                <a:latin typeface="+mn-lt"/>
+                <a:ea typeface="+mn-ea"/>
+                <a:cs typeface="+mn-cs"/>
+              </a:defRPr>
+            </a:lvl5pPr>
+            <a:lvl6pPr marL="2514600" indent="-228600" algn="l" defTabSz="914400" rtl="0" eaLnBrk="1" latinLnBrk="0" hangingPunct="1">
+              <a:lnSpc>
+                <a:spcPct val="90000"/>
+              </a:lnSpc>
+              <a:spcBef>
+                <a:spcPts val="500"/>
+              </a:spcBef>
+              <a:buFont typeface="Arial" panose="020B0604020202020204" pitchFamily="34" charset="0"/>
+              <a:buChar char="•"/>
+              <a:defRPr sz="1800" kern="1200">
+                <a:solidFill>
+                  <a:schemeClr val="tx1"/>
+                </a:solidFill>
+                <a:latin typeface="+mn-lt"/>
+                <a:ea typeface="+mn-ea"/>
+                <a:cs typeface="+mn-cs"/>
+              </a:defRPr>
+            </a:lvl6pPr>
+            <a:lvl7pPr marL="2971800" indent="-228600" algn="l" defTabSz="914400" rtl="0" eaLnBrk="1" latinLnBrk="0" hangingPunct="1">
+              <a:lnSpc>
+                <a:spcPct val="90000"/>
+              </a:lnSpc>
+              <a:spcBef>
+                <a:spcPts val="500"/>
+              </a:spcBef>
+              <a:buFont typeface="Arial" panose="020B0604020202020204" pitchFamily="34" charset="0"/>
+              <a:buChar char="•"/>
+              <a:defRPr sz="1800" kern="1200">
+                <a:solidFill>
+                  <a:schemeClr val="tx1"/>
+                </a:solidFill>
+                <a:latin typeface="+mn-lt"/>
+                <a:ea typeface="+mn-ea"/>
+                <a:cs typeface="+mn-cs"/>
+              </a:defRPr>
+            </a:lvl7pPr>
+            <a:lvl8pPr marL="3429000" indent="-228600" algn="l" defTabSz="914400" rtl="0" eaLnBrk="1" latinLnBrk="0" hangingPunct="1">
+              <a:lnSpc>
+                <a:spcPct val="90000"/>
+              </a:lnSpc>
+              <a:spcBef>
+                <a:spcPts val="500"/>
+              </a:spcBef>
+              <a:buFont typeface="Arial" panose="020B0604020202020204" pitchFamily="34" charset="0"/>
+              <a:buChar char="•"/>
+              <a:defRPr sz="1800" kern="1200">
+                <a:solidFill>
+                  <a:schemeClr val="tx1"/>
+                </a:solidFill>
+                <a:latin typeface="+mn-lt"/>
+                <a:ea typeface="+mn-ea"/>
+                <a:cs typeface="+mn-cs"/>
+              </a:defRPr>
+            </a:lvl8pPr>
+            <a:lvl9pPr marL="3886200" indent="-228600" algn="l" defTabSz="914400" rtl="0" eaLnBrk="1" latinLnBrk="0" hangingPunct="1">
+              <a:lnSpc>
+                <a:spcPct val="90000"/>
+              </a:lnSpc>
+              <a:spcBef>
+                <a:spcPts val="500"/>
+              </a:spcBef>
+              <a:buFont typeface="Arial" panose="020B0604020202020204" pitchFamily="34" charset="0"/>
+              <a:buChar char="•"/>
+              <a:defRPr sz="1800" kern="1200">
+                <a:solidFill>
+                  <a:schemeClr val="tx1"/>
+                </a:solidFill>
+                <a:latin typeface="+mn-lt"/>
+                <a:ea typeface="+mn-ea"/>
+                <a:cs typeface="+mn-cs"/>
+              </a:defRPr>
+            </a:lvl9pPr>
+          </a:lstStyle>
+          <a:p>
+            <a:r>
+              <a:rPr lang="en-US" sz="600" dirty="0"/>
+              <a:t>REFERENCES</a:t>
+            </a:r>
+          </a:p>
+        </p:txBody>
+      </p:sp>
+      <p:sp>
+        <p:nvSpPr>
+          <p:cNvPr id="42" name="Rectangle: Rounded Corners 41">
+            <a:extLst>
+              <a:ext uri="{FF2B5EF4-FFF2-40B4-BE49-F238E27FC236}">
+                <a16:creationId xmlns:a16="http://schemas.microsoft.com/office/drawing/2014/main" id="{4BEBDBE6-4D49-1D28-FEF6-DC4721CB20D2}"/>
+              </a:ext>
+            </a:extLst>
+          </p:cNvPr>
+          <p:cNvSpPr/>
+          <p:nvPr/>
+        </p:nvSpPr>
+        <p:spPr>
+          <a:xfrm>
+            <a:off x="425898" y="4499188"/>
+            <a:ext cx="5064750" cy="2513716"/>
+          </a:xfrm>
+          <a:prstGeom prst="roundRect">
+            <a:avLst>
+              <a:gd name="adj" fmla="val 7621"/>
+            </a:avLst>
+          </a:prstGeom>
+          <a:solidFill>
+            <a:schemeClr val="dk1"/>
+          </a:solidFill>
+          <a:ln>
+            <a:noFill/>
+          </a:ln>
+        </p:spPr>
+        <p:style>
+          <a:lnRef idx="0">
+            <a:scrgbClr r="0" g="0" b="0"/>
+          </a:lnRef>
+          <a:fillRef idx="0">
+            <a:scrgbClr r="0" g="0" b="0"/>
+          </a:fillRef>
+          <a:effectRef idx="0">
+            <a:scrgbClr r="0" g="0" b="0"/>
+          </a:effectRef>
+          <a:fontRef idx="minor">
+            <a:schemeClr val="lt1"/>
+          </a:fontRef>
+        </p:style>
+        <p:txBody>
+          <a:bodyPr rtlCol="0" anchor="ctr"/>
+          <a:lstStyle/>
+          <a:p>
+            <a:pPr algn="ctr"/>
+            <a:endParaRPr lang="en-GB" sz="1013"/>
+          </a:p>
+        </p:txBody>
+      </p:sp>
+      <p:sp>
+        <p:nvSpPr>
+          <p:cNvPr id="43" name="Rectangle: Rounded Corners 42">
+            <a:extLst>
+              <a:ext uri="{FF2B5EF4-FFF2-40B4-BE49-F238E27FC236}">
+                <a16:creationId xmlns:a16="http://schemas.microsoft.com/office/drawing/2014/main" id="{FF08B1F5-BA8C-9F8E-8934-44838031CF11}"/>
+              </a:ext>
+            </a:extLst>
+          </p:cNvPr>
+          <p:cNvSpPr/>
+          <p:nvPr/>
+        </p:nvSpPr>
+        <p:spPr>
+          <a:xfrm>
+            <a:off x="425898" y="7665298"/>
+            <a:ext cx="5064750" cy="2513716"/>
+          </a:xfrm>
+          <a:prstGeom prst="roundRect">
+            <a:avLst>
+              <a:gd name="adj" fmla="val 7621"/>
+            </a:avLst>
+          </a:prstGeom>
+          <a:solidFill>
+            <a:schemeClr val="dk1"/>
+          </a:solidFill>
+          <a:ln>
+            <a:noFill/>
+          </a:ln>
+        </p:spPr>
+        <p:style>
+          <a:lnRef idx="0">
+            <a:scrgbClr r="0" g="0" b="0"/>
+          </a:lnRef>
+          <a:fillRef idx="0">
+            <a:scrgbClr r="0" g="0" b="0"/>
+          </a:fillRef>
+          <a:effectRef idx="0">
+            <a:scrgbClr r="0" g="0" b="0"/>
+          </a:effectRef>
+          <a:fontRef idx="minor">
+            <a:schemeClr val="lt1"/>
+          </a:fontRef>
+        </p:style>
+        <p:txBody>
+          <a:bodyPr rtlCol="0" anchor="ctr"/>
+          <a:lstStyle/>
+          <a:p>
+            <a:pPr algn="ctr"/>
+            <a:endParaRPr lang="en-GB" sz="1013"/>
+          </a:p>
+        </p:txBody>
+      </p:sp>
+      <p:sp>
+        <p:nvSpPr>
+          <p:cNvPr id="44" name="Text Placeholder 4">
+            <a:extLst>
+              <a:ext uri="{FF2B5EF4-FFF2-40B4-BE49-F238E27FC236}">
+                <a16:creationId xmlns:a16="http://schemas.microsoft.com/office/drawing/2014/main" id="{96DB6994-301A-1B2D-B403-2B0D424C5306}"/>
+              </a:ext>
+            </a:extLst>
+          </p:cNvPr>
+          <p:cNvSpPr txBox="1">
+            <a:spLocks/>
+          </p:cNvSpPr>
+          <p:nvPr/>
+        </p:nvSpPr>
+        <p:spPr>
+          <a:xfrm>
+            <a:off x="491507" y="4606034"/>
+            <a:ext cx="3659243" cy="365172"/>
+          </a:xfrm>
+          <a:prstGeom prst="rect">
+            <a:avLst/>
+          </a:prstGeom>
+        </p:spPr>
+        <p:txBody>
+          <a:bodyPr vert="horz" lIns="91440" tIns="0" rIns="91440" bIns="45720" rtlCol="0">
+            <a:noAutofit/>
+          </a:bodyPr>
+          <a:lstStyle>
+            <a:lvl1pPr marL="0" indent="0" algn="l" defTabSz="685800" rtl="0" eaLnBrk="1" latinLnBrk="0" hangingPunct="1">
+              <a:lnSpc>
+                <a:spcPct val="90000"/>
+              </a:lnSpc>
+              <a:spcBef>
+                <a:spcPts val="750"/>
+              </a:spcBef>
+              <a:buFont typeface="Arial" panose="020B0604020202020204" pitchFamily="34" charset="0"/>
+              <a:buNone/>
+              <a:defRPr sz="1650" b="1" kern="1200" cap="all" spc="75" baseline="0">
+                <a:solidFill>
+                  <a:schemeClr val="bg1"/>
+                </a:solidFill>
+                <a:latin typeface="+mj-lt"/>
+                <a:ea typeface="+mn-ea"/>
+                <a:cs typeface="+mn-cs"/>
+              </a:defRPr>
+            </a:lvl1pPr>
+            <a:lvl2pPr marL="342900" indent="0" algn="l" defTabSz="685800" rtl="0" eaLnBrk="1" latinLnBrk="0" hangingPunct="1">
+              <a:lnSpc>
+                <a:spcPct val="90000"/>
+              </a:lnSpc>
+              <a:spcBef>
+                <a:spcPts val="375"/>
+              </a:spcBef>
+              <a:buFont typeface="Arial" panose="020B0604020202020204" pitchFamily="34" charset="0"/>
+              <a:buNone/>
+              <a:defRPr sz="1350" kern="1200">
+                <a:solidFill>
+                  <a:schemeClr val="bg1"/>
+                </a:solidFill>
+                <a:latin typeface="+mn-lt"/>
+                <a:ea typeface="+mn-ea"/>
+                <a:cs typeface="+mn-cs"/>
+              </a:defRPr>
+            </a:lvl2pPr>
+            <a:lvl3pPr marL="685800" indent="0" algn="l" defTabSz="685800" rtl="0" eaLnBrk="1" latinLnBrk="0" hangingPunct="1">
+              <a:lnSpc>
+                <a:spcPct val="90000"/>
+              </a:lnSpc>
+              <a:spcBef>
+                <a:spcPts val="375"/>
+              </a:spcBef>
+              <a:buFont typeface="Arial" panose="020B0604020202020204" pitchFamily="34" charset="0"/>
+              <a:buNone/>
+              <a:defRPr sz="1350" kern="1200">
+                <a:solidFill>
+                  <a:schemeClr val="bg1"/>
+                </a:solidFill>
+                <a:latin typeface="+mn-lt"/>
+                <a:ea typeface="+mn-ea"/>
+                <a:cs typeface="+mn-cs"/>
+              </a:defRPr>
+            </a:lvl3pPr>
+            <a:lvl4pPr marL="1028700" indent="0" algn="l" defTabSz="685800" rtl="0" eaLnBrk="1" latinLnBrk="0" hangingPunct="1">
+              <a:lnSpc>
+                <a:spcPct val="90000"/>
+              </a:lnSpc>
+              <a:spcBef>
+                <a:spcPts val="375"/>
+              </a:spcBef>
+              <a:buFont typeface="Arial" panose="020B0604020202020204" pitchFamily="34" charset="0"/>
+              <a:buNone/>
+              <a:defRPr sz="1350" kern="1200">
+                <a:solidFill>
+                  <a:schemeClr val="bg1"/>
+                </a:solidFill>
+                <a:latin typeface="+mn-lt"/>
+                <a:ea typeface="+mn-ea"/>
+                <a:cs typeface="+mn-cs"/>
+              </a:defRPr>
+            </a:lvl4pPr>
+            <a:lvl5pPr marL="1371600" indent="0" algn="l" defTabSz="685800" rtl="0" eaLnBrk="1" latinLnBrk="0" hangingPunct="1">
+              <a:lnSpc>
+                <a:spcPct val="90000"/>
+              </a:lnSpc>
+              <a:spcBef>
+                <a:spcPts val="375"/>
+              </a:spcBef>
+              <a:buFont typeface="Arial" panose="020B0604020202020204" pitchFamily="34" charset="0"/>
+              <a:buNone/>
+              <a:defRPr sz="1350" kern="1200">
+                <a:solidFill>
+                  <a:schemeClr val="bg1"/>
+                </a:solidFill>
+                <a:latin typeface="+mn-lt"/>
+                <a:ea typeface="+mn-ea"/>
+                <a:cs typeface="+mn-cs"/>
+              </a:defRPr>
+            </a:lvl5pPr>
+            <a:lvl6pPr marL="1885950" indent="-171450" algn="l" defTabSz="685800" rtl="0" eaLnBrk="1" latinLnBrk="0" hangingPunct="1">
+              <a:lnSpc>
+                <a:spcPct val="90000"/>
+              </a:lnSpc>
+              <a:spcBef>
+                <a:spcPts val="375"/>
+              </a:spcBef>
+              <a:buFont typeface="Arial" panose="020B0604020202020204" pitchFamily="34" charset="0"/>
+              <a:buChar char="•"/>
+              <a:defRPr sz="1350" kern="1200">
+                <a:solidFill>
+                  <a:schemeClr val="tx1"/>
+                </a:solidFill>
+                <a:latin typeface="+mn-lt"/>
+                <a:ea typeface="+mn-ea"/>
+                <a:cs typeface="+mn-cs"/>
+              </a:defRPr>
+            </a:lvl6pPr>
+            <a:lvl7pPr marL="2228850" indent="-171450" algn="l" defTabSz="685800" rtl="0" eaLnBrk="1" latinLnBrk="0" hangingPunct="1">
+              <a:lnSpc>
+                <a:spcPct val="90000"/>
+              </a:lnSpc>
+              <a:spcBef>
+                <a:spcPts val="375"/>
+              </a:spcBef>
+              <a:buFont typeface="Arial" panose="020B0604020202020204" pitchFamily="34" charset="0"/>
+              <a:buChar char="•"/>
+              <a:defRPr sz="1350" kern="1200">
+                <a:solidFill>
+                  <a:schemeClr val="tx1"/>
+                </a:solidFill>
+                <a:latin typeface="+mn-lt"/>
+                <a:ea typeface="+mn-ea"/>
+                <a:cs typeface="+mn-cs"/>
+              </a:defRPr>
+            </a:lvl7pPr>
+            <a:lvl8pPr marL="2571750" indent="-171450" algn="l" defTabSz="685800" rtl="0" eaLnBrk="1" latinLnBrk="0" hangingPunct="1">
+              <a:lnSpc>
+                <a:spcPct val="90000"/>
+              </a:lnSpc>
+              <a:spcBef>
+                <a:spcPts val="375"/>
+              </a:spcBef>
+              <a:buFont typeface="Arial" panose="020B0604020202020204" pitchFamily="34" charset="0"/>
+              <a:buChar char="•"/>
+              <a:defRPr sz="1350" kern="1200">
+                <a:solidFill>
+                  <a:schemeClr val="tx1"/>
+                </a:solidFill>
+                <a:latin typeface="+mn-lt"/>
+                <a:ea typeface="+mn-ea"/>
+                <a:cs typeface="+mn-cs"/>
+              </a:defRPr>
+            </a:lvl8pPr>
+            <a:lvl9pPr marL="2914650" indent="-171450" algn="l" defTabSz="685800" rtl="0" eaLnBrk="1" latinLnBrk="0" hangingPunct="1">
+              <a:lnSpc>
+                <a:spcPct val="90000"/>
+              </a:lnSpc>
+              <a:spcBef>
+                <a:spcPts val="375"/>
+              </a:spcBef>
+              <a:buFont typeface="Arial" panose="020B0604020202020204" pitchFamily="34" charset="0"/>
+              <a:buChar char="•"/>
+              <a:defRPr sz="1350" kern="1200">
+                <a:solidFill>
+                  <a:schemeClr val="tx1"/>
+                </a:solidFill>
+                <a:latin typeface="+mn-lt"/>
+                <a:ea typeface="+mn-ea"/>
+                <a:cs typeface="+mn-cs"/>
+              </a:defRPr>
+            </a:lvl9pPr>
+          </a:lstStyle>
+          <a:p>
+            <a:r>
+              <a:rPr lang="en-US" sz="2800" dirty="0"/>
+              <a:t>Objectives</a:t>
+            </a:r>
+          </a:p>
+        </p:txBody>
+      </p:sp>
+      <p:sp>
+        <p:nvSpPr>
+          <p:cNvPr id="46" name="Text Placeholder 9">
+            <a:extLst>
+              <a:ext uri="{FF2B5EF4-FFF2-40B4-BE49-F238E27FC236}">
+                <a16:creationId xmlns:a16="http://schemas.microsoft.com/office/drawing/2014/main" id="{154DC6BE-5A3A-7D1A-455C-DCE8F2E018CA}"/>
+              </a:ext>
+            </a:extLst>
+          </p:cNvPr>
+          <p:cNvSpPr txBox="1">
+            <a:spLocks/>
+          </p:cNvSpPr>
+          <p:nvPr/>
+        </p:nvSpPr>
+        <p:spPr>
+          <a:xfrm>
+            <a:off x="491507" y="5075096"/>
+            <a:ext cx="4967050" cy="1818224"/>
+          </a:xfrm>
+          <a:prstGeom prst="rect">
+            <a:avLst/>
+          </a:prstGeom>
+        </p:spPr>
+        <p:txBody>
+          <a:bodyPr vert="horz" lIns="91440" tIns="0" rIns="91440" bIns="45720" rtlCol="0">
+            <a:noAutofit/>
+          </a:bodyPr>
+          <a:lstStyle>
+            <a:lvl1pPr marL="0" indent="0" algn="l" defTabSz="685800" rtl="0" eaLnBrk="1" latinLnBrk="0" hangingPunct="1">
+              <a:lnSpc>
+                <a:spcPct val="90000"/>
+              </a:lnSpc>
+              <a:spcBef>
+                <a:spcPts val="750"/>
+              </a:spcBef>
+              <a:buFont typeface="Arial" panose="020B0604020202020204" pitchFamily="34" charset="0"/>
+              <a:buNone/>
+              <a:defRPr sz="900" kern="1200" cap="none" baseline="0">
+                <a:solidFill>
+                  <a:schemeClr val="bg1"/>
+                </a:solidFill>
+                <a:latin typeface="+mn-lt"/>
+                <a:ea typeface="+mn-ea"/>
+                <a:cs typeface="+mn-cs"/>
+              </a:defRPr>
+            </a:lvl1pPr>
+            <a:lvl2pPr marL="342900" indent="0" algn="l" defTabSz="685800" rtl="0" eaLnBrk="1" latinLnBrk="0" hangingPunct="1">
+              <a:lnSpc>
+                <a:spcPct val="90000"/>
+              </a:lnSpc>
+              <a:spcBef>
+                <a:spcPts val="375"/>
+              </a:spcBef>
+              <a:buFont typeface="Arial" panose="020B0604020202020204" pitchFamily="34" charset="0"/>
+              <a:buNone/>
+              <a:defRPr sz="1350" kern="1200">
+                <a:solidFill>
+                  <a:schemeClr val="bg1"/>
+                </a:solidFill>
+                <a:latin typeface="+mn-lt"/>
+                <a:ea typeface="+mn-ea"/>
+                <a:cs typeface="+mn-cs"/>
+              </a:defRPr>
+            </a:lvl2pPr>
+            <a:lvl3pPr marL="685800" indent="0" algn="l" defTabSz="685800" rtl="0" eaLnBrk="1" latinLnBrk="0" hangingPunct="1">
+              <a:lnSpc>
+                <a:spcPct val="90000"/>
+              </a:lnSpc>
+              <a:spcBef>
+                <a:spcPts val="375"/>
+              </a:spcBef>
+              <a:buFont typeface="Arial" panose="020B0604020202020204" pitchFamily="34" charset="0"/>
+              <a:buNone/>
+              <a:defRPr sz="1350" kern="1200">
+                <a:solidFill>
+                  <a:schemeClr val="bg1"/>
+                </a:solidFill>
+                <a:latin typeface="+mn-lt"/>
+                <a:ea typeface="+mn-ea"/>
+                <a:cs typeface="+mn-cs"/>
+              </a:defRPr>
+            </a:lvl3pPr>
+            <a:lvl4pPr marL="1028700" indent="0" algn="l" defTabSz="685800" rtl="0" eaLnBrk="1" latinLnBrk="0" hangingPunct="1">
+              <a:lnSpc>
+                <a:spcPct val="90000"/>
+              </a:lnSpc>
+              <a:spcBef>
+                <a:spcPts val="375"/>
+              </a:spcBef>
+              <a:buFont typeface="Arial" panose="020B0604020202020204" pitchFamily="34" charset="0"/>
+              <a:buNone/>
+              <a:defRPr sz="1350" kern="1200">
+                <a:solidFill>
+                  <a:schemeClr val="bg1"/>
+                </a:solidFill>
+                <a:latin typeface="+mn-lt"/>
+                <a:ea typeface="+mn-ea"/>
+                <a:cs typeface="+mn-cs"/>
+              </a:defRPr>
+            </a:lvl4pPr>
+            <a:lvl5pPr marL="1371600" indent="0" algn="l" defTabSz="685800" rtl="0" eaLnBrk="1" latinLnBrk="0" hangingPunct="1">
+              <a:lnSpc>
+                <a:spcPct val="90000"/>
+              </a:lnSpc>
+              <a:spcBef>
+                <a:spcPts val="375"/>
+              </a:spcBef>
+              <a:buFont typeface="Arial" panose="020B0604020202020204" pitchFamily="34" charset="0"/>
+              <a:buNone/>
+              <a:defRPr sz="1350" kern="1200">
+                <a:solidFill>
+                  <a:schemeClr val="bg1"/>
+                </a:solidFill>
+                <a:latin typeface="+mn-lt"/>
+                <a:ea typeface="+mn-ea"/>
+                <a:cs typeface="+mn-cs"/>
+              </a:defRPr>
+            </a:lvl5pPr>
+            <a:lvl6pPr marL="1885950" indent="-171450" algn="l" defTabSz="685800" rtl="0" eaLnBrk="1" latinLnBrk="0" hangingPunct="1">
+              <a:lnSpc>
+                <a:spcPct val="90000"/>
+              </a:lnSpc>
+              <a:spcBef>
+                <a:spcPts val="375"/>
+              </a:spcBef>
+              <a:buFont typeface="Arial" panose="020B0604020202020204" pitchFamily="34" charset="0"/>
+              <a:buChar char="•"/>
+              <a:defRPr sz="1350" kern="1200">
+                <a:solidFill>
+                  <a:schemeClr val="tx1"/>
+                </a:solidFill>
+                <a:latin typeface="+mn-lt"/>
+                <a:ea typeface="+mn-ea"/>
+                <a:cs typeface="+mn-cs"/>
+              </a:defRPr>
+            </a:lvl6pPr>
+            <a:lvl7pPr marL="2228850" indent="-171450" algn="l" defTabSz="685800" rtl="0" eaLnBrk="1" latinLnBrk="0" hangingPunct="1">
+              <a:lnSpc>
+                <a:spcPct val="90000"/>
+              </a:lnSpc>
+              <a:spcBef>
+                <a:spcPts val="375"/>
+              </a:spcBef>
+              <a:buFont typeface="Arial" panose="020B0604020202020204" pitchFamily="34" charset="0"/>
+              <a:buChar char="•"/>
+              <a:defRPr sz="1350" kern="1200">
+                <a:solidFill>
+                  <a:schemeClr val="tx1"/>
+                </a:solidFill>
+                <a:latin typeface="+mn-lt"/>
+                <a:ea typeface="+mn-ea"/>
+                <a:cs typeface="+mn-cs"/>
+              </a:defRPr>
+            </a:lvl7pPr>
+            <a:lvl8pPr marL="2571750" indent="-171450" algn="l" defTabSz="685800" rtl="0" eaLnBrk="1" latinLnBrk="0" hangingPunct="1">
+              <a:lnSpc>
+                <a:spcPct val="90000"/>
+              </a:lnSpc>
+              <a:spcBef>
+                <a:spcPts val="375"/>
+              </a:spcBef>
+              <a:buFont typeface="Arial" panose="020B0604020202020204" pitchFamily="34" charset="0"/>
+              <a:buChar char="•"/>
+              <a:defRPr sz="1350" kern="1200">
+                <a:solidFill>
+                  <a:schemeClr val="tx1"/>
+                </a:solidFill>
+                <a:latin typeface="+mn-lt"/>
+                <a:ea typeface="+mn-ea"/>
+                <a:cs typeface="+mn-cs"/>
+              </a:defRPr>
+            </a:lvl8pPr>
+            <a:lvl9pPr marL="2914650" indent="-171450" algn="l" defTabSz="685800" rtl="0" eaLnBrk="1" latinLnBrk="0" hangingPunct="1">
+              <a:lnSpc>
+                <a:spcPct val="90000"/>
+              </a:lnSpc>
+              <a:spcBef>
+                <a:spcPts val="375"/>
+              </a:spcBef>
+              <a:buFont typeface="Arial" panose="020B0604020202020204" pitchFamily="34" charset="0"/>
+              <a:buChar char="•"/>
+              <a:defRPr sz="1350" kern="1200">
+                <a:solidFill>
+                  <a:schemeClr val="tx1"/>
+                </a:solidFill>
+                <a:latin typeface="+mn-lt"/>
+                <a:ea typeface="+mn-ea"/>
+                <a:cs typeface="+mn-cs"/>
+              </a:defRPr>
+            </a:lvl9pPr>
+          </a:lstStyle>
+          <a:p>
+            <a:pPr marL="128588" indent="-128588" fontAlgn="base">
+              <a:lnSpc>
+                <a:spcPct val="100000"/>
+              </a:lnSpc>
+              <a:spcBef>
+                <a:spcPts val="0"/>
+              </a:spcBef>
+              <a:buFont typeface="Arial" panose="020B0604020202020204" pitchFamily="34" charset="0"/>
+              <a:buChar char="•"/>
+            </a:pPr>
+            <a:r>
+              <a:rPr lang="en-GB" sz="1200" dirty="0">
+                <a:solidFill>
+                  <a:schemeClr val="accent3">
+                    <a:lumMod val="20000"/>
+                    <a:lumOff val="80000"/>
+                  </a:schemeClr>
+                </a:solidFill>
+              </a:rPr>
+              <a:t>Demonstrate the potential of legacy music playback formats in modern systems. </a:t>
+            </a:r>
+          </a:p>
+          <a:p>
+            <a:pPr marL="128588" indent="-128588" fontAlgn="base">
+              <a:lnSpc>
+                <a:spcPct val="100000"/>
+              </a:lnSpc>
+              <a:spcBef>
+                <a:spcPts val="0"/>
+              </a:spcBef>
+              <a:buFont typeface="Arial" panose="020B0604020202020204" pitchFamily="34" charset="0"/>
+              <a:buChar char="•"/>
+            </a:pPr>
+            <a:r>
+              <a:rPr lang="en-GB" sz="1200" dirty="0">
+                <a:solidFill>
+                  <a:schemeClr val="accent3">
+                    <a:lumMod val="20000"/>
+                    <a:lumOff val="80000"/>
+                  </a:schemeClr>
+                </a:solidFill>
+              </a:rPr>
+              <a:t>Allow quick prototype or full music production for a game developer.</a:t>
+            </a:r>
+          </a:p>
+          <a:p>
+            <a:pPr marL="128588" indent="-128588" fontAlgn="base">
+              <a:lnSpc>
+                <a:spcPct val="100000"/>
+              </a:lnSpc>
+              <a:spcBef>
+                <a:spcPts val="0"/>
+              </a:spcBef>
+              <a:buFont typeface="Arial" panose="020B0604020202020204" pitchFamily="34" charset="0"/>
+              <a:buChar char="•"/>
+            </a:pPr>
+            <a:r>
+              <a:rPr lang="en-GB" sz="1200" dirty="0">
+                <a:solidFill>
+                  <a:schemeClr val="accent3">
+                    <a:lumMod val="20000"/>
+                    <a:lumOff val="80000"/>
+                  </a:schemeClr>
+                </a:solidFill>
+              </a:rPr>
+              <a:t>Removes the barrier between level design/gameplay programming and music creation.</a:t>
+            </a:r>
+          </a:p>
+          <a:p>
+            <a:pPr marL="128588" indent="-128588" fontAlgn="base">
+              <a:lnSpc>
+                <a:spcPct val="100000"/>
+              </a:lnSpc>
+              <a:spcBef>
+                <a:spcPts val="0"/>
+              </a:spcBef>
+              <a:buFont typeface="Arial" panose="020B0604020202020204" pitchFamily="34" charset="0"/>
+              <a:buChar char="•"/>
+            </a:pPr>
+            <a:r>
+              <a:rPr lang="en-GB" sz="1200" dirty="0">
+                <a:solidFill>
+                  <a:schemeClr val="accent3">
+                    <a:lumMod val="20000"/>
+                    <a:lumOff val="80000"/>
+                  </a:schemeClr>
+                </a:solidFill>
+              </a:rPr>
+              <a:t>Allow for future modification of tracks due to the text-command style of music files such as transformative or generative music.</a:t>
+            </a:r>
+          </a:p>
+          <a:p>
+            <a:endParaRPr lang="en-US" sz="1200" dirty="0"/>
+          </a:p>
+        </p:txBody>
+      </p:sp>
       <p:cxnSp>
         <p:nvCxnSpPr>
-          <p:cNvPr id="459" name="Straight Connector 458">
-            <a:extLst>
-              <a:ext uri="{FF2B5EF4-FFF2-40B4-BE49-F238E27FC236}">
-                <a16:creationId xmlns:a16="http://schemas.microsoft.com/office/drawing/2014/main" id="{774EA625-3F51-B2CE-1BAD-BD842A45F343}"/>
+          <p:cNvPr id="50" name="Straight Connector 49">
+            <a:extLst>
+              <a:ext uri="{FF2B5EF4-FFF2-40B4-BE49-F238E27FC236}">
+                <a16:creationId xmlns:a16="http://schemas.microsoft.com/office/drawing/2014/main" id="{06A259B8-6DD8-D9CF-6387-790DF0464125}"/>
               </a:ext>
               <a:ext uri="{C183D7F6-B498-43B3-948B-1728B52AA6E4}">
                 <adec:decorative xmlns:adec="http://schemas.microsoft.com/office/drawing/2017/decorative" val="1"/>
@@ -10054,8 +11047,8 @@
         </p:nvCxnSpPr>
         <p:spPr>
           <a:xfrm>
-            <a:off x="7532343" y="3617848"/>
-            <a:ext cx="2115155" cy="0"/>
+            <a:off x="566641" y="4926756"/>
+            <a:ext cx="2680041" cy="0"/>
           </a:xfrm>
           <a:prstGeom prst="line">
             <a:avLst/>
@@ -10095,84 +11088,472 @@
           </a:fontRef>
         </p:style>
       </p:cxnSp>
-      <p:graphicFrame>
-        <p:nvGraphicFramePr>
-          <p:cNvPr id="17" name="Chart 16">
-            <a:extLst>
-              <a:ext uri="{FF2B5EF4-FFF2-40B4-BE49-F238E27FC236}">
-                <a16:creationId xmlns:a16="http://schemas.microsoft.com/office/drawing/2014/main" id="{5AE5CE50-ADD5-9554-96C4-76188162E714}"/>
-              </a:ext>
-            </a:extLst>
-          </p:cNvPr>
-          <p:cNvGraphicFramePr/>
-          <p:nvPr>
-            <p:extLst>
-              <p:ext uri="{D42A27DB-BD31-4B8C-83A1-F6EECF244321}">
-                <p14:modId xmlns:p14="http://schemas.microsoft.com/office/powerpoint/2010/main" val="1423307786"/>
-              </p:ext>
-            </p:extLst>
-          </p:nvPr>
-        </p:nvGraphicFramePr>
-        <p:xfrm>
-          <a:off x="7474270" y="1639260"/>
-          <a:ext cx="3006241" cy="1327659"/>
-        </p:xfrm>
-        <a:graphic>
-          <a:graphicData uri="http://schemas.openxmlformats.org/drawingml/2006/chart">
-            <c:chart xmlns:c="http://schemas.openxmlformats.org/drawingml/2006/chart" xmlns:r="http://schemas.openxmlformats.org/officeDocument/2006/relationships" r:id="rId14"/>
-          </a:graphicData>
-        </a:graphic>
-      </p:graphicFrame>
-      <p:pic>
-        <p:nvPicPr>
-          <p:cNvPr id="30" name="Picture 29">
-            <a:extLst>
-              <a:ext uri="{FF2B5EF4-FFF2-40B4-BE49-F238E27FC236}">
-                <a16:creationId xmlns:a16="http://schemas.microsoft.com/office/drawing/2014/main" id="{F94EFD76-C369-ECF3-6857-B780AE3F8D93}"/>
-              </a:ext>
-            </a:extLst>
-          </p:cNvPr>
-          <p:cNvPicPr>
-            <a:picLocks noChangeAspect="1"/>
-          </p:cNvPicPr>
+      <p:sp>
+        <p:nvSpPr>
+          <p:cNvPr id="51" name="Text Placeholder 4">
+            <a:extLst>
+              <a:ext uri="{FF2B5EF4-FFF2-40B4-BE49-F238E27FC236}">
+                <a16:creationId xmlns:a16="http://schemas.microsoft.com/office/drawing/2014/main" id="{4DA6487D-CECE-A300-8F70-22329145D531}"/>
+              </a:ext>
+            </a:extLst>
+          </p:cNvPr>
+          <p:cNvSpPr txBox="1">
+            <a:spLocks/>
+          </p:cNvSpPr>
           <p:nvPr/>
-        </p:nvPicPr>
-        <p:blipFill>
-          <a:blip r:embed="rId15"/>
-          <a:stretch>
-            <a:fillRect/>
-          </a:stretch>
-        </p:blipFill>
-        <p:spPr>
-          <a:xfrm>
-            <a:off x="1164729" y="3153097"/>
-            <a:ext cx="2490055" cy="1443510"/>
+        </p:nvSpPr>
+        <p:spPr>
+          <a:xfrm>
+            <a:off x="447950" y="7767492"/>
+            <a:ext cx="3659243" cy="365172"/>
           </a:xfrm>
           <a:prstGeom prst="rect">
             <a:avLst/>
           </a:prstGeom>
-          <a:ln w="38100" cap="sq">
-            <a:solidFill>
-              <a:srgbClr val="000000"/>
-            </a:solidFill>
-            <a:prstDash val="solid"/>
-            <a:miter lim="800000"/>
-          </a:ln>
-          <a:effectLst>
-            <a:outerShdw blurRad="50800" dist="38100" dir="2700000" algn="tl" rotWithShape="0">
-              <a:srgbClr val="000000">
-                <a:alpha val="43000"/>
-              </a:srgbClr>
-            </a:outerShdw>
-          </a:effectLst>
-        </p:spPr>
-      </p:pic>
+        </p:spPr>
+        <p:txBody>
+          <a:bodyPr vert="horz" lIns="91440" tIns="0" rIns="91440" bIns="45720" rtlCol="0">
+            <a:noAutofit/>
+          </a:bodyPr>
+          <a:lstStyle>
+            <a:lvl1pPr marL="0" indent="0" algn="l" defTabSz="685800" rtl="0" eaLnBrk="1" latinLnBrk="0" hangingPunct="1">
+              <a:lnSpc>
+                <a:spcPct val="90000"/>
+              </a:lnSpc>
+              <a:spcBef>
+                <a:spcPts val="750"/>
+              </a:spcBef>
+              <a:buFont typeface="Arial" panose="020B0604020202020204" pitchFamily="34" charset="0"/>
+              <a:buNone/>
+              <a:defRPr sz="1650" b="1" kern="1200" cap="all" spc="75" baseline="0">
+                <a:solidFill>
+                  <a:schemeClr val="bg1"/>
+                </a:solidFill>
+                <a:latin typeface="+mj-lt"/>
+                <a:ea typeface="+mn-ea"/>
+                <a:cs typeface="+mn-cs"/>
+              </a:defRPr>
+            </a:lvl1pPr>
+            <a:lvl2pPr marL="342900" indent="0" algn="l" defTabSz="685800" rtl="0" eaLnBrk="1" latinLnBrk="0" hangingPunct="1">
+              <a:lnSpc>
+                <a:spcPct val="90000"/>
+              </a:lnSpc>
+              <a:spcBef>
+                <a:spcPts val="375"/>
+              </a:spcBef>
+              <a:buFont typeface="Arial" panose="020B0604020202020204" pitchFamily="34" charset="0"/>
+              <a:buNone/>
+              <a:defRPr sz="1350" kern="1200">
+                <a:solidFill>
+                  <a:schemeClr val="bg1"/>
+                </a:solidFill>
+                <a:latin typeface="+mn-lt"/>
+                <a:ea typeface="+mn-ea"/>
+                <a:cs typeface="+mn-cs"/>
+              </a:defRPr>
+            </a:lvl2pPr>
+            <a:lvl3pPr marL="685800" indent="0" algn="l" defTabSz="685800" rtl="0" eaLnBrk="1" latinLnBrk="0" hangingPunct="1">
+              <a:lnSpc>
+                <a:spcPct val="90000"/>
+              </a:lnSpc>
+              <a:spcBef>
+                <a:spcPts val="375"/>
+              </a:spcBef>
+              <a:buFont typeface="Arial" panose="020B0604020202020204" pitchFamily="34" charset="0"/>
+              <a:buNone/>
+              <a:defRPr sz="1350" kern="1200">
+                <a:solidFill>
+                  <a:schemeClr val="bg1"/>
+                </a:solidFill>
+                <a:latin typeface="+mn-lt"/>
+                <a:ea typeface="+mn-ea"/>
+                <a:cs typeface="+mn-cs"/>
+              </a:defRPr>
+            </a:lvl3pPr>
+            <a:lvl4pPr marL="1028700" indent="0" algn="l" defTabSz="685800" rtl="0" eaLnBrk="1" latinLnBrk="0" hangingPunct="1">
+              <a:lnSpc>
+                <a:spcPct val="90000"/>
+              </a:lnSpc>
+              <a:spcBef>
+                <a:spcPts val="375"/>
+              </a:spcBef>
+              <a:buFont typeface="Arial" panose="020B0604020202020204" pitchFamily="34" charset="0"/>
+              <a:buNone/>
+              <a:defRPr sz="1350" kern="1200">
+                <a:solidFill>
+                  <a:schemeClr val="bg1"/>
+                </a:solidFill>
+                <a:latin typeface="+mn-lt"/>
+                <a:ea typeface="+mn-ea"/>
+                <a:cs typeface="+mn-cs"/>
+              </a:defRPr>
+            </a:lvl4pPr>
+            <a:lvl5pPr marL="1371600" indent="0" algn="l" defTabSz="685800" rtl="0" eaLnBrk="1" latinLnBrk="0" hangingPunct="1">
+              <a:lnSpc>
+                <a:spcPct val="90000"/>
+              </a:lnSpc>
+              <a:spcBef>
+                <a:spcPts val="375"/>
+              </a:spcBef>
+              <a:buFont typeface="Arial" panose="020B0604020202020204" pitchFamily="34" charset="0"/>
+              <a:buNone/>
+              <a:defRPr sz="1350" kern="1200">
+                <a:solidFill>
+                  <a:schemeClr val="bg1"/>
+                </a:solidFill>
+                <a:latin typeface="+mn-lt"/>
+                <a:ea typeface="+mn-ea"/>
+                <a:cs typeface="+mn-cs"/>
+              </a:defRPr>
+            </a:lvl5pPr>
+            <a:lvl6pPr marL="1885950" indent="-171450" algn="l" defTabSz="685800" rtl="0" eaLnBrk="1" latinLnBrk="0" hangingPunct="1">
+              <a:lnSpc>
+                <a:spcPct val="90000"/>
+              </a:lnSpc>
+              <a:spcBef>
+                <a:spcPts val="375"/>
+              </a:spcBef>
+              <a:buFont typeface="Arial" panose="020B0604020202020204" pitchFamily="34" charset="0"/>
+              <a:buChar char="•"/>
+              <a:defRPr sz="1350" kern="1200">
+                <a:solidFill>
+                  <a:schemeClr val="tx1"/>
+                </a:solidFill>
+                <a:latin typeface="+mn-lt"/>
+                <a:ea typeface="+mn-ea"/>
+                <a:cs typeface="+mn-cs"/>
+              </a:defRPr>
+            </a:lvl6pPr>
+            <a:lvl7pPr marL="2228850" indent="-171450" algn="l" defTabSz="685800" rtl="0" eaLnBrk="1" latinLnBrk="0" hangingPunct="1">
+              <a:lnSpc>
+                <a:spcPct val="90000"/>
+              </a:lnSpc>
+              <a:spcBef>
+                <a:spcPts val="375"/>
+              </a:spcBef>
+              <a:buFont typeface="Arial" panose="020B0604020202020204" pitchFamily="34" charset="0"/>
+              <a:buChar char="•"/>
+              <a:defRPr sz="1350" kern="1200">
+                <a:solidFill>
+                  <a:schemeClr val="tx1"/>
+                </a:solidFill>
+                <a:latin typeface="+mn-lt"/>
+                <a:ea typeface="+mn-ea"/>
+                <a:cs typeface="+mn-cs"/>
+              </a:defRPr>
+            </a:lvl7pPr>
+            <a:lvl8pPr marL="2571750" indent="-171450" algn="l" defTabSz="685800" rtl="0" eaLnBrk="1" latinLnBrk="0" hangingPunct="1">
+              <a:lnSpc>
+                <a:spcPct val="90000"/>
+              </a:lnSpc>
+              <a:spcBef>
+                <a:spcPts val="375"/>
+              </a:spcBef>
+              <a:buFont typeface="Arial" panose="020B0604020202020204" pitchFamily="34" charset="0"/>
+              <a:buChar char="•"/>
+              <a:defRPr sz="1350" kern="1200">
+                <a:solidFill>
+                  <a:schemeClr val="tx1"/>
+                </a:solidFill>
+                <a:latin typeface="+mn-lt"/>
+                <a:ea typeface="+mn-ea"/>
+                <a:cs typeface="+mn-cs"/>
+              </a:defRPr>
+            </a:lvl8pPr>
+            <a:lvl9pPr marL="2914650" indent="-171450" algn="l" defTabSz="685800" rtl="0" eaLnBrk="1" latinLnBrk="0" hangingPunct="1">
+              <a:lnSpc>
+                <a:spcPct val="90000"/>
+              </a:lnSpc>
+              <a:spcBef>
+                <a:spcPts val="375"/>
+              </a:spcBef>
+              <a:buFont typeface="Arial" panose="020B0604020202020204" pitchFamily="34" charset="0"/>
+              <a:buChar char="•"/>
+              <a:defRPr sz="1350" kern="1200">
+                <a:solidFill>
+                  <a:schemeClr val="tx1"/>
+                </a:solidFill>
+                <a:latin typeface="+mn-lt"/>
+                <a:ea typeface="+mn-ea"/>
+                <a:cs typeface="+mn-cs"/>
+              </a:defRPr>
+            </a:lvl9pPr>
+          </a:lstStyle>
+          <a:p>
+            <a:r>
+              <a:rPr lang="en-US" sz="2800" dirty="0"/>
+              <a:t>Methodology</a:t>
+            </a:r>
+            <a:endParaRPr lang="en-US" sz="2500" dirty="0"/>
+          </a:p>
+        </p:txBody>
+      </p:sp>
+      <p:sp>
+        <p:nvSpPr>
+          <p:cNvPr id="52" name="Text Placeholder 9">
+            <a:extLst>
+              <a:ext uri="{FF2B5EF4-FFF2-40B4-BE49-F238E27FC236}">
+                <a16:creationId xmlns:a16="http://schemas.microsoft.com/office/drawing/2014/main" id="{E9C56B95-31E1-3129-DC7A-A8406BF91701}"/>
+              </a:ext>
+            </a:extLst>
+          </p:cNvPr>
+          <p:cNvSpPr txBox="1">
+            <a:spLocks/>
+          </p:cNvSpPr>
+          <p:nvPr/>
+        </p:nvSpPr>
+        <p:spPr>
+          <a:xfrm>
+            <a:off x="447950" y="8236554"/>
+            <a:ext cx="5010607" cy="1818224"/>
+          </a:xfrm>
+          <a:prstGeom prst="rect">
+            <a:avLst/>
+          </a:prstGeom>
+        </p:spPr>
+        <p:txBody>
+          <a:bodyPr vert="horz" lIns="91440" tIns="0" rIns="91440" bIns="45720" rtlCol="0">
+            <a:noAutofit/>
+          </a:bodyPr>
+          <a:lstStyle>
+            <a:lvl1pPr marL="0" indent="0" algn="l" defTabSz="685800" rtl="0" eaLnBrk="1" latinLnBrk="0" hangingPunct="1">
+              <a:lnSpc>
+                <a:spcPct val="90000"/>
+              </a:lnSpc>
+              <a:spcBef>
+                <a:spcPts val="750"/>
+              </a:spcBef>
+              <a:buFont typeface="Arial" panose="020B0604020202020204" pitchFamily="34" charset="0"/>
+              <a:buNone/>
+              <a:defRPr sz="900" kern="1200" cap="none" baseline="0">
+                <a:solidFill>
+                  <a:schemeClr val="bg1"/>
+                </a:solidFill>
+                <a:latin typeface="+mn-lt"/>
+                <a:ea typeface="+mn-ea"/>
+                <a:cs typeface="+mn-cs"/>
+              </a:defRPr>
+            </a:lvl1pPr>
+            <a:lvl2pPr marL="342900" indent="0" algn="l" defTabSz="685800" rtl="0" eaLnBrk="1" latinLnBrk="0" hangingPunct="1">
+              <a:lnSpc>
+                <a:spcPct val="90000"/>
+              </a:lnSpc>
+              <a:spcBef>
+                <a:spcPts val="375"/>
+              </a:spcBef>
+              <a:buFont typeface="Arial" panose="020B0604020202020204" pitchFamily="34" charset="0"/>
+              <a:buNone/>
+              <a:defRPr sz="1350" kern="1200">
+                <a:solidFill>
+                  <a:schemeClr val="bg1"/>
+                </a:solidFill>
+                <a:latin typeface="+mn-lt"/>
+                <a:ea typeface="+mn-ea"/>
+                <a:cs typeface="+mn-cs"/>
+              </a:defRPr>
+            </a:lvl2pPr>
+            <a:lvl3pPr marL="685800" indent="0" algn="l" defTabSz="685800" rtl="0" eaLnBrk="1" latinLnBrk="0" hangingPunct="1">
+              <a:lnSpc>
+                <a:spcPct val="90000"/>
+              </a:lnSpc>
+              <a:spcBef>
+                <a:spcPts val="375"/>
+              </a:spcBef>
+              <a:buFont typeface="Arial" panose="020B0604020202020204" pitchFamily="34" charset="0"/>
+              <a:buNone/>
+              <a:defRPr sz="1350" kern="1200">
+                <a:solidFill>
+                  <a:schemeClr val="bg1"/>
+                </a:solidFill>
+                <a:latin typeface="+mn-lt"/>
+                <a:ea typeface="+mn-ea"/>
+                <a:cs typeface="+mn-cs"/>
+              </a:defRPr>
+            </a:lvl3pPr>
+            <a:lvl4pPr marL="1028700" indent="0" algn="l" defTabSz="685800" rtl="0" eaLnBrk="1" latinLnBrk="0" hangingPunct="1">
+              <a:lnSpc>
+                <a:spcPct val="90000"/>
+              </a:lnSpc>
+              <a:spcBef>
+                <a:spcPts val="375"/>
+              </a:spcBef>
+              <a:buFont typeface="Arial" panose="020B0604020202020204" pitchFamily="34" charset="0"/>
+              <a:buNone/>
+              <a:defRPr sz="1350" kern="1200">
+                <a:solidFill>
+                  <a:schemeClr val="bg1"/>
+                </a:solidFill>
+                <a:latin typeface="+mn-lt"/>
+                <a:ea typeface="+mn-ea"/>
+                <a:cs typeface="+mn-cs"/>
+              </a:defRPr>
+            </a:lvl4pPr>
+            <a:lvl5pPr marL="1371600" indent="0" algn="l" defTabSz="685800" rtl="0" eaLnBrk="1" latinLnBrk="0" hangingPunct="1">
+              <a:lnSpc>
+                <a:spcPct val="90000"/>
+              </a:lnSpc>
+              <a:spcBef>
+                <a:spcPts val="375"/>
+              </a:spcBef>
+              <a:buFont typeface="Arial" panose="020B0604020202020204" pitchFamily="34" charset="0"/>
+              <a:buNone/>
+              <a:defRPr sz="1350" kern="1200">
+                <a:solidFill>
+                  <a:schemeClr val="bg1"/>
+                </a:solidFill>
+                <a:latin typeface="+mn-lt"/>
+                <a:ea typeface="+mn-ea"/>
+                <a:cs typeface="+mn-cs"/>
+              </a:defRPr>
+            </a:lvl5pPr>
+            <a:lvl6pPr marL="1885950" indent="-171450" algn="l" defTabSz="685800" rtl="0" eaLnBrk="1" latinLnBrk="0" hangingPunct="1">
+              <a:lnSpc>
+                <a:spcPct val="90000"/>
+              </a:lnSpc>
+              <a:spcBef>
+                <a:spcPts val="375"/>
+              </a:spcBef>
+              <a:buFont typeface="Arial" panose="020B0604020202020204" pitchFamily="34" charset="0"/>
+              <a:buChar char="•"/>
+              <a:defRPr sz="1350" kern="1200">
+                <a:solidFill>
+                  <a:schemeClr val="tx1"/>
+                </a:solidFill>
+                <a:latin typeface="+mn-lt"/>
+                <a:ea typeface="+mn-ea"/>
+                <a:cs typeface="+mn-cs"/>
+              </a:defRPr>
+            </a:lvl6pPr>
+            <a:lvl7pPr marL="2228850" indent="-171450" algn="l" defTabSz="685800" rtl="0" eaLnBrk="1" latinLnBrk="0" hangingPunct="1">
+              <a:lnSpc>
+                <a:spcPct val="90000"/>
+              </a:lnSpc>
+              <a:spcBef>
+                <a:spcPts val="375"/>
+              </a:spcBef>
+              <a:buFont typeface="Arial" panose="020B0604020202020204" pitchFamily="34" charset="0"/>
+              <a:buChar char="•"/>
+              <a:defRPr sz="1350" kern="1200">
+                <a:solidFill>
+                  <a:schemeClr val="tx1"/>
+                </a:solidFill>
+                <a:latin typeface="+mn-lt"/>
+                <a:ea typeface="+mn-ea"/>
+                <a:cs typeface="+mn-cs"/>
+              </a:defRPr>
+            </a:lvl7pPr>
+            <a:lvl8pPr marL="2571750" indent="-171450" algn="l" defTabSz="685800" rtl="0" eaLnBrk="1" latinLnBrk="0" hangingPunct="1">
+              <a:lnSpc>
+                <a:spcPct val="90000"/>
+              </a:lnSpc>
+              <a:spcBef>
+                <a:spcPts val="375"/>
+              </a:spcBef>
+              <a:buFont typeface="Arial" panose="020B0604020202020204" pitchFamily="34" charset="0"/>
+              <a:buChar char="•"/>
+              <a:defRPr sz="1350" kern="1200">
+                <a:solidFill>
+                  <a:schemeClr val="tx1"/>
+                </a:solidFill>
+                <a:latin typeface="+mn-lt"/>
+                <a:ea typeface="+mn-ea"/>
+                <a:cs typeface="+mn-cs"/>
+              </a:defRPr>
+            </a:lvl8pPr>
+            <a:lvl9pPr marL="2914650" indent="-171450" algn="l" defTabSz="685800" rtl="0" eaLnBrk="1" latinLnBrk="0" hangingPunct="1">
+              <a:lnSpc>
+                <a:spcPct val="90000"/>
+              </a:lnSpc>
+              <a:spcBef>
+                <a:spcPts val="375"/>
+              </a:spcBef>
+              <a:buFont typeface="Arial" panose="020B0604020202020204" pitchFamily="34" charset="0"/>
+              <a:buChar char="•"/>
+              <a:defRPr sz="1350" kern="1200">
+                <a:solidFill>
+                  <a:schemeClr val="tx1"/>
+                </a:solidFill>
+                <a:latin typeface="+mn-lt"/>
+                <a:ea typeface="+mn-ea"/>
+                <a:cs typeface="+mn-cs"/>
+              </a:defRPr>
+            </a:lvl9pPr>
+          </a:lstStyle>
+          <a:p>
+            <a:pPr fontAlgn="base"/>
+            <a:r>
+              <a:rPr lang="en-GB" sz="1200" dirty="0">
+                <a:solidFill>
+                  <a:schemeClr val="accent3">
+                    <a:lumMod val="20000"/>
+                    <a:lumOff val="80000"/>
+                  </a:schemeClr>
+                </a:solidFill>
+              </a:rPr>
+              <a:t>The first step is creating an sf2 file playback method, using </a:t>
+            </a:r>
+            <a:r>
+              <a:rPr lang="en-GB" sz="1200" dirty="0" err="1">
+                <a:solidFill>
+                  <a:schemeClr val="accent3">
+                    <a:lumMod val="20000"/>
+                    <a:lumOff val="80000"/>
+                  </a:schemeClr>
+                </a:solidFill>
+              </a:rPr>
+              <a:t>TinySoundFont</a:t>
+            </a:r>
+            <a:r>
+              <a:rPr lang="en-GB" sz="1200" dirty="0">
+                <a:solidFill>
+                  <a:schemeClr val="accent3">
+                    <a:lumMod val="20000"/>
+                    <a:lumOff val="80000"/>
+                  </a:schemeClr>
+                </a:solidFill>
+              </a:rPr>
+              <a:t> in C, that can be read by other applications. A sequence editor tool !!!!!!! will be created to create and adjust musical files.</a:t>
+            </a:r>
+          </a:p>
+          <a:p>
+            <a:pPr fontAlgn="base"/>
+            <a:r>
+              <a:rPr lang="en-GB" sz="1200" dirty="0">
+                <a:solidFill>
+                  <a:schemeClr val="accent3">
+                    <a:lumMod val="20000"/>
+                    <a:lumOff val="80000"/>
+                  </a:schemeClr>
+                </a:solidFill>
+              </a:rPr>
+              <a:t>Samples of tracker sequence playback will be implemented in a Unity project for game testers to play. An accompanying questionnaire will provide input on the authenticity and immersion of the music. </a:t>
+            </a:r>
+          </a:p>
+          <a:p>
+            <a:pPr fontAlgn="base"/>
+            <a:r>
+              <a:rPr lang="en-GB" sz="1200" dirty="0">
+                <a:solidFill>
+                  <a:schemeClr val="accent3">
+                    <a:lumMod val="20000"/>
+                    <a:lumOff val="80000"/>
+                  </a:schemeClr>
+                </a:solidFill>
+              </a:rPr>
+              <a:t>The results of these playtest will allow insight into the direction and potential that this type of music format holds.</a:t>
+            </a:r>
+          </a:p>
+          <a:p>
+            <a:endParaRPr lang="en-US" sz="1200" dirty="0"/>
+          </a:p>
+        </p:txBody>
+      </p:sp>
       <p:cxnSp>
         <p:nvCxnSpPr>
-          <p:cNvPr id="31" name="Straight Connector 30">
-            <a:extLst>
-              <a:ext uri="{FF2B5EF4-FFF2-40B4-BE49-F238E27FC236}">
-                <a16:creationId xmlns:a16="http://schemas.microsoft.com/office/drawing/2014/main" id="{FD5CE708-A853-2C3E-983C-35C803DD1CC8}"/>
+          <p:cNvPr id="53" name="Straight Connector 52">
+            <a:extLst>
+              <a:ext uri="{FF2B5EF4-FFF2-40B4-BE49-F238E27FC236}">
+                <a16:creationId xmlns:a16="http://schemas.microsoft.com/office/drawing/2014/main" id="{33DC9A77-9B8F-49BF-88E9-B663432B3092}"/>
               </a:ext>
               <a:ext uri="{C183D7F6-B498-43B3-948B-1728B52AA6E4}">
                 <adec:decorative xmlns:adec="http://schemas.microsoft.com/office/drawing/2017/decorative" val="1"/>
@@ -10186,8 +11567,8 @@
         </p:nvCxnSpPr>
         <p:spPr>
           <a:xfrm>
-            <a:off x="7233273" y="1032699"/>
-            <a:ext cx="0" cy="5814766"/>
+            <a:off x="523084" y="8088214"/>
+            <a:ext cx="2680041" cy="0"/>
           </a:xfrm>
           <a:prstGeom prst="line">
             <a:avLst/>
@@ -10227,581 +11608,6 @@
           </a:fontRef>
         </p:style>
       </p:cxnSp>
-      <p:pic>
-        <p:nvPicPr>
-          <p:cNvPr id="41" name="Picture 40">
-            <a:extLst>
-              <a:ext uri="{FF2B5EF4-FFF2-40B4-BE49-F238E27FC236}">
-                <a16:creationId xmlns:a16="http://schemas.microsoft.com/office/drawing/2014/main" id="{8F13D3BE-934C-8F0A-7F14-A4A6002998ED}"/>
-              </a:ext>
-            </a:extLst>
-          </p:cNvPr>
-          <p:cNvPicPr>
-            <a:picLocks noChangeAspect="1"/>
-          </p:cNvPicPr>
-          <p:nvPr/>
-        </p:nvPicPr>
-        <p:blipFill>
-          <a:blip r:embed="rId16"/>
-          <a:srcRect l="608" t="15273" r="-608" b="13970"/>
-          <a:stretch>
-            <a:fillRect/>
-          </a:stretch>
-        </p:blipFill>
-        <p:spPr>
-          <a:xfrm>
-            <a:off x="3647745" y="1397303"/>
-            <a:ext cx="2233675" cy="1313222"/>
-          </a:xfrm>
-          <a:prstGeom prst="rect">
-            <a:avLst/>
-          </a:prstGeom>
-          <a:ln w="38100" cap="sq">
-            <a:solidFill>
-              <a:srgbClr val="000000"/>
-            </a:solidFill>
-            <a:prstDash val="solid"/>
-            <a:miter lim="800000"/>
-          </a:ln>
-          <a:effectLst>
-            <a:outerShdw blurRad="50800" dist="38100" dir="2700000" algn="tl" rotWithShape="0">
-              <a:srgbClr val="000000">
-                <a:alpha val="43000"/>
-              </a:srgbClr>
-            </a:outerShdw>
-          </a:effectLst>
-        </p:spPr>
-      </p:pic>
-      <p:pic>
-        <p:nvPicPr>
-          <p:cNvPr id="45" name="Picture 44">
-            <a:extLst>
-              <a:ext uri="{FF2B5EF4-FFF2-40B4-BE49-F238E27FC236}">
-                <a16:creationId xmlns:a16="http://schemas.microsoft.com/office/drawing/2014/main" id="{037669C3-50E5-D9D4-72CB-F4B3AAB9DEEE}"/>
-              </a:ext>
-            </a:extLst>
-          </p:cNvPr>
-          <p:cNvPicPr>
-            <a:picLocks noChangeAspect="1"/>
-          </p:cNvPicPr>
-          <p:nvPr/>
-        </p:nvPicPr>
-        <p:blipFill>
-          <a:blip r:embed="rId17"/>
-          <a:srcRect l="933" t="3180" r="3871" b="21086"/>
-          <a:stretch>
-            <a:fillRect/>
-          </a:stretch>
-        </p:blipFill>
-        <p:spPr>
-          <a:xfrm>
-            <a:off x="1160470" y="4147169"/>
-            <a:ext cx="2486456" cy="449437"/>
-          </a:xfrm>
-          <a:prstGeom prst="rect">
-            <a:avLst/>
-          </a:prstGeom>
-        </p:spPr>
-      </p:pic>
-      <p:pic>
-        <p:nvPicPr>
-          <p:cNvPr id="47" name="Picture 46">
-            <a:extLst>
-              <a:ext uri="{FF2B5EF4-FFF2-40B4-BE49-F238E27FC236}">
-                <a16:creationId xmlns:a16="http://schemas.microsoft.com/office/drawing/2014/main" id="{BFDE0753-056F-C374-0FF8-33E01B87FE9C}"/>
-              </a:ext>
-            </a:extLst>
-          </p:cNvPr>
-          <p:cNvPicPr>
-            <a:picLocks noChangeAspect="1"/>
-          </p:cNvPicPr>
-          <p:nvPr/>
-        </p:nvPicPr>
-        <p:blipFill>
-          <a:blip r:embed="rId18"/>
-          <a:srcRect b="18555"/>
-          <a:stretch>
-            <a:fillRect/>
-          </a:stretch>
-        </p:blipFill>
-        <p:spPr>
-          <a:xfrm>
-            <a:off x="3713909" y="5039408"/>
-            <a:ext cx="2682805" cy="1496886"/>
-          </a:xfrm>
-          <a:prstGeom prst="rect">
-            <a:avLst/>
-          </a:prstGeom>
-          <a:ln w="38100" cap="sq">
-            <a:solidFill>
-              <a:srgbClr val="000000"/>
-            </a:solidFill>
-            <a:prstDash val="solid"/>
-            <a:miter lim="800000"/>
-          </a:ln>
-          <a:effectLst>
-            <a:outerShdw blurRad="50800" dist="38100" dir="2700000" algn="tl" rotWithShape="0">
-              <a:srgbClr val="000000">
-                <a:alpha val="43000"/>
-              </a:srgbClr>
-            </a:outerShdw>
-          </a:effectLst>
-        </p:spPr>
-      </p:pic>
-      <p:sp>
-        <p:nvSpPr>
-          <p:cNvPr id="48" name="Text Placeholder 13">
-            <a:extLst>
-              <a:ext uri="{FF2B5EF4-FFF2-40B4-BE49-F238E27FC236}">
-                <a16:creationId xmlns:a16="http://schemas.microsoft.com/office/drawing/2014/main" id="{76289639-2865-1374-7CE0-28AB5C41F2D6}"/>
-              </a:ext>
-            </a:extLst>
-          </p:cNvPr>
-          <p:cNvSpPr txBox="1">
-            <a:spLocks/>
-          </p:cNvSpPr>
-          <p:nvPr/>
-        </p:nvSpPr>
-        <p:spPr>
-          <a:xfrm>
-            <a:off x="7515744" y="2983877"/>
-            <a:ext cx="4676255" cy="1422654"/>
-          </a:xfrm>
-          <a:prstGeom prst="rect">
-            <a:avLst/>
-          </a:prstGeom>
-        </p:spPr>
-        <p:txBody>
-          <a:bodyPr vert="horz" lIns="91440" tIns="0" rIns="91440" bIns="45720" rtlCol="0">
-            <a:noAutofit/>
-          </a:bodyPr>
-          <a:lstStyle>
-            <a:lvl1pPr marL="0" indent="0" algn="l" defTabSz="914400" rtl="0" eaLnBrk="1" latinLnBrk="0" hangingPunct="1">
-              <a:lnSpc>
-                <a:spcPct val="90000"/>
-              </a:lnSpc>
-              <a:spcBef>
-                <a:spcPts val="1000"/>
-              </a:spcBef>
-              <a:buFont typeface="Arial" panose="020B0604020202020204" pitchFamily="34" charset="0"/>
-              <a:buNone/>
-              <a:defRPr sz="1200" kern="1200" cap="none" baseline="0">
-                <a:solidFill>
-                  <a:schemeClr val="bg1"/>
-                </a:solidFill>
-                <a:latin typeface="+mn-lt"/>
-                <a:ea typeface="+mn-ea"/>
-                <a:cs typeface="+mn-cs"/>
-              </a:defRPr>
-            </a:lvl1pPr>
-            <a:lvl2pPr marL="457200" indent="0" algn="l" defTabSz="914400" rtl="0" eaLnBrk="1" latinLnBrk="0" hangingPunct="1">
-              <a:lnSpc>
-                <a:spcPct val="90000"/>
-              </a:lnSpc>
-              <a:spcBef>
-                <a:spcPts val="500"/>
-              </a:spcBef>
-              <a:buFont typeface="Arial" panose="020B0604020202020204" pitchFamily="34" charset="0"/>
-              <a:buNone/>
-              <a:defRPr sz="1800" kern="1200">
-                <a:solidFill>
-                  <a:schemeClr val="bg1"/>
-                </a:solidFill>
-                <a:latin typeface="+mn-lt"/>
-                <a:ea typeface="+mn-ea"/>
-                <a:cs typeface="+mn-cs"/>
-              </a:defRPr>
-            </a:lvl2pPr>
-            <a:lvl3pPr marL="914400" indent="0" algn="l" defTabSz="914400" rtl="0" eaLnBrk="1" latinLnBrk="0" hangingPunct="1">
-              <a:lnSpc>
-                <a:spcPct val="90000"/>
-              </a:lnSpc>
-              <a:spcBef>
-                <a:spcPts val="500"/>
-              </a:spcBef>
-              <a:buFont typeface="Arial" panose="020B0604020202020204" pitchFamily="34" charset="0"/>
-              <a:buNone/>
-              <a:defRPr sz="1800" kern="1200">
-                <a:solidFill>
-                  <a:schemeClr val="bg1"/>
-                </a:solidFill>
-                <a:latin typeface="+mn-lt"/>
-                <a:ea typeface="+mn-ea"/>
-                <a:cs typeface="+mn-cs"/>
-              </a:defRPr>
-            </a:lvl3pPr>
-            <a:lvl4pPr marL="1371600" indent="0" algn="l" defTabSz="914400" rtl="0" eaLnBrk="1" latinLnBrk="0" hangingPunct="1">
-              <a:lnSpc>
-                <a:spcPct val="90000"/>
-              </a:lnSpc>
-              <a:spcBef>
-                <a:spcPts val="500"/>
-              </a:spcBef>
-              <a:buFont typeface="Arial" panose="020B0604020202020204" pitchFamily="34" charset="0"/>
-              <a:buNone/>
-              <a:defRPr sz="1800" kern="1200">
-                <a:solidFill>
-                  <a:schemeClr val="bg1"/>
-                </a:solidFill>
-                <a:latin typeface="+mn-lt"/>
-                <a:ea typeface="+mn-ea"/>
-                <a:cs typeface="+mn-cs"/>
-              </a:defRPr>
-            </a:lvl4pPr>
-            <a:lvl5pPr marL="1828800" indent="0" algn="l" defTabSz="914400" rtl="0" eaLnBrk="1" latinLnBrk="0" hangingPunct="1">
-              <a:lnSpc>
-                <a:spcPct val="90000"/>
-              </a:lnSpc>
-              <a:spcBef>
-                <a:spcPts val="500"/>
-              </a:spcBef>
-              <a:buFont typeface="Arial" panose="020B0604020202020204" pitchFamily="34" charset="0"/>
-              <a:buNone/>
-              <a:defRPr sz="1800" kern="1200">
-                <a:solidFill>
-                  <a:schemeClr val="bg1"/>
-                </a:solidFill>
-                <a:latin typeface="+mn-lt"/>
-                <a:ea typeface="+mn-ea"/>
-                <a:cs typeface="+mn-cs"/>
-              </a:defRPr>
-            </a:lvl5pPr>
-            <a:lvl6pPr marL="2514600" indent="-228600" algn="l" defTabSz="914400" rtl="0" eaLnBrk="1" latinLnBrk="0" hangingPunct="1">
-              <a:lnSpc>
-                <a:spcPct val="90000"/>
-              </a:lnSpc>
-              <a:spcBef>
-                <a:spcPts val="500"/>
-              </a:spcBef>
-              <a:buFont typeface="Arial" panose="020B0604020202020204" pitchFamily="34" charset="0"/>
-              <a:buChar char="•"/>
-              <a:defRPr sz="1800" kern="1200">
-                <a:solidFill>
-                  <a:schemeClr val="tx1"/>
-                </a:solidFill>
-                <a:latin typeface="+mn-lt"/>
-                <a:ea typeface="+mn-ea"/>
-                <a:cs typeface="+mn-cs"/>
-              </a:defRPr>
-            </a:lvl6pPr>
-            <a:lvl7pPr marL="2971800" indent="-228600" algn="l" defTabSz="914400" rtl="0" eaLnBrk="1" latinLnBrk="0" hangingPunct="1">
-              <a:lnSpc>
-                <a:spcPct val="90000"/>
-              </a:lnSpc>
-              <a:spcBef>
-                <a:spcPts val="500"/>
-              </a:spcBef>
-              <a:buFont typeface="Arial" panose="020B0604020202020204" pitchFamily="34" charset="0"/>
-              <a:buChar char="•"/>
-              <a:defRPr sz="1800" kern="1200">
-                <a:solidFill>
-                  <a:schemeClr val="tx1"/>
-                </a:solidFill>
-                <a:latin typeface="+mn-lt"/>
-                <a:ea typeface="+mn-ea"/>
-                <a:cs typeface="+mn-cs"/>
-              </a:defRPr>
-            </a:lvl7pPr>
-            <a:lvl8pPr marL="3429000" indent="-228600" algn="l" defTabSz="914400" rtl="0" eaLnBrk="1" latinLnBrk="0" hangingPunct="1">
-              <a:lnSpc>
-                <a:spcPct val="90000"/>
-              </a:lnSpc>
-              <a:spcBef>
-                <a:spcPts val="500"/>
-              </a:spcBef>
-              <a:buFont typeface="Arial" panose="020B0604020202020204" pitchFamily="34" charset="0"/>
-              <a:buChar char="•"/>
-              <a:defRPr sz="1800" kern="1200">
-                <a:solidFill>
-                  <a:schemeClr val="tx1"/>
-                </a:solidFill>
-                <a:latin typeface="+mn-lt"/>
-                <a:ea typeface="+mn-ea"/>
-                <a:cs typeface="+mn-cs"/>
-              </a:defRPr>
-            </a:lvl8pPr>
-            <a:lvl9pPr marL="3886200" indent="-228600" algn="l" defTabSz="914400" rtl="0" eaLnBrk="1" latinLnBrk="0" hangingPunct="1">
-              <a:lnSpc>
-                <a:spcPct val="90000"/>
-              </a:lnSpc>
-              <a:spcBef>
-                <a:spcPts val="500"/>
-              </a:spcBef>
-              <a:buFont typeface="Arial" panose="020B0604020202020204" pitchFamily="34" charset="0"/>
-              <a:buChar char="•"/>
-              <a:defRPr sz="1800" kern="1200">
-                <a:solidFill>
-                  <a:schemeClr val="tx1"/>
-                </a:solidFill>
-                <a:latin typeface="+mn-lt"/>
-                <a:ea typeface="+mn-ea"/>
-                <a:cs typeface="+mn-cs"/>
-              </a:defRPr>
-            </a:lvl9pPr>
-          </a:lstStyle>
-          <a:p>
-            <a:r>
-              <a:rPr lang="en-US" sz="900" dirty="0">
-                <a:solidFill>
-                  <a:srgbClr val="FF0000"/>
-                </a:solidFill>
-              </a:rPr>
-              <a:t>Notes about results here?</a:t>
-            </a:r>
-          </a:p>
-        </p:txBody>
-      </p:sp>
-      <p:sp>
-        <p:nvSpPr>
-          <p:cNvPr id="19" name="Rectangle: Rounded Corners 18">
-            <a:extLst>
-              <a:ext uri="{FF2B5EF4-FFF2-40B4-BE49-F238E27FC236}">
-                <a16:creationId xmlns:a16="http://schemas.microsoft.com/office/drawing/2014/main" id="{74E9BD1E-F8EB-4F53-3201-64EB6ACA93FC}"/>
-              </a:ext>
-            </a:extLst>
-          </p:cNvPr>
-          <p:cNvSpPr/>
-          <p:nvPr/>
-        </p:nvSpPr>
-        <p:spPr>
-          <a:xfrm>
-            <a:off x="7473960" y="6087344"/>
-            <a:ext cx="4327750" cy="699847"/>
-          </a:xfrm>
-          <a:prstGeom prst="roundRect">
-            <a:avLst>
-              <a:gd name="adj" fmla="val 7621"/>
-            </a:avLst>
-          </a:prstGeom>
-          <a:solidFill>
-            <a:schemeClr val="dk1"/>
-          </a:solidFill>
-          <a:ln>
-            <a:noFill/>
-          </a:ln>
-        </p:spPr>
-        <p:style>
-          <a:lnRef idx="0">
-            <a:scrgbClr r="0" g="0" b="0"/>
-          </a:lnRef>
-          <a:fillRef idx="0">
-            <a:scrgbClr r="0" g="0" b="0"/>
-          </a:fillRef>
-          <a:effectRef idx="0">
-            <a:scrgbClr r="0" g="0" b="0"/>
-          </a:effectRef>
-          <a:fontRef idx="minor">
-            <a:schemeClr val="lt1"/>
-          </a:fontRef>
-        </p:style>
-        <p:txBody>
-          <a:bodyPr rtlCol="0" anchor="ctr"/>
-          <a:lstStyle/>
-          <a:p>
-            <a:pPr algn="ctr"/>
-            <a:endParaRPr lang="en-GB"/>
-          </a:p>
-        </p:txBody>
-      </p:sp>
-      <p:sp>
-        <p:nvSpPr>
-          <p:cNvPr id="20" name="Text Placeholder 13">
-            <a:extLst>
-              <a:ext uri="{FF2B5EF4-FFF2-40B4-BE49-F238E27FC236}">
-                <a16:creationId xmlns:a16="http://schemas.microsoft.com/office/drawing/2014/main" id="{F3362837-5AC8-25C8-92BC-47CEFA1E9C79}"/>
-              </a:ext>
-            </a:extLst>
-          </p:cNvPr>
-          <p:cNvSpPr txBox="1">
-            <a:spLocks/>
-          </p:cNvSpPr>
-          <p:nvPr/>
-        </p:nvSpPr>
-        <p:spPr>
-          <a:xfrm>
-            <a:off x="7515745" y="6347168"/>
-            <a:ext cx="4676255" cy="1021663"/>
-          </a:xfrm>
-          <a:prstGeom prst="rect">
-            <a:avLst/>
-          </a:prstGeom>
-        </p:spPr>
-        <p:txBody>
-          <a:bodyPr vert="horz" lIns="91440" tIns="0" rIns="91440" bIns="45720" rtlCol="0">
-            <a:noAutofit/>
-          </a:bodyPr>
-          <a:lstStyle>
-            <a:lvl1pPr marL="0" indent="0" algn="l" defTabSz="914400" rtl="0" eaLnBrk="1" latinLnBrk="0" hangingPunct="1">
-              <a:lnSpc>
-                <a:spcPct val="90000"/>
-              </a:lnSpc>
-              <a:spcBef>
-                <a:spcPts val="1000"/>
-              </a:spcBef>
-              <a:buFont typeface="Arial" panose="020B0604020202020204" pitchFamily="34" charset="0"/>
-              <a:buNone/>
-              <a:defRPr sz="1200" kern="1200" cap="none" baseline="0">
-                <a:solidFill>
-                  <a:schemeClr val="bg1"/>
-                </a:solidFill>
-                <a:latin typeface="+mn-lt"/>
-                <a:ea typeface="+mn-ea"/>
-                <a:cs typeface="+mn-cs"/>
-              </a:defRPr>
-            </a:lvl1pPr>
-            <a:lvl2pPr marL="457200" indent="0" algn="l" defTabSz="914400" rtl="0" eaLnBrk="1" latinLnBrk="0" hangingPunct="1">
-              <a:lnSpc>
-                <a:spcPct val="90000"/>
-              </a:lnSpc>
-              <a:spcBef>
-                <a:spcPts val="500"/>
-              </a:spcBef>
-              <a:buFont typeface="Arial" panose="020B0604020202020204" pitchFamily="34" charset="0"/>
-              <a:buNone/>
-              <a:defRPr sz="1800" kern="1200">
-                <a:solidFill>
-                  <a:schemeClr val="bg1"/>
-                </a:solidFill>
-                <a:latin typeface="+mn-lt"/>
-                <a:ea typeface="+mn-ea"/>
-                <a:cs typeface="+mn-cs"/>
-              </a:defRPr>
-            </a:lvl2pPr>
-            <a:lvl3pPr marL="914400" indent="0" algn="l" defTabSz="914400" rtl="0" eaLnBrk="1" latinLnBrk="0" hangingPunct="1">
-              <a:lnSpc>
-                <a:spcPct val="90000"/>
-              </a:lnSpc>
-              <a:spcBef>
-                <a:spcPts val="500"/>
-              </a:spcBef>
-              <a:buFont typeface="Arial" panose="020B0604020202020204" pitchFamily="34" charset="0"/>
-              <a:buNone/>
-              <a:defRPr sz="1800" kern="1200">
-                <a:solidFill>
-                  <a:schemeClr val="bg1"/>
-                </a:solidFill>
-                <a:latin typeface="+mn-lt"/>
-                <a:ea typeface="+mn-ea"/>
-                <a:cs typeface="+mn-cs"/>
-              </a:defRPr>
-            </a:lvl3pPr>
-            <a:lvl4pPr marL="1371600" indent="0" algn="l" defTabSz="914400" rtl="0" eaLnBrk="1" latinLnBrk="0" hangingPunct="1">
-              <a:lnSpc>
-                <a:spcPct val="90000"/>
-              </a:lnSpc>
-              <a:spcBef>
-                <a:spcPts val="500"/>
-              </a:spcBef>
-              <a:buFont typeface="Arial" panose="020B0604020202020204" pitchFamily="34" charset="0"/>
-              <a:buNone/>
-              <a:defRPr sz="1800" kern="1200">
-                <a:solidFill>
-                  <a:schemeClr val="bg1"/>
-                </a:solidFill>
-                <a:latin typeface="+mn-lt"/>
-                <a:ea typeface="+mn-ea"/>
-                <a:cs typeface="+mn-cs"/>
-              </a:defRPr>
-            </a:lvl4pPr>
-            <a:lvl5pPr marL="1828800" indent="0" algn="l" defTabSz="914400" rtl="0" eaLnBrk="1" latinLnBrk="0" hangingPunct="1">
-              <a:lnSpc>
-                <a:spcPct val="90000"/>
-              </a:lnSpc>
-              <a:spcBef>
-                <a:spcPts val="500"/>
-              </a:spcBef>
-              <a:buFont typeface="Arial" panose="020B0604020202020204" pitchFamily="34" charset="0"/>
-              <a:buNone/>
-              <a:defRPr sz="1800" kern="1200">
-                <a:solidFill>
-                  <a:schemeClr val="bg1"/>
-                </a:solidFill>
-                <a:latin typeface="+mn-lt"/>
-                <a:ea typeface="+mn-ea"/>
-                <a:cs typeface="+mn-cs"/>
-              </a:defRPr>
-            </a:lvl5pPr>
-            <a:lvl6pPr marL="2514600" indent="-228600" algn="l" defTabSz="914400" rtl="0" eaLnBrk="1" latinLnBrk="0" hangingPunct="1">
-              <a:lnSpc>
-                <a:spcPct val="90000"/>
-              </a:lnSpc>
-              <a:spcBef>
-                <a:spcPts val="500"/>
-              </a:spcBef>
-              <a:buFont typeface="Arial" panose="020B0604020202020204" pitchFamily="34" charset="0"/>
-              <a:buChar char="•"/>
-              <a:defRPr sz="1800" kern="1200">
-                <a:solidFill>
-                  <a:schemeClr val="tx1"/>
-                </a:solidFill>
-                <a:latin typeface="+mn-lt"/>
-                <a:ea typeface="+mn-ea"/>
-                <a:cs typeface="+mn-cs"/>
-              </a:defRPr>
-            </a:lvl6pPr>
-            <a:lvl7pPr marL="2971800" indent="-228600" algn="l" defTabSz="914400" rtl="0" eaLnBrk="1" latinLnBrk="0" hangingPunct="1">
-              <a:lnSpc>
-                <a:spcPct val="90000"/>
-              </a:lnSpc>
-              <a:spcBef>
-                <a:spcPts val="500"/>
-              </a:spcBef>
-              <a:buFont typeface="Arial" panose="020B0604020202020204" pitchFamily="34" charset="0"/>
-              <a:buChar char="•"/>
-              <a:defRPr sz="1800" kern="1200">
-                <a:solidFill>
-                  <a:schemeClr val="tx1"/>
-                </a:solidFill>
-                <a:latin typeface="+mn-lt"/>
-                <a:ea typeface="+mn-ea"/>
-                <a:cs typeface="+mn-cs"/>
-              </a:defRPr>
-            </a:lvl7pPr>
-            <a:lvl8pPr marL="3429000" indent="-228600" algn="l" defTabSz="914400" rtl="0" eaLnBrk="1" latinLnBrk="0" hangingPunct="1">
-              <a:lnSpc>
-                <a:spcPct val="90000"/>
-              </a:lnSpc>
-              <a:spcBef>
-                <a:spcPts val="500"/>
-              </a:spcBef>
-              <a:buFont typeface="Arial" panose="020B0604020202020204" pitchFamily="34" charset="0"/>
-              <a:buChar char="•"/>
-              <a:defRPr sz="1800" kern="1200">
-                <a:solidFill>
-                  <a:schemeClr val="tx1"/>
-                </a:solidFill>
-                <a:latin typeface="+mn-lt"/>
-                <a:ea typeface="+mn-ea"/>
-                <a:cs typeface="+mn-cs"/>
-              </a:defRPr>
-            </a:lvl8pPr>
-            <a:lvl9pPr marL="3886200" indent="-228600" algn="l" defTabSz="914400" rtl="0" eaLnBrk="1" latinLnBrk="0" hangingPunct="1">
-              <a:lnSpc>
-                <a:spcPct val="90000"/>
-              </a:lnSpc>
-              <a:spcBef>
-                <a:spcPts val="500"/>
-              </a:spcBef>
-              <a:buFont typeface="Arial" panose="020B0604020202020204" pitchFamily="34" charset="0"/>
-              <a:buChar char="•"/>
-              <a:defRPr sz="1800" kern="1200">
-                <a:solidFill>
-                  <a:schemeClr val="tx1"/>
-                </a:solidFill>
-                <a:latin typeface="+mn-lt"/>
-                <a:ea typeface="+mn-ea"/>
-                <a:cs typeface="+mn-cs"/>
-              </a:defRPr>
-            </a:lvl9pPr>
-          </a:lstStyle>
-          <a:p>
-            <a:r>
-              <a:rPr lang="en-US" sz="800" dirty="0"/>
-              <a:t>REFERENCES</a:t>
-            </a:r>
-          </a:p>
-        </p:txBody>
-      </p:sp>
     </p:spTree>
     <p:extLst>
       <p:ext uri="{BB962C8B-B14F-4D97-AF65-F5344CB8AC3E}">
@@ -10850,8 +11656,8 @@
         </p:nvSpPr>
         <p:spPr>
           <a:xfrm>
-            <a:off x="618744" y="209677"/>
-            <a:ext cx="9064752" cy="1097915"/>
+            <a:off x="3451733" y="2931414"/>
+            <a:ext cx="6798564" cy="823436"/>
           </a:xfrm>
         </p:spPr>
         <p:txBody>
@@ -10883,8 +11689,8 @@
         </p:nvSpPr>
         <p:spPr>
           <a:xfrm>
-            <a:off x="618745" y="1344676"/>
-            <a:ext cx="9064752" cy="511175"/>
+            <a:off x="3451734" y="3782665"/>
+            <a:ext cx="6798564" cy="383381"/>
           </a:xfrm>
         </p:spPr>
         <p:txBody>
@@ -10927,8 +11733,8 @@
         </p:blipFill>
         <p:spPr>
           <a:xfrm>
-            <a:off x="10487786" y="649342"/>
-            <a:ext cx="822960" cy="822960"/>
+            <a:off x="10853515" y="3261163"/>
+            <a:ext cx="617220" cy="617220"/>
           </a:xfrm>
         </p:spPr>
       </p:pic>
@@ -10950,8 +11756,8 @@
         </p:nvSpPr>
         <p:spPr>
           <a:xfrm>
-            <a:off x="673608" y="2556796"/>
-            <a:ext cx="1996440" cy="381190"/>
+            <a:off x="3492881" y="4691754"/>
+            <a:ext cx="1497330" cy="285893"/>
           </a:xfrm>
         </p:spPr>
         <p:txBody>
@@ -10983,8 +11789,8 @@
         </p:nvSpPr>
         <p:spPr>
           <a:xfrm>
-            <a:off x="673608" y="3391012"/>
-            <a:ext cx="1996440" cy="778652"/>
+            <a:off x="3492881" y="5317416"/>
+            <a:ext cx="1497330" cy="583989"/>
           </a:xfrm>
         </p:spPr>
         <p:txBody>
@@ -11016,8 +11822,8 @@
         </p:nvSpPr>
         <p:spPr>
           <a:xfrm>
-            <a:off x="670560" y="4505738"/>
-            <a:ext cx="893064" cy="335470"/>
+            <a:off x="3490595" y="6153460"/>
+            <a:ext cx="669798" cy="251603"/>
           </a:xfrm>
         </p:spPr>
         <p:txBody>
@@ -11060,8 +11866,8 @@
         </p:blipFill>
         <p:spPr>
           <a:xfrm>
-            <a:off x="1796796" y="4513453"/>
-            <a:ext cx="457200" cy="457200"/>
+            <a:off x="4335272" y="6159246"/>
+            <a:ext cx="342900" cy="342900"/>
           </a:xfrm>
         </p:spPr>
       </p:pic>
@@ -11083,8 +11889,8 @@
         </p:nvSpPr>
         <p:spPr>
           <a:xfrm>
-            <a:off x="670560" y="4894756"/>
-            <a:ext cx="893064" cy="335470"/>
+            <a:off x="3490595" y="6445224"/>
+            <a:ext cx="669798" cy="251603"/>
           </a:xfrm>
         </p:spPr>
         <p:txBody>
@@ -11116,8 +11922,8 @@
         </p:nvSpPr>
         <p:spPr>
           <a:xfrm>
-            <a:off x="2862072" y="2556796"/>
-            <a:ext cx="1996440" cy="381190"/>
+            <a:off x="5134229" y="4691754"/>
+            <a:ext cx="1497330" cy="285893"/>
           </a:xfrm>
         </p:spPr>
         <p:txBody>
@@ -11149,8 +11955,8 @@
         </p:nvSpPr>
         <p:spPr>
           <a:xfrm>
-            <a:off x="2862072" y="3391012"/>
-            <a:ext cx="1996440" cy="778652"/>
+            <a:off x="5134229" y="5317416"/>
+            <a:ext cx="1497330" cy="583989"/>
           </a:xfrm>
         </p:spPr>
         <p:txBody>
@@ -11182,8 +11988,8 @@
         </p:nvSpPr>
         <p:spPr>
           <a:xfrm>
-            <a:off x="2862072" y="4505738"/>
-            <a:ext cx="893064" cy="335470"/>
+            <a:off x="5134229" y="6153460"/>
+            <a:ext cx="669798" cy="251603"/>
           </a:xfrm>
         </p:spPr>
         <p:txBody>
@@ -11226,8 +12032,8 @@
         </p:blipFill>
         <p:spPr>
           <a:xfrm>
-            <a:off x="4002024" y="4513453"/>
-            <a:ext cx="457200" cy="457200"/>
+            <a:off x="5989193" y="6159246"/>
+            <a:ext cx="342900" cy="342900"/>
           </a:xfrm>
         </p:spPr>
       </p:pic>
@@ -11249,8 +12055,8 @@
         </p:nvSpPr>
         <p:spPr>
           <a:xfrm>
-            <a:off x="2862072" y="4894756"/>
-            <a:ext cx="893064" cy="335470"/>
+            <a:off x="5134229" y="6445224"/>
+            <a:ext cx="669798" cy="251603"/>
           </a:xfrm>
         </p:spPr>
         <p:txBody>
@@ -11282,8 +12088,8 @@
         </p:nvSpPr>
         <p:spPr>
           <a:xfrm>
-            <a:off x="5050536" y="2556796"/>
-            <a:ext cx="1996440" cy="381190"/>
+            <a:off x="6775577" y="4691754"/>
+            <a:ext cx="1497330" cy="285893"/>
           </a:xfrm>
         </p:spPr>
         <p:txBody>
@@ -11315,8 +12121,8 @@
         </p:nvSpPr>
         <p:spPr>
           <a:xfrm>
-            <a:off x="5050536" y="3391012"/>
-            <a:ext cx="1996440" cy="778652"/>
+            <a:off x="6775577" y="5317416"/>
+            <a:ext cx="1497330" cy="583989"/>
           </a:xfrm>
         </p:spPr>
         <p:txBody>
@@ -11348,8 +12154,8 @@
         </p:nvSpPr>
         <p:spPr>
           <a:xfrm>
-            <a:off x="5065776" y="4505738"/>
-            <a:ext cx="893064" cy="335470"/>
+            <a:off x="6787007" y="6153460"/>
+            <a:ext cx="669798" cy="251603"/>
           </a:xfrm>
         </p:spPr>
         <p:txBody>
@@ -11392,8 +12198,8 @@
         </p:blipFill>
         <p:spPr>
           <a:xfrm>
-            <a:off x="6207252" y="4517172"/>
-            <a:ext cx="457200" cy="457200"/>
+            <a:off x="7643114" y="6162035"/>
+            <a:ext cx="342900" cy="342900"/>
           </a:xfrm>
         </p:spPr>
       </p:pic>
@@ -11415,8 +12221,8 @@
         </p:nvSpPr>
         <p:spPr>
           <a:xfrm>
-            <a:off x="5065776" y="4894756"/>
-            <a:ext cx="893064" cy="335470"/>
+            <a:off x="6787007" y="6445224"/>
+            <a:ext cx="669798" cy="251603"/>
           </a:xfrm>
         </p:spPr>
         <p:txBody>
@@ -11448,8 +12254,8 @@
         </p:nvSpPr>
         <p:spPr>
           <a:xfrm>
-            <a:off x="7239000" y="2556796"/>
-            <a:ext cx="1996440" cy="381190"/>
+            <a:off x="8416925" y="4691754"/>
+            <a:ext cx="1497330" cy="285893"/>
           </a:xfrm>
         </p:spPr>
         <p:txBody>
@@ -11481,8 +12287,8 @@
         </p:nvSpPr>
         <p:spPr>
           <a:xfrm>
-            <a:off x="7239000" y="3391012"/>
-            <a:ext cx="1996440" cy="778652"/>
+            <a:off x="8416925" y="5317416"/>
+            <a:ext cx="1497330" cy="583989"/>
           </a:xfrm>
         </p:spPr>
         <p:txBody>
@@ -11514,8 +12320,8 @@
         </p:nvSpPr>
         <p:spPr>
           <a:xfrm>
-            <a:off x="7257288" y="4505738"/>
-            <a:ext cx="893064" cy="335470"/>
+            <a:off x="8430641" y="6153460"/>
+            <a:ext cx="669798" cy="251603"/>
           </a:xfrm>
         </p:spPr>
         <p:txBody>
@@ -11558,8 +12364,8 @@
         </p:blipFill>
         <p:spPr>
           <a:xfrm>
-            <a:off x="8412480" y="4517172"/>
-            <a:ext cx="457200" cy="457200"/>
+            <a:off x="9297035" y="6162035"/>
+            <a:ext cx="342900" cy="342900"/>
           </a:xfrm>
         </p:spPr>
       </p:pic>
@@ -11581,8 +12387,8 @@
         </p:nvSpPr>
         <p:spPr>
           <a:xfrm>
-            <a:off x="7257288" y="4894756"/>
-            <a:ext cx="893064" cy="335470"/>
+            <a:off x="8430641" y="6445224"/>
+            <a:ext cx="669798" cy="251603"/>
           </a:xfrm>
         </p:spPr>
         <p:txBody>
@@ -11614,8 +12420,8 @@
         </p:nvSpPr>
         <p:spPr>
           <a:xfrm>
-            <a:off x="9427464" y="2556796"/>
-            <a:ext cx="1996440" cy="381190"/>
+            <a:off x="10058273" y="4691754"/>
+            <a:ext cx="1497330" cy="285893"/>
           </a:xfrm>
         </p:spPr>
         <p:txBody>
@@ -11647,8 +12453,8 @@
         </p:nvSpPr>
         <p:spPr>
           <a:xfrm>
-            <a:off x="9427464" y="3391012"/>
-            <a:ext cx="1996440" cy="778652"/>
+            <a:off x="10058273" y="5317416"/>
+            <a:ext cx="1497330" cy="583989"/>
           </a:xfrm>
         </p:spPr>
         <p:txBody>
@@ -11680,8 +12486,8 @@
         </p:nvSpPr>
         <p:spPr>
           <a:xfrm>
-            <a:off x="9448800" y="4505738"/>
-            <a:ext cx="893064" cy="335470"/>
+            <a:off x="10074275" y="6153460"/>
+            <a:ext cx="669798" cy="251603"/>
           </a:xfrm>
         </p:spPr>
         <p:txBody>
@@ -11724,8 +12530,8 @@
         </p:blipFill>
         <p:spPr>
           <a:xfrm>
-            <a:off x="10599038" y="4513453"/>
-            <a:ext cx="457200" cy="457200"/>
+            <a:off x="10936954" y="6159246"/>
+            <a:ext cx="342900" cy="342900"/>
           </a:xfrm>
         </p:spPr>
       </p:pic>
@@ -11747,8 +12553,8 @@
         </p:nvSpPr>
         <p:spPr>
           <a:xfrm>
-            <a:off x="9448800" y="4894756"/>
-            <a:ext cx="893064" cy="335470"/>
+            <a:off x="10074275" y="6445224"/>
+            <a:ext cx="669798" cy="251603"/>
           </a:xfrm>
         </p:spPr>
         <p:txBody>
@@ -11780,8 +12586,8 @@
         </p:nvSpPr>
         <p:spPr>
           <a:xfrm>
-            <a:off x="670560" y="6072886"/>
-            <a:ext cx="4114800" cy="365125"/>
+            <a:off x="3490595" y="7328821"/>
+            <a:ext cx="3086100" cy="273844"/>
           </a:xfrm>
         </p:spPr>
         <p:txBody>
@@ -11813,8 +12619,8 @@
         </p:nvSpPr>
         <p:spPr>
           <a:xfrm>
-            <a:off x="8738616" y="6072886"/>
-            <a:ext cx="2743200" cy="365125"/>
+            <a:off x="9541637" y="7328821"/>
+            <a:ext cx="2057400" cy="273844"/>
           </a:xfrm>
         </p:spPr>
         <p:txBody>
@@ -11853,8 +12659,8 @@
         </p:nvCxnSpPr>
         <p:spPr>
           <a:xfrm>
-            <a:off x="2199568" y="1475740"/>
-            <a:ext cx="3291058" cy="0"/>
+            <a:off x="4637351" y="3880961"/>
+            <a:ext cx="2468294" cy="0"/>
           </a:xfrm>
           <a:prstGeom prst="line">
             <a:avLst/>
@@ -12696,6 +13502,35 @@
 </file>
 
 <file path=customXml/item1.xml><?xml version="1.0" encoding="utf-8"?>
+<p:properties xmlns:p="http://schemas.microsoft.com/office/2006/metadata/properties" xmlns:xsi="http://www.w3.org/2001/XMLSchema-instance" xmlns:pc="http://schemas.microsoft.com/office/infopath/2007/PartnerControls">
+  <documentManagement>
+    <_ip_UnifiedCompliancePolicyUIAction xmlns="http://schemas.microsoft.com/sharepoint/v3" xsi:nil="true"/>
+    <Image xmlns="71af3243-3dd4-4a8d-8c0d-dd76da1f02a5">
+      <Url xsi:nil="true"/>
+      <Description xsi:nil="true"/>
+    </Image>
+    <Status xmlns="71af3243-3dd4-4a8d-8c0d-dd76da1f02a5">Not started</Status>
+    <Background xmlns="71af3243-3dd4-4a8d-8c0d-dd76da1f02a5">false</Background>
+    <_ip_UnifiedCompliancePolicyProperties xmlns="http://schemas.microsoft.com/sharepoint/v3" xsi:nil="true"/>
+    <ImageTagsTaxHTField xmlns="71af3243-3dd4-4a8d-8c0d-dd76da1f02a5">
+      <Terms xmlns="http://schemas.microsoft.com/office/infopath/2007/PartnerControls"/>
+    </ImageTagsTaxHTField>
+    <TaxCatchAll xmlns="230e9df3-be65-4c73-a93b-d1236ebd677e" xsi:nil="true"/>
+    <MediaServiceKeyPoints xmlns="71af3243-3dd4-4a8d-8c0d-dd76da1f02a5" xsi:nil="true"/>
+  </documentManagement>
+</p:properties>
+</file>
+
+<file path=customXml/item2.xml><?xml version="1.0" encoding="utf-8"?>
+<?mso-contentType ?>
+<FormTemplates xmlns="http://schemas.microsoft.com/sharepoint/v3/contenttype/forms">
+  <Display>DocumentLibraryForm</Display>
+  <Edit>DocumentLibraryForm</Edit>
+  <New>DocumentLibraryForm</New>
+</FormTemplates>
+</file>
+
+<file path=customXml/item3.xml><?xml version="1.0" encoding="utf-8"?>
 <ct:contentTypeSchema xmlns:ct="http://schemas.microsoft.com/office/2006/metadata/contentType" xmlns:ma="http://schemas.microsoft.com/office/2006/metadata/properties/metaAttributes" ct:_="" ma:_="" ma:contentTypeName="Document" ma:contentTypeID="0x01010079F111ED35F8CC479449609E8A0923A6" ma:contentTypeVersion="27" ma:contentTypeDescription="Create a new document." ma:contentTypeScope="" ma:versionID="c6f9a84f66a9c8b9a21755b9ffafb945">
   <xsd:schema xmlns:xsd="http://www.w3.org/2001/XMLSchema" xmlns:xs="http://www.w3.org/2001/XMLSchema" xmlns:p="http://schemas.microsoft.com/office/2006/metadata/properties" xmlns:ns1="http://schemas.microsoft.com/sharepoint/v3" xmlns:ns2="71af3243-3dd4-4a8d-8c0d-dd76da1f02a5" xmlns:ns3="16c05727-aa75-4e4a-9b5f-8a80a1165891" xmlns:ns4="230e9df3-be65-4c73-a93b-d1236ebd677e" targetNamespace="http://schemas.microsoft.com/office/2006/metadata/properties" ma:root="true" ma:fieldsID="27df39e3e7036dff54f89ddd5805ce72" ns1:_="" ns2:_="" ns3:_="" ns4:_="">
     <xsd:import namespace="http://schemas.microsoft.com/sharepoint/v3"/>
@@ -13001,36 +13836,34 @@
 </ct:contentTypeSchema>
 </file>
 
-<file path=customXml/item2.xml><?xml version="1.0" encoding="utf-8"?>
-<?mso-contentType ?>
-<FormTemplates xmlns="http://schemas.microsoft.com/sharepoint/v3/contenttype/forms">
-  <Display>DocumentLibraryForm</Display>
-  <Edit>DocumentLibraryForm</Edit>
-  <New>DocumentLibraryForm</New>
-</FormTemplates>
+<file path=customXml/itemProps1.xml><?xml version="1.0" encoding="utf-8"?>
+<ds:datastoreItem xmlns:ds="http://schemas.openxmlformats.org/officeDocument/2006/customXml" ds:itemID="{A0FF118E-0388-4333-9D85-CA81E2C8D164}">
+  <ds:schemaRefs>
+    <ds:schemaRef ds:uri="http://purl.org/dc/elements/1.1/"/>
+    <ds:schemaRef ds:uri="http://purl.org/dc/dcmitype/"/>
+    <ds:schemaRef ds:uri="http://schemas.microsoft.com/sharepoint/v3"/>
+    <ds:schemaRef ds:uri="http://schemas.microsoft.com/office/2006/metadata/properties"/>
+    <ds:schemaRef ds:uri="http://schemas.microsoft.com/office/infopath/2007/PartnerControls"/>
+    <ds:schemaRef ds:uri="230e9df3-be65-4c73-a93b-d1236ebd677e"/>
+    <ds:schemaRef ds:uri="71af3243-3dd4-4a8d-8c0d-dd76da1f02a5"/>
+    <ds:schemaRef ds:uri="http://schemas.microsoft.com/office/2006/documentManagement/types"/>
+    <ds:schemaRef ds:uri="http://purl.org/dc/terms/"/>
+    <ds:schemaRef ds:uri="http://schemas.openxmlformats.org/package/2006/metadata/core-properties"/>
+    <ds:schemaRef ds:uri="16c05727-aa75-4e4a-9b5f-8a80a1165891"/>
+    <ds:schemaRef ds:uri="http://www.w3.org/XML/1998/namespace"/>
+  </ds:schemaRefs>
+</ds:datastoreItem>
 </file>
 
-<file path=customXml/item3.xml><?xml version="1.0" encoding="utf-8"?>
-<p:properties xmlns:p="http://schemas.microsoft.com/office/2006/metadata/properties" xmlns:xsi="http://www.w3.org/2001/XMLSchema-instance" xmlns:pc="http://schemas.microsoft.com/office/infopath/2007/PartnerControls">
-  <documentManagement>
-    <_ip_UnifiedCompliancePolicyUIAction xmlns="http://schemas.microsoft.com/sharepoint/v3" xsi:nil="true"/>
-    <Image xmlns="71af3243-3dd4-4a8d-8c0d-dd76da1f02a5">
-      <Url xsi:nil="true"/>
-      <Description xsi:nil="true"/>
-    </Image>
-    <Status xmlns="71af3243-3dd4-4a8d-8c0d-dd76da1f02a5">Not started</Status>
-    <Background xmlns="71af3243-3dd4-4a8d-8c0d-dd76da1f02a5">false</Background>
-    <_ip_UnifiedCompliancePolicyProperties xmlns="http://schemas.microsoft.com/sharepoint/v3" xsi:nil="true"/>
-    <ImageTagsTaxHTField xmlns="71af3243-3dd4-4a8d-8c0d-dd76da1f02a5">
-      <Terms xmlns="http://schemas.microsoft.com/office/infopath/2007/PartnerControls"/>
-    </ImageTagsTaxHTField>
-    <TaxCatchAll xmlns="230e9df3-be65-4c73-a93b-d1236ebd677e" xsi:nil="true"/>
-    <MediaServiceKeyPoints xmlns="71af3243-3dd4-4a8d-8c0d-dd76da1f02a5" xsi:nil="true"/>
-  </documentManagement>
-</p:properties>
+<file path=customXml/itemProps2.xml><?xml version="1.0" encoding="utf-8"?>
+<ds:datastoreItem xmlns:ds="http://schemas.openxmlformats.org/officeDocument/2006/customXml" ds:itemID="{836CDCFB-1550-438B-8C76-AE76FBCD3159}">
+  <ds:schemaRefs>
+    <ds:schemaRef ds:uri="http://schemas.microsoft.com/sharepoint/v3/contenttype/forms"/>
+  </ds:schemaRefs>
+</ds:datastoreItem>
 </file>
 
-<file path=customXml/itemProps1.xml><?xml version="1.0" encoding="utf-8"?>
+<file path=customXml/itemProps3.xml><?xml version="1.0" encoding="utf-8"?>
 <ds:datastoreItem xmlns:ds="http://schemas.openxmlformats.org/officeDocument/2006/customXml" ds:itemID="{B0A68F62-F174-4677-B07F-B071C4E6C2C1}">
   <ds:schemaRefs>
     <ds:schemaRef ds:uri="http://schemas.microsoft.com/office/2006/metadata/contentType"/>
@@ -13051,26 +13884,6 @@
 </ds:datastoreItem>
 </file>
 
-<file path=customXml/itemProps2.xml><?xml version="1.0" encoding="utf-8"?>
-<ds:datastoreItem xmlns:ds="http://schemas.openxmlformats.org/officeDocument/2006/customXml" ds:itemID="{836CDCFB-1550-438B-8C76-AE76FBCD3159}">
-  <ds:schemaRefs>
-    <ds:schemaRef ds:uri="http://schemas.microsoft.com/sharepoint/v3/contenttype/forms"/>
-  </ds:schemaRefs>
-</ds:datastoreItem>
-</file>
-
-<file path=customXml/itemProps3.xml><?xml version="1.0" encoding="utf-8"?>
-<ds:datastoreItem xmlns:ds="http://schemas.openxmlformats.org/officeDocument/2006/customXml" ds:itemID="{A0FF118E-0388-4333-9D85-CA81E2C8D164}">
-  <ds:schemaRefs>
-    <ds:schemaRef ds:uri="http://schemas.microsoft.com/office/2006/metadata/properties"/>
-    <ds:schemaRef ds:uri="http://schemas.microsoft.com/office/infopath/2007/PartnerControls"/>
-    <ds:schemaRef ds:uri="http://schemas.microsoft.com/sharepoint/v3"/>
-    <ds:schemaRef ds:uri="71af3243-3dd4-4a8d-8c0d-dd76da1f02a5"/>
-    <ds:schemaRef ds:uri="230e9df3-be65-4c73-a93b-d1236ebd677e"/>
-  </ds:schemaRefs>
-</ds:datastoreItem>
-</file>
-
 <file path=docMetadata/LabelInfo.xml><?xml version="1.0" encoding="utf-8"?>
 <clbl:labelList xmlns:clbl="http://schemas.microsoft.com/office/2020/mipLabelMetadata"/>
 </file>